--- a/slides/presentation.pptx
+++ b/slides/presentation.pptx
@@ -4409,7 +4409,7 @@
                 <a:ea typeface="Calibri" pitchFamily="34" charset="-122"/>
                 <a:cs typeface="Calibri" pitchFamily="34" charset="-120"/>
               </a:rPr>
-              <a:t>Полный прогон с нуля: ~9 секунд (лимит задания — 30 минут).</a:t>
+              <a:t>Полный прогон с нуля (проверено дважды, включая чистое окружение): 12 секунд (лимит задания — 30 минут).</a:t>
             </a:r>
             <a:endParaRPr lang="en-US" sz="1300" dirty="0"/>
           </a:p>

--- a/slides/presentation.pptx
+++ b/slides/presentation.pptx
@@ -16,12 +16,9 @@
     <p:sldId id="264" r:id="rId10"/>
     <p:sldId id="265" r:id="rId11"/>
     <p:sldId id="266" r:id="rId12"/>
-    <p:sldId id="267" r:id="rId13"/>
-    <p:sldId id="268" r:id="rId14"/>
-    <p:sldId id="269" r:id="rId15"/>
   </p:sldIdLst>
   <p:notesMasterIdLst>
-    <p:notesMasterId r:id="rId16"/>
+    <p:notesMasterId r:id="rId13"/>
   </p:notesMasterIdLst>
   <p:sldSz cx="12192000" cy="6858000"/>
   <p:notesSz cx="6858000" cy="12192000"/>
@@ -515,7 +512,7 @@
           <a:p>
             <a:r>
               <a:rPr lang="en-US" dirty="0"/>
-              <a:t/>
+              <a:t>Заголовок раскрывает главный вывод не сразу — сначала вопрос и дизайн, потом находка на слайде 6. Если попросят резюме в одном предложении: связь между ставкой и курсом реальна, но только в кризис.</a:t>
             </a:r>
             <a:endParaRPr lang="en-US" dirty="0"/>
           </a:p>
@@ -733,270 +730,6 @@
 </p:notes>
 </file>
 
-<file path=ppt/notesSlides/notesSlide12.xml><?xml version="1.0" encoding="utf-8"?>
-<p:notes xmlns:a="http://schemas.openxmlformats.org/drawingml/2006/main" xmlns:r="http://schemas.openxmlformats.org/officeDocument/2006/relationships" xmlns:p="http://schemas.openxmlformats.org/presentationml/2006/main">
-  <p:cSld>
-    <p:spTree>
-      <p:nvGrpSpPr>
-        <p:cNvPr id="1" name=""/>
-        <p:cNvGrpSpPr/>
-        <p:nvPr/>
-      </p:nvGrpSpPr>
-      <p:grpSpPr>
-        <a:xfrm>
-          <a:off x="0" y="0"/>
-          <a:ext cx="0" cy="0"/>
-          <a:chOff x="0" y="0"/>
-          <a:chExt cx="0" cy="0"/>
-        </a:xfrm>
-      </p:grpSpPr>
-      <p:sp>
-        <p:nvSpPr>
-          <p:cNvPr id="2" name="Slide Image Placeholder 1"/>
-          <p:cNvSpPr>
-            <a:spLocks noGrp="1" noRot="1" noChangeAspect="1"/>
-          </p:cNvSpPr>
-          <p:nvPr>
-            <p:ph type="sldImg"/>
-          </p:nvPr>
-        </p:nvSpPr>
-        <p:spPr/>
-      </p:sp>
-      <p:sp>
-        <p:nvSpPr>
-          <p:cNvPr id="3" name="Notes Placeholder 2"/>
-          <p:cNvSpPr>
-            <a:spLocks noGrp="1"/>
-          </p:cNvSpPr>
-          <p:nvPr>
-            <p:ph type="body" idx="1"/>
-          </p:nvPr>
-        </p:nvSpPr>
-        <p:spPr/>
-        <p:txBody>
-          <a:bodyPr/>
-          <a:lstStyle/>
-          <a:p>
-            <a:r>
-              <a:rPr lang="en-US" dirty="0"/>
-              <a:t/>
-            </a:r>
-            <a:endParaRPr lang="en-US" dirty="0"/>
-          </a:p>
-        </p:txBody>
-      </p:sp>
-      <p:sp>
-        <p:nvSpPr>
-          <p:cNvPr id="4" name="Slide Number Placeholder 3"/>
-          <p:cNvSpPr>
-            <a:spLocks noGrp="1"/>
-          </p:cNvSpPr>
-          <p:nvPr>
-            <p:ph type="sldNum" sz="quarter" idx="10"/>
-          </p:nvPr>
-        </p:nvSpPr>
-        <p:spPr/>
-        <p:txBody>
-          <a:bodyPr/>
-          <a:lstStyle/>
-          <a:p>
-            <a:fld id="{F7021451-1387-4CA6-816F-3879F97B5CBC}" type="slidenum">
-              <a:rPr lang="en-US"/>
-              <a:t>12</a:t>
-            </a:fld>
-            <a:endParaRPr lang="en-US"/>
-          </a:p>
-        </p:txBody>
-      </p:sp>
-    </p:spTree>
-    <p:extLst>
-      <p:ext uri="{BB962C8B-B14F-4D97-AF65-F5344CB8AC3E}">
-        <p14:creationId xmlns:p14="http://schemas.microsoft.com/office/powerpoint/2010/main" val="1024086991"/>
-      </p:ext>
-    </p:extLst>
-  </p:cSld>
-  <p:clrMapOvr>
-    <a:masterClrMapping/>
-  </p:clrMapOvr>
-</p:notes>
-</file>
-
-<file path=ppt/notesSlides/notesSlide13.xml><?xml version="1.0" encoding="utf-8"?>
-<p:notes xmlns:a="http://schemas.openxmlformats.org/drawingml/2006/main" xmlns:r="http://schemas.openxmlformats.org/officeDocument/2006/relationships" xmlns:p="http://schemas.openxmlformats.org/presentationml/2006/main">
-  <p:cSld>
-    <p:spTree>
-      <p:nvGrpSpPr>
-        <p:cNvPr id="1" name=""/>
-        <p:cNvGrpSpPr/>
-        <p:nvPr/>
-      </p:nvGrpSpPr>
-      <p:grpSpPr>
-        <a:xfrm>
-          <a:off x="0" y="0"/>
-          <a:ext cx="0" cy="0"/>
-          <a:chOff x="0" y="0"/>
-          <a:chExt cx="0" cy="0"/>
-        </a:xfrm>
-      </p:grpSpPr>
-      <p:sp>
-        <p:nvSpPr>
-          <p:cNvPr id="2" name="Slide Image Placeholder 1"/>
-          <p:cNvSpPr>
-            <a:spLocks noGrp="1" noRot="1" noChangeAspect="1"/>
-          </p:cNvSpPr>
-          <p:nvPr>
-            <p:ph type="sldImg"/>
-          </p:nvPr>
-        </p:nvSpPr>
-        <p:spPr/>
-      </p:sp>
-      <p:sp>
-        <p:nvSpPr>
-          <p:cNvPr id="3" name="Notes Placeholder 2"/>
-          <p:cNvSpPr>
-            <a:spLocks noGrp="1"/>
-          </p:cNvSpPr>
-          <p:nvPr>
-            <p:ph type="body" idx="1"/>
-          </p:nvPr>
-        </p:nvSpPr>
-        <p:spPr/>
-        <p:txBody>
-          <a:bodyPr/>
-          <a:lstStyle/>
-          <a:p>
-            <a:r>
-              <a:rPr lang="en-US" dirty="0"/>
-              <a:t/>
-            </a:r>
-            <a:endParaRPr lang="en-US" dirty="0"/>
-          </a:p>
-        </p:txBody>
-      </p:sp>
-      <p:sp>
-        <p:nvSpPr>
-          <p:cNvPr id="4" name="Slide Number Placeholder 3"/>
-          <p:cNvSpPr>
-            <a:spLocks noGrp="1"/>
-          </p:cNvSpPr>
-          <p:nvPr>
-            <p:ph type="sldNum" sz="quarter" idx="10"/>
-          </p:nvPr>
-        </p:nvSpPr>
-        <p:spPr/>
-        <p:txBody>
-          <a:bodyPr/>
-          <a:lstStyle/>
-          <a:p>
-            <a:fld id="{F7021451-1387-4CA6-816F-3879F97B5CBC}" type="slidenum">
-              <a:rPr lang="en-US"/>
-              <a:t>13</a:t>
-            </a:fld>
-            <a:endParaRPr lang="en-US"/>
-          </a:p>
-        </p:txBody>
-      </p:sp>
-    </p:spTree>
-    <p:extLst>
-      <p:ext uri="{BB962C8B-B14F-4D97-AF65-F5344CB8AC3E}">
-        <p14:creationId xmlns:p14="http://schemas.microsoft.com/office/powerpoint/2010/main" val="1024086991"/>
-      </p:ext>
-    </p:extLst>
-  </p:cSld>
-  <p:clrMapOvr>
-    <a:masterClrMapping/>
-  </p:clrMapOvr>
-</p:notes>
-</file>
-
-<file path=ppt/notesSlides/notesSlide14.xml><?xml version="1.0" encoding="utf-8"?>
-<p:notes xmlns:a="http://schemas.openxmlformats.org/drawingml/2006/main" xmlns:r="http://schemas.openxmlformats.org/officeDocument/2006/relationships" xmlns:p="http://schemas.openxmlformats.org/presentationml/2006/main">
-  <p:cSld>
-    <p:spTree>
-      <p:nvGrpSpPr>
-        <p:cNvPr id="1" name=""/>
-        <p:cNvGrpSpPr/>
-        <p:nvPr/>
-      </p:nvGrpSpPr>
-      <p:grpSpPr>
-        <a:xfrm>
-          <a:off x="0" y="0"/>
-          <a:ext cx="0" cy="0"/>
-          <a:chOff x="0" y="0"/>
-          <a:chExt cx="0" cy="0"/>
-        </a:xfrm>
-      </p:grpSpPr>
-      <p:sp>
-        <p:nvSpPr>
-          <p:cNvPr id="2" name="Slide Image Placeholder 1"/>
-          <p:cNvSpPr>
-            <a:spLocks noGrp="1" noRot="1" noChangeAspect="1"/>
-          </p:cNvSpPr>
-          <p:nvPr>
-            <p:ph type="sldImg"/>
-          </p:nvPr>
-        </p:nvSpPr>
-        <p:spPr/>
-      </p:sp>
-      <p:sp>
-        <p:nvSpPr>
-          <p:cNvPr id="3" name="Notes Placeholder 2"/>
-          <p:cNvSpPr>
-            <a:spLocks noGrp="1"/>
-          </p:cNvSpPr>
-          <p:nvPr>
-            <p:ph type="body" idx="1"/>
-          </p:nvPr>
-        </p:nvSpPr>
-        <p:spPr/>
-        <p:txBody>
-          <a:bodyPr/>
-          <a:lstStyle/>
-          <a:p>
-            <a:r>
-              <a:rPr lang="en-US" dirty="0"/>
-              <a:t/>
-            </a:r>
-            <a:endParaRPr lang="en-US" dirty="0"/>
-          </a:p>
-        </p:txBody>
-      </p:sp>
-      <p:sp>
-        <p:nvSpPr>
-          <p:cNvPr id="4" name="Slide Number Placeholder 3"/>
-          <p:cNvSpPr>
-            <a:spLocks noGrp="1"/>
-          </p:cNvSpPr>
-          <p:nvPr>
-            <p:ph type="sldNum" sz="quarter" idx="10"/>
-          </p:nvPr>
-        </p:nvSpPr>
-        <p:spPr/>
-        <p:txBody>
-          <a:bodyPr/>
-          <a:lstStyle/>
-          <a:p>
-            <a:fld id="{F7021451-1387-4CA6-816F-3879F97B5CBC}" type="slidenum">
-              <a:rPr lang="en-US"/>
-              <a:t>14</a:t>
-            </a:fld>
-            <a:endParaRPr lang="en-US"/>
-          </a:p>
-        </p:txBody>
-      </p:sp>
-    </p:spTree>
-    <p:extLst>
-      <p:ext uri="{BB962C8B-B14F-4D97-AF65-F5344CB8AC3E}">
-        <p14:creationId xmlns:p14="http://schemas.microsoft.com/office/powerpoint/2010/main" val="1024086991"/>
-      </p:ext>
-    </p:extLst>
-  </p:cSld>
-  <p:clrMapOvr>
-    <a:masterClrMapping/>
-  </p:clrMapOvr>
-</p:notes>
-</file>
-
 <file path=ppt/notesSlides/notesSlide2.xml><?xml version="1.0" encoding="utf-8"?>
 <p:notes xmlns:a="http://schemas.openxmlformats.org/drawingml/2006/main" xmlns:r="http://schemas.openxmlformats.org/officeDocument/2006/relationships" xmlns:p="http://schemas.openxmlformats.org/presentationml/2006/main">
   <p:cSld>
@@ -1219,7 +952,7 @@
           <a:p>
             <a:r>
               <a:rPr lang="en-US" dirty="0"/>
-              <a:t/>
+              <a:t>Если спросят про VECM: мы его не выбросили, а прогнали параллельно (слайд с Грейнджером) — результат тот же качественно.</a:t>
             </a:r>
             <a:endParaRPr lang="en-US" dirty="0"/>
           </a:p>
@@ -1395,7 +1128,7 @@
           <a:p>
             <a:r>
               <a:rPr lang="en-US" dirty="0"/>
-              <a:t/>
+              <a:t>Это переработанная версия находки после внешнего ревью: в первой версии мы утверждали 'разворот' Грейнджера по подпериодам до/после 2022. Ревью показало, что оба подпериода всё ещё содержат кризисные месяцы. Спокойные периоды по отдельности не значимы ни в одну сторону — значит, дело не в направлении причинности, а в самом присутствии кризиса в выборке. Экзогенная дамми на кризисные месяцы эффект не убирает — связь размазана по кризисному режиму, а не сосредоточена в паре месяцев.</a:t>
             </a:r>
             <a:endParaRPr lang="en-US" dirty="0"/>
           </a:p>
@@ -2040,8 +1773,8 @@
         </p:nvSpPr>
         <p:spPr>
           <a:xfrm>
-            <a:off x="731520" y="1920240"/>
-            <a:ext cx="9601200" cy="2011680"/>
+            <a:off x="731520" y="1828800"/>
+            <a:ext cx="9601200" cy="1828800"/>
           </a:xfrm>
           <a:prstGeom prst="rect">
             <a:avLst/>
@@ -2060,7 +1793,7 @@
               <a:buNone/>
             </a:pPr>
             <a:r>
-              <a:rPr lang="en-US" sz="4200" b="1" dirty="0">
+              <a:rPr lang="en-US" sz="4000" b="1" dirty="0">
                 <a:solidFill>
                   <a:srgbClr val="FFFFFF"/>
                 </a:solidFill>
@@ -2070,7 +1803,7 @@
               </a:rPr>
               <a:t>Ставка ЦБ, курс рубля</a:t>
             </a:r>
-            <a:endParaRPr lang="en-US" sz="4200" dirty="0"/>
+            <a:endParaRPr lang="en-US" sz="4000" dirty="0"/>
           </a:p>
           <a:p>
             <a:pPr indent="0" marL="0">
@@ -2080,7 +1813,7 @@
               <a:buNone/>
             </a:pPr>
             <a:r>
-              <a:rPr lang="en-US" sz="4200" b="1" dirty="0">
+              <a:rPr lang="en-US" sz="4000" b="1" dirty="0">
                 <a:solidFill>
                   <a:srgbClr val="FFFFFF"/>
                 </a:solidFill>
@@ -2090,7 +1823,7 @@
               </a:rPr>
               <a:t>и его волатильность</a:t>
             </a:r>
-            <a:endParaRPr lang="en-US" sz="4200" dirty="0"/>
+            <a:endParaRPr lang="en-US" sz="4000" dirty="0"/>
           </a:p>
         </p:txBody>
       </p:sp>
@@ -2102,7 +1835,7 @@
         </p:nvSpPr>
         <p:spPr>
           <a:xfrm>
-            <a:off x="731520" y="3840480"/>
+            <a:off x="731520" y="3657600"/>
             <a:ext cx="9144000" cy="457200"/>
           </a:xfrm>
           <a:prstGeom prst="rect">
@@ -2141,7 +1874,7 @@
         </p:nvSpPr>
         <p:spPr>
           <a:xfrm>
-            <a:off x="731520" y="5989320"/>
+            <a:off x="731520" y="5897880"/>
             <a:ext cx="7315200" cy="365760"/>
           </a:xfrm>
           <a:prstGeom prst="rect">
@@ -2180,8 +1913,8 @@
         </p:nvSpPr>
         <p:spPr>
           <a:xfrm>
-            <a:off x="731520" y="6355080"/>
-            <a:ext cx="9144000" cy="320040"/>
+            <a:off x="731520" y="6263640"/>
+            <a:ext cx="10058400" cy="320040"/>
           </a:xfrm>
           <a:prstGeom prst="rect">
             <a:avLst/>
@@ -2205,7 +1938,7 @@
                 <a:ea typeface="Calibri" pitchFamily="34" charset="-122"/>
                 <a:cs typeface="Calibri" pitchFamily="34" charset="-120"/>
               </a:rPr>
-              <a:t>2013 – 2026  ·  65 решений ЦБ  ·  3 источника данных</a:t>
+              <a:t>2013 – 2026  ·  65 решений ЦБ  ·  связь видна только в кризис</a:t>
             </a:r>
             <a:endParaRPr lang="en-US" sz="1100" dirty="0"/>
           </a:p>
@@ -2268,7 +2001,7 @@
               <a:buNone/>
             </a:pPr>
             <a:r>
-              <a:rPr lang="en-US" sz="3000" b="1" dirty="0">
+              <a:rPr lang="en-US" sz="2800" b="1" dirty="0">
                 <a:solidFill>
                   <a:srgbClr val="1C2733"/>
                 </a:solidFill>
@@ -2276,46 +2009,83 @@
                 <a:ea typeface="Calibri" pitchFamily="34" charset="-122"/>
                 <a:cs typeface="Calibri" pitchFamily="34" charset="-120"/>
               </a:rPr>
-              <a:t>Импульсный отклик курса на шок ставки</a:t>
-            </a:r>
-            <a:endParaRPr lang="en-US" sz="3000" dirty="0"/>
-          </a:p>
-        </p:txBody>
-      </p:sp>
-      <p:pic>
-        <p:nvPicPr>
-          <p:cNvPr id="3" name="Image 0" descr="../output/figures/R2_irf_rate_to_fx.png">    </p:cNvPr>
-          <p:cNvPicPr>
-            <a:picLocks noChangeAspect="1"/>
-          </p:cNvPicPr>
-          <p:nvPr/>
-        </p:nvPicPr>
-        <p:blipFill>
-          <a:blip r:embed="rId1"/>
-          <a:stretch>
-            <a:fillRect/>
-          </a:stretch>
-        </p:blipFill>
-        <p:spPr>
-          <a:xfrm>
-            <a:off x="3419856" y="1234440"/>
-            <a:ext cx="5349240" cy="3566160"/>
+              <a:t>Ответ на вопрос и ограничения</a:t>
+            </a:r>
+            <a:endParaRPr lang="en-US" sz="2800" dirty="0"/>
+          </a:p>
+        </p:txBody>
+      </p:sp>
+      <p:sp>
+        <p:nvSpPr>
+          <p:cNvPr id="3" name="Shape 1"/>
+          <p:cNvSpPr/>
+          <p:nvPr/>
+        </p:nvSpPr>
+        <p:spPr>
+          <a:xfrm>
+            <a:off x="548640" y="1371600"/>
+            <a:ext cx="5212080" cy="4297680"/>
+          </a:xfrm>
+          <a:prstGeom prst="roundRect">
+            <a:avLst>
+              <a:gd name="adj" fmla="val 1702"/>
+            </a:avLst>
+          </a:prstGeom>
+          <a:solidFill>
+            <a:srgbClr val="F3F5F8"/>
+          </a:solidFill>
+          <a:ln/>
+        </p:spPr>
+      </p:sp>
+      <p:sp>
+        <p:nvSpPr>
+          <p:cNvPr id="4" name="Text 2"/>
+          <p:cNvSpPr txBox="1"/>
+          <p:nvPr/>
+        </p:nvSpPr>
+        <p:spPr>
+          <a:xfrm>
+            <a:off x="822960" y="1600200"/>
+            <a:ext cx="4663440" cy="365760"/>
           </a:xfrm>
           <a:prstGeom prst="rect">
             <a:avLst/>
           </a:prstGeom>
-        </p:spPr>
-      </p:pic>
-      <p:sp>
-        <p:nvSpPr>
-          <p:cNvPr id="4" name="Text 1"/>
+          <a:noFill/>
+          <a:ln/>
+        </p:spPr>
+        <p:txBody>
+          <a:bodyPr wrap="square" lIns="0" tIns="0" rIns="0" bIns="0" rtlCol="0" anchor="ctr"/>
+          <a:lstStyle/>
+          <a:p>
+            <a:pPr indent="0" marL="0">
+              <a:buNone/>
+            </a:pPr>
+            <a:r>
+              <a:rPr lang="en-US" sz="1600" b="1" dirty="0">
+                <a:solidFill>
+                  <a:srgbClr val="13294B"/>
+                </a:solidFill>
+                <a:latin typeface="Calibri" pitchFamily="34" charset="0"/>
+                <a:ea typeface="Calibri" pitchFamily="34" charset="-122"/>
+                <a:cs typeface="Calibri" pitchFamily="34" charset="-120"/>
+              </a:rPr>
+              <a:t>Ответ</a:t>
+            </a:r>
+            <a:endParaRPr lang="en-US" sz="1600" dirty="0"/>
+          </a:p>
+        </p:txBody>
+      </p:sp>
+      <p:sp>
+        <p:nvSpPr>
+          <p:cNvPr id="5" name="Text 3"/>
           <p:cNvSpPr txBox="1"/>
           <p:nvPr/>
         </p:nvSpPr>
         <p:spPr>
           <a:xfrm>
-            <a:off x="548640" y="4846320"/>
-            <a:ext cx="10972800" cy="1645920"/>
+            <a:off x="822960" y="2103120"/>
+            <a:ext cx="4663440" cy="3383280"/>
           </a:xfrm>
           <a:prstGeom prst="rect">
             <a:avLst/>
@@ -2329,13 +2099,13 @@
           <a:p>
             <a:pPr marL="342900" indent="-342900">
               <a:spcAft>
-                <a:spcPts val="600"/>
+                <a:spcPts val="1000"/>
               </a:spcAft>
               <a:buSzPct val="100000"/>
               <a:buChar char="•"/>
             </a:pPr>
             <a:r>
-              <a:rPr lang="en-US" sz="1300" dirty="0">
+              <a:rPr lang="en-US" sz="1250" dirty="0">
                 <a:solidFill>
                   <a:srgbClr val="1C2733"/>
                 </a:solidFill>
@@ -2343,20 +2113,20 @@
                 <a:ea typeface="Calibri" pitchFamily="34" charset="-122"/>
                 <a:cs typeface="Calibri" pitchFamily="34" charset="-120"/>
               </a:rPr>
-              <a:t>Пик на 1-м месяце (+3–4%), разворот в минус на 2–3 месяце, гаснет к 9–10 месяцу.</a:t>
-            </a:r>
-            <a:endParaRPr lang="en-US" sz="1300" dirty="0"/>
+              <a:t>Факт: ставка и курс совместно движутся сильнее в кризис; вне кризиса предсказуемости нет ни в одну сторону.</a:t>
+            </a:r>
+            <a:endParaRPr lang="en-US" sz="1250" dirty="0"/>
           </a:p>
           <a:p>
             <a:pPr marL="342900" indent="-342900">
               <a:spcAft>
-                <a:spcPts val="600"/>
+                <a:spcPts val="1000"/>
               </a:spcAft>
               <a:buSzPct val="100000"/>
               <a:buChar char="•"/>
             </a:pPr>
             <a:r>
-              <a:rPr lang="en-US" sz="1300" dirty="0">
+              <a:rPr lang="en-US" sz="1250" dirty="0">
                 <a:solidFill>
                   <a:srgbClr val="1C2733"/>
                 </a:solidFill>
@@ -2364,20 +2134,20 @@
                 <a:ea typeface="Calibri" pitchFamily="34" charset="-122"/>
                 <a:cs typeface="Calibri" pitchFamily="34" charset="-120"/>
               </a:rPr>
-              <a:t>Знак и масштаб пика устойчивы к порядку переменных в ортогонализации (3 варианта, разброс 0,026–0,031).</a:t>
-            </a:r>
-            <a:endParaRPr lang="en-US" sz="1300" dirty="0"/>
+              <a:t>Чего данные не позволяют утверждать: направление причинности, роль инфляции и ожиданий (их нет в модели).</a:t>
+            </a:r>
+            <a:endParaRPr lang="en-US" sz="1250" dirty="0"/>
           </a:p>
           <a:p>
             <a:pPr marL="342900" indent="-342900">
               <a:spcAft>
-                <a:spcPts val="600"/>
+                <a:spcPts val="1000"/>
               </a:spcAft>
               <a:buSzPct val="100000"/>
               <a:buChar char="•"/>
             </a:pPr>
             <a:r>
-              <a:rPr lang="en-US" sz="1300" dirty="0">
+              <a:rPr lang="en-US" sz="1250" dirty="0">
                 <a:solidFill>
                   <a:srgbClr val="1C2733"/>
                 </a:solidFill>
@@ -2385,15 +2155,182 @@
                 <a:ea typeface="Calibri" pitchFamily="34" charset="-122"/>
                 <a:cs typeface="Calibri" pitchFamily="34" charset="-120"/>
               </a:rPr>
-              <a:t>Контринтуитивно относительно паритета ставок — согласуется с обратной причинностью (слайд 9).</a:t>
-            </a:r>
-            <a:endParaRPr lang="en-US" sz="1300" dirty="0"/>
-          </a:p>
-        </p:txBody>
-      </p:sp>
-      <p:sp>
-        <p:nvSpPr>
-          <p:cNvPr id="5" name="Text 2"/>
+              <a:t>Что нужно для следующего шага: данные по инфляции, календарь заседаний без изменения ставки, дизайн с «сюрпризом» решения.</a:t>
+            </a:r>
+            <a:endParaRPr lang="en-US" sz="1250" dirty="0"/>
+          </a:p>
+        </p:txBody>
+      </p:sp>
+      <p:sp>
+        <p:nvSpPr>
+          <p:cNvPr id="6" name="Shape 4"/>
+          <p:cNvSpPr/>
+          <p:nvPr/>
+        </p:nvSpPr>
+        <p:spPr>
+          <a:xfrm>
+            <a:off x="6080760" y="1371600"/>
+            <a:ext cx="5394960" cy="4297680"/>
+          </a:xfrm>
+          <a:prstGeom prst="roundRect">
+            <a:avLst>
+              <a:gd name="adj" fmla="val 1702"/>
+            </a:avLst>
+          </a:prstGeom>
+          <a:solidFill>
+            <a:srgbClr val="13294B"/>
+          </a:solidFill>
+          <a:ln/>
+        </p:spPr>
+      </p:sp>
+      <p:sp>
+        <p:nvSpPr>
+          <p:cNvPr id="7" name="Text 5"/>
+          <p:cNvSpPr txBox="1"/>
+          <p:nvPr/>
+        </p:nvSpPr>
+        <p:spPr>
+          <a:xfrm>
+            <a:off x="6355080" y="1600200"/>
+            <a:ext cx="4846320" cy="365760"/>
+          </a:xfrm>
+          <a:prstGeom prst="rect">
+            <a:avLst/>
+          </a:prstGeom>
+          <a:noFill/>
+          <a:ln/>
+        </p:spPr>
+        <p:txBody>
+          <a:bodyPr wrap="square" lIns="0" tIns="0" rIns="0" bIns="0" rtlCol="0" anchor="ctr"/>
+          <a:lstStyle/>
+          <a:p>
+            <a:pPr indent="0" marL="0">
+              <a:buNone/>
+            </a:pPr>
+            <a:r>
+              <a:rPr lang="en-US" sz="1600" b="1" dirty="0">
+                <a:solidFill>
+                  <a:srgbClr val="C9A227"/>
+                </a:solidFill>
+                <a:latin typeface="Calibri" pitchFamily="34" charset="0"/>
+                <a:ea typeface="Calibri" pitchFamily="34" charset="-122"/>
+                <a:cs typeface="Calibri" pitchFamily="34" charset="-120"/>
+              </a:rPr>
+              <a:t>Ограничения</a:t>
+            </a:r>
+            <a:endParaRPr lang="en-US" sz="1600" dirty="0"/>
+          </a:p>
+        </p:txBody>
+      </p:sp>
+      <p:sp>
+        <p:nvSpPr>
+          <p:cNvPr id="8" name="Text 6"/>
+          <p:cNvSpPr txBox="1"/>
+          <p:nvPr/>
+        </p:nvSpPr>
+        <p:spPr>
+          <a:xfrm>
+            <a:off x="6355080" y="2103120"/>
+            <a:ext cx="4846320" cy="3383280"/>
+          </a:xfrm>
+          <a:prstGeom prst="rect">
+            <a:avLst/>
+          </a:prstGeom>
+          <a:noFill/>
+          <a:ln/>
+        </p:spPr>
+        <p:txBody>
+          <a:bodyPr wrap="square" lIns="0" tIns="0" rIns="0" bIns="0" rtlCol="0" anchor="ctr"/>
+          <a:lstStyle/>
+          <a:p>
+            <a:pPr marL="342900" indent="-342900">
+              <a:spcAft>
+                <a:spcPts val="1000"/>
+              </a:spcAft>
+              <a:buSzPct val="100000"/>
+              <a:buChar char="•"/>
+            </a:pPr>
+            <a:r>
+              <a:rPr lang="en-US" sz="1250" dirty="0">
+                <a:solidFill>
+                  <a:srgbClr val="FFFFFF"/>
+                </a:solidFill>
+                <a:latin typeface="Calibri" pitchFamily="34" charset="0"/>
+                <a:ea typeface="Calibri" pitchFamily="34" charset="-122"/>
+                <a:cs typeface="Calibri" pitchFamily="34" charset="-120"/>
+              </a:rPr>
+              <a:t>Контрольная группа «заседания без изменения ставки» не построена — тест остаётся ослабленным.</a:t>
+            </a:r>
+            <a:endParaRPr lang="en-US" sz="1250" dirty="0"/>
+          </a:p>
+          <a:p>
+            <a:pPr marL="342900" indent="-342900">
+              <a:spcAft>
+                <a:spcPts val="1000"/>
+              </a:spcAft>
+              <a:buSzPct val="100000"/>
+              <a:buChar char="•"/>
+            </a:pPr>
+            <a:r>
+              <a:rPr lang="en-US" sz="1250" dirty="0">
+                <a:solidFill>
+                  <a:srgbClr val="FFFFFF"/>
+                </a:solidFill>
+                <a:latin typeface="Calibri" pitchFamily="34" charset="0"/>
+                <a:ea typeface="Calibri" pitchFamily="34" charset="-122"/>
+                <a:cs typeface="Calibri" pitchFamily="34" charset="-120"/>
+              </a:rPr>
+              <a:t>Множественные проверки (лаги, подпериоды, спецификации) не скорректированы на множественное тестирование.</a:t>
+            </a:r>
+            <a:endParaRPr lang="en-US" sz="1250" dirty="0"/>
+          </a:p>
+          <a:p>
+            <a:pPr marL="342900" indent="-342900">
+              <a:spcAft>
+                <a:spcPts val="1000"/>
+              </a:spcAft>
+              <a:buSzPct val="100000"/>
+              <a:buChar char="•"/>
+            </a:pPr>
+            <a:r>
+              <a:rPr lang="en-US" sz="1250" dirty="0">
+                <a:solidFill>
+                  <a:srgbClr val="FFFFFF"/>
+                </a:solidFill>
+                <a:latin typeface="Calibri" pitchFamily="34" charset="0"/>
+                <a:ea typeface="Calibri" pitchFamily="34" charset="-122"/>
+                <a:cs typeface="Calibri" pitchFamily="34" charset="-120"/>
+              </a:rPr>
+              <a:t>Короткие кризисные подвыборки (n=12–55) — низкая мощность, отсутствие значимости может быть нехваткой данных.</a:t>
+            </a:r>
+            <a:endParaRPr lang="en-US" sz="1250" dirty="0"/>
+          </a:p>
+          <a:p>
+            <a:pPr marL="342900" indent="-342900">
+              <a:spcAft>
+                <a:spcPts val="1000"/>
+              </a:spcAft>
+              <a:buSzPct val="100000"/>
+              <a:buChar char="•"/>
+            </a:pPr>
+            <a:r>
+              <a:rPr lang="en-US" sz="1250" dirty="0">
+                <a:solidFill>
+                  <a:srgbClr val="FFFFFF"/>
+                </a:solidFill>
+                <a:latin typeface="Calibri" pitchFamily="34" charset="0"/>
+                <a:ea typeface="Calibri" pitchFamily="34" charset="-122"/>
+                <a:cs typeface="Calibri" pitchFamily="34" charset="-120"/>
+              </a:rPr>
+              <a:t>Три переменные — упрощение: нет ставки ФРС, инфляции, санкционного индекса.</a:t>
+            </a:r>
+            <a:endParaRPr lang="en-US" sz="1250" dirty="0"/>
+          </a:p>
+        </p:txBody>
+      </p:sp>
+      <p:sp>
+        <p:nvSpPr>
+          <p:cNvPr id="9" name="Text 7"/>
           <p:cNvSpPr txBox="1"/>
           <p:nvPr/>
         </p:nvSpPr>
@@ -2441,1825 +2378,6 @@
 <file path=ppt/slides/slide11.xml><?xml version="1.0" encoding="utf-8"?>
 <p:sld xmlns:a="http://schemas.openxmlformats.org/drawingml/2006/main" xmlns:r="http://schemas.openxmlformats.org/officeDocument/2006/relationships" xmlns:p="http://schemas.openxmlformats.org/presentationml/2006/main">
   <p:cSld name="Slide 11">
-    <p:bg>
-      <p:bgPr>
-        <a:solidFill>
-          <a:srgbClr val="FFFFFF"/>
-        </a:solidFill>
-      </p:bgPr>
-    </p:bg>
-    <p:spTree>
-      <p:nvGrpSpPr>
-        <p:cNvPr id="1" name=""/>
-        <p:cNvGrpSpPr/>
-        <p:nvPr/>
-      </p:nvGrpSpPr>
-      <p:grpSpPr>
-        <a:xfrm>
-          <a:off x="0" y="0"/>
-          <a:ext cx="0" cy="0"/>
-          <a:chOff x="0" y="0"/>
-          <a:chExt cx="0" cy="0"/>
-        </a:xfrm>
-      </p:grpSpPr>
-      <p:sp>
-        <p:nvSpPr>
-          <p:cNvPr id="2" name="Text 0"/>
-          <p:cNvSpPr txBox="1"/>
-          <p:nvPr/>
-        </p:nvSpPr>
-        <p:spPr>
-          <a:xfrm>
-            <a:off x="548640" y="411480"/>
-            <a:ext cx="11064240" cy="822960"/>
-          </a:xfrm>
-          <a:prstGeom prst="rect">
-            <a:avLst/>
-          </a:prstGeom>
-          <a:noFill/>
-          <a:ln/>
-        </p:spPr>
-        <p:txBody>
-          <a:bodyPr wrap="square" lIns="0" tIns="0" rIns="0" bIns="0" rtlCol="0" anchor="ctr"/>
-          <a:lstStyle/>
-          <a:p>
-            <a:pPr indent="0" marL="0">
-              <a:buNone/>
-            </a:pPr>
-            <a:r>
-              <a:rPr lang="en-US" sz="3000" b="1" dirty="0">
-                <a:solidFill>
-                  <a:srgbClr val="1C2733"/>
-                </a:solidFill>
-                <a:latin typeface="Calibri" pitchFamily="34" charset="0"/>
-                <a:ea typeface="Calibri" pitchFamily="34" charset="-122"/>
-                <a:cs typeface="Calibri" pitchFamily="34" charset="-120"/>
-              </a:rPr>
-              <a:t>GARCH(1,1): волатильность курса кластеризована</a:t>
-            </a:r>
-            <a:endParaRPr lang="en-US" sz="3000" dirty="0"/>
-          </a:p>
-        </p:txBody>
-      </p:sp>
-      <p:sp>
-        <p:nvSpPr>
-          <p:cNvPr id="3" name="Text 1"/>
-          <p:cNvSpPr txBox="1"/>
-          <p:nvPr/>
-        </p:nvSpPr>
-        <p:spPr>
-          <a:xfrm>
-            <a:off x="548640" y="1463040"/>
-            <a:ext cx="3383280" cy="777240"/>
-          </a:xfrm>
-          <a:prstGeom prst="rect">
-            <a:avLst/>
-          </a:prstGeom>
-          <a:noFill/>
-          <a:ln/>
-        </p:spPr>
-        <p:txBody>
-          <a:bodyPr wrap="square" lIns="0" tIns="0" rIns="0" bIns="0" rtlCol="0" anchor="ctr"/>
-          <a:lstStyle/>
-          <a:p>
-            <a:pPr algn="l" indent="0" marL="0">
-              <a:buNone/>
-            </a:pPr>
-            <a:r>
-              <a:rPr lang="en-US" sz="3400" b="1" dirty="0">
-                <a:solidFill>
-                  <a:srgbClr val="13294B"/>
-                </a:solidFill>
-                <a:latin typeface="Calibri" pitchFamily="34" charset="0"/>
-                <a:ea typeface="Calibri" pitchFamily="34" charset="-122"/>
-                <a:cs typeface="Calibri" pitchFamily="34" charset="-120"/>
-              </a:rPr>
-              <a:t>p ≈ 0</a:t>
-            </a:r>
-            <a:endParaRPr lang="en-US" sz="3400" dirty="0"/>
-          </a:p>
-        </p:txBody>
-      </p:sp>
-      <p:sp>
-        <p:nvSpPr>
-          <p:cNvPr id="4" name="Text 2"/>
-          <p:cNvSpPr txBox="1"/>
-          <p:nvPr/>
-        </p:nvSpPr>
-        <p:spPr>
-          <a:xfrm>
-            <a:off x="548640" y="2240280"/>
-            <a:ext cx="3383280" cy="548640"/>
-          </a:xfrm>
-          <a:prstGeom prst="rect">
-            <a:avLst/>
-          </a:prstGeom>
-          <a:noFill/>
-          <a:ln/>
-        </p:spPr>
-        <p:txBody>
-          <a:bodyPr wrap="square" lIns="0" tIns="0" rIns="0" bIns="0" rtlCol="0" anchor="ctr"/>
-          <a:lstStyle/>
-          <a:p>
-            <a:pPr algn="l" indent="0" marL="0">
-              <a:buNone/>
-            </a:pPr>
-            <a:r>
-              <a:rPr lang="en-US" sz="1200" dirty="0">
-                <a:solidFill>
-                  <a:srgbClr val="6B7688"/>
-                </a:solidFill>
-                <a:latin typeface="Calibri" pitchFamily="34" charset="0"/>
-                <a:ea typeface="Calibri" pitchFamily="34" charset="-122"/>
-                <a:cs typeface="Calibri" pitchFamily="34" charset="-120"/>
-              </a:rPr>
-              <a:t>ARCH-LM тест: волатильность точно кластеризована</a:t>
-            </a:r>
-            <a:endParaRPr lang="en-US" sz="1200" dirty="0"/>
-          </a:p>
-        </p:txBody>
-      </p:sp>
-      <p:sp>
-        <p:nvSpPr>
-          <p:cNvPr id="5" name="Text 3"/>
-          <p:cNvSpPr txBox="1"/>
-          <p:nvPr/>
-        </p:nvSpPr>
-        <p:spPr>
-          <a:xfrm>
-            <a:off x="4206240" y="1463040"/>
-            <a:ext cx="3383280" cy="777240"/>
-          </a:xfrm>
-          <a:prstGeom prst="rect">
-            <a:avLst/>
-          </a:prstGeom>
-          <a:noFill/>
-          <a:ln/>
-        </p:spPr>
-        <p:txBody>
-          <a:bodyPr wrap="square" lIns="0" tIns="0" rIns="0" bIns="0" rtlCol="0" anchor="ctr"/>
-          <a:lstStyle/>
-          <a:p>
-            <a:pPr algn="l" indent="0" marL="0">
-              <a:buNone/>
-            </a:pPr>
-            <a:r>
-              <a:rPr lang="en-US" sz="3400" b="1" dirty="0">
-                <a:solidFill>
-                  <a:srgbClr val="5B7FA6"/>
-                </a:solidFill>
-                <a:latin typeface="Calibri" pitchFamily="34" charset="0"/>
-                <a:ea typeface="Calibri" pitchFamily="34" charset="-122"/>
-                <a:cs typeface="Calibri" pitchFamily="34" charset="-120"/>
-              </a:rPr>
-              <a:t>α+β ≈ 0,98</a:t>
-            </a:r>
-            <a:endParaRPr lang="en-US" sz="3400" dirty="0"/>
-          </a:p>
-        </p:txBody>
-      </p:sp>
-      <p:sp>
-        <p:nvSpPr>
-          <p:cNvPr id="6" name="Text 4"/>
-          <p:cNvSpPr txBox="1"/>
-          <p:nvPr/>
-        </p:nvSpPr>
-        <p:spPr>
-          <a:xfrm>
-            <a:off x="4206240" y="2240280"/>
-            <a:ext cx="3383280" cy="548640"/>
-          </a:xfrm>
-          <a:prstGeom prst="rect">
-            <a:avLst/>
-          </a:prstGeom>
-          <a:noFill/>
-          <a:ln/>
-        </p:spPr>
-        <p:txBody>
-          <a:bodyPr wrap="square" lIns="0" tIns="0" rIns="0" bIns="0" rtlCol="0" anchor="ctr"/>
-          <a:lstStyle/>
-          <a:p>
-            <a:pPr algn="l" indent="0" marL="0">
-              <a:buNone/>
-            </a:pPr>
-            <a:r>
-              <a:rPr lang="en-US" sz="1200" dirty="0">
-                <a:solidFill>
-                  <a:srgbClr val="6B7688"/>
-                </a:solidFill>
-                <a:latin typeface="Calibri" pitchFamily="34" charset="0"/>
-                <a:ea typeface="Calibri" pitchFamily="34" charset="-122"/>
-                <a:cs typeface="Calibri" pitchFamily="34" charset="-120"/>
-              </a:rPr>
-              <a:t>персистентность шоков волатильности, весь период</a:t>
-            </a:r>
-            <a:endParaRPr lang="en-US" sz="1200" dirty="0"/>
-          </a:p>
-        </p:txBody>
-      </p:sp>
-      <p:sp>
-        <p:nvSpPr>
-          <p:cNvPr id="7" name="Text 5"/>
-          <p:cNvSpPr txBox="1"/>
-          <p:nvPr/>
-        </p:nvSpPr>
-        <p:spPr>
-          <a:xfrm>
-            <a:off x="7863840" y="1463040"/>
-            <a:ext cx="3383280" cy="777240"/>
-          </a:xfrm>
-          <a:prstGeom prst="rect">
-            <a:avLst/>
-          </a:prstGeom>
-          <a:noFill/>
-          <a:ln/>
-        </p:spPr>
-        <p:txBody>
-          <a:bodyPr wrap="square" lIns="0" tIns="0" rIns="0" bIns="0" rtlCol="0" anchor="ctr"/>
-          <a:lstStyle/>
-          <a:p>
-            <a:pPr algn="l" indent="0" marL="0">
-              <a:buNone/>
-            </a:pPr>
-            <a:r>
-              <a:rPr lang="en-US" sz="2600" b="1" dirty="0">
-                <a:solidFill>
-                  <a:srgbClr val="C9A227"/>
-                </a:solidFill>
-                <a:latin typeface="Calibri" pitchFamily="34" charset="0"/>
-                <a:ea typeface="Calibri" pitchFamily="34" charset="-122"/>
-                <a:cs typeface="Calibri" pitchFamily="34" charset="-120"/>
-              </a:rPr>
-              <a:t>0,029→0,061</a:t>
-            </a:r>
-            <a:endParaRPr lang="en-US" sz="2600" dirty="0"/>
-          </a:p>
-        </p:txBody>
-      </p:sp>
-      <p:sp>
-        <p:nvSpPr>
-          <p:cNvPr id="8" name="Text 6"/>
-          <p:cNvSpPr txBox="1"/>
-          <p:nvPr/>
-        </p:nvSpPr>
-        <p:spPr>
-          <a:xfrm>
-            <a:off x="7863840" y="2240280"/>
-            <a:ext cx="3383280" cy="548640"/>
-          </a:xfrm>
-          <a:prstGeom prst="rect">
-            <a:avLst/>
-          </a:prstGeom>
-          <a:noFill/>
-          <a:ln/>
-        </p:spPr>
-        <p:txBody>
-          <a:bodyPr wrap="square" lIns="0" tIns="0" rIns="0" bIns="0" rtlCol="0" anchor="ctr"/>
-          <a:lstStyle/>
-          <a:p>
-            <a:pPr algn="l" indent="0" marL="0">
-              <a:buNone/>
-            </a:pPr>
-            <a:r>
-              <a:rPr lang="en-US" sz="1200" dirty="0">
-                <a:solidFill>
-                  <a:srgbClr val="6B7688"/>
-                </a:solidFill>
-                <a:latin typeface="Calibri" pitchFamily="34" charset="0"/>
-                <a:ea typeface="Calibri" pitchFamily="34" charset="-122"/>
-                <a:cs typeface="Calibri" pitchFamily="34" charset="-120"/>
-              </a:rPr>
-              <a:t>базовая дисперсия (ω): до → после 28.02.2022</a:t>
-            </a:r>
-            <a:endParaRPr lang="en-US" sz="1200" dirty="0"/>
-          </a:p>
-        </p:txBody>
-      </p:sp>
-      <p:pic>
-        <p:nvPicPr>
-          <p:cNvPr id="9" name="Image 0" descr="../output/figures/R3_conditional_volatility.png">    </p:cNvPr>
-          <p:cNvPicPr>
-            <a:picLocks noChangeAspect="1"/>
-          </p:cNvPicPr>
-          <p:nvPr/>
-        </p:nvPicPr>
-        <p:blipFill>
-          <a:blip r:embed="rId1"/>
-          <a:stretch>
-            <a:fillRect/>
-          </a:stretch>
-        </p:blipFill>
-        <p:spPr>
-          <a:xfrm>
-            <a:off x="3172968" y="3520440"/>
-            <a:ext cx="5852160" cy="2926080"/>
-          </a:xfrm>
-          <a:prstGeom prst="rect">
-            <a:avLst/>
-          </a:prstGeom>
-        </p:spPr>
-      </p:pic>
-      <p:sp>
-        <p:nvSpPr>
-          <p:cNvPr id="10" name="Text 7"/>
-          <p:cNvSpPr txBox="1"/>
-          <p:nvPr/>
-        </p:nvSpPr>
-        <p:spPr>
-          <a:xfrm>
-            <a:off x="11521440" y="6446520"/>
-            <a:ext cx="457200" cy="274320"/>
-          </a:xfrm>
-          <a:prstGeom prst="rect">
-            <a:avLst/>
-          </a:prstGeom>
-          <a:noFill/>
-          <a:ln/>
-        </p:spPr>
-        <p:txBody>
-          <a:bodyPr wrap="square" lIns="0" tIns="0" rIns="0" bIns="0" rtlCol="0" anchor="ctr"/>
-          <a:lstStyle/>
-          <a:p>
-            <a:pPr algn="r" indent="0" marL="0">
-              <a:buNone/>
-            </a:pPr>
-            <a:r>
-              <a:rPr lang="en-US" sz="1000" dirty="0">
-                <a:solidFill>
-                  <a:srgbClr val="6B7688"/>
-                </a:solidFill>
-                <a:latin typeface="Calibri" pitchFamily="34" charset="0"/>
-                <a:ea typeface="Calibri" pitchFamily="34" charset="-122"/>
-                <a:cs typeface="Calibri" pitchFamily="34" charset="-120"/>
-              </a:rPr>
-              <a:t>11</a:t>
-            </a:r>
-            <a:endParaRPr lang="en-US" sz="1000" dirty="0"/>
-          </a:p>
-        </p:txBody>
-      </p:sp>
-    </p:spTree>
-  </p:cSld>
-  <p:clrMapOvr>
-    <a:masterClrMapping/>
-  </p:clrMapOvr>
-</p:sld>
-</file>
-
-<file path=ppt/slides/slide12.xml><?xml version="1.0" encoding="utf-8"?>
-<p:sld xmlns:a="http://schemas.openxmlformats.org/drawingml/2006/main" xmlns:r="http://schemas.openxmlformats.org/officeDocument/2006/relationships" xmlns:p="http://schemas.openxmlformats.org/presentationml/2006/main">
-  <p:cSld name="Slide 12">
-    <p:bg>
-      <p:bgPr>
-        <a:solidFill>
-          <a:srgbClr val="FFFFFF"/>
-        </a:solidFill>
-      </p:bgPr>
-    </p:bg>
-    <p:spTree>
-      <p:nvGrpSpPr>
-        <p:cNvPr id="1" name=""/>
-        <p:cNvGrpSpPr/>
-        <p:nvPr/>
-      </p:nvGrpSpPr>
-      <p:grpSpPr>
-        <a:xfrm>
-          <a:off x="0" y="0"/>
-          <a:ext cx="0" cy="0"/>
-          <a:chOff x="0" y="0"/>
-          <a:chExt cx="0" cy="0"/>
-        </a:xfrm>
-      </p:grpSpPr>
-      <p:sp>
-        <p:nvSpPr>
-          <p:cNvPr id="2" name="Text 0"/>
-          <p:cNvSpPr txBox="1"/>
-          <p:nvPr/>
-        </p:nvSpPr>
-        <p:spPr>
-          <a:xfrm>
-            <a:off x="548640" y="411480"/>
-            <a:ext cx="11064240" cy="822960"/>
-          </a:xfrm>
-          <a:prstGeom prst="rect">
-            <a:avLst/>
-          </a:prstGeom>
-          <a:noFill/>
-          <a:ln/>
-        </p:spPr>
-        <p:txBody>
-          <a:bodyPr wrap="square" lIns="0" tIns="0" rIns="0" bIns="0" rtlCol="0" anchor="ctr"/>
-          <a:lstStyle/>
-          <a:p>
-            <a:pPr indent="0" marL="0">
-              <a:buNone/>
-            </a:pPr>
-            <a:r>
-              <a:rPr lang="en-US" sz="3000" b="1" dirty="0">
-                <a:solidFill>
-                  <a:srgbClr val="1C2733"/>
-                </a:solidFill>
-                <a:latin typeface="Calibri" pitchFamily="34" charset="0"/>
-                <a:ea typeface="Calibri" pitchFamily="34" charset="-122"/>
-                <a:cs typeface="Calibri" pitchFamily="34" charset="-120"/>
-              </a:rPr>
-              <a:t>Волатильность вокруг решений ЦБ выше случайной</a:t>
-            </a:r>
-            <a:endParaRPr lang="en-US" sz="3000" dirty="0"/>
-          </a:p>
-        </p:txBody>
-      </p:sp>
-      <p:sp>
-        <p:nvSpPr>
-          <p:cNvPr id="3" name="Text 1"/>
-          <p:cNvSpPr txBox="1"/>
-          <p:nvPr/>
-        </p:nvSpPr>
-        <p:spPr>
-          <a:xfrm>
-            <a:off x="548640" y="1371600"/>
-            <a:ext cx="10972800" cy="548640"/>
-          </a:xfrm>
-          <a:prstGeom prst="rect">
-            <a:avLst/>
-          </a:prstGeom>
-          <a:noFill/>
-          <a:ln/>
-        </p:spPr>
-        <p:txBody>
-          <a:bodyPr wrap="square" lIns="0" tIns="0" rIns="0" bIns="0" rtlCol="0" anchor="ctr"/>
-          <a:lstStyle/>
-          <a:p>
-            <a:pPr indent="0" marL="0">
-              <a:buNone/>
-            </a:pPr>
-            <a:r>
-              <a:rPr lang="en-US" sz="1400" dirty="0">
-                <a:solidFill>
-                  <a:srgbClr val="1C2733"/>
-                </a:solidFill>
-                <a:latin typeface="Calibri" pitchFamily="34" charset="0"/>
-                <a:ea typeface="Calibri" pitchFamily="34" charset="-122"/>
-                <a:cs typeface="Calibri" pitchFamily="34" charset="-120"/>
-              </a:rPr>
-              <a:t>Окно ±5 торговых дней вокруг каждого из 65 решений, сравнение с 1000 случайных плацебо-наборов той же длины.</a:t>
-            </a:r>
-            <a:endParaRPr lang="en-US" sz="1400" dirty="0"/>
-          </a:p>
-        </p:txBody>
-      </p:sp>
-      <p:graphicFrame>
-        <p:nvGraphicFramePr>
-          <p:cNvPr id="13" name="Table 0"/>
-          <p:cNvGraphicFramePr>
-            <a:graphicFrameLocks noGrp="1"/>
-          </p:cNvGraphicFramePr>
-          <p:nvPr>
-            <p:extLst>
-              <p:ext uri="{D42A27DB-BD31-4B8C-83A1-F6EECF244321}">
-                <p14:modId xmlns:p14="http://schemas.microsoft.com/office/powerpoint/2010/main" val="1579011935"/>
-              </p:ext>
-            </p:extLst>
-          </p:nvPr>
-        </p:nvGraphicFramePr>
-        <p:xfrm>
-          <a:off x="548640" y="2148840"/>
-          <a:ext cx="10972800" cy="1463040"/>
-        </p:xfrm>
-        <a:graphic>
-          <a:graphicData uri="http://schemas.openxmlformats.org/drawingml/2006/table">
-            <a:tbl>
-              <a:tblPr/>
-              <a:tblGrid>
-                <a:gridCol w="3657600"/>
-                <a:gridCol w="2468880"/>
-                <a:gridCol w="2468880"/>
-                <a:gridCol w="2377440"/>
-              </a:tblGrid>
-              <a:tr h="487680">
-                <a:tc>
-                  <a:txBody>
-                    <a:bodyPr/>
-                    <a:lstStyle/>
-                    <a:p>
-                      <a:pPr algn="ctr" indent="0" marL="0">
-                        <a:buNone/>
-                      </a:pPr>
-                      <a:endParaRPr lang="en-US" sz="1500" dirty="0">
-                        <a:latin typeface="Calibri" charset="0"/>
-                        <a:ea typeface="Calibri" charset="0"/>
-                        <a:cs typeface="Calibri" charset="0"/>
-                      </a:endParaRPr>
-                    </a:p>
-                  </a:txBody>
-                  <a:tcPr marL="91440" marR="91440" marT="45720" marB="45720">
-                    <a:lnL w="12700" cap="flat" cmpd="sng" algn="ctr">
-                      <a:solidFill>
-                        <a:srgbClr val="E3E7ED"/>
-                      </a:solidFill>
-                      <a:prstDash val="solid"/>
-                      <a:round/>
-                      <a:headEnd type="none" w="med" len="med"/>
-                      <a:tailEnd type="none" w="med" len="med"/>
-                    </a:lnL>
-                    <a:lnR w="12700" cap="flat" cmpd="sng" algn="ctr">
-                      <a:solidFill>
-                        <a:srgbClr val="E3E7ED"/>
-                      </a:solidFill>
-                      <a:prstDash val="solid"/>
-                      <a:round/>
-                      <a:headEnd type="none" w="med" len="med"/>
-                      <a:tailEnd type="none" w="med" len="med"/>
-                    </a:lnR>
-                    <a:lnT w="12700" cap="flat" cmpd="sng" algn="ctr">
-                      <a:solidFill>
-                        <a:srgbClr val="E3E7ED"/>
-                      </a:solidFill>
-                      <a:prstDash val="solid"/>
-                      <a:round/>
-                      <a:headEnd type="none" w="med" len="med"/>
-                      <a:tailEnd type="none" w="med" len="med"/>
-                    </a:lnT>
-                    <a:lnB w="12700" cap="flat" cmpd="sng" algn="ctr">
-                      <a:solidFill>
-                        <a:srgbClr val="E3E7ED"/>
-                      </a:solidFill>
-                      <a:prstDash val="solid"/>
-                      <a:round/>
-                      <a:headEnd type="none" w="med" len="med"/>
-                      <a:tailEnd type="none" w="med" len="med"/>
-                    </a:lnB>
-                    <a:solidFill>
-                      <a:srgbClr val="13294B"/>
-                    </a:solidFill>
-                  </a:tcPr>
-                </a:tc>
-                <a:tc>
-                  <a:txBody>
-                    <a:bodyPr/>
-                    <a:lstStyle/>
-                    <a:p>
-                      <a:pPr algn="ctr" indent="0" marL="0">
-                        <a:buNone/>
-                      </a:pPr>
-                      <a:r>
-                        <a:rPr lang="en-US" sz="1500" b="1" dirty="0">
-                          <a:solidFill>
-                            <a:srgbClr val="FFFFFF"/>
-                          </a:solidFill>
-                          <a:latin typeface="Calibri" pitchFamily="34" charset="0"/>
-                          <a:ea typeface="Calibri" pitchFamily="34" charset="-122"/>
-                          <a:cs typeface="Calibri" pitchFamily="34" charset="-120"/>
-                        </a:rPr>
-                        <a:t>Наблюдаемое</a:t>
-                      </a:r>
-                      <a:endParaRPr lang="en-US" sz="1500" dirty="0">
-                        <a:latin typeface="Calibri" charset="0"/>
-                        <a:ea typeface="Calibri" charset="0"/>
-                        <a:cs typeface="Calibri" charset="0"/>
-                      </a:endParaRPr>
-                    </a:p>
-                  </a:txBody>
-                  <a:tcPr marL="91440" marR="91440" marT="45720" marB="45720">
-                    <a:lnL w="12700" cap="flat" cmpd="sng" algn="ctr">
-                      <a:solidFill>
-                        <a:srgbClr val="E3E7ED"/>
-                      </a:solidFill>
-                      <a:prstDash val="solid"/>
-                      <a:round/>
-                      <a:headEnd type="none" w="med" len="med"/>
-                      <a:tailEnd type="none" w="med" len="med"/>
-                    </a:lnL>
-                    <a:lnR w="12700" cap="flat" cmpd="sng" algn="ctr">
-                      <a:solidFill>
-                        <a:srgbClr val="E3E7ED"/>
-                      </a:solidFill>
-                      <a:prstDash val="solid"/>
-                      <a:round/>
-                      <a:headEnd type="none" w="med" len="med"/>
-                      <a:tailEnd type="none" w="med" len="med"/>
-                    </a:lnR>
-                    <a:lnT w="12700" cap="flat" cmpd="sng" algn="ctr">
-                      <a:solidFill>
-                        <a:srgbClr val="E3E7ED"/>
-                      </a:solidFill>
-                      <a:prstDash val="solid"/>
-                      <a:round/>
-                      <a:headEnd type="none" w="med" len="med"/>
-                      <a:tailEnd type="none" w="med" len="med"/>
-                    </a:lnT>
-                    <a:lnB w="12700" cap="flat" cmpd="sng" algn="ctr">
-                      <a:solidFill>
-                        <a:srgbClr val="E3E7ED"/>
-                      </a:solidFill>
-                      <a:prstDash val="solid"/>
-                      <a:round/>
-                      <a:headEnd type="none" w="med" len="med"/>
-                      <a:tailEnd type="none" w="med" len="med"/>
-                    </a:lnB>
-                    <a:solidFill>
-                      <a:srgbClr val="13294B"/>
-                    </a:solidFill>
-                  </a:tcPr>
-                </a:tc>
-                <a:tc>
-                  <a:txBody>
-                    <a:bodyPr/>
-                    <a:lstStyle/>
-                    <a:p>
-                      <a:pPr algn="ctr" indent="0" marL="0">
-                        <a:buNone/>
-                      </a:pPr>
-                      <a:r>
-                        <a:rPr lang="en-US" sz="1500" b="1" dirty="0">
-                          <a:solidFill>
-                            <a:srgbClr val="FFFFFF"/>
-                          </a:solidFill>
-                          <a:latin typeface="Calibri" pitchFamily="34" charset="0"/>
-                          <a:ea typeface="Calibri" pitchFamily="34" charset="-122"/>
-                          <a:cs typeface="Calibri" pitchFamily="34" charset="-120"/>
-                        </a:rPr>
-                        <a:t>Плацебо (среднее)</a:t>
-                      </a:r>
-                      <a:endParaRPr lang="en-US" sz="1500" dirty="0">
-                        <a:latin typeface="Calibri" charset="0"/>
-                        <a:ea typeface="Calibri" charset="0"/>
-                        <a:cs typeface="Calibri" charset="0"/>
-                      </a:endParaRPr>
-                    </a:p>
-                  </a:txBody>
-                  <a:tcPr marL="91440" marR="91440" marT="45720" marB="45720">
-                    <a:lnL w="12700" cap="flat" cmpd="sng" algn="ctr">
-                      <a:solidFill>
-                        <a:srgbClr val="E3E7ED"/>
-                      </a:solidFill>
-                      <a:prstDash val="solid"/>
-                      <a:round/>
-                      <a:headEnd type="none" w="med" len="med"/>
-                      <a:tailEnd type="none" w="med" len="med"/>
-                    </a:lnL>
-                    <a:lnR w="12700" cap="flat" cmpd="sng" algn="ctr">
-                      <a:solidFill>
-                        <a:srgbClr val="E3E7ED"/>
-                      </a:solidFill>
-                      <a:prstDash val="solid"/>
-                      <a:round/>
-                      <a:headEnd type="none" w="med" len="med"/>
-                      <a:tailEnd type="none" w="med" len="med"/>
-                    </a:lnR>
-                    <a:lnT w="12700" cap="flat" cmpd="sng" algn="ctr">
-                      <a:solidFill>
-                        <a:srgbClr val="E3E7ED"/>
-                      </a:solidFill>
-                      <a:prstDash val="solid"/>
-                      <a:round/>
-                      <a:headEnd type="none" w="med" len="med"/>
-                      <a:tailEnd type="none" w="med" len="med"/>
-                    </a:lnT>
-                    <a:lnB w="12700" cap="flat" cmpd="sng" algn="ctr">
-                      <a:solidFill>
-                        <a:srgbClr val="E3E7ED"/>
-                      </a:solidFill>
-                      <a:prstDash val="solid"/>
-                      <a:round/>
-                      <a:headEnd type="none" w="med" len="med"/>
-                      <a:tailEnd type="none" w="med" len="med"/>
-                    </a:lnB>
-                    <a:solidFill>
-                      <a:srgbClr val="13294B"/>
-                    </a:solidFill>
-                  </a:tcPr>
-                </a:tc>
-                <a:tc>
-                  <a:txBody>
-                    <a:bodyPr/>
-                    <a:lstStyle/>
-                    <a:p>
-                      <a:pPr algn="ctr" indent="0" marL="0">
-                        <a:buNone/>
-                      </a:pPr>
-                      <a:r>
-                        <a:rPr lang="en-US" sz="1500" b="1" dirty="0">
-                          <a:solidFill>
-                            <a:srgbClr val="FFFFFF"/>
-                          </a:solidFill>
-                          <a:latin typeface="Calibri" pitchFamily="34" charset="0"/>
-                          <a:ea typeface="Calibri" pitchFamily="34" charset="-122"/>
-                          <a:cs typeface="Calibri" pitchFamily="34" charset="-120"/>
-                        </a:rPr>
-                        <a:t>p-значение</a:t>
-                      </a:r>
-                      <a:endParaRPr lang="en-US" sz="1500" dirty="0">
-                        <a:latin typeface="Calibri" charset="0"/>
-                        <a:ea typeface="Calibri" charset="0"/>
-                        <a:cs typeface="Calibri" charset="0"/>
-                      </a:endParaRPr>
-                    </a:p>
-                  </a:txBody>
-                  <a:tcPr marL="91440" marR="91440" marT="45720" marB="45720">
-                    <a:lnL w="12700" cap="flat" cmpd="sng" algn="ctr">
-                      <a:solidFill>
-                        <a:srgbClr val="E3E7ED"/>
-                      </a:solidFill>
-                      <a:prstDash val="solid"/>
-                      <a:round/>
-                      <a:headEnd type="none" w="med" len="med"/>
-                      <a:tailEnd type="none" w="med" len="med"/>
-                    </a:lnL>
-                    <a:lnR w="12700" cap="flat" cmpd="sng" algn="ctr">
-                      <a:solidFill>
-                        <a:srgbClr val="E3E7ED"/>
-                      </a:solidFill>
-                      <a:prstDash val="solid"/>
-                      <a:round/>
-                      <a:headEnd type="none" w="med" len="med"/>
-                      <a:tailEnd type="none" w="med" len="med"/>
-                    </a:lnR>
-                    <a:lnT w="12700" cap="flat" cmpd="sng" algn="ctr">
-                      <a:solidFill>
-                        <a:srgbClr val="E3E7ED"/>
-                      </a:solidFill>
-                      <a:prstDash val="solid"/>
-                      <a:round/>
-                      <a:headEnd type="none" w="med" len="med"/>
-                      <a:tailEnd type="none" w="med" len="med"/>
-                    </a:lnT>
-                    <a:lnB w="12700" cap="flat" cmpd="sng" algn="ctr">
-                      <a:solidFill>
-                        <a:srgbClr val="E3E7ED"/>
-                      </a:solidFill>
-                      <a:prstDash val="solid"/>
-                      <a:round/>
-                      <a:headEnd type="none" w="med" len="med"/>
-                      <a:tailEnd type="none" w="med" len="med"/>
-                    </a:lnB>
-                    <a:solidFill>
-                      <a:srgbClr val="13294B"/>
-                    </a:solidFill>
-                  </a:tcPr>
-                </a:tc>
-              </a:tr>
-              <a:tr h="487680">
-                <a:tc>
-                  <a:txBody>
-                    <a:bodyPr/>
-                    <a:lstStyle/>
-                    <a:p>
-                      <a:pPr algn="ctr" indent="0" marL="0">
-                        <a:buNone/>
-                      </a:pPr>
-                      <a:r>
-                        <a:rPr lang="en-US" sz="1500" dirty="0">
-                          <a:solidFill>
-                            <a:srgbClr val="1C2733"/>
-                          </a:solidFill>
-                          <a:latin typeface="Calibri" pitchFamily="34" charset="0"/>
-                          <a:ea typeface="Calibri" pitchFamily="34" charset="-122"/>
-                          <a:cs typeface="Calibri" pitchFamily="34" charset="-120"/>
-                        </a:rPr>
-                        <a:t>|доходность|, %</a:t>
-                      </a:r>
-                      <a:endParaRPr lang="en-US" sz="1500" dirty="0">
-                        <a:latin typeface="Calibri" charset="0"/>
-                        <a:ea typeface="Calibri" charset="0"/>
-                        <a:cs typeface="Calibri" charset="0"/>
-                      </a:endParaRPr>
-                    </a:p>
-                  </a:txBody>
-                  <a:tcPr marL="91440" marR="91440" marT="45720" marB="45720">
-                    <a:lnL w="12700" cap="flat" cmpd="sng" algn="ctr">
-                      <a:solidFill>
-                        <a:srgbClr val="E3E7ED"/>
-                      </a:solidFill>
-                      <a:prstDash val="solid"/>
-                      <a:round/>
-                      <a:headEnd type="none" w="med" len="med"/>
-                      <a:tailEnd type="none" w="med" len="med"/>
-                    </a:lnL>
-                    <a:lnR w="12700" cap="flat" cmpd="sng" algn="ctr">
-                      <a:solidFill>
-                        <a:srgbClr val="E3E7ED"/>
-                      </a:solidFill>
-                      <a:prstDash val="solid"/>
-                      <a:round/>
-                      <a:headEnd type="none" w="med" len="med"/>
-                      <a:tailEnd type="none" w="med" len="med"/>
-                    </a:lnR>
-                    <a:lnT w="12700" cap="flat" cmpd="sng" algn="ctr">
-                      <a:solidFill>
-                        <a:srgbClr val="E3E7ED"/>
-                      </a:solidFill>
-                      <a:prstDash val="solid"/>
-                      <a:round/>
-                      <a:headEnd type="none" w="med" len="med"/>
-                      <a:tailEnd type="none" w="med" len="med"/>
-                    </a:lnT>
-                    <a:lnB w="12700" cap="flat" cmpd="sng" algn="ctr">
-                      <a:solidFill>
-                        <a:srgbClr val="E3E7ED"/>
-                      </a:solidFill>
-                      <a:prstDash val="solid"/>
-                      <a:round/>
-                      <a:headEnd type="none" w="med" len="med"/>
-                      <a:tailEnd type="none" w="med" len="med"/>
-                    </a:lnB>
-                  </a:tcPr>
-                </a:tc>
-                <a:tc>
-                  <a:txBody>
-                    <a:bodyPr/>
-                    <a:lstStyle/>
-                    <a:p>
-                      <a:pPr algn="ctr" indent="0" marL="0">
-                        <a:buNone/>
-                      </a:pPr>
-                      <a:r>
-                        <a:rPr lang="en-US" sz="1500" dirty="0">
-                          <a:solidFill>
-                            <a:srgbClr val="1C2733"/>
-                          </a:solidFill>
-                          <a:latin typeface="Calibri" pitchFamily="34" charset="0"/>
-                          <a:ea typeface="Calibri" pitchFamily="34" charset="-122"/>
-                          <a:cs typeface="Calibri" pitchFamily="34" charset="-120"/>
-                        </a:rPr>
-                        <a:t>0,92</a:t>
-                      </a:r>
-                      <a:endParaRPr lang="en-US" sz="1500" dirty="0">
-                        <a:latin typeface="Calibri" charset="0"/>
-                        <a:ea typeface="Calibri" charset="0"/>
-                        <a:cs typeface="Calibri" charset="0"/>
-                      </a:endParaRPr>
-                    </a:p>
-                  </a:txBody>
-                  <a:tcPr marL="91440" marR="91440" marT="45720" marB="45720">
-                    <a:lnL w="12700" cap="flat" cmpd="sng" algn="ctr">
-                      <a:solidFill>
-                        <a:srgbClr val="E3E7ED"/>
-                      </a:solidFill>
-                      <a:prstDash val="solid"/>
-                      <a:round/>
-                      <a:headEnd type="none" w="med" len="med"/>
-                      <a:tailEnd type="none" w="med" len="med"/>
-                    </a:lnL>
-                    <a:lnR w="12700" cap="flat" cmpd="sng" algn="ctr">
-                      <a:solidFill>
-                        <a:srgbClr val="E3E7ED"/>
-                      </a:solidFill>
-                      <a:prstDash val="solid"/>
-                      <a:round/>
-                      <a:headEnd type="none" w="med" len="med"/>
-                      <a:tailEnd type="none" w="med" len="med"/>
-                    </a:lnR>
-                    <a:lnT w="12700" cap="flat" cmpd="sng" algn="ctr">
-                      <a:solidFill>
-                        <a:srgbClr val="E3E7ED"/>
-                      </a:solidFill>
-                      <a:prstDash val="solid"/>
-                      <a:round/>
-                      <a:headEnd type="none" w="med" len="med"/>
-                      <a:tailEnd type="none" w="med" len="med"/>
-                    </a:lnT>
-                    <a:lnB w="12700" cap="flat" cmpd="sng" algn="ctr">
-                      <a:solidFill>
-                        <a:srgbClr val="E3E7ED"/>
-                      </a:solidFill>
-                      <a:prstDash val="solid"/>
-                      <a:round/>
-                      <a:headEnd type="none" w="med" len="med"/>
-                      <a:tailEnd type="none" w="med" len="med"/>
-                    </a:lnB>
-                  </a:tcPr>
-                </a:tc>
-                <a:tc>
-                  <a:txBody>
-                    <a:bodyPr/>
-                    <a:lstStyle/>
-                    <a:p>
-                      <a:pPr algn="ctr" indent="0" marL="0">
-                        <a:buNone/>
-                      </a:pPr>
-                      <a:r>
-                        <a:rPr lang="en-US" sz="1500" dirty="0">
-                          <a:solidFill>
-                            <a:srgbClr val="1C2733"/>
-                          </a:solidFill>
-                          <a:latin typeface="Calibri" pitchFamily="34" charset="0"/>
-                          <a:ea typeface="Calibri" pitchFamily="34" charset="-122"/>
-                          <a:cs typeface="Calibri" pitchFamily="34" charset="-120"/>
-                        </a:rPr>
-                        <a:t>0,68</a:t>
-                      </a:r>
-                      <a:endParaRPr lang="en-US" sz="1500" dirty="0">
-                        <a:latin typeface="Calibri" charset="0"/>
-                        <a:ea typeface="Calibri" charset="0"/>
-                        <a:cs typeface="Calibri" charset="0"/>
-                      </a:endParaRPr>
-                    </a:p>
-                  </a:txBody>
-                  <a:tcPr marL="91440" marR="91440" marT="45720" marB="45720">
-                    <a:lnL w="12700" cap="flat" cmpd="sng" algn="ctr">
-                      <a:solidFill>
-                        <a:srgbClr val="E3E7ED"/>
-                      </a:solidFill>
-                      <a:prstDash val="solid"/>
-                      <a:round/>
-                      <a:headEnd type="none" w="med" len="med"/>
-                      <a:tailEnd type="none" w="med" len="med"/>
-                    </a:lnL>
-                    <a:lnR w="12700" cap="flat" cmpd="sng" algn="ctr">
-                      <a:solidFill>
-                        <a:srgbClr val="E3E7ED"/>
-                      </a:solidFill>
-                      <a:prstDash val="solid"/>
-                      <a:round/>
-                      <a:headEnd type="none" w="med" len="med"/>
-                      <a:tailEnd type="none" w="med" len="med"/>
-                    </a:lnR>
-                    <a:lnT w="12700" cap="flat" cmpd="sng" algn="ctr">
-                      <a:solidFill>
-                        <a:srgbClr val="E3E7ED"/>
-                      </a:solidFill>
-                      <a:prstDash val="solid"/>
-                      <a:round/>
-                      <a:headEnd type="none" w="med" len="med"/>
-                      <a:tailEnd type="none" w="med" len="med"/>
-                    </a:lnT>
-                    <a:lnB w="12700" cap="flat" cmpd="sng" algn="ctr">
-                      <a:solidFill>
-                        <a:srgbClr val="E3E7ED"/>
-                      </a:solidFill>
-                      <a:prstDash val="solid"/>
-                      <a:round/>
-                      <a:headEnd type="none" w="med" len="med"/>
-                      <a:tailEnd type="none" w="med" len="med"/>
-                    </a:lnB>
-                  </a:tcPr>
-                </a:tc>
-                <a:tc>
-                  <a:txBody>
-                    <a:bodyPr/>
-                    <a:lstStyle/>
-                    <a:p>
-                      <a:pPr algn="ctr" indent="0" marL="0">
-                        <a:buNone/>
-                      </a:pPr>
-                      <a:r>
-                        <a:rPr lang="en-US" sz="1500" b="1" dirty="0">
-                          <a:solidFill>
-                            <a:srgbClr val="1C7C3E"/>
-                          </a:solidFill>
-                          <a:latin typeface="Calibri" pitchFamily="34" charset="0"/>
-                          <a:ea typeface="Calibri" pitchFamily="34" charset="-122"/>
-                          <a:cs typeface="Calibri" pitchFamily="34" charset="-120"/>
-                        </a:rPr>
-                        <a:t>0,000</a:t>
-                      </a:r>
-                      <a:endParaRPr lang="en-US" sz="1500" dirty="0">
-                        <a:latin typeface="Calibri" charset="0"/>
-                        <a:ea typeface="Calibri" charset="0"/>
-                        <a:cs typeface="Calibri" charset="0"/>
-                      </a:endParaRPr>
-                    </a:p>
-                  </a:txBody>
-                  <a:tcPr marL="91440" marR="91440" marT="45720" marB="45720">
-                    <a:lnL w="12700" cap="flat" cmpd="sng" algn="ctr">
-                      <a:solidFill>
-                        <a:srgbClr val="E3E7ED"/>
-                      </a:solidFill>
-                      <a:prstDash val="solid"/>
-                      <a:round/>
-                      <a:headEnd type="none" w="med" len="med"/>
-                      <a:tailEnd type="none" w="med" len="med"/>
-                    </a:lnL>
-                    <a:lnR w="12700" cap="flat" cmpd="sng" algn="ctr">
-                      <a:solidFill>
-                        <a:srgbClr val="E3E7ED"/>
-                      </a:solidFill>
-                      <a:prstDash val="solid"/>
-                      <a:round/>
-                      <a:headEnd type="none" w="med" len="med"/>
-                      <a:tailEnd type="none" w="med" len="med"/>
-                    </a:lnR>
-                    <a:lnT w="12700" cap="flat" cmpd="sng" algn="ctr">
-                      <a:solidFill>
-                        <a:srgbClr val="E3E7ED"/>
-                      </a:solidFill>
-                      <a:prstDash val="solid"/>
-                      <a:round/>
-                      <a:headEnd type="none" w="med" len="med"/>
-                      <a:tailEnd type="none" w="med" len="med"/>
-                    </a:lnT>
-                    <a:lnB w="12700" cap="flat" cmpd="sng" algn="ctr">
-                      <a:solidFill>
-                        <a:srgbClr val="E3E7ED"/>
-                      </a:solidFill>
-                      <a:prstDash val="solid"/>
-                      <a:round/>
-                      <a:headEnd type="none" w="med" len="med"/>
-                      <a:tailEnd type="none" w="med" len="med"/>
-                    </a:lnB>
-                  </a:tcPr>
-                </a:tc>
-              </a:tr>
-              <a:tr h="487680">
-                <a:tc>
-                  <a:txBody>
-                    <a:bodyPr/>
-                    <a:lstStyle/>
-                    <a:p>
-                      <a:pPr algn="ctr" indent="0" marL="0">
-                        <a:buNone/>
-                      </a:pPr>
-                      <a:r>
-                        <a:rPr lang="en-US" sz="1500" dirty="0">
-                          <a:solidFill>
-                            <a:srgbClr val="1C2733"/>
-                          </a:solidFill>
-                          <a:latin typeface="Calibri" pitchFamily="34" charset="0"/>
-                          <a:ea typeface="Calibri" pitchFamily="34" charset="-122"/>
-                          <a:cs typeface="Calibri" pitchFamily="34" charset="-120"/>
-                        </a:rPr>
-                        <a:t>Условная волатильность</a:t>
-                      </a:r>
-                      <a:endParaRPr lang="en-US" sz="1500" dirty="0">
-                        <a:latin typeface="Calibri" charset="0"/>
-                        <a:ea typeface="Calibri" charset="0"/>
-                        <a:cs typeface="Calibri" charset="0"/>
-                      </a:endParaRPr>
-                    </a:p>
-                  </a:txBody>
-                  <a:tcPr marL="91440" marR="91440" marT="45720" marB="45720">
-                    <a:lnL w="12700" cap="flat" cmpd="sng" algn="ctr">
-                      <a:solidFill>
-                        <a:srgbClr val="E3E7ED"/>
-                      </a:solidFill>
-                      <a:prstDash val="solid"/>
-                      <a:round/>
-                      <a:headEnd type="none" w="med" len="med"/>
-                      <a:tailEnd type="none" w="med" len="med"/>
-                    </a:lnL>
-                    <a:lnR w="12700" cap="flat" cmpd="sng" algn="ctr">
-                      <a:solidFill>
-                        <a:srgbClr val="E3E7ED"/>
-                      </a:solidFill>
-                      <a:prstDash val="solid"/>
-                      <a:round/>
-                      <a:headEnd type="none" w="med" len="med"/>
-                      <a:tailEnd type="none" w="med" len="med"/>
-                    </a:lnR>
-                    <a:lnT w="12700" cap="flat" cmpd="sng" algn="ctr">
-                      <a:solidFill>
-                        <a:srgbClr val="E3E7ED"/>
-                      </a:solidFill>
-                      <a:prstDash val="solid"/>
-                      <a:round/>
-                      <a:headEnd type="none" w="med" len="med"/>
-                      <a:tailEnd type="none" w="med" len="med"/>
-                    </a:lnT>
-                    <a:lnB w="12700" cap="flat" cmpd="sng" algn="ctr">
-                      <a:solidFill>
-                        <a:srgbClr val="E3E7ED"/>
-                      </a:solidFill>
-                      <a:prstDash val="solid"/>
-                      <a:round/>
-                      <a:headEnd type="none" w="med" len="med"/>
-                      <a:tailEnd type="none" w="med" len="med"/>
-                    </a:lnB>
-                  </a:tcPr>
-                </a:tc>
-                <a:tc>
-                  <a:txBody>
-                    <a:bodyPr/>
-                    <a:lstStyle/>
-                    <a:p>
-                      <a:pPr algn="ctr" indent="0" marL="0">
-                        <a:buNone/>
-                      </a:pPr>
-                      <a:r>
-                        <a:rPr lang="en-US" sz="1500" dirty="0">
-                          <a:solidFill>
-                            <a:srgbClr val="1C2733"/>
-                          </a:solidFill>
-                          <a:latin typeface="Calibri" pitchFamily="34" charset="0"/>
-                          <a:ea typeface="Calibri" pitchFamily="34" charset="-122"/>
-                          <a:cs typeface="Calibri" pitchFamily="34" charset="-120"/>
-                        </a:rPr>
-                        <a:t>1,16</a:t>
-                      </a:r>
-                      <a:endParaRPr lang="en-US" sz="1500" dirty="0">
-                        <a:latin typeface="Calibri" charset="0"/>
-                        <a:ea typeface="Calibri" charset="0"/>
-                        <a:cs typeface="Calibri" charset="0"/>
-                      </a:endParaRPr>
-                    </a:p>
-                  </a:txBody>
-                  <a:tcPr marL="91440" marR="91440" marT="45720" marB="45720">
-                    <a:lnL w="12700" cap="flat" cmpd="sng" algn="ctr">
-                      <a:solidFill>
-                        <a:srgbClr val="E3E7ED"/>
-                      </a:solidFill>
-                      <a:prstDash val="solid"/>
-                      <a:round/>
-                      <a:headEnd type="none" w="med" len="med"/>
-                      <a:tailEnd type="none" w="med" len="med"/>
-                    </a:lnL>
-                    <a:lnR w="12700" cap="flat" cmpd="sng" algn="ctr">
-                      <a:solidFill>
-                        <a:srgbClr val="E3E7ED"/>
-                      </a:solidFill>
-                      <a:prstDash val="solid"/>
-                      <a:round/>
-                      <a:headEnd type="none" w="med" len="med"/>
-                      <a:tailEnd type="none" w="med" len="med"/>
-                    </a:lnR>
-                    <a:lnT w="12700" cap="flat" cmpd="sng" algn="ctr">
-                      <a:solidFill>
-                        <a:srgbClr val="E3E7ED"/>
-                      </a:solidFill>
-                      <a:prstDash val="solid"/>
-                      <a:round/>
-                      <a:headEnd type="none" w="med" len="med"/>
-                      <a:tailEnd type="none" w="med" len="med"/>
-                    </a:lnT>
-                    <a:lnB w="12700" cap="flat" cmpd="sng" algn="ctr">
-                      <a:solidFill>
-                        <a:srgbClr val="E3E7ED"/>
-                      </a:solidFill>
-                      <a:prstDash val="solid"/>
-                      <a:round/>
-                      <a:headEnd type="none" w="med" len="med"/>
-                      <a:tailEnd type="none" w="med" len="med"/>
-                    </a:lnB>
-                  </a:tcPr>
-                </a:tc>
-                <a:tc>
-                  <a:txBody>
-                    <a:bodyPr/>
-                    <a:lstStyle/>
-                    <a:p>
-                      <a:pPr algn="ctr" indent="0" marL="0">
-                        <a:buNone/>
-                      </a:pPr>
-                      <a:r>
-                        <a:rPr lang="en-US" sz="1500" dirty="0">
-                          <a:solidFill>
-                            <a:srgbClr val="1C2733"/>
-                          </a:solidFill>
-                          <a:latin typeface="Calibri" pitchFamily="34" charset="0"/>
-                          <a:ea typeface="Calibri" pitchFamily="34" charset="-122"/>
-                          <a:cs typeface="Calibri" pitchFamily="34" charset="-120"/>
-                        </a:rPr>
-                        <a:t>0,95</a:t>
-                      </a:r>
-                      <a:endParaRPr lang="en-US" sz="1500" dirty="0">
-                        <a:latin typeface="Calibri" charset="0"/>
-                        <a:ea typeface="Calibri" charset="0"/>
-                        <a:cs typeface="Calibri" charset="0"/>
-                      </a:endParaRPr>
-                    </a:p>
-                  </a:txBody>
-                  <a:tcPr marL="91440" marR="91440" marT="45720" marB="45720">
-                    <a:lnL w="12700" cap="flat" cmpd="sng" algn="ctr">
-                      <a:solidFill>
-                        <a:srgbClr val="E3E7ED"/>
-                      </a:solidFill>
-                      <a:prstDash val="solid"/>
-                      <a:round/>
-                      <a:headEnd type="none" w="med" len="med"/>
-                      <a:tailEnd type="none" w="med" len="med"/>
-                    </a:lnL>
-                    <a:lnR w="12700" cap="flat" cmpd="sng" algn="ctr">
-                      <a:solidFill>
-                        <a:srgbClr val="E3E7ED"/>
-                      </a:solidFill>
-                      <a:prstDash val="solid"/>
-                      <a:round/>
-                      <a:headEnd type="none" w="med" len="med"/>
-                      <a:tailEnd type="none" w="med" len="med"/>
-                    </a:lnR>
-                    <a:lnT w="12700" cap="flat" cmpd="sng" algn="ctr">
-                      <a:solidFill>
-                        <a:srgbClr val="E3E7ED"/>
-                      </a:solidFill>
-                      <a:prstDash val="solid"/>
-                      <a:round/>
-                      <a:headEnd type="none" w="med" len="med"/>
-                      <a:tailEnd type="none" w="med" len="med"/>
-                    </a:lnT>
-                    <a:lnB w="12700" cap="flat" cmpd="sng" algn="ctr">
-                      <a:solidFill>
-                        <a:srgbClr val="E3E7ED"/>
-                      </a:solidFill>
-                      <a:prstDash val="solid"/>
-                      <a:round/>
-                      <a:headEnd type="none" w="med" len="med"/>
-                      <a:tailEnd type="none" w="med" len="med"/>
-                    </a:lnB>
-                  </a:tcPr>
-                </a:tc>
-                <a:tc>
-                  <a:txBody>
-                    <a:bodyPr/>
-                    <a:lstStyle/>
-                    <a:p>
-                      <a:pPr algn="ctr" indent="0" marL="0">
-                        <a:buNone/>
-                      </a:pPr>
-                      <a:r>
-                        <a:rPr lang="en-US" sz="1500" b="1" dirty="0">
-                          <a:solidFill>
-                            <a:srgbClr val="1C7C3E"/>
-                          </a:solidFill>
-                          <a:latin typeface="Calibri" pitchFamily="34" charset="0"/>
-                          <a:ea typeface="Calibri" pitchFamily="34" charset="-122"/>
-                          <a:cs typeface="Calibri" pitchFamily="34" charset="-120"/>
-                        </a:rPr>
-                        <a:t>0,002</a:t>
-                      </a:r>
-                      <a:endParaRPr lang="en-US" sz="1500" dirty="0">
-                        <a:latin typeface="Calibri" charset="0"/>
-                        <a:ea typeface="Calibri" charset="0"/>
-                        <a:cs typeface="Calibri" charset="0"/>
-                      </a:endParaRPr>
-                    </a:p>
-                  </a:txBody>
-                  <a:tcPr marL="91440" marR="91440" marT="45720" marB="45720">
-                    <a:lnL w="12700" cap="flat" cmpd="sng" algn="ctr">
-                      <a:solidFill>
-                        <a:srgbClr val="E3E7ED"/>
-                      </a:solidFill>
-                      <a:prstDash val="solid"/>
-                      <a:round/>
-                      <a:headEnd type="none" w="med" len="med"/>
-                      <a:tailEnd type="none" w="med" len="med"/>
-                    </a:lnL>
-                    <a:lnR w="12700" cap="flat" cmpd="sng" algn="ctr">
-                      <a:solidFill>
-                        <a:srgbClr val="E3E7ED"/>
-                      </a:solidFill>
-                      <a:prstDash val="solid"/>
-                      <a:round/>
-                      <a:headEnd type="none" w="med" len="med"/>
-                      <a:tailEnd type="none" w="med" len="med"/>
-                    </a:lnR>
-                    <a:lnT w="12700" cap="flat" cmpd="sng" algn="ctr">
-                      <a:solidFill>
-                        <a:srgbClr val="E3E7ED"/>
-                      </a:solidFill>
-                      <a:prstDash val="solid"/>
-                      <a:round/>
-                      <a:headEnd type="none" w="med" len="med"/>
-                      <a:tailEnd type="none" w="med" len="med"/>
-                    </a:lnT>
-                    <a:lnB w="12700" cap="flat" cmpd="sng" algn="ctr">
-                      <a:solidFill>
-                        <a:srgbClr val="E3E7ED"/>
-                      </a:solidFill>
-                      <a:prstDash val="solid"/>
-                      <a:round/>
-                      <a:headEnd type="none" w="med" len="med"/>
-                      <a:tailEnd type="none" w="med" len="med"/>
-                    </a:lnB>
-                  </a:tcPr>
-                </a:tc>
-              </a:tr>
-            </a:tbl>
-          </a:graphicData>
-        </a:graphic>
-      </p:graphicFrame>
-      <p:sp>
-        <p:nvSpPr>
-          <p:cNvPr id="5" name="Text 2"/>
-          <p:cNvSpPr txBox="1"/>
-          <p:nvPr/>
-        </p:nvSpPr>
-        <p:spPr>
-          <a:xfrm>
-            <a:off x="548640" y="3931920"/>
-            <a:ext cx="10972800" cy="731520"/>
-          </a:xfrm>
-          <a:prstGeom prst="rect">
-            <a:avLst/>
-          </a:prstGeom>
-          <a:noFill/>
-          <a:ln/>
-        </p:spPr>
-        <p:txBody>
-          <a:bodyPr wrap="square" lIns="0" tIns="0" rIns="0" bIns="0" rtlCol="0" anchor="ctr"/>
-          <a:lstStyle/>
-          <a:p>
-            <a:pPr indent="0" marL="0">
-              <a:buNone/>
-            </a:pPr>
-            <a:r>
-              <a:rPr lang="en-US" sz="1300" i="1" dirty="0">
-                <a:solidFill>
-                  <a:srgbClr val="6B7688"/>
-                </a:solidFill>
-                <a:latin typeface="Calibri" pitchFamily="34" charset="0"/>
-                <a:ea typeface="Calibri" pitchFamily="34" charset="-122"/>
-                <a:cs typeface="Calibri" pitchFamily="34" charset="-120"/>
-              </a:rPr>
-              <a:t>Наблюдаемое значение выше всех 1000 плацебо-перестановок по |доходности| — результат не объясняется случайным совпадением дат.</a:t>
-            </a:r>
-            <a:endParaRPr lang="en-US" sz="1300" dirty="0"/>
-          </a:p>
-        </p:txBody>
-      </p:sp>
-      <p:sp>
-        <p:nvSpPr>
-          <p:cNvPr id="6" name="Text 3"/>
-          <p:cNvSpPr txBox="1"/>
-          <p:nvPr/>
-        </p:nvSpPr>
-        <p:spPr>
-          <a:xfrm>
-            <a:off x="11521440" y="6446520"/>
-            <a:ext cx="457200" cy="274320"/>
-          </a:xfrm>
-          <a:prstGeom prst="rect">
-            <a:avLst/>
-          </a:prstGeom>
-          <a:noFill/>
-          <a:ln/>
-        </p:spPr>
-        <p:txBody>
-          <a:bodyPr wrap="square" lIns="0" tIns="0" rIns="0" bIns="0" rtlCol="0" anchor="ctr"/>
-          <a:lstStyle/>
-          <a:p>
-            <a:pPr algn="r" indent="0" marL="0">
-              <a:buNone/>
-            </a:pPr>
-            <a:r>
-              <a:rPr lang="en-US" sz="1000" dirty="0">
-                <a:solidFill>
-                  <a:srgbClr val="6B7688"/>
-                </a:solidFill>
-                <a:latin typeface="Calibri" pitchFamily="34" charset="0"/>
-                <a:ea typeface="Calibri" pitchFamily="34" charset="-122"/>
-                <a:cs typeface="Calibri" pitchFamily="34" charset="-120"/>
-              </a:rPr>
-              <a:t>12</a:t>
-            </a:r>
-            <a:endParaRPr lang="en-US" sz="1000" dirty="0"/>
-          </a:p>
-        </p:txBody>
-      </p:sp>
-    </p:spTree>
-  </p:cSld>
-  <p:clrMapOvr>
-    <a:masterClrMapping/>
-  </p:clrMapOvr>
-</p:sld>
-</file>
-
-<file path=ppt/slides/slide13.xml><?xml version="1.0" encoding="utf-8"?>
-<p:sld xmlns:a="http://schemas.openxmlformats.org/drawingml/2006/main" xmlns:r="http://schemas.openxmlformats.org/officeDocument/2006/relationships" xmlns:p="http://schemas.openxmlformats.org/presentationml/2006/main">
-  <p:cSld name="Slide 13">
-    <p:bg>
-      <p:bgPr>
-        <a:solidFill>
-          <a:srgbClr val="FFFFFF"/>
-        </a:solidFill>
-      </p:bgPr>
-    </p:bg>
-    <p:spTree>
-      <p:nvGrpSpPr>
-        <p:cNvPr id="1" name=""/>
-        <p:cNvGrpSpPr/>
-        <p:nvPr/>
-      </p:nvGrpSpPr>
-      <p:grpSpPr>
-        <a:xfrm>
-          <a:off x="0" y="0"/>
-          <a:ext cx="0" cy="0"/>
-          <a:chOff x="0" y="0"/>
-          <a:chExt cx="0" cy="0"/>
-        </a:xfrm>
-      </p:grpSpPr>
-      <p:sp>
-        <p:nvSpPr>
-          <p:cNvPr id="2" name="Text 0"/>
-          <p:cNvSpPr txBox="1"/>
-          <p:nvPr/>
-        </p:nvSpPr>
-        <p:spPr>
-          <a:xfrm>
-            <a:off x="548640" y="411480"/>
-            <a:ext cx="11064240" cy="822960"/>
-          </a:xfrm>
-          <a:prstGeom prst="rect">
-            <a:avLst/>
-          </a:prstGeom>
-          <a:noFill/>
-          <a:ln/>
-        </p:spPr>
-        <p:txBody>
-          <a:bodyPr wrap="square" lIns="0" tIns="0" rIns="0" bIns="0" rtlCol="0" anchor="ctr"/>
-          <a:lstStyle/>
-          <a:p>
-            <a:pPr indent="0" marL="0">
-              <a:buNone/>
-            </a:pPr>
-            <a:r>
-              <a:rPr lang="en-US" sz="3000" b="1" dirty="0">
-                <a:solidFill>
-                  <a:srgbClr val="1C2733"/>
-                </a:solidFill>
-                <a:latin typeface="Calibri" pitchFamily="34" charset="0"/>
-                <a:ea typeface="Calibri" pitchFamily="34" charset="-122"/>
-                <a:cs typeface="Calibri" pitchFamily="34" charset="-120"/>
-              </a:rPr>
-              <a:t>Ответ на вопрос и ограничения</a:t>
-            </a:r>
-            <a:endParaRPr lang="en-US" sz="3000" dirty="0"/>
-          </a:p>
-        </p:txBody>
-      </p:sp>
-      <p:sp>
-        <p:nvSpPr>
-          <p:cNvPr id="3" name="Shape 1"/>
-          <p:cNvSpPr/>
-          <p:nvPr/>
-        </p:nvSpPr>
-        <p:spPr>
-          <a:xfrm>
-            <a:off x="548640" y="1371600"/>
-            <a:ext cx="5212080" cy="4297680"/>
-          </a:xfrm>
-          <a:prstGeom prst="roundRect">
-            <a:avLst>
-              <a:gd name="adj" fmla="val 1702"/>
-            </a:avLst>
-          </a:prstGeom>
-          <a:solidFill>
-            <a:srgbClr val="F3F5F8"/>
-          </a:solidFill>
-          <a:ln/>
-        </p:spPr>
-      </p:sp>
-      <p:sp>
-        <p:nvSpPr>
-          <p:cNvPr id="4" name="Text 2"/>
-          <p:cNvSpPr txBox="1"/>
-          <p:nvPr/>
-        </p:nvSpPr>
-        <p:spPr>
-          <a:xfrm>
-            <a:off x="822960" y="1600200"/>
-            <a:ext cx="4663440" cy="365760"/>
-          </a:xfrm>
-          <a:prstGeom prst="rect">
-            <a:avLst/>
-          </a:prstGeom>
-          <a:noFill/>
-          <a:ln/>
-        </p:spPr>
-        <p:txBody>
-          <a:bodyPr wrap="square" lIns="0" tIns="0" rIns="0" bIns="0" rtlCol="0" anchor="ctr"/>
-          <a:lstStyle/>
-          <a:p>
-            <a:pPr indent="0" marL="0">
-              <a:buNone/>
-            </a:pPr>
-            <a:r>
-              <a:rPr lang="en-US" sz="1600" b="1" dirty="0">
-                <a:solidFill>
-                  <a:srgbClr val="13294B"/>
-                </a:solidFill>
-                <a:latin typeface="Calibri" pitchFamily="34" charset="0"/>
-                <a:ea typeface="Calibri" pitchFamily="34" charset="-122"/>
-                <a:cs typeface="Calibri" pitchFamily="34" charset="-120"/>
-              </a:rPr>
-              <a:t>Ответ</a:t>
-            </a:r>
-            <a:endParaRPr lang="en-US" sz="1600" dirty="0"/>
-          </a:p>
-        </p:txBody>
-      </p:sp>
-      <p:sp>
-        <p:nvSpPr>
-          <p:cNvPr id="5" name="Text 3"/>
-          <p:cNvSpPr txBox="1"/>
-          <p:nvPr/>
-        </p:nvSpPr>
-        <p:spPr>
-          <a:xfrm>
-            <a:off x="822960" y="2103120"/>
-            <a:ext cx="4663440" cy="3383280"/>
-          </a:xfrm>
-          <a:prstGeom prst="rect">
-            <a:avLst/>
-          </a:prstGeom>
-          <a:noFill/>
-          <a:ln/>
-        </p:spPr>
-        <p:txBody>
-          <a:bodyPr wrap="square" lIns="0" tIns="0" rIns="0" bIns="0" rtlCol="0" anchor="ctr"/>
-          <a:lstStyle/>
-          <a:p>
-            <a:pPr marL="342900" indent="-342900">
-              <a:spcAft>
-                <a:spcPts val="1000"/>
-              </a:spcAft>
-              <a:buSzPct val="100000"/>
-              <a:buChar char="•"/>
-            </a:pPr>
-            <a:r>
-              <a:rPr lang="en-US" sz="1300" dirty="0">
-                <a:solidFill>
-                  <a:srgbClr val="1C2733"/>
-                </a:solidFill>
-                <a:latin typeface="Calibri" pitchFamily="34" charset="0"/>
-                <a:ea typeface="Calibri" pitchFamily="34" charset="-122"/>
-                <a:cs typeface="Calibri" pitchFamily="34" charset="-120"/>
-              </a:rPr>
-              <a:t>Устойчивой поддержки идее «ставка предсказывает курс» в данных нет.</a:t>
-            </a:r>
-            <a:endParaRPr lang="en-US" sz="1300" dirty="0"/>
-          </a:p>
-          <a:p>
-            <a:pPr marL="342900" indent="-342900">
-              <a:spcAft>
-                <a:spcPts val="1000"/>
-              </a:spcAft>
-              <a:buSzPct val="100000"/>
-              <a:buChar char="•"/>
-            </a:pPr>
-            <a:r>
-              <a:rPr lang="en-US" sz="1300" dirty="0">
-                <a:solidFill>
-                  <a:srgbClr val="1C2733"/>
-                </a:solidFill>
-                <a:latin typeface="Calibri" pitchFamily="34" charset="0"/>
-                <a:ea typeface="Calibri" pitchFamily="34" charset="-122"/>
-                <a:cs typeface="Calibri" pitchFamily="34" charset="-120"/>
-              </a:rPr>
-              <a:t>Устойчиво обратное: курс предсказывает решения по ставке — ЦБ реагирует на курс/инфляцию, а не наоборот.</a:t>
-            </a:r>
-            <a:endParaRPr lang="en-US" sz="1300" dirty="0"/>
-          </a:p>
-          <a:p>
-            <a:pPr marL="342900" indent="-342900">
-              <a:spcAft>
-                <a:spcPts val="1000"/>
-              </a:spcAft>
-              <a:buSzPct val="100000"/>
-              <a:buChar char="•"/>
-            </a:pPr>
-            <a:r>
-              <a:rPr lang="en-US" sz="1300" dirty="0">
-                <a:solidFill>
-                  <a:srgbClr val="1C2733"/>
-                </a:solidFill>
-                <a:latin typeface="Calibri" pitchFamily="34" charset="0"/>
-                <a:ea typeface="Calibri" pitchFamily="34" charset="-122"/>
-                <a:cs typeface="Calibri" pitchFamily="34" charset="-120"/>
-              </a:rPr>
-              <a:t>Волатильность курса вокруг решений выше случайной — это надёжно.</a:t>
-            </a:r>
-            <a:endParaRPr lang="en-US" sz="1300" dirty="0"/>
-          </a:p>
-        </p:txBody>
-      </p:sp>
-      <p:sp>
-        <p:nvSpPr>
-          <p:cNvPr id="6" name="Shape 4"/>
-          <p:cNvSpPr/>
-          <p:nvPr/>
-        </p:nvSpPr>
-        <p:spPr>
-          <a:xfrm>
-            <a:off x="6080760" y="1371600"/>
-            <a:ext cx="5394960" cy="4297680"/>
-          </a:xfrm>
-          <a:prstGeom prst="roundRect">
-            <a:avLst>
-              <a:gd name="adj" fmla="val 1702"/>
-            </a:avLst>
-          </a:prstGeom>
-          <a:solidFill>
-            <a:srgbClr val="13294B"/>
-          </a:solidFill>
-          <a:ln/>
-        </p:spPr>
-      </p:sp>
-      <p:sp>
-        <p:nvSpPr>
-          <p:cNvPr id="7" name="Text 5"/>
-          <p:cNvSpPr txBox="1"/>
-          <p:nvPr/>
-        </p:nvSpPr>
-        <p:spPr>
-          <a:xfrm>
-            <a:off x="6355080" y="1600200"/>
-            <a:ext cx="4846320" cy="365760"/>
-          </a:xfrm>
-          <a:prstGeom prst="rect">
-            <a:avLst/>
-          </a:prstGeom>
-          <a:noFill/>
-          <a:ln/>
-        </p:spPr>
-        <p:txBody>
-          <a:bodyPr wrap="square" lIns="0" tIns="0" rIns="0" bIns="0" rtlCol="0" anchor="ctr"/>
-          <a:lstStyle/>
-          <a:p>
-            <a:pPr indent="0" marL="0">
-              <a:buNone/>
-            </a:pPr>
-            <a:r>
-              <a:rPr lang="en-US" sz="1600" b="1" dirty="0">
-                <a:solidFill>
-                  <a:srgbClr val="C9A227"/>
-                </a:solidFill>
-                <a:latin typeface="Calibri" pitchFamily="34" charset="0"/>
-                <a:ea typeface="Calibri" pitchFamily="34" charset="-122"/>
-                <a:cs typeface="Calibri" pitchFamily="34" charset="-120"/>
-              </a:rPr>
-              <a:t>Ограничения</a:t>
-            </a:r>
-            <a:endParaRPr lang="en-US" sz="1600" dirty="0"/>
-          </a:p>
-        </p:txBody>
-      </p:sp>
-      <p:sp>
-        <p:nvSpPr>
-          <p:cNvPr id="8" name="Text 6"/>
-          <p:cNvSpPr txBox="1"/>
-          <p:nvPr/>
-        </p:nvSpPr>
-        <p:spPr>
-          <a:xfrm>
-            <a:off x="6355080" y="2103120"/>
-            <a:ext cx="4846320" cy="3383280"/>
-          </a:xfrm>
-          <a:prstGeom prst="rect">
-            <a:avLst/>
-          </a:prstGeom>
-          <a:noFill/>
-          <a:ln/>
-        </p:spPr>
-        <p:txBody>
-          <a:bodyPr wrap="square" lIns="0" tIns="0" rIns="0" bIns="0" rtlCol="0" anchor="ctr"/>
-          <a:lstStyle/>
-          <a:p>
-            <a:pPr marL="342900" indent="-342900">
-              <a:spcAft>
-                <a:spcPts val="1000"/>
-              </a:spcAft>
-              <a:buSzPct val="100000"/>
-              <a:buChar char="•"/>
-            </a:pPr>
-            <a:r>
-              <a:rPr lang="en-US" sz="1300" dirty="0">
-                <a:solidFill>
-                  <a:srgbClr val="FFFFFF"/>
-                </a:solidFill>
-                <a:latin typeface="Calibri" pitchFamily="34" charset="0"/>
-                <a:ea typeface="Calibri" pitchFamily="34" charset="-122"/>
-                <a:cs typeface="Calibri" pitchFamily="34" charset="-120"/>
-              </a:rPr>
-              <a:t>Официальный фиксинг ≠ рыночная сделка, особенно после 2022.</a:t>
-            </a:r>
-            <a:endParaRPr lang="en-US" sz="1300" dirty="0"/>
-          </a:p>
-          <a:p>
-            <a:pPr marL="342900" indent="-342900">
-              <a:spcAft>
-                <a:spcPts val="1000"/>
-              </a:spcAft>
-              <a:buSzPct val="100000"/>
-              <a:buChar char="•"/>
-            </a:pPr>
-            <a:r>
-              <a:rPr lang="en-US" sz="1300" dirty="0">
-                <a:solidFill>
-                  <a:srgbClr val="FFFFFF"/>
-                </a:solidFill>
-                <a:latin typeface="Calibri" pitchFamily="34" charset="0"/>
-                <a:ea typeface="Calibri" pitchFamily="34" charset="-122"/>
-                <a:cs typeface="Calibri" pitchFamily="34" charset="-120"/>
-              </a:rPr>
-              <a:t>Три переменные — упрощение (нет ставки ФРС, санкционного индекса).</a:t>
-            </a:r>
-            <a:endParaRPr lang="en-US" sz="1300" dirty="0"/>
-          </a:p>
-          <a:p>
-            <a:pPr marL="342900" indent="-342900">
-              <a:spcAft>
-                <a:spcPts val="1000"/>
-              </a:spcAft>
-              <a:buSzPct val="100000"/>
-              <a:buChar char="•"/>
-            </a:pPr>
-            <a:r>
-              <a:rPr lang="en-US" sz="1300" dirty="0">
-                <a:solidFill>
-                  <a:srgbClr val="FFFFFF"/>
-                </a:solidFill>
-                <a:latin typeface="Calibri" pitchFamily="34" charset="0"/>
-                <a:ea typeface="Calibri" pitchFamily="34" charset="-122"/>
-                <a:cs typeface="Calibri" pitchFamily="34" charset="-120"/>
-              </a:rPr>
-              <a:t>IRF зависит от порядка ортогонализации (проверено, но не единственно).</a:t>
-            </a:r>
-            <a:endParaRPr lang="en-US" sz="1300" dirty="0"/>
-          </a:p>
-          <a:p>
-            <a:pPr marL="342900" indent="-342900">
-              <a:spcAft>
-                <a:spcPts val="1000"/>
-              </a:spcAft>
-              <a:buSzPct val="100000"/>
-              <a:buChar char="•"/>
-            </a:pPr>
-            <a:r>
-              <a:rPr lang="en-US" sz="1300" dirty="0">
-                <a:solidFill>
-                  <a:srgbClr val="FFFFFF"/>
-                </a:solidFill>
-                <a:latin typeface="Calibri" pitchFamily="34" charset="0"/>
-                <a:ea typeface="Calibri" pitchFamily="34" charset="-122"/>
-                <a:cs typeface="Calibri" pitchFamily="34" charset="-120"/>
-              </a:rPr>
-              <a:t>GARCH не до конца объясняет автокорреляцию в уровне доходностей.</a:t>
-            </a:r>
-            <a:endParaRPr lang="en-US" sz="1300" dirty="0"/>
-          </a:p>
-          <a:p>
-            <a:pPr marL="342900" indent="-342900">
-              <a:spcAft>
-                <a:spcPts val="1000"/>
-              </a:spcAft>
-              <a:buSzPct val="100000"/>
-              <a:buChar char="•"/>
-            </a:pPr>
-            <a:r>
-              <a:rPr lang="en-US" sz="1300" dirty="0">
-                <a:solidFill>
-                  <a:srgbClr val="FFFFFF"/>
-                </a:solidFill>
-                <a:latin typeface="Calibri" pitchFamily="34" charset="0"/>
-                <a:ea typeface="Calibri" pitchFamily="34" charset="-122"/>
-                <a:cs typeface="Calibri" pitchFamily="34" charset="-120"/>
-              </a:rPr>
-              <a:t>Грейнджер — про предсказуемость, не про причинность.</a:t>
-            </a:r>
-            <a:endParaRPr lang="en-US" sz="1300" dirty="0"/>
-          </a:p>
-        </p:txBody>
-      </p:sp>
-      <p:sp>
-        <p:nvSpPr>
-          <p:cNvPr id="9" name="Text 7"/>
-          <p:cNvSpPr txBox="1"/>
-          <p:nvPr/>
-        </p:nvSpPr>
-        <p:spPr>
-          <a:xfrm>
-            <a:off x="11521440" y="6446520"/>
-            <a:ext cx="457200" cy="274320"/>
-          </a:xfrm>
-          <a:prstGeom prst="rect">
-            <a:avLst/>
-          </a:prstGeom>
-          <a:noFill/>
-          <a:ln/>
-        </p:spPr>
-        <p:txBody>
-          <a:bodyPr wrap="square" lIns="0" tIns="0" rIns="0" bIns="0" rtlCol="0" anchor="ctr"/>
-          <a:lstStyle/>
-          <a:p>
-            <a:pPr algn="r" indent="0" marL="0">
-              <a:buNone/>
-            </a:pPr>
-            <a:r>
-              <a:rPr lang="en-US" sz="1000" dirty="0">
-                <a:solidFill>
-                  <a:srgbClr val="6B7688"/>
-                </a:solidFill>
-                <a:latin typeface="Calibri" pitchFamily="34" charset="0"/>
-                <a:ea typeface="Calibri" pitchFamily="34" charset="-122"/>
-                <a:cs typeface="Calibri" pitchFamily="34" charset="-120"/>
-              </a:rPr>
-              <a:t>13</a:t>
-            </a:r>
-            <a:endParaRPr lang="en-US" sz="1000" dirty="0"/>
-          </a:p>
-        </p:txBody>
-      </p:sp>
-    </p:spTree>
-  </p:cSld>
-  <p:clrMapOvr>
-    <a:masterClrMapping/>
-  </p:clrMapOvr>
-</p:sld>
-</file>
-
-<file path=ppt/slides/slide14.xml><?xml version="1.0" encoding="utf-8"?>
-<p:sld xmlns:a="http://schemas.openxmlformats.org/drawingml/2006/main" xmlns:r="http://schemas.openxmlformats.org/officeDocument/2006/relationships" xmlns:p="http://schemas.openxmlformats.org/presentationml/2006/main">
-  <p:cSld name="Slide 14">
     <p:bg>
       <p:bgPr>
         <a:solidFill>
@@ -4368,7 +2486,7 @@
         <p:spPr>
           <a:xfrm>
             <a:off x="731520" y="3749040"/>
-            <a:ext cx="9601200" cy="914400"/>
+            <a:ext cx="9601200" cy="1188720"/>
           </a:xfrm>
           <a:prstGeom prst="rect">
             <a:avLst/>
@@ -4409,7 +2527,24 @@
                 <a:ea typeface="Calibri" pitchFamily="34" charset="-122"/>
                 <a:cs typeface="Calibri" pitchFamily="34" charset="-120"/>
               </a:rPr>
-              <a:t>Полный прогон с нуля (проверено дважды, включая чистое окружение): 12 секунд (лимит задания — 30 минут).</a:t>
+              <a:t>Полный прогон с нуля: ~19 секунд (лимит задания — 30 минут).</a:t>
+            </a:r>
+            <a:endParaRPr lang="en-US" sz="1300" dirty="0"/>
+          </a:p>
+          <a:p>
+            <a:pPr indent="0" marL="0">
+              <a:buNone/>
+            </a:pPr>
+            <a:r>
+              <a:rPr lang="en-US" sz="1300" dirty="0">
+                <a:solidFill>
+                  <a:srgbClr val="8592A8"/>
+                </a:solidFill>
+                <a:latin typeface="Calibri" pitchFamily="34" charset="0"/>
+                <a:ea typeface="Calibri" pitchFamily="34" charset="-122"/>
+                <a:cs typeface="Calibri" pitchFamily="34" charset="-120"/>
+              </a:rPr>
+              <a:t>Проект прошёл внешнее ревью — см. feedback_1.md в репозитории.</a:t>
             </a:r>
             <a:endParaRPr lang="en-US" sz="1300" dirty="0"/>
           </a:p>
@@ -4448,7 +2583,7 @@
                 <a:ea typeface="Calibri" pitchFamily="34" charset="-122"/>
                 <a:cs typeface="Calibri" pitchFamily="34" charset="-120"/>
               </a:rPr>
-              <a:t>14</a:t>
+              <a:t>11</a:t>
             </a:r>
             <a:endParaRPr lang="en-US" sz="1000" dirty="0"/>
           </a:p>
@@ -4511,7 +2646,7 @@
               <a:buNone/>
             </a:pPr>
             <a:r>
-              <a:rPr lang="en-US" sz="3000" b="1" dirty="0">
+              <a:rPr lang="en-US" sz="2800" b="1" dirty="0">
                 <a:solidFill>
                   <a:srgbClr val="1C2733"/>
                 </a:solidFill>
@@ -4521,7 +2656,7 @@
               </a:rPr>
               <a:t>Вопрос</a:t>
             </a:r>
-            <a:endParaRPr lang="en-US" sz="3000" dirty="0"/>
+            <a:endParaRPr lang="en-US" sz="2800" dirty="0"/>
           </a:p>
         </p:txBody>
       </p:sp>
@@ -4534,7 +2669,7 @@
         <p:spPr>
           <a:xfrm>
             <a:off x="548640" y="1371600"/>
-            <a:ext cx="10515600" cy="1371600"/>
+            <a:ext cx="10789920" cy="1371600"/>
           </a:xfrm>
           <a:prstGeom prst="rect">
             <a:avLst/>
@@ -4550,7 +2685,7 @@
               <a:buNone/>
             </a:pPr>
             <a:r>
-              <a:rPr lang="en-US" sz="2400" i="1" dirty="0">
+              <a:rPr lang="en-US" sz="2200" i="1" dirty="0">
                 <a:solidFill>
                   <a:srgbClr val="13294B"/>
                 </a:solidFill>
@@ -4558,16 +2693,16 @@
                 <a:ea typeface="Cambria" pitchFamily="34" charset="-122"/>
                 <a:cs typeface="Cambria" pitchFamily="34" charset="-120"/>
               </a:rPr>
-              <a:t>Как ключевая ставка ЦБ РФ влияет на курс рубля и его волатильность,</a:t>
-            </a:r>
-            <a:endParaRPr lang="en-US" sz="2400" dirty="0"/>
+              <a:t>Есть ли связь по времени между решениями ЦБ по ставке, курсом рубля</a:t>
+            </a:r>
+            <a:endParaRPr lang="en-US" sz="2200" dirty="0"/>
           </a:p>
           <a:p>
             <a:pPr indent="0" marL="0">
               <a:buNone/>
             </a:pPr>
             <a:r>
-              <a:rPr lang="en-US" sz="2400" i="1" dirty="0">
+              <a:rPr lang="en-US" sz="2200" i="1" dirty="0">
                 <a:solidFill>
                   <a:srgbClr val="13294B"/>
                 </a:solidFill>
@@ -4575,9 +2710,9 @@
                 <a:ea typeface="Cambria" pitchFamily="34" charset="-122"/>
                 <a:cs typeface="Cambria" pitchFamily="34" charset="-120"/>
               </a:rPr>
-              <a:t>и с каким лагом это происходит?</a:t>
-            </a:r>
-            <a:endParaRPr lang="en-US" sz="2400" dirty="0"/>
+              <a:t>и его волатильностью, и в каком направлении идёт предсказуемость?</a:t>
+            </a:r>
+            <a:endParaRPr lang="en-US" sz="2200" dirty="0"/>
           </a:p>
         </p:txBody>
       </p:sp>
@@ -4639,7 +2774,7 @@
                 <a:ea typeface="Calibri" pitchFamily="34" charset="-122"/>
                 <a:cs typeface="Calibri" pitchFamily="34" charset="-120"/>
               </a:rPr>
-              <a:t>Не причинный quasi-эксперимент (нет рандомизации ставки) — приведённая форма: VAR, тест Грейнджера, импульсные отклики.</a:t>
+              <a:t>Дизайн предсказательный (VAR, Грейнджер, IRF, GARCH), не причинный — намеренно: нет рандомизации ставки, вопрос про предсказуемость, а не про эффект.</a:t>
             </a:r>
             <a:endParaRPr lang="en-US" sz="1500" dirty="0"/>
           </a:p>
@@ -4660,7 +2795,7 @@
                 <a:ea typeface="Calibri" pitchFamily="34" charset="-122"/>
                 <a:cs typeface="Calibri" pitchFamily="34" charset="-120"/>
               </a:rPr>
-              <a:t>Дополнительно: меняется ли волатильность курса вокруг решений ЦБ (GARCH + событийное исследование).</a:t>
+              <a:t>«Влияет» и «предсказывает» — разные слова, и мы различаем их до конца презентации, не только на этом слайде.</a:t>
             </a:r>
             <a:endParaRPr lang="en-US" sz="1500" dirty="0"/>
           </a:p>
@@ -4675,7 +2810,7 @@
         <p:spPr>
           <a:xfrm>
             <a:off x="7955280" y="3017520"/>
-            <a:ext cx="3474720" cy="777240"/>
+            <a:ext cx="3474720" cy="640080"/>
           </a:xfrm>
           <a:prstGeom prst="rect">
             <a:avLst/>
@@ -4691,7 +2826,7 @@
               <a:buNone/>
             </a:pPr>
             <a:r>
-              <a:rPr lang="en-US" sz="4000" b="1" dirty="0">
+              <a:rPr lang="en-US" sz="3200" b="1" dirty="0">
                 <a:solidFill>
                   <a:srgbClr val="13294B"/>
                 </a:solidFill>
@@ -4701,7 +2836,7 @@
               </a:rPr>
               <a:t>4,25 – 21%</a:t>
             </a:r>
-            <a:endParaRPr lang="en-US" sz="4000" dirty="0"/>
+            <a:endParaRPr lang="en-US" sz="3200" dirty="0"/>
           </a:p>
         </p:txBody>
       </p:sp>
@@ -4713,7 +2848,7 @@
         </p:nvSpPr>
         <p:spPr>
           <a:xfrm>
-            <a:off x="7955280" y="3794760"/>
+            <a:off x="7955280" y="3657600"/>
             <a:ext cx="3474720" cy="548640"/>
           </a:xfrm>
           <a:prstGeom prst="rect">
@@ -4730,7 +2865,7 @@
               <a:buNone/>
             </a:pPr>
             <a:r>
-              <a:rPr lang="en-US" sz="1200" dirty="0">
+              <a:rPr lang="en-US" sz="1100" dirty="0">
                 <a:solidFill>
                   <a:srgbClr val="6B7688"/>
                 </a:solidFill>
@@ -4740,7 +2875,7 @@
               </a:rPr>
               <a:t>диапазон ключевой ставки, 2013–2026</a:t>
             </a:r>
-            <a:endParaRPr lang="en-US" sz="1200" dirty="0"/>
+            <a:endParaRPr lang="en-US" sz="1100" dirty="0"/>
           </a:p>
         </p:txBody>
       </p:sp>
@@ -4752,8 +2887,8 @@
         </p:nvSpPr>
         <p:spPr>
           <a:xfrm>
-            <a:off x="7955280" y="4663440"/>
-            <a:ext cx="3474720" cy="777240"/>
+            <a:off x="7955280" y="4572000"/>
+            <a:ext cx="3474720" cy="640080"/>
           </a:xfrm>
           <a:prstGeom prst="rect">
             <a:avLst/>
@@ -4769,7 +2904,7 @@
               <a:buNone/>
             </a:pPr>
             <a:r>
-              <a:rPr lang="en-US" sz="4000" b="1" dirty="0">
+              <a:rPr lang="en-US" sz="3200" b="1" dirty="0">
                 <a:solidFill>
                   <a:srgbClr val="13294B"/>
                 </a:solidFill>
@@ -4779,7 +2914,7 @@
               </a:rPr>
               <a:t>65</a:t>
             </a:r>
-            <a:endParaRPr lang="en-US" sz="4000" dirty="0"/>
+            <a:endParaRPr lang="en-US" sz="3200" dirty="0"/>
           </a:p>
         </p:txBody>
       </p:sp>
@@ -4791,7 +2926,7 @@
         </p:nvSpPr>
         <p:spPr>
           <a:xfrm>
-            <a:off x="7955280" y="5440680"/>
+            <a:off x="7955280" y="5212080"/>
             <a:ext cx="3474720" cy="548640"/>
           </a:xfrm>
           <a:prstGeom prst="rect">
@@ -4808,7 +2943,7 @@
               <a:buNone/>
             </a:pPr>
             <a:r>
-              <a:rPr lang="en-US" sz="1200" dirty="0">
+              <a:rPr lang="en-US" sz="1100" dirty="0">
                 <a:solidFill>
                   <a:srgbClr val="6B7688"/>
                 </a:solidFill>
@@ -4818,7 +2953,7 @@
               </a:rPr>
               <a:t>решений ЦБ по ставке за 13 лет</a:t>
             </a:r>
-            <a:endParaRPr lang="en-US" sz="1200" dirty="0"/>
+            <a:endParaRPr lang="en-US" sz="1100" dirty="0"/>
           </a:p>
         </p:txBody>
       </p:sp>
@@ -4918,7 +3053,7 @@
               <a:buNone/>
             </a:pPr>
             <a:r>
-              <a:rPr lang="en-US" sz="3000" b="1" dirty="0">
+              <a:rPr lang="en-US" sz="2800" b="1" dirty="0">
                 <a:solidFill>
                   <a:srgbClr val="1C2733"/>
                 </a:solidFill>
@@ -4928,7 +3063,7 @@
               </a:rPr>
               <a:t>Данные: три открытых источника</a:t>
             </a:r>
-            <a:endParaRPr lang="en-US" sz="3000" dirty="0"/>
+            <a:endParaRPr lang="en-US" sz="2800" dirty="0"/>
           </a:p>
         </p:txBody>
       </p:sp>
@@ -4940,12 +3075,12 @@
         </p:nvSpPr>
         <p:spPr>
           <a:xfrm>
-            <a:off x="548640" y="1417320"/>
-            <a:ext cx="3383280" cy="2468880"/>
+            <a:off x="548640" y="1371600"/>
+            <a:ext cx="3383280" cy="2103120"/>
           </a:xfrm>
           <a:prstGeom prst="roundRect">
             <a:avLst>
-              <a:gd name="adj" fmla="val 2963"/>
+              <a:gd name="adj" fmla="val 3478"/>
             </a:avLst>
           </a:prstGeom>
           <a:solidFill>
@@ -4962,7 +3097,7 @@
         </p:nvSpPr>
         <p:spPr>
           <a:xfrm>
-            <a:off x="777240" y="1600200"/>
+            <a:off x="777240" y="1536192"/>
             <a:ext cx="2926080" cy="457200"/>
           </a:xfrm>
           <a:prstGeom prst="rect">
@@ -4979,7 +3114,7 @@
               <a:buNone/>
             </a:pPr>
             <a:r>
-              <a:rPr lang="en-US" sz="1600" b="1" dirty="0">
+              <a:rPr lang="en-US" sz="1500" b="1" dirty="0">
                 <a:solidFill>
                   <a:srgbClr val="13294B"/>
                 </a:solidFill>
@@ -4989,7 +3124,7 @@
               </a:rPr>
               <a:t>Ключевая ставка</a:t>
             </a:r>
-            <a:endParaRPr lang="en-US" sz="1600" dirty="0"/>
+            <a:endParaRPr lang="en-US" sz="1500" dirty="0"/>
           </a:p>
         </p:txBody>
       </p:sp>
@@ -5001,7 +3136,7 @@
         </p:nvSpPr>
         <p:spPr>
           <a:xfrm>
-            <a:off x="777240" y="2057400"/>
+            <a:off x="777240" y="1956816"/>
             <a:ext cx="2926080" cy="457200"/>
           </a:xfrm>
           <a:prstGeom prst="rect">
@@ -5018,7 +3153,7 @@
               <a:buNone/>
             </a:pPr>
             <a:r>
-              <a:rPr lang="en-US" sz="1100" dirty="0">
+              <a:rPr lang="en-US" sz="1000" dirty="0">
                 <a:solidFill>
                   <a:srgbClr val="6B7688"/>
                 </a:solidFill>
@@ -5028,7 +3163,7 @@
               </a:rPr>
               <a:t>cbr.ru, HTML-таблица</a:t>
             </a:r>
-            <a:endParaRPr lang="en-US" sz="1100" dirty="0"/>
+            <a:endParaRPr lang="en-US" sz="1000" dirty="0"/>
           </a:p>
         </p:txBody>
       </p:sp>
@@ -5040,8 +3175,8 @@
         </p:nvSpPr>
         <p:spPr>
           <a:xfrm>
-            <a:off x="777240" y="2606040"/>
-            <a:ext cx="2926080" cy="640080"/>
+            <a:off x="777240" y="2423160"/>
+            <a:ext cx="2926080" cy="548640"/>
           </a:xfrm>
           <a:prstGeom prst="rect">
             <a:avLst/>
@@ -5057,7 +3192,7 @@
               <a:buNone/>
             </a:pPr>
             <a:r>
-              <a:rPr lang="en-US" sz="3000" b="1" dirty="0">
+              <a:rPr lang="en-US" sz="2600" b="1" dirty="0">
                 <a:solidFill>
                   <a:srgbClr val="5B7FA6"/>
                 </a:solidFill>
@@ -5067,7 +3202,7 @@
               </a:rPr>
               <a:t>3264</a:t>
             </a:r>
-            <a:endParaRPr lang="en-US" sz="3000" dirty="0"/>
+            <a:endParaRPr lang="en-US" sz="2600" dirty="0"/>
           </a:p>
         </p:txBody>
       </p:sp>
@@ -5079,8 +3214,8 @@
         </p:nvSpPr>
         <p:spPr>
           <a:xfrm>
-            <a:off x="777240" y="3246120"/>
-            <a:ext cx="2926080" cy="548640"/>
+            <a:off x="777240" y="2971800"/>
+            <a:ext cx="2926080" cy="502920"/>
           </a:xfrm>
           <a:prstGeom prst="rect">
             <a:avLst/>
@@ -5096,7 +3231,7 @@
               <a:buNone/>
             </a:pPr>
             <a:r>
-              <a:rPr lang="en-US" sz="1000" dirty="0">
+              <a:rPr lang="en-US" sz="950" dirty="0">
                 <a:solidFill>
                   <a:srgbClr val="6B7688"/>
                 </a:solidFill>
@@ -5106,7 +3241,7 @@
               </a:rPr>
               <a:t>наблюдений · 17.09.2013 – 23.09.2026</a:t>
             </a:r>
-            <a:endParaRPr lang="en-US" sz="1000" dirty="0"/>
+            <a:endParaRPr lang="en-US" sz="950" dirty="0"/>
           </a:p>
         </p:txBody>
       </p:sp>
@@ -5118,12 +3253,12 @@
         </p:nvSpPr>
         <p:spPr>
           <a:xfrm>
-            <a:off x="4297680" y="1417320"/>
-            <a:ext cx="3383280" cy="2468880"/>
+            <a:off x="4297680" y="1371600"/>
+            <a:ext cx="3383280" cy="2103120"/>
           </a:xfrm>
           <a:prstGeom prst="roundRect">
             <a:avLst>
-              <a:gd name="adj" fmla="val 2963"/>
+              <a:gd name="adj" fmla="val 3478"/>
             </a:avLst>
           </a:prstGeom>
           <a:solidFill>
@@ -5140,7 +3275,7 @@
         </p:nvSpPr>
         <p:spPr>
           <a:xfrm>
-            <a:off x="4526280" y="1600200"/>
+            <a:off x="4526280" y="1536192"/>
             <a:ext cx="2926080" cy="457200"/>
           </a:xfrm>
           <a:prstGeom prst="rect">
@@ -5157,7 +3292,7 @@
               <a:buNone/>
             </a:pPr>
             <a:r>
-              <a:rPr lang="en-US" sz="1600" b="1" dirty="0">
+              <a:rPr lang="en-US" sz="1500" b="1" dirty="0">
                 <a:solidFill>
                   <a:srgbClr val="13294B"/>
                 </a:solidFill>
@@ -5167,7 +3302,7 @@
               </a:rPr>
               <a:t>Курс USD/RUB</a:t>
             </a:r>
-            <a:endParaRPr lang="en-US" sz="1600" dirty="0"/>
+            <a:endParaRPr lang="en-US" sz="1500" dirty="0"/>
           </a:p>
         </p:txBody>
       </p:sp>
@@ -5179,7 +3314,7 @@
         </p:nvSpPr>
         <p:spPr>
           <a:xfrm>
-            <a:off x="4526280" y="2057400"/>
+            <a:off x="4526280" y="1956816"/>
             <a:ext cx="2926080" cy="457200"/>
           </a:xfrm>
           <a:prstGeom prst="rect">
@@ -5196,7 +3331,7 @@
               <a:buNone/>
             </a:pPr>
             <a:r>
-              <a:rPr lang="en-US" sz="1100" dirty="0">
+              <a:rPr lang="en-US" sz="1000" dirty="0">
                 <a:solidFill>
                   <a:srgbClr val="6B7688"/>
                 </a:solidFill>
@@ -5206,7 +3341,7 @@
               </a:rPr>
               <a:t>cbr.ru, XML (официальный фиксинг)</a:t>
             </a:r>
-            <a:endParaRPr lang="en-US" sz="1100" dirty="0"/>
+            <a:endParaRPr lang="en-US" sz="1000" dirty="0"/>
           </a:p>
         </p:txBody>
       </p:sp>
@@ -5218,8 +3353,8 @@
         </p:nvSpPr>
         <p:spPr>
           <a:xfrm>
-            <a:off x="4526280" y="2606040"/>
-            <a:ext cx="2926080" cy="640080"/>
+            <a:off x="4526280" y="2423160"/>
+            <a:ext cx="2926080" cy="548640"/>
           </a:xfrm>
           <a:prstGeom prst="rect">
             <a:avLst/>
@@ -5235,7 +3370,7 @@
               <a:buNone/>
             </a:pPr>
             <a:r>
-              <a:rPr lang="en-US" sz="3000" b="1" dirty="0">
+              <a:rPr lang="en-US" sz="2600" b="1" dirty="0">
                 <a:solidFill>
                   <a:srgbClr val="5B7FA6"/>
                 </a:solidFill>
@@ -5245,7 +3380,7 @@
               </a:rPr>
               <a:t>3385</a:t>
             </a:r>
-            <a:endParaRPr lang="en-US" sz="3000" dirty="0"/>
+            <a:endParaRPr lang="en-US" sz="2600" dirty="0"/>
           </a:p>
         </p:txBody>
       </p:sp>
@@ -5257,8 +3392,8 @@
         </p:nvSpPr>
         <p:spPr>
           <a:xfrm>
-            <a:off x="4526280" y="3246120"/>
-            <a:ext cx="2926080" cy="548640"/>
+            <a:off x="4526280" y="2971800"/>
+            <a:ext cx="2926080" cy="502920"/>
           </a:xfrm>
           <a:prstGeom prst="rect">
             <a:avLst/>
@@ -5274,7 +3409,7 @@
               <a:buNone/>
             </a:pPr>
             <a:r>
-              <a:rPr lang="en-US" sz="1000" dirty="0">
+              <a:rPr lang="en-US" sz="950" dirty="0">
                 <a:solidFill>
                   <a:srgbClr val="6B7688"/>
                 </a:solidFill>
@@ -5284,7 +3419,7 @@
               </a:rPr>
               <a:t>наблюдений · 10.01.2013 – 23.09.2026</a:t>
             </a:r>
-            <a:endParaRPr lang="en-US" sz="1000" dirty="0"/>
+            <a:endParaRPr lang="en-US" sz="950" dirty="0"/>
           </a:p>
         </p:txBody>
       </p:sp>
@@ -5296,12 +3431,12 @@
         </p:nvSpPr>
         <p:spPr>
           <a:xfrm>
-            <a:off x="8046720" y="1417320"/>
-            <a:ext cx="3383280" cy="2468880"/>
+            <a:off x="8046720" y="1371600"/>
+            <a:ext cx="3383280" cy="2103120"/>
           </a:xfrm>
           <a:prstGeom prst="roundRect">
             <a:avLst>
-              <a:gd name="adj" fmla="val 2963"/>
+              <a:gd name="adj" fmla="val 3478"/>
             </a:avLst>
           </a:prstGeom>
           <a:solidFill>
@@ -5318,7 +3453,7 @@
         </p:nvSpPr>
         <p:spPr>
           <a:xfrm>
-            <a:off x="8275320" y="1600200"/>
+            <a:off x="8275320" y="1536192"/>
             <a:ext cx="2926080" cy="457200"/>
           </a:xfrm>
           <a:prstGeom prst="rect">
@@ -5335,7 +3470,7 @@
               <a:buNone/>
             </a:pPr>
             <a:r>
-              <a:rPr lang="en-US" sz="1600" b="1" dirty="0">
+              <a:rPr lang="en-US" sz="1500" b="1" dirty="0">
                 <a:solidFill>
                   <a:srgbClr val="13294B"/>
                 </a:solidFill>
@@ -5345,7 +3480,7 @@
               </a:rPr>
               <a:t>Нефть Brent</a:t>
             </a:r>
-            <a:endParaRPr lang="en-US" sz="1600" dirty="0"/>
+            <a:endParaRPr lang="en-US" sz="1500" dirty="0"/>
           </a:p>
         </p:txBody>
       </p:sp>
@@ -5357,7 +3492,7 @@
         </p:nvSpPr>
         <p:spPr>
           <a:xfrm>
-            <a:off x="8275320" y="2057400"/>
+            <a:off x="8275320" y="1956816"/>
             <a:ext cx="2926080" cy="457200"/>
           </a:xfrm>
           <a:prstGeom prst="rect">
@@ -5374,7 +3509,7 @@
               <a:buNone/>
             </a:pPr>
             <a:r>
-              <a:rPr lang="en-US" sz="1100" dirty="0">
+              <a:rPr lang="en-US" sz="1000" dirty="0">
                 <a:solidFill>
                   <a:srgbClr val="6B7688"/>
                 </a:solidFill>
@@ -5384,7 +3519,7 @@
               </a:rPr>
               <a:t>FRED, DCOILBRENTEU</a:t>
             </a:r>
-            <a:endParaRPr lang="en-US" sz="1100" dirty="0"/>
+            <a:endParaRPr lang="en-US" sz="1000" dirty="0"/>
           </a:p>
         </p:txBody>
       </p:sp>
@@ -5396,8 +3531,8 @@
         </p:nvSpPr>
         <p:spPr>
           <a:xfrm>
-            <a:off x="8275320" y="2606040"/>
-            <a:ext cx="2926080" cy="640080"/>
+            <a:off x="8275320" y="2423160"/>
+            <a:ext cx="2926080" cy="548640"/>
           </a:xfrm>
           <a:prstGeom prst="rect">
             <a:avLst/>
@@ -5413,7 +3548,7 @@
               <a:buNone/>
             </a:pPr>
             <a:r>
-              <a:rPr lang="en-US" sz="3000" b="1" dirty="0">
+              <a:rPr lang="en-US" sz="2600" b="1" dirty="0">
                 <a:solidFill>
                   <a:srgbClr val="5B7FA6"/>
                 </a:solidFill>
@@ -5423,7 +3558,7 @@
               </a:rPr>
               <a:t>3581</a:t>
             </a:r>
-            <a:endParaRPr lang="en-US" sz="3000" dirty="0"/>
+            <a:endParaRPr lang="en-US" sz="2600" dirty="0"/>
           </a:p>
         </p:txBody>
       </p:sp>
@@ -5435,8 +3570,8 @@
         </p:nvSpPr>
         <p:spPr>
           <a:xfrm>
-            <a:off x="8275320" y="3246120"/>
-            <a:ext cx="2926080" cy="548640"/>
+            <a:off x="8275320" y="2971800"/>
+            <a:ext cx="2926080" cy="502920"/>
           </a:xfrm>
           <a:prstGeom prst="rect">
             <a:avLst/>
@@ -5452,7 +3587,7 @@
               <a:buNone/>
             </a:pPr>
             <a:r>
-              <a:rPr lang="en-US" sz="1000" dirty="0">
+              <a:rPr lang="en-US" sz="950" dirty="0">
                 <a:solidFill>
                   <a:srgbClr val="6B7688"/>
                 </a:solidFill>
@@ -5462,7 +3597,7 @@
               </a:rPr>
               <a:t>наблюдений · 01.01.2013 – 22.09.2026</a:t>
             </a:r>
-            <a:endParaRPr lang="en-US" sz="1000" dirty="0"/>
+            <a:endParaRPr lang="en-US" sz="950" dirty="0"/>
           </a:p>
         </p:txBody>
       </p:sp>
@@ -5474,8 +3609,8 @@
         </p:nvSpPr>
         <p:spPr>
           <a:xfrm>
-            <a:off x="548640" y="4160520"/>
-            <a:ext cx="10972800" cy="457200"/>
+            <a:off x="548640" y="3794760"/>
+            <a:ext cx="10972800" cy="640080"/>
           </a:xfrm>
           <a:prstGeom prst="rect">
             <a:avLst/>
@@ -5491,7 +3626,7 @@
               <a:buNone/>
             </a:pPr>
             <a:r>
-              <a:rPr lang="en-US" sz="1400" dirty="0">
+              <a:rPr lang="en-US" sz="1300" dirty="0">
                 <a:solidFill>
                   <a:srgbClr val="1C2733"/>
                 </a:solidFill>
@@ -5505,7 +3640,7 @@
               <a:buNone/>
             </a:pPr>
             <a:r>
-              <a:rPr lang="en-US" sz="1400" b="1" dirty="0">
+              <a:rPr lang="en-US" sz="1300" b="1" dirty="0">
                 <a:solidFill>
                   <a:srgbClr val="13294B"/>
                 </a:solidFill>
@@ -5519,7 +3654,7 @@
               <a:buNone/>
             </a:pPr>
             <a:r>
-              <a:rPr lang="en-US" sz="1400" dirty="0">
+              <a:rPr lang="en-US" sz="1300" dirty="0">
                 <a:solidFill>
                   <a:srgbClr val="1C2733"/>
                 </a:solidFill>
@@ -5527,9 +3662,9 @@
                 <a:ea typeface="Calibri" pitchFamily="34" charset="-122"/>
                 <a:cs typeface="Calibri" pitchFamily="34" charset="-120"/>
               </a:rPr>
-              <a:t> (~5 в год).</a:t>
-            </a:r>
-            <a:endParaRPr lang="en-US" sz="1400" dirty="0"/>
+              <a:t> (~5 в год). Курс и ставка обязательно моделируются вместе с нефтью — иначе эффект ставки путается с сырьевым циклом.</a:t>
+            </a:r>
+            <a:endParaRPr lang="en-US" sz="1300" dirty="0"/>
           </a:p>
         </p:txBody>
       </p:sp>
@@ -5541,8 +3676,8 @@
         </p:nvSpPr>
         <p:spPr>
           <a:xfrm>
-            <a:off x="548640" y="4709160"/>
-            <a:ext cx="10972800" cy="548640"/>
+            <a:off x="548640" y="4526280"/>
+            <a:ext cx="10972800" cy="914400"/>
           </a:xfrm>
           <a:prstGeom prst="rect">
             <a:avLst/>
@@ -5558,7 +3693,7 @@
               <a:buNone/>
             </a:pPr>
             <a:r>
-              <a:rPr lang="en-US" sz="1400" dirty="0">
+              <a:rPr lang="en-US" sz="1250" b="1" dirty="0">
                 <a:solidFill>
                   <a:srgbClr val="1C2733"/>
                 </a:solidFill>
@@ -5566,9 +3701,23 @@
                 <a:ea typeface="Calibri" pitchFamily="34" charset="-122"/>
                 <a:cs typeface="Calibri" pitchFamily="34" charset="-120"/>
               </a:rPr>
-              <a:t>Курс и ставка обязательно моделируются вместе с нефтью: без контроля на неё эффект ставки на курс путается с сырьевым циклом (корреляция курс–нефть −0,14 по уровням).</a:t>
-            </a:r>
-            <a:endParaRPr lang="en-US" sz="1400" dirty="0"/>
+              <a:t>Проверка данных: </a:t>
+            </a:r>
+            <a:pPr indent="0" marL="0">
+              <a:buNone/>
+            </a:pPr>
+            <a:r>
+              <a:rPr lang="en-US" sz="1250" dirty="0">
+                <a:solidFill>
+                  <a:srgbClr val="1C2733"/>
+                </a:solidFill>
+                <a:latin typeface="Calibri" pitchFamily="34" charset="0"/>
+                <a:ea typeface="Calibri" pitchFamily="34" charset="-122"/>
+                <a:cs typeface="Calibri" pitchFamily="34" charset="-120"/>
+              </a:rPr>
+              <a:t>даты решений и даты курса в выгрузках ЦБ используют разные конвенции (курс датирован T+1 от торговой сессии). Прямое сравнение совпадало в 5 случаях из 65; после сдвига на 1 день — в 65 из 65. Проверка встроена в код: скрипт падает, если совпадений не 65.</a:t>
+            </a:r>
+            <a:endParaRPr lang="en-US" sz="1250" dirty="0"/>
           </a:p>
         </p:txBody>
       </p:sp>
@@ -5580,8 +3729,8 @@
         </p:nvSpPr>
         <p:spPr>
           <a:xfrm>
-            <a:off x="548640" y="5440680"/>
-            <a:ext cx="10972800" cy="731520"/>
+            <a:off x="548640" y="5577840"/>
+            <a:ext cx="10972800" cy="640080"/>
           </a:xfrm>
           <a:prstGeom prst="rect">
             <a:avLst/>
@@ -5597,7 +3746,7 @@
               <a:buNone/>
             </a:pPr>
             <a:r>
-              <a:rPr lang="en-US" sz="1300" i="1" dirty="0">
+              <a:rPr lang="en-US" sz="1200" i="1" dirty="0">
                 <a:solidFill>
                   <a:srgbClr val="6B7688"/>
                 </a:solidFill>
@@ -5607,7 +3756,7 @@
               </a:rPr>
               <a:t>Два структурных слома видны прямо в данных: экстренное повышение ставки до 20% 28.02.2022 (пик курса 120,4 ₽/$ 11.03.2022) и цикл ужесточения 2023–2024 до исторического максимума 21%.</a:t>
             </a:r>
-            <a:endParaRPr lang="en-US" sz="1300" dirty="0"/>
+            <a:endParaRPr lang="en-US" sz="1200" dirty="0"/>
           </a:p>
         </p:txBody>
       </p:sp>
@@ -5707,7 +3856,7 @@
               <a:buNone/>
             </a:pPr>
             <a:r>
-              <a:rPr lang="en-US" sz="3000" b="1" dirty="0">
+              <a:rPr lang="en-US" sz="2800" b="1" dirty="0">
                 <a:solidFill>
                   <a:srgbClr val="1C2733"/>
                 </a:solidFill>
@@ -5715,82 +3864,26 @@
                 <a:ea typeface="Calibri" pitchFamily="34" charset="-122"/>
                 <a:cs typeface="Calibri" pitchFamily="34" charset="-120"/>
               </a:rPr>
-              <a:t>Проверка вместо доверия: даты решений не совпадали</a:t>
-            </a:r>
-            <a:endParaRPr lang="en-US" sz="3000" dirty="0"/>
-          </a:p>
-        </p:txBody>
-      </p:sp>
-      <p:sp>
-        <p:nvSpPr>
-          <p:cNvPr id="3" name="Text 1"/>
-          <p:cNvSpPr txBox="1"/>
+              <a:t>Методы: два слоя, спецификация выбрана данными</a:t>
+            </a:r>
+            <a:endParaRPr lang="en-US" sz="2800" dirty="0"/>
+          </a:p>
+        </p:txBody>
+      </p:sp>
+      <p:sp>
+        <p:nvSpPr>
+          <p:cNvPr id="3" name="Shape 1"/>
+          <p:cNvSpPr/>
           <p:nvPr/>
         </p:nvSpPr>
         <p:spPr>
           <a:xfrm>
             <a:off x="548640" y="1417320"/>
-            <a:ext cx="10972800" cy="914400"/>
-          </a:xfrm>
-          <a:prstGeom prst="rect">
-            <a:avLst/>
-          </a:prstGeom>
-          <a:noFill/>
-          <a:ln/>
-        </p:spPr>
-        <p:txBody>
-          <a:bodyPr wrap="square" lIns="0" tIns="0" rIns="0" bIns="0" rtlCol="0" anchor="ctr"/>
-          <a:lstStyle/>
-          <a:p>
-            <a:pPr indent="0" marL="0">
-              <a:buNone/>
-            </a:pPr>
-            <a:r>
-              <a:rPr lang="en-US" sz="1500" dirty="0">
-                <a:solidFill>
-                  <a:srgbClr val="1C2733"/>
-                </a:solidFill>
-                <a:latin typeface="Calibri" pitchFamily="34" charset="0"/>
-                <a:ea typeface="Calibri" pitchFamily="34" charset="-122"/>
-                <a:cs typeface="Calibri" pitchFamily="34" charset="-120"/>
-              </a:rPr>
-              <a:t>Дата в выгрузке курса — дата действия официального фиксинга (T+1 от торговой сессии).</a:t>
-            </a:r>
-            <a:endParaRPr lang="en-US" sz="1500" dirty="0"/>
-          </a:p>
-          <a:p>
-            <a:pPr indent="0" marL="0">
-              <a:buNone/>
-            </a:pPr>
-            <a:r>
-              <a:rPr lang="en-US" sz="1500" dirty="0">
-                <a:solidFill>
-                  <a:srgbClr val="1C2733"/>
-                </a:solidFill>
-                <a:latin typeface="Calibri" pitchFamily="34" charset="0"/>
-                <a:ea typeface="Calibri" pitchFamily="34" charset="-122"/>
-                <a:cs typeface="Calibri" pitchFamily="34" charset="-120"/>
-              </a:rPr>
-              <a:t>Дата в выгрузке ставки — дата вступления решения в силу. Разные конвенции — разные даты.</a:t>
-            </a:r>
-            <a:endParaRPr lang="en-US" sz="1500" dirty="0"/>
-          </a:p>
-        </p:txBody>
-      </p:sp>
-      <p:sp>
-        <p:nvSpPr>
-          <p:cNvPr id="4" name="Shape 2"/>
-          <p:cNvSpPr/>
-          <p:nvPr/>
-        </p:nvSpPr>
-        <p:spPr>
-          <a:xfrm>
-            <a:off x="1188720" y="2651760"/>
-            <a:ext cx="3931920" cy="2286000"/>
+            <a:ext cx="5394960" cy="3931920"/>
           </a:xfrm>
           <a:prstGeom prst="roundRect">
             <a:avLst>
-              <a:gd name="adj" fmla="val 3200"/>
+              <a:gd name="adj" fmla="val 1860"/>
             </a:avLst>
           </a:prstGeom>
           <a:solidFill>
@@ -5801,136 +3894,17 @@
       </p:sp>
       <p:sp>
         <p:nvSpPr>
-          <p:cNvPr id="5" name="Text 3"/>
-          <p:cNvSpPr txBox="1"/>
-          <p:nvPr/>
-        </p:nvSpPr>
-        <p:spPr>
-          <a:xfrm>
-            <a:off x="1463040" y="2834640"/>
-            <a:ext cx="3383280" cy="457200"/>
-          </a:xfrm>
-          <a:prstGeom prst="rect">
-            <a:avLst/>
-          </a:prstGeom>
-          <a:noFill/>
-          <a:ln/>
-        </p:spPr>
-        <p:txBody>
-          <a:bodyPr wrap="square" lIns="0" tIns="0" rIns="0" bIns="0" rtlCol="0" anchor="ctr"/>
-          <a:lstStyle/>
-          <a:p>
-            <a:pPr indent="0" marL="0">
-              <a:buNone/>
-            </a:pPr>
-            <a:r>
-              <a:rPr lang="en-US" sz="1400" b="1" dirty="0">
-                <a:solidFill>
-                  <a:srgbClr val="6B7688"/>
-                </a:solidFill>
-                <a:latin typeface="Calibri" pitchFamily="34" charset="0"/>
-                <a:ea typeface="Calibri" pitchFamily="34" charset="-122"/>
-                <a:cs typeface="Calibri" pitchFamily="34" charset="-120"/>
-              </a:rPr>
-              <a:t>До проверки</a:t>
-            </a:r>
-            <a:endParaRPr lang="en-US" sz="1400" dirty="0"/>
-          </a:p>
-        </p:txBody>
-      </p:sp>
-      <p:sp>
-        <p:nvSpPr>
-          <p:cNvPr id="6" name="Text 4"/>
-          <p:cNvSpPr txBox="1"/>
-          <p:nvPr/>
-        </p:nvSpPr>
-        <p:spPr>
-          <a:xfrm>
-            <a:off x="1463040" y="3291840"/>
-            <a:ext cx="3383280" cy="914400"/>
-          </a:xfrm>
-          <a:prstGeom prst="rect">
-            <a:avLst/>
-          </a:prstGeom>
-          <a:noFill/>
-          <a:ln/>
-        </p:spPr>
-        <p:txBody>
-          <a:bodyPr wrap="square" lIns="0" tIns="0" rIns="0" bIns="0" rtlCol="0" anchor="ctr"/>
-          <a:lstStyle/>
-          <a:p>
-            <a:pPr indent="0" marL="0">
-              <a:buNone/>
-            </a:pPr>
-            <a:r>
-              <a:rPr lang="en-US" sz="4400" b="1" dirty="0">
-                <a:solidFill>
-                  <a:srgbClr val="B23B3B"/>
-                </a:solidFill>
-                <a:latin typeface="Calibri" pitchFamily="34" charset="0"/>
-                <a:ea typeface="Calibri" pitchFamily="34" charset="-122"/>
-                <a:cs typeface="Calibri" pitchFamily="34" charset="-120"/>
-              </a:rPr>
-              <a:t>5 / 65</a:t>
-            </a:r>
-            <a:endParaRPr lang="en-US" sz="4400" dirty="0"/>
-          </a:p>
-        </p:txBody>
-      </p:sp>
-      <p:sp>
-        <p:nvSpPr>
-          <p:cNvPr id="7" name="Text 5"/>
-          <p:cNvSpPr txBox="1"/>
-          <p:nvPr/>
-        </p:nvSpPr>
-        <p:spPr>
-          <a:xfrm>
-            <a:off x="1463040" y="4251960"/>
-            <a:ext cx="3383280" cy="457200"/>
-          </a:xfrm>
-          <a:prstGeom prst="rect">
-            <a:avLst/>
-          </a:prstGeom>
-          <a:noFill/>
-          <a:ln/>
-        </p:spPr>
-        <p:txBody>
-          <a:bodyPr wrap="square" lIns="0" tIns="0" rIns="0" bIns="0" rtlCol="0" anchor="ctr"/>
-          <a:lstStyle/>
-          <a:p>
-            <a:pPr indent="0" marL="0">
-              <a:buNone/>
-            </a:pPr>
-            <a:r>
-              <a:rPr lang="en-US" sz="1200" dirty="0">
-                <a:solidFill>
-                  <a:srgbClr val="6B7688"/>
-                </a:solidFill>
-                <a:latin typeface="Calibri" pitchFamily="34" charset="0"/>
-                <a:ea typeface="Calibri" pitchFamily="34" charset="-122"/>
-                <a:cs typeface="Calibri" pitchFamily="34" charset="-120"/>
-              </a:rPr>
-              <a:t>дат совпало напрямую</a:t>
-            </a:r>
-            <a:endParaRPr lang="en-US" sz="1200" dirty="0"/>
-          </a:p>
-        </p:txBody>
-      </p:sp>
-      <p:sp>
-        <p:nvSpPr>
-          <p:cNvPr id="8" name="Shape 6"/>
+          <p:cNvPr id="4" name="Shape 2"/>
           <p:cNvSpPr/>
           <p:nvPr/>
         </p:nvSpPr>
         <p:spPr>
           <a:xfrm>
-            <a:off x="6675120" y="2651760"/>
-            <a:ext cx="3931920" cy="2286000"/>
+            <a:off x="868680" y="1737360"/>
+            <a:ext cx="228600" cy="228600"/>
           </a:xfrm>
           <a:prstGeom prst="roundRect">
-            <a:avLst>
-              <a:gd name="adj" fmla="val 3200"/>
-            </a:avLst>
+            <a:avLst/>
           </a:prstGeom>
           <a:solidFill>
             <a:srgbClr val="13294B"/>
@@ -5940,14 +3914,180 @@
       </p:sp>
       <p:sp>
         <p:nvSpPr>
+          <p:cNvPr id="5" name="Text 3"/>
+          <p:cNvSpPr txBox="1"/>
+          <p:nvPr/>
+        </p:nvSpPr>
+        <p:spPr>
+          <a:xfrm>
+            <a:off x="1280160" y="1645920"/>
+            <a:ext cx="4297680" cy="457200"/>
+          </a:xfrm>
+          <a:prstGeom prst="rect">
+            <a:avLst/>
+          </a:prstGeom>
+          <a:noFill/>
+          <a:ln/>
+        </p:spPr>
+        <p:txBody>
+          <a:bodyPr wrap="square" lIns="0" tIns="0" rIns="0" bIns="0" rtlCol="0" anchor="ctr"/>
+          <a:lstStyle/>
+          <a:p>
+            <a:pPr indent="0" marL="0">
+              <a:buNone/>
+            </a:pPr>
+            <a:r>
+              <a:rPr lang="en-US" sz="1600" b="1" dirty="0">
+                <a:solidFill>
+                  <a:srgbClr val="13294B"/>
+                </a:solidFill>
+                <a:latin typeface="Calibri" pitchFamily="34" charset="0"/>
+                <a:ea typeface="Calibri" pitchFamily="34" charset="-122"/>
+                <a:cs typeface="Calibri" pitchFamily="34" charset="-120"/>
+              </a:rPr>
+              <a:t>Месячные данные</a:t>
+            </a:r>
+            <a:endParaRPr lang="en-US" sz="1600" dirty="0"/>
+          </a:p>
+        </p:txBody>
+      </p:sp>
+      <p:sp>
+        <p:nvSpPr>
+          <p:cNvPr id="6" name="Text 4"/>
+          <p:cNvSpPr txBox="1"/>
+          <p:nvPr/>
+        </p:nvSpPr>
+        <p:spPr>
+          <a:xfrm>
+            <a:off x="914400" y="2286000"/>
+            <a:ext cx="4663440" cy="2834640"/>
+          </a:xfrm>
+          <a:prstGeom prst="rect">
+            <a:avLst/>
+          </a:prstGeom>
+          <a:noFill/>
+          <a:ln/>
+        </p:spPr>
+        <p:txBody>
+          <a:bodyPr wrap="square" lIns="0" tIns="0" rIns="0" bIns="0" rtlCol="0" anchor="ctr"/>
+          <a:lstStyle/>
+          <a:p>
+            <a:pPr marL="342900" indent="-342900">
+              <a:spcAft>
+                <a:spcPts val="1000"/>
+              </a:spcAft>
+              <a:buSzPct val="100000"/>
+              <a:buChar char="•"/>
+            </a:pPr>
+            <a:r>
+              <a:rPr lang="en-US" sz="1300" dirty="0">
+                <a:solidFill>
+                  <a:srgbClr val="1C2733"/>
+                </a:solidFill>
+                <a:latin typeface="Calibri" pitchFamily="34" charset="0"/>
+                <a:ea typeface="Calibri" pitchFamily="34" charset="-122"/>
+                <a:cs typeface="Calibri" pitchFamily="34" charset="-120"/>
+              </a:rPr>
+              <a:t>VAR в первых разностях (лаг по BIC/AIC/HQIC/FPE: p=3)</a:t>
+            </a:r>
+            <a:endParaRPr lang="en-US" sz="1300" dirty="0"/>
+          </a:p>
+          <a:p>
+            <a:pPr marL="342900" indent="-342900">
+              <a:spcAft>
+                <a:spcPts val="1000"/>
+              </a:spcAft>
+              <a:buSzPct val="100000"/>
+              <a:buChar char="•"/>
+            </a:pPr>
+            <a:r>
+              <a:rPr lang="en-US" sz="1300" dirty="0">
+                <a:solidFill>
+                  <a:srgbClr val="1C2733"/>
+                </a:solidFill>
+                <a:latin typeface="Calibri" pitchFamily="34" charset="0"/>
+                <a:ea typeface="Calibri" pitchFamily="34" charset="-122"/>
+                <a:cs typeface="Calibri" pitchFamily="34" charset="-120"/>
+              </a:rPr>
+              <a:t>Тест на коинтеграцию: ранг неустойчив к лагу (1 при kd=1, 0 при kd=2/3) — берём VAR-в-разностях, VECM как альтернатива</a:t>
+            </a:r>
+            <a:endParaRPr lang="en-US" sz="1300" dirty="0"/>
+          </a:p>
+          <a:p>
+            <a:pPr marL="342900" indent="-342900">
+              <a:spcAft>
+                <a:spcPts val="1000"/>
+              </a:spcAft>
+              <a:buSzPct val="100000"/>
+              <a:buChar char="•"/>
+            </a:pPr>
+            <a:r>
+              <a:rPr lang="en-US" sz="1300" dirty="0">
+                <a:solidFill>
+                  <a:srgbClr val="1C2733"/>
+                </a:solidFill>
+                <a:latin typeface="Calibri" pitchFamily="34" charset="0"/>
+                <a:ea typeface="Calibri" pitchFamily="34" charset="-122"/>
+                <a:cs typeface="Calibri" pitchFamily="34" charset="-120"/>
+              </a:rPr>
+              <a:t>Тест Грейнджера, импульсные отклики (IRF)</a:t>
+            </a:r>
+            <a:endParaRPr lang="en-US" sz="1300" dirty="0"/>
+          </a:p>
+        </p:txBody>
+      </p:sp>
+      <p:sp>
+        <p:nvSpPr>
+          <p:cNvPr id="7" name="Shape 5"/>
+          <p:cNvSpPr/>
+          <p:nvPr/>
+        </p:nvSpPr>
+        <p:spPr>
+          <a:xfrm>
+            <a:off x="6217920" y="1417320"/>
+            <a:ext cx="5394960" cy="3931920"/>
+          </a:xfrm>
+          <a:prstGeom prst="roundRect">
+            <a:avLst>
+              <a:gd name="adj" fmla="val 1860"/>
+            </a:avLst>
+          </a:prstGeom>
+          <a:solidFill>
+            <a:srgbClr val="F3F5F8"/>
+          </a:solidFill>
+          <a:ln/>
+        </p:spPr>
+      </p:sp>
+      <p:sp>
+        <p:nvSpPr>
+          <p:cNvPr id="8" name="Shape 6"/>
+          <p:cNvSpPr/>
+          <p:nvPr/>
+        </p:nvSpPr>
+        <p:spPr>
+          <a:xfrm>
+            <a:off x="6537960" y="1737360"/>
+            <a:ext cx="228600" cy="228600"/>
+          </a:xfrm>
+          <a:prstGeom prst="roundRect">
+            <a:avLst/>
+          </a:prstGeom>
+          <a:solidFill>
+            <a:srgbClr val="5B7FA6"/>
+          </a:solidFill>
+          <a:ln/>
+        </p:spPr>
+      </p:sp>
+      <p:sp>
+        <p:nvSpPr>
           <p:cNvPr id="9" name="Text 7"/>
           <p:cNvSpPr txBox="1"/>
           <p:nvPr/>
         </p:nvSpPr>
         <p:spPr>
           <a:xfrm>
-            <a:off x="6949440" y="2834640"/>
-            <a:ext cx="3383280" cy="457200"/>
+            <a:off x="6949440" y="1645920"/>
+            <a:ext cx="4297680" cy="457200"/>
           </a:xfrm>
           <a:prstGeom prst="rect">
             <a:avLst/>
@@ -5963,17 +4103,17 @@
               <a:buNone/>
             </a:pPr>
             <a:r>
-              <a:rPr lang="en-US" sz="1400" b="1" dirty="0">
-                <a:solidFill>
-                  <a:srgbClr val="AEB9CC"/>
-                </a:solidFill>
-                <a:latin typeface="Calibri" pitchFamily="34" charset="0"/>
-                <a:ea typeface="Calibri" pitchFamily="34" charset="-122"/>
-                <a:cs typeface="Calibri" pitchFamily="34" charset="-120"/>
-              </a:rPr>
-              <a:t>После сдвига на +1 день</a:t>
-            </a:r>
-            <a:endParaRPr lang="en-US" sz="1400" dirty="0"/>
+              <a:rPr lang="en-US" sz="1600" b="1" dirty="0">
+                <a:solidFill>
+                  <a:srgbClr val="5B7FA6"/>
+                </a:solidFill>
+                <a:latin typeface="Calibri" pitchFamily="34" charset="0"/>
+                <a:ea typeface="Calibri" pitchFamily="34" charset="-122"/>
+                <a:cs typeface="Calibri" pitchFamily="34" charset="-120"/>
+              </a:rPr>
+              <a:t>Дневные данные</a:t>
+            </a:r>
+            <a:endParaRPr lang="en-US" sz="1600" dirty="0"/>
           </a:p>
         </p:txBody>
       </p:sp>
@@ -5985,8 +4125,93 @@
         </p:nvSpPr>
         <p:spPr>
           <a:xfrm>
-            <a:off x="6949440" y="3291840"/>
-            <a:ext cx="3383280" cy="914400"/>
+            <a:off x="6583680" y="2286000"/>
+            <a:ext cx="4663440" cy="2834640"/>
+          </a:xfrm>
+          <a:prstGeom prst="rect">
+            <a:avLst/>
+          </a:prstGeom>
+          <a:noFill/>
+          <a:ln/>
+        </p:spPr>
+        <p:txBody>
+          <a:bodyPr wrap="square" lIns="0" tIns="0" rIns="0" bIns="0" rtlCol="0" anchor="ctr"/>
+          <a:lstStyle/>
+          <a:p>
+            <a:pPr marL="342900" indent="-342900">
+              <a:spcAft>
+                <a:spcPts val="1000"/>
+              </a:spcAft>
+              <a:buSzPct val="100000"/>
+              <a:buChar char="•"/>
+            </a:pPr>
+            <a:r>
+              <a:rPr lang="en-US" sz="1300" dirty="0">
+                <a:solidFill>
+                  <a:srgbClr val="1C2733"/>
+                </a:solidFill>
+                <a:latin typeface="Calibri" pitchFamily="34" charset="0"/>
+                <a:ea typeface="Calibri" pitchFamily="34" charset="-122"/>
+                <a:cs typeface="Calibri" pitchFamily="34" charset="-120"/>
+              </a:rPr>
+              <a:t>GARCH: спецификация выбрана по AIC/BIC среди 4 кандидатов (Normal/t × const/AR(1) × GJR)</a:t>
+            </a:r>
+            <a:endParaRPr lang="en-US" sz="1300" dirty="0"/>
+          </a:p>
+          <a:p>
+            <a:pPr marL="342900" indent="-342900">
+              <a:spcAft>
+                <a:spcPts val="1000"/>
+              </a:spcAft>
+              <a:buSzPct val="100000"/>
+              <a:buChar char="•"/>
+            </a:pPr>
+            <a:r>
+              <a:rPr lang="en-US" sz="1300" dirty="0">
+                <a:solidFill>
+                  <a:srgbClr val="1C2733"/>
+                </a:solidFill>
+                <a:latin typeface="Calibri" pitchFamily="34" charset="0"/>
+                <a:ea typeface="Calibri" pitchFamily="34" charset="-122"/>
+                <a:cs typeface="Calibri" pitchFamily="34" charset="-120"/>
+              </a:rPr>
+              <a:t>Выбрана: t-распределение, AR(1)-среднее, GJR-асимметрия</a:t>
+            </a:r>
+            <a:endParaRPr lang="en-US" sz="1300" dirty="0"/>
+          </a:p>
+          <a:p>
+            <a:pPr marL="342900" indent="-342900">
+              <a:spcAft>
+                <a:spcPts val="1000"/>
+              </a:spcAft>
+              <a:buSzPct val="100000"/>
+              <a:buChar char="•"/>
+            </a:pPr>
+            <a:r>
+              <a:rPr lang="en-US" sz="1300" dirty="0">
+                <a:solidFill>
+                  <a:srgbClr val="1C2733"/>
+                </a:solidFill>
+                <a:latin typeface="Calibri" pitchFamily="34" charset="0"/>
+                <a:ea typeface="Calibri" pitchFamily="34" charset="-122"/>
+                <a:cs typeface="Calibri" pitchFamily="34" charset="-120"/>
+              </a:rPr>
+              <a:t>Событийное исследование вокруг 65 решений, плацебо стратифицировано по году</a:t>
+            </a:r>
+            <a:endParaRPr lang="en-US" sz="1300" dirty="0"/>
+          </a:p>
+        </p:txBody>
+      </p:sp>
+      <p:sp>
+        <p:nvSpPr>
+          <p:cNvPr id="11" name="Text 9"/>
+          <p:cNvSpPr txBox="1"/>
+          <p:nvPr/>
+        </p:nvSpPr>
+        <p:spPr>
+          <a:xfrm>
+            <a:off x="548640" y="5486400"/>
+            <a:ext cx="10972800" cy="822960"/>
           </a:xfrm>
           <a:prstGeom prst="rect">
             <a:avLst/>
@@ -6002,54 +4227,15 @@
               <a:buNone/>
             </a:pPr>
             <a:r>
-              <a:rPr lang="en-US" sz="4400" b="1" dirty="0">
-                <a:solidFill>
-                  <a:srgbClr val="C9A227"/>
-                </a:solidFill>
-                <a:latin typeface="Calibri" pitchFamily="34" charset="0"/>
-                <a:ea typeface="Calibri" pitchFamily="34" charset="-122"/>
-                <a:cs typeface="Calibri" pitchFamily="34" charset="-120"/>
-              </a:rPr>
-              <a:t>65 / 65</a:t>
-            </a:r>
-            <a:endParaRPr lang="en-US" sz="4400" dirty="0"/>
-          </a:p>
-        </p:txBody>
-      </p:sp>
-      <p:sp>
-        <p:nvSpPr>
-          <p:cNvPr id="11" name="Text 9"/>
-          <p:cNvSpPr txBox="1"/>
-          <p:nvPr/>
-        </p:nvSpPr>
-        <p:spPr>
-          <a:xfrm>
-            <a:off x="6949440" y="4251960"/>
-            <a:ext cx="3383280" cy="457200"/>
-          </a:xfrm>
-          <a:prstGeom prst="rect">
-            <a:avLst/>
-          </a:prstGeom>
-          <a:noFill/>
-          <a:ln/>
-        </p:spPr>
-        <p:txBody>
-          <a:bodyPr wrap="square" lIns="0" tIns="0" rIns="0" bIns="0" rtlCol="0" anchor="ctr"/>
-          <a:lstStyle/>
-          <a:p>
-            <a:pPr indent="0" marL="0">
-              <a:buNone/>
-            </a:pPr>
-            <a:r>
-              <a:rPr lang="en-US" sz="1200" dirty="0">
-                <a:solidFill>
-                  <a:srgbClr val="CADCFC"/>
-                </a:solidFill>
-                <a:latin typeface="Calibri" pitchFamily="34" charset="0"/>
-                <a:ea typeface="Calibri" pitchFamily="34" charset="-122"/>
-                <a:cs typeface="Calibri" pitchFamily="34" charset="-120"/>
-              </a:rPr>
-              <a:t>дат совпало точно</a:t>
+              <a:rPr lang="en-US" sz="1200" i="1" dirty="0">
+                <a:solidFill>
+                  <a:srgbClr val="6B7688"/>
+                </a:solidFill>
+                <a:latin typeface="Calibri" pitchFamily="34" charset="0"/>
+                <a:ea typeface="Calibri" pitchFamily="34" charset="-122"/>
+                <a:cs typeface="Calibri" pitchFamily="34" charset="-120"/>
+              </a:rPr>
+              <a:t>Почему так: произвольный выбор лага (kd=1) давал коинтеграцию на границе критического значения — при лаге, выбранном по данным, она исчезает. Исходная GARCH-спецификация (const-mean, Normal) не проходила диагностику остатков — выбранная по BIC проходит.</a:t>
             </a:r>
             <a:endParaRPr lang="en-US" sz="1200" dirty="0"/>
           </a:p>
@@ -6057,46 +4243,7 @@
       </p:sp>
       <p:sp>
         <p:nvSpPr>
-          <p:cNvPr id="12" name="Text 10"/>
-          <p:cNvSpPr txBox="1"/>
-          <p:nvPr/>
-        </p:nvSpPr>
-        <p:spPr>
-          <a:xfrm>
-            <a:off x="548640" y="5257800"/>
-            <a:ext cx="10515600" cy="731520"/>
-          </a:xfrm>
-          <a:prstGeom prst="rect">
-            <a:avLst/>
-          </a:prstGeom>
-          <a:noFill/>
-          <a:ln/>
-        </p:spPr>
-        <p:txBody>
-          <a:bodyPr wrap="square" lIns="0" tIns="0" rIns="0" bIns="0" rtlCol="0" anchor="ctr"/>
-          <a:lstStyle/>
-          <a:p>
-            <a:pPr indent="0" marL="0">
-              <a:buNone/>
-            </a:pPr>
-            <a:r>
-              <a:rPr lang="en-US" sz="1300" i="1" dirty="0">
-                <a:solidFill>
-                  <a:srgbClr val="6B7688"/>
-                </a:solidFill>
-                <a:latin typeface="Calibri" pitchFamily="34" charset="0"/>
-                <a:ea typeface="Calibri" pitchFamily="34" charset="-122"/>
-                <a:cs typeface="Calibri" pitchFamily="34" charset="-120"/>
-              </a:rPr>
-              <a:t>Проверка встроена в код: скрипт останавливается с ошибкой, если совпадений не 65 — не полагаемся на то, что «выглядит похоже».</a:t>
-            </a:r>
-            <a:endParaRPr lang="en-US" sz="1300" dirty="0"/>
-          </a:p>
-        </p:txBody>
-      </p:sp>
-      <p:sp>
-        <p:nvSpPr>
-          <p:cNvPr id="13" name="Text 11"/>
+          <p:cNvPr id="13" name="Text 10"/>
           <p:cNvSpPr txBox="1"/>
           <p:nvPr/>
         </p:nvSpPr>
@@ -6190,7 +4337,7 @@
               <a:buNone/>
             </a:pPr>
             <a:r>
-              <a:rPr lang="en-US" sz="3000" b="1" dirty="0">
+              <a:rPr lang="en-US" sz="2800" b="1" dirty="0">
                 <a:solidFill>
                   <a:srgbClr val="1C2733"/>
                 </a:solidFill>
@@ -6198,386 +4345,39 @@
                 <a:ea typeface="Calibri" pitchFamily="34" charset="-122"/>
                 <a:cs typeface="Calibri" pitchFamily="34" charset="-120"/>
               </a:rPr>
-              <a:t>Дизайн: два слоя, две частоты</a:t>
-            </a:r>
-            <a:endParaRPr lang="en-US" sz="3000" dirty="0"/>
-          </a:p>
-        </p:txBody>
-      </p:sp>
-      <p:sp>
-        <p:nvSpPr>
-          <p:cNvPr id="3" name="Shape 1"/>
-          <p:cNvSpPr/>
-          <p:nvPr/>
-        </p:nvSpPr>
-        <p:spPr>
-          <a:xfrm>
-            <a:off x="548640" y="1463040"/>
-            <a:ext cx="5394960" cy="4206240"/>
-          </a:xfrm>
-          <a:prstGeom prst="roundRect">
-            <a:avLst>
-              <a:gd name="adj" fmla="val 1739"/>
-            </a:avLst>
-          </a:prstGeom>
-          <a:solidFill>
-            <a:srgbClr val="F3F5F8"/>
-          </a:solidFill>
-          <a:ln/>
-        </p:spPr>
-      </p:sp>
-      <p:sp>
-        <p:nvSpPr>
-          <p:cNvPr id="4" name="Shape 2"/>
-          <p:cNvSpPr/>
-          <p:nvPr/>
-        </p:nvSpPr>
-        <p:spPr>
-          <a:xfrm>
-            <a:off x="868680" y="1783080"/>
-            <a:ext cx="228600" cy="228600"/>
-          </a:xfrm>
-          <a:prstGeom prst="roundRect">
-            <a:avLst/>
-          </a:prstGeom>
-          <a:solidFill>
-            <a:srgbClr val="13294B"/>
-          </a:solidFill>
-          <a:ln/>
-        </p:spPr>
-      </p:sp>
-      <p:sp>
-        <p:nvSpPr>
-          <p:cNvPr id="5" name="Text 3"/>
-          <p:cNvSpPr txBox="1"/>
-          <p:nvPr/>
-        </p:nvSpPr>
-        <p:spPr>
-          <a:xfrm>
-            <a:off x="1280160" y="1691640"/>
-            <a:ext cx="4297680" cy="457200"/>
+              <a:t>Три ряда во времени</a:t>
+            </a:r>
+            <a:endParaRPr lang="en-US" sz="2800" dirty="0"/>
+          </a:p>
+        </p:txBody>
+      </p:sp>
+      <p:pic>
+        <p:nvPicPr>
+          <p:cNvPr id="3" name="Image 0" descr="../output/figures/R1_three_series.png">    </p:cNvPr>
+          <p:cNvPicPr>
+            <a:picLocks noChangeAspect="1"/>
+          </p:cNvPicPr>
+          <p:nvPr/>
+        </p:nvPicPr>
+        <p:blipFill>
+          <a:blip r:embed="rId1"/>
+          <a:stretch>
+            <a:fillRect/>
+          </a:stretch>
+        </p:blipFill>
+        <p:spPr>
+          <a:xfrm>
+            <a:off x="3163824" y="1280160"/>
+            <a:ext cx="5861304" cy="5212080"/>
           </a:xfrm>
           <a:prstGeom prst="rect">
             <a:avLst/>
           </a:prstGeom>
-          <a:noFill/>
-          <a:ln/>
-        </p:spPr>
-        <p:txBody>
-          <a:bodyPr wrap="square" lIns="0" tIns="0" rIns="0" bIns="0" rtlCol="0" anchor="ctr"/>
-          <a:lstStyle/>
-          <a:p>
-            <a:pPr indent="0" marL="0">
-              <a:buNone/>
-            </a:pPr>
-            <a:r>
-              <a:rPr lang="en-US" sz="1700" b="1" dirty="0">
-                <a:solidFill>
-                  <a:srgbClr val="13294B"/>
-                </a:solidFill>
-                <a:latin typeface="Calibri" pitchFamily="34" charset="0"/>
-                <a:ea typeface="Calibri" pitchFamily="34" charset="-122"/>
-                <a:cs typeface="Calibri" pitchFamily="34" charset="-120"/>
-              </a:rPr>
-              <a:t>Слой 1 · месячные данные</a:t>
-            </a:r>
-            <a:endParaRPr lang="en-US" sz="1700" dirty="0"/>
-          </a:p>
-        </p:txBody>
-      </p:sp>
-      <p:sp>
-        <p:nvSpPr>
-          <p:cNvPr id="6" name="Text 4"/>
-          <p:cNvSpPr txBox="1"/>
-          <p:nvPr/>
-        </p:nvSpPr>
-        <p:spPr>
-          <a:xfrm>
-            <a:off x="914400" y="2377440"/>
-            <a:ext cx="4663440" cy="3017520"/>
-          </a:xfrm>
-          <a:prstGeom prst="rect">
-            <a:avLst/>
-          </a:prstGeom>
-          <a:noFill/>
-          <a:ln/>
-        </p:spPr>
-        <p:txBody>
-          <a:bodyPr wrap="square" lIns="0" tIns="0" rIns="0" bIns="0" rtlCol="0" anchor="ctr"/>
-          <a:lstStyle/>
-          <a:p>
-            <a:pPr marL="342900" indent="-342900">
-              <a:spcAft>
-                <a:spcPts val="1400"/>
-              </a:spcAft>
-              <a:buSzPct val="100000"/>
-              <a:buChar char="•"/>
-            </a:pPr>
-            <a:r>
-              <a:rPr lang="en-US" sz="1500" dirty="0">
-                <a:solidFill>
-                  <a:srgbClr val="1C2733"/>
-                </a:solidFill>
-                <a:latin typeface="Calibri" pitchFamily="34" charset="0"/>
-                <a:ea typeface="Calibri" pitchFamily="34" charset="-122"/>
-                <a:cs typeface="Calibri" pitchFamily="34" charset="-120"/>
-              </a:rPr>
-              <a:t>VAR в первых разностях</a:t>
-            </a:r>
-            <a:endParaRPr lang="en-US" sz="1500" dirty="0"/>
-          </a:p>
-          <a:p>
-            <a:pPr marL="342900" indent="-342900">
-              <a:spcAft>
-                <a:spcPts val="1400"/>
-              </a:spcAft>
-              <a:buSzPct val="100000"/>
-              <a:buChar char="•"/>
-            </a:pPr>
-            <a:r>
-              <a:rPr lang="en-US" sz="1500" dirty="0">
-                <a:solidFill>
-                  <a:srgbClr val="1C2733"/>
-                </a:solidFill>
-                <a:latin typeface="Calibri" pitchFamily="34" charset="0"/>
-                <a:ea typeface="Calibri" pitchFamily="34" charset="-122"/>
-                <a:cs typeface="Calibri" pitchFamily="34" charset="-120"/>
-              </a:rPr>
-              <a:t>Тест Грейнджера (обе стороны, с нефтью и без)</a:t>
-            </a:r>
-            <a:endParaRPr lang="en-US" sz="1500" dirty="0"/>
-          </a:p>
-          <a:p>
-            <a:pPr marL="342900" indent="-342900">
-              <a:spcAft>
-                <a:spcPts val="1400"/>
-              </a:spcAft>
-              <a:buSzPct val="100000"/>
-              <a:buChar char="•"/>
-            </a:pPr>
-            <a:r>
-              <a:rPr lang="en-US" sz="1500" dirty="0">
-                <a:solidFill>
-                  <a:srgbClr val="1C2733"/>
-                </a:solidFill>
-                <a:latin typeface="Calibri" pitchFamily="34" charset="0"/>
-                <a:ea typeface="Calibri" pitchFamily="34" charset="-122"/>
-                <a:cs typeface="Calibri" pitchFamily="34" charset="-120"/>
-              </a:rPr>
-              <a:t>Импульсные отклики (IRF)</a:t>
-            </a:r>
-            <a:endParaRPr lang="en-US" sz="1500" dirty="0"/>
-          </a:p>
-        </p:txBody>
-      </p:sp>
-      <p:sp>
-        <p:nvSpPr>
-          <p:cNvPr id="7" name="Shape 5"/>
-          <p:cNvSpPr/>
-          <p:nvPr/>
-        </p:nvSpPr>
-        <p:spPr>
-          <a:xfrm>
-            <a:off x="6217920" y="1463040"/>
-            <a:ext cx="5394960" cy="4206240"/>
-          </a:xfrm>
-          <a:prstGeom prst="roundRect">
-            <a:avLst>
-              <a:gd name="adj" fmla="val 1739"/>
-            </a:avLst>
-          </a:prstGeom>
-          <a:solidFill>
-            <a:srgbClr val="F3F5F8"/>
-          </a:solidFill>
-          <a:ln/>
-        </p:spPr>
-      </p:sp>
-      <p:sp>
-        <p:nvSpPr>
-          <p:cNvPr id="8" name="Shape 6"/>
-          <p:cNvSpPr/>
-          <p:nvPr/>
-        </p:nvSpPr>
-        <p:spPr>
-          <a:xfrm>
-            <a:off x="6537960" y="1783080"/>
-            <a:ext cx="228600" cy="228600"/>
-          </a:xfrm>
-          <a:prstGeom prst="roundRect">
-            <a:avLst/>
-          </a:prstGeom>
-          <a:solidFill>
-            <a:srgbClr val="5B7FA6"/>
-          </a:solidFill>
-          <a:ln/>
-        </p:spPr>
-      </p:sp>
-      <p:sp>
-        <p:nvSpPr>
-          <p:cNvPr id="9" name="Text 7"/>
-          <p:cNvSpPr txBox="1"/>
-          <p:nvPr/>
-        </p:nvSpPr>
-        <p:spPr>
-          <a:xfrm>
-            <a:off x="6949440" y="1691640"/>
-            <a:ext cx="4297680" cy="457200"/>
-          </a:xfrm>
-          <a:prstGeom prst="rect">
-            <a:avLst/>
-          </a:prstGeom>
-          <a:noFill/>
-          <a:ln/>
-        </p:spPr>
-        <p:txBody>
-          <a:bodyPr wrap="square" lIns="0" tIns="0" rIns="0" bIns="0" rtlCol="0" anchor="ctr"/>
-          <a:lstStyle/>
-          <a:p>
-            <a:pPr indent="0" marL="0">
-              <a:buNone/>
-            </a:pPr>
-            <a:r>
-              <a:rPr lang="en-US" sz="1700" b="1" dirty="0">
-                <a:solidFill>
-                  <a:srgbClr val="5B7FA6"/>
-                </a:solidFill>
-                <a:latin typeface="Calibri" pitchFamily="34" charset="0"/>
-                <a:ea typeface="Calibri" pitchFamily="34" charset="-122"/>
-                <a:cs typeface="Calibri" pitchFamily="34" charset="-120"/>
-              </a:rPr>
-              <a:t>Слой 2 · дневные данные</a:t>
-            </a:r>
-            <a:endParaRPr lang="en-US" sz="1700" dirty="0"/>
-          </a:p>
-        </p:txBody>
-      </p:sp>
-      <p:sp>
-        <p:nvSpPr>
-          <p:cNvPr id="10" name="Text 8"/>
-          <p:cNvSpPr txBox="1"/>
-          <p:nvPr/>
-        </p:nvSpPr>
-        <p:spPr>
-          <a:xfrm>
-            <a:off x="6583680" y="2377440"/>
-            <a:ext cx="4663440" cy="3017520"/>
-          </a:xfrm>
-          <a:prstGeom prst="rect">
-            <a:avLst/>
-          </a:prstGeom>
-          <a:noFill/>
-          <a:ln/>
-        </p:spPr>
-        <p:txBody>
-          <a:bodyPr wrap="square" lIns="0" tIns="0" rIns="0" bIns="0" rtlCol="0" anchor="ctr"/>
-          <a:lstStyle/>
-          <a:p>
-            <a:pPr marL="342900" indent="-342900">
-              <a:spcAft>
-                <a:spcPts val="1400"/>
-              </a:spcAft>
-              <a:buSzPct val="100000"/>
-              <a:buChar char="•"/>
-            </a:pPr>
-            <a:r>
-              <a:rPr lang="en-US" sz="1500" dirty="0">
-                <a:solidFill>
-                  <a:srgbClr val="1C2733"/>
-                </a:solidFill>
-                <a:latin typeface="Calibri" pitchFamily="34" charset="0"/>
-                <a:ea typeface="Calibri" pitchFamily="34" charset="-122"/>
-                <a:cs typeface="Calibri" pitchFamily="34" charset="-120"/>
-              </a:rPr>
-              <a:t>GARCH(1,1) на доходностях курса</a:t>
-            </a:r>
-            <a:endParaRPr lang="en-US" sz="1500" dirty="0"/>
-          </a:p>
-          <a:p>
-            <a:pPr marL="342900" indent="-342900">
-              <a:spcAft>
-                <a:spcPts val="1400"/>
-              </a:spcAft>
-              <a:buSzPct val="100000"/>
-              <a:buChar char="•"/>
-            </a:pPr>
-            <a:r>
-              <a:rPr lang="en-US" sz="1500" dirty="0">
-                <a:solidFill>
-                  <a:srgbClr val="1C2733"/>
-                </a:solidFill>
-                <a:latin typeface="Calibri" pitchFamily="34" charset="0"/>
-                <a:ea typeface="Calibri" pitchFamily="34" charset="-122"/>
-                <a:cs typeface="Calibri" pitchFamily="34" charset="-120"/>
-              </a:rPr>
-              <a:t>Диагностика остатков (Ljung-Box)</a:t>
-            </a:r>
-            <a:endParaRPr lang="en-US" sz="1500" dirty="0"/>
-          </a:p>
-          <a:p>
-            <a:pPr marL="342900" indent="-342900">
-              <a:spcAft>
-                <a:spcPts val="1400"/>
-              </a:spcAft>
-              <a:buSzPct val="100000"/>
-              <a:buChar char="•"/>
-            </a:pPr>
-            <a:r>
-              <a:rPr lang="en-US" sz="1500" dirty="0">
-                <a:solidFill>
-                  <a:srgbClr val="1C2733"/>
-                </a:solidFill>
-                <a:latin typeface="Calibri" pitchFamily="34" charset="0"/>
-                <a:ea typeface="Calibri" pitchFamily="34" charset="-122"/>
-                <a:cs typeface="Calibri" pitchFamily="34" charset="-120"/>
-              </a:rPr>
-              <a:t>Событийное исследование вокруг 65 решений + плацебо</a:t>
-            </a:r>
-            <a:endParaRPr lang="en-US" sz="1500" dirty="0"/>
-          </a:p>
-        </p:txBody>
-      </p:sp>
-      <p:sp>
-        <p:nvSpPr>
-          <p:cNvPr id="11" name="Text 9"/>
-          <p:cNvSpPr txBox="1"/>
-          <p:nvPr/>
-        </p:nvSpPr>
-        <p:spPr>
-          <a:xfrm>
-            <a:off x="548640" y="5806440"/>
-            <a:ext cx="10972800" cy="640080"/>
-          </a:xfrm>
-          <a:prstGeom prst="rect">
-            <a:avLst/>
-          </a:prstGeom>
-          <a:noFill/>
-          <a:ln/>
-        </p:spPr>
-        <p:txBody>
-          <a:bodyPr wrap="square" lIns="0" tIns="0" rIns="0" bIns="0" rtlCol="0" anchor="ctr"/>
-          <a:lstStyle/>
-          <a:p>
-            <a:pPr indent="0" marL="0">
-              <a:buNone/>
-            </a:pPr>
-            <a:r>
-              <a:rPr lang="en-US" sz="1300" i="1" dirty="0">
-                <a:solidFill>
-                  <a:srgbClr val="6B7688"/>
-                </a:solidFill>
-                <a:latin typeface="Calibri" pitchFamily="34" charset="0"/>
-                <a:ea typeface="Calibri" pitchFamily="34" charset="-122"/>
-                <a:cs typeface="Calibri" pitchFamily="34" charset="-120"/>
-              </a:rPr>
-              <a:t>Почему раздельно: ставка меняется реже раза в два месяца — дневной шум испортит VAR. Волатильность, наоборот, нельзя оценить на 157 месячных точках.</a:t>
-            </a:r>
-            <a:endParaRPr lang="en-US" sz="1300" dirty="0"/>
-          </a:p>
-        </p:txBody>
-      </p:sp>
-      <p:sp>
-        <p:nvSpPr>
-          <p:cNvPr id="12" name="Text 10"/>
+        </p:spPr>
+      </p:pic>
+      <p:sp>
+        <p:nvSpPr>
+          <p:cNvPr id="4" name="Text 1"/>
           <p:cNvSpPr txBox="1"/>
           <p:nvPr/>
         </p:nvSpPr>
@@ -6628,7 +4428,7 @@
     <p:bg>
       <p:bgPr>
         <a:solidFill>
-          <a:srgbClr val="FFFFFF"/>
+          <a:srgbClr val="13294B"/>
         </a:solidFill>
       </p:bgPr>
     </p:bg>
@@ -6648,14 +4448,75 @@
       </p:grpSpPr>
       <p:sp>
         <p:nvSpPr>
-          <p:cNvPr id="2" name="Text 0"/>
+          <p:cNvPr id="2" name="Shape 0"/>
+          <p:cNvSpPr/>
+          <p:nvPr/>
+        </p:nvSpPr>
+        <p:spPr>
+          <a:xfrm>
+            <a:off x="457200" y="365760"/>
+            <a:ext cx="3108960" cy="365760"/>
+          </a:xfrm>
+          <a:prstGeom prst="roundRect">
+            <a:avLst>
+              <a:gd name="adj" fmla="val 15000"/>
+            </a:avLst>
+          </a:prstGeom>
+          <a:solidFill>
+            <a:srgbClr val="C9A227"/>
+          </a:solidFill>
+          <a:ln/>
+        </p:spPr>
+      </p:sp>
+      <p:sp>
+        <p:nvSpPr>
+          <p:cNvPr id="3" name="Text 1"/>
           <p:cNvSpPr txBox="1"/>
           <p:nvPr/>
         </p:nvSpPr>
         <p:spPr>
           <a:xfrm>
-            <a:off x="548640" y="411480"/>
-            <a:ext cx="11064240" cy="822960"/>
+            <a:off x="457200" y="365760"/>
+            <a:ext cx="3108960" cy="365760"/>
+          </a:xfrm>
+          <a:prstGeom prst="rect">
+            <a:avLst/>
+          </a:prstGeom>
+          <a:noFill/>
+          <a:ln/>
+        </p:spPr>
+        <p:txBody>
+          <a:bodyPr wrap="square" lIns="0" tIns="0" rIns="0" bIns="0" rtlCol="0" anchor="ctr"/>
+          <a:lstStyle/>
+          <a:p>
+            <a:pPr algn="ctr" indent="0" marL="0">
+              <a:buNone/>
+            </a:pPr>
+            <a:r>
+              <a:rPr lang="en-US" sz="1300" b="1" dirty="0">
+                <a:solidFill>
+                  <a:srgbClr val="13294B"/>
+                </a:solidFill>
+                <a:latin typeface="Calibri" pitchFamily="34" charset="0"/>
+                <a:ea typeface="Calibri" pitchFamily="34" charset="-122"/>
+                <a:cs typeface="Calibri" pitchFamily="34" charset="-120"/>
+              </a:rPr>
+              <a:t>ГЛАВНАЯ НАХОДКА</a:t>
+            </a:r>
+            <a:endParaRPr lang="en-US" sz="1300" dirty="0"/>
+          </a:p>
+        </p:txBody>
+      </p:sp>
+      <p:sp>
+        <p:nvSpPr>
+          <p:cNvPr id="4" name="Text 2"/>
+          <p:cNvSpPr txBox="1"/>
+          <p:nvPr/>
+        </p:nvSpPr>
+        <p:spPr>
+          <a:xfrm>
+            <a:off x="548640" y="868680"/>
+            <a:ext cx="10972800" cy="731520"/>
           </a:xfrm>
           <a:prstGeom prst="rect">
             <a:avLst/>
@@ -6671,59 +4532,44 @@
               <a:buNone/>
             </a:pPr>
             <a:r>
-              <a:rPr lang="en-US" sz="3000" b="1" dirty="0">
-                <a:solidFill>
-                  <a:srgbClr val="1C2733"/>
-                </a:solidFill>
-                <a:latin typeface="Calibri" pitchFamily="34" charset="0"/>
-                <a:ea typeface="Calibri" pitchFamily="34" charset="-122"/>
-                <a:cs typeface="Calibri" pitchFamily="34" charset="-120"/>
-              </a:rPr>
-              <a:t>Спецификация выбрана тестом, а не наугад</a:t>
-            </a:r>
-            <a:endParaRPr lang="en-US" sz="3000" dirty="0"/>
-          </a:p>
-        </p:txBody>
-      </p:sp>
-      <p:sp>
-        <p:nvSpPr>
-          <p:cNvPr id="3" name="Text 1"/>
-          <p:cNvSpPr txBox="1"/>
-          <p:nvPr/>
-        </p:nvSpPr>
-        <p:spPr>
-          <a:xfrm>
-            <a:off x="548640" y="1371600"/>
-            <a:ext cx="10972800" cy="548640"/>
+              <a:rPr lang="en-US" sz="2400" b="1" dirty="0">
+                <a:solidFill>
+                  <a:srgbClr val="FFFFFF"/>
+                </a:solidFill>
+                <a:latin typeface="Cambria" pitchFamily="34" charset="0"/>
+                <a:ea typeface="Cambria" pitchFamily="34" charset="-122"/>
+                <a:cs typeface="Cambria" pitchFamily="34" charset="-120"/>
+              </a:rPr>
+              <a:t>Связь видна только тогда, когда в выборке есть кризис</a:t>
+            </a:r>
+            <a:endParaRPr lang="en-US" sz="2400" dirty="0"/>
+          </a:p>
+        </p:txBody>
+      </p:sp>
+      <p:pic>
+        <p:nvPicPr>
+          <p:cNvPr id="5" name="Image 0" descr="../output/figures/R4_rolling_granger.png">    </p:cNvPr>
+          <p:cNvPicPr>
+            <a:picLocks noChangeAspect="1"/>
+          </p:cNvPicPr>
+          <p:nvPr/>
+        </p:nvPicPr>
+        <p:blipFill>
+          <a:blip r:embed="rId1"/>
+          <a:stretch>
+            <a:fillRect/>
+          </a:stretch>
+        </p:blipFill>
+        <p:spPr>
+          <a:xfrm>
+            <a:off x="457200" y="1600200"/>
+            <a:ext cx="6949440" cy="3474720"/>
           </a:xfrm>
           <a:prstGeom prst="rect">
             <a:avLst/>
           </a:prstGeom>
-          <a:noFill/>
-          <a:ln/>
-        </p:spPr>
-        <p:txBody>
-          <a:bodyPr wrap="square" lIns="0" tIns="0" rIns="0" bIns="0" rtlCol="0" anchor="ctr"/>
-          <a:lstStyle/>
-          <a:p>
-            <a:pPr indent="0" marL="0">
-              <a:buNone/>
-            </a:pPr>
-            <a:r>
-              <a:rPr lang="en-US" sz="1500" dirty="0">
-                <a:solidFill>
-                  <a:srgbClr val="1C2733"/>
-                </a:solidFill>
-                <a:latin typeface="Calibri" pitchFamily="34" charset="0"/>
-                <a:ea typeface="Calibri" pitchFamily="34" charset="-122"/>
-                <a:cs typeface="Calibri" pitchFamily="34" charset="-120"/>
-              </a:rPr>
-              <a:t>Лаг для теста Йохансена подобран по данным (BIC/AIC/HQIC/FPE → p=3 → k_ar_diff=2), не взят произвольно.</a:t>
-            </a:r>
-            <a:endParaRPr lang="en-US" sz="1500" dirty="0"/>
-          </a:p>
-        </p:txBody>
-      </p:sp>
+        </p:spPr>
+      </p:pic>
       <p:graphicFrame>
         <p:nvGraphicFramePr>
           <p:cNvPr id="7" name="Table 0"/>
@@ -6739,29 +4585,29 @@
           </p:nvPr>
         </p:nvGraphicFramePr>
         <p:xfrm>
-          <a:off x="548640" y="2103120"/>
-          <a:ext cx="10972800" cy="1828800"/>
+          <a:off x="7589520" y="1600200"/>
+          <a:ext cx="4114800" cy="2377440"/>
         </p:xfrm>
         <a:graphic>
           <a:graphicData uri="http://schemas.openxmlformats.org/drawingml/2006/table">
             <a:tbl>
               <a:tblPr/>
               <a:tblGrid>
-                <a:gridCol w="3200400"/>
-                <a:gridCol w="4114800"/>
-                <a:gridCol w="3657600"/>
+                <a:gridCol w="1920240"/>
+                <a:gridCol w="1097280"/>
+                <a:gridCol w="1097280"/>
               </a:tblGrid>
-              <a:tr h="457200">
+              <a:tr h="594360">
                 <a:tc>
                   <a:txBody>
                     <a:bodyPr/>
                     <a:lstStyle/>
                     <a:p>
-                      <a:pPr indent="0" marL="0">
+                      <a:pPr algn="ctr" indent="0" marL="0">
                         <a:buNone/>
                       </a:pPr>
                       <a:r>
-                        <a:rPr lang="en-US" sz="1400" b="1" dirty="0">
+                        <a:rPr lang="en-US" sz="1100" b="1" dirty="0">
                           <a:solidFill>
                             <a:srgbClr val="FFFFFF"/>
                           </a:solidFill>
@@ -6769,9 +4615,9 @@
                           <a:ea typeface="Calibri" pitchFamily="34" charset="-122"/>
                           <a:cs typeface="Calibri" pitchFamily="34" charset="-120"/>
                         </a:rPr>
-                        <a:t>k_ar_diff</a:t>
+                        <a:t>Подвыборка</a:t>
                       </a:r>
-                      <a:endParaRPr lang="en-US" sz="1400" dirty="0">
+                      <a:endParaRPr lang="en-US" sz="1100" dirty="0">
                         <a:latin typeface="Calibri" charset="0"/>
                         <a:ea typeface="Calibri" charset="0"/>
                         <a:cs typeface="Calibri" charset="0"/>
@@ -6825,11 +4671,11 @@
                     <a:bodyPr/>
                     <a:lstStyle/>
                     <a:p>
-                      <a:pPr indent="0" marL="0">
+                      <a:pPr algn="ctr" indent="0" marL="0">
                         <a:buNone/>
                       </a:pPr>
                       <a:r>
-                        <a:rPr lang="en-US" sz="1400" b="1" dirty="0">
+                        <a:rPr lang="en-US" sz="1100" b="1" dirty="0">
                           <a:solidFill>
                             <a:srgbClr val="FFFFFF"/>
                           </a:solidFill>
@@ -6837,9 +4683,9 @@
                           <a:ea typeface="Calibri" pitchFamily="34" charset="-122"/>
                           <a:cs typeface="Calibri" pitchFamily="34" charset="-120"/>
                         </a:rPr>
-                        <a:t>Ранг коинтеграции</a:t>
+                        <a:t>ставка→курс, p</a:t>
                       </a:r>
-                      <a:endParaRPr lang="en-US" sz="1400" dirty="0">
+                      <a:endParaRPr lang="en-US" sz="1100" dirty="0">
                         <a:latin typeface="Calibri" charset="0"/>
                         <a:ea typeface="Calibri" charset="0"/>
                         <a:cs typeface="Calibri" charset="0"/>
@@ -6893,11 +4739,11 @@
                     <a:bodyPr/>
                     <a:lstStyle/>
                     <a:p>
-                      <a:pPr indent="0" marL="0">
+                      <a:pPr algn="ctr" indent="0" marL="0">
                         <a:buNone/>
                       </a:pPr>
                       <a:r>
-                        <a:rPr lang="en-US" sz="1400" b="1" dirty="0">
+                        <a:rPr lang="en-US" sz="1100" b="1" dirty="0">
                           <a:solidFill>
                             <a:srgbClr val="FFFFFF"/>
                           </a:solidFill>
@@ -6905,9 +4751,9 @@
                           <a:ea typeface="Calibri" pitchFamily="34" charset="-122"/>
                           <a:cs typeface="Calibri" pitchFamily="34" charset="-120"/>
                         </a:rPr>
-                        <a:t>Решение</a:t>
+                        <a:t>курс→ставка, p</a:t>
                       </a:r>
-                      <a:endParaRPr lang="en-US" sz="1400" dirty="0">
+                      <a:endParaRPr lang="en-US" sz="1100" dirty="0">
                         <a:latin typeface="Calibri" charset="0"/>
                         <a:ea typeface="Calibri" charset="0"/>
                         <a:cs typeface="Calibri" charset="0"/>
@@ -6957,17 +4803,17 @@
                   </a:tcPr>
                 </a:tc>
               </a:tr>
-              <a:tr h="457200">
+              <a:tr h="594360">
                 <a:tc>
                   <a:txBody>
                     <a:bodyPr/>
                     <a:lstStyle/>
                     <a:p>
-                      <a:pPr indent="0" marL="0">
+                      <a:pPr algn="ctr" indent="0" marL="0">
                         <a:buNone/>
                       </a:pPr>
                       <a:r>
-                        <a:rPr lang="en-US" sz="1400" dirty="0">
+                        <a:rPr lang="en-US" sz="1100" dirty="0">
                           <a:solidFill>
                             <a:srgbClr val="1C2733"/>
                           </a:solidFill>
@@ -6975,9 +4821,9 @@
                           <a:ea typeface="Calibri" pitchFamily="34" charset="-122"/>
                           <a:cs typeface="Calibri" pitchFamily="34" charset="-120"/>
                         </a:rPr>
-                        <a:t>1 (произвольный)</a:t>
+                        <a:t>Вся выборка</a:t>
                       </a:r>
-                      <a:endParaRPr lang="en-US" sz="1400" dirty="0">
+                      <a:endParaRPr lang="en-US" sz="1100" dirty="0">
                         <a:latin typeface="Calibri" charset="0"/>
                         <a:ea typeface="Calibri" charset="0"/>
                         <a:cs typeface="Calibri" charset="0"/>
@@ -7021,6 +4867,9 @@
                       <a:headEnd type="none" w="med" len="med"/>
                       <a:tailEnd type="none" w="med" len="med"/>
                     </a:lnB>
+                    <a:solidFill>
+                      <a:srgbClr val="FFFFFF"/>
+                    </a:solidFill>
                   </a:tcPr>
                 </a:tc>
                 <a:tc>
@@ -7028,21 +4877,21 @@
                     <a:bodyPr/>
                     <a:lstStyle/>
                     <a:p>
-                      <a:pPr indent="0" marL="0">
+                      <a:pPr algn="ctr" indent="0" marL="0">
                         <a:buNone/>
                       </a:pPr>
                       <a:r>
-                        <a:rPr lang="en-US" sz="1400" dirty="0">
+                        <a:rPr lang="en-US" sz="1100" b="1" dirty="0">
                           <a:solidFill>
-                            <a:srgbClr val="1C2733"/>
+                            <a:srgbClr val="1C7C3E"/>
                           </a:solidFill>
                           <a:latin typeface="Calibri" pitchFamily="34" charset="0"/>
                           <a:ea typeface="Calibri" pitchFamily="34" charset="-122"/>
                           <a:cs typeface="Calibri" pitchFamily="34" charset="-120"/>
                         </a:rPr>
-                        <a:t>1 (на границе: 14,96 vs 15,49)</a:t>
+                        <a:t>&lt;0,0001</a:t>
                       </a:r>
-                      <a:endParaRPr lang="en-US" sz="1400" dirty="0">
+                      <a:endParaRPr lang="en-US" sz="1100" dirty="0">
                         <a:latin typeface="Calibri" charset="0"/>
                         <a:ea typeface="Calibri" charset="0"/>
                         <a:cs typeface="Calibri" charset="0"/>
@@ -7086,6 +4935,9 @@
                       <a:headEnd type="none" w="med" len="med"/>
                       <a:tailEnd type="none" w="med" len="med"/>
                     </a:lnB>
+                    <a:solidFill>
+                      <a:srgbClr val="FFFFFF"/>
+                    </a:solidFill>
                   </a:tcPr>
                 </a:tc>
                 <a:tc>
@@ -7093,21 +4945,21 @@
                     <a:bodyPr/>
                     <a:lstStyle/>
                     <a:p>
-                      <a:pPr indent="0" marL="0">
+                      <a:pPr algn="ctr" indent="0" marL="0">
                         <a:buNone/>
                       </a:pPr>
                       <a:r>
-                        <a:rPr lang="en-US" sz="1400" dirty="0">
+                        <a:rPr lang="en-US" sz="1100" dirty="0">
                           <a:solidFill>
-                            <a:srgbClr val="1C2733"/>
+                            <a:srgbClr val="1C7C3E"/>
                           </a:solidFill>
                           <a:latin typeface="Calibri" pitchFamily="34" charset="0"/>
                           <a:ea typeface="Calibri" pitchFamily="34" charset="-122"/>
                           <a:cs typeface="Calibri" pitchFamily="34" charset="-120"/>
                         </a:rPr>
-                        <a:t>VECM — альтернатива</a:t>
+                        <a:t>0,005</a:t>
                       </a:r>
-                      <a:endParaRPr lang="en-US" sz="1400" dirty="0">
+                      <a:endParaRPr lang="en-US" sz="1100" dirty="0">
                         <a:latin typeface="Calibri" charset="0"/>
                         <a:ea typeface="Calibri" charset="0"/>
                         <a:cs typeface="Calibri" charset="0"/>
@@ -7151,20 +5003,23 @@
                       <a:headEnd type="none" w="med" len="med"/>
                       <a:tailEnd type="none" w="med" len="med"/>
                     </a:lnB>
+                    <a:solidFill>
+                      <a:srgbClr val="FFFFFF"/>
+                    </a:solidFill>
                   </a:tcPr>
                 </a:tc>
               </a:tr>
-              <a:tr h="457200">
+              <a:tr h="594360">
                 <a:tc>
                   <a:txBody>
                     <a:bodyPr/>
                     <a:lstStyle/>
                     <a:p>
-                      <a:pPr indent="0" marL="0">
+                      <a:pPr algn="ctr" indent="0" marL="0">
                         <a:buNone/>
                       </a:pPr>
                       <a:r>
-                        <a:rPr lang="en-US" sz="1400" dirty="0">
+                        <a:rPr lang="en-US" sz="1100" dirty="0">
                           <a:solidFill>
                             <a:srgbClr val="1C2733"/>
                           </a:solidFill>
@@ -7172,9 +5027,9 @@
                           <a:ea typeface="Calibri" pitchFamily="34" charset="-122"/>
                           <a:cs typeface="Calibri" pitchFamily="34" charset="-120"/>
                         </a:rPr>
-                        <a:t>2 (по данным, основной)</a:t>
+                        <a:t>Спокойный период 2015-06–2021-12</a:t>
                       </a:r>
-                      <a:endParaRPr lang="en-US" sz="1400" dirty="0">
+                      <a:endParaRPr lang="en-US" sz="1100" dirty="0">
                         <a:latin typeface="Calibri" charset="0"/>
                         <a:ea typeface="Calibri" charset="0"/>
                         <a:cs typeface="Calibri" charset="0"/>
@@ -7218,6 +5073,9 @@
                       <a:headEnd type="none" w="med" len="med"/>
                       <a:tailEnd type="none" w="med" len="med"/>
                     </a:lnB>
+                    <a:solidFill>
+                      <a:srgbClr val="FFFFFF"/>
+                    </a:solidFill>
                   </a:tcPr>
                 </a:tc>
                 <a:tc>
@@ -7225,21 +5083,21 @@
                     <a:bodyPr/>
                     <a:lstStyle/>
                     <a:p>
-                      <a:pPr indent="0" marL="0">
+                      <a:pPr algn="ctr" indent="0" marL="0">
                         <a:buNone/>
                       </a:pPr>
                       <a:r>
-                        <a:rPr lang="en-US" sz="1400" dirty="0">
+                        <a:rPr lang="en-US" sz="1100" dirty="0">
                           <a:solidFill>
-                            <a:srgbClr val="1C2733"/>
+                            <a:srgbClr val="B23B3B"/>
                           </a:solidFill>
                           <a:latin typeface="Calibri" pitchFamily="34" charset="0"/>
                           <a:ea typeface="Calibri" pitchFamily="34" charset="-122"/>
                           <a:cs typeface="Calibri" pitchFamily="34" charset="-120"/>
                         </a:rPr>
-                        <a:t>0</a:t>
+                        <a:t>0,54</a:t>
                       </a:r>
-                      <a:endParaRPr lang="en-US" sz="1400" dirty="0">
+                      <a:endParaRPr lang="en-US" sz="1100" dirty="0">
                         <a:latin typeface="Calibri" charset="0"/>
                         <a:ea typeface="Calibri" charset="0"/>
                         <a:cs typeface="Calibri" charset="0"/>
@@ -7283,6 +5141,9 @@
                       <a:headEnd type="none" w="med" len="med"/>
                       <a:tailEnd type="none" w="med" len="med"/>
                     </a:lnB>
+                    <a:solidFill>
+                      <a:srgbClr val="FFFFFF"/>
+                    </a:solidFill>
                   </a:tcPr>
                 </a:tc>
                 <a:tc>
@@ -7290,21 +5151,21 @@
                     <a:bodyPr/>
                     <a:lstStyle/>
                     <a:p>
-                      <a:pPr indent="0" marL="0">
+                      <a:pPr algn="ctr" indent="0" marL="0">
                         <a:buNone/>
                       </a:pPr>
                       <a:r>
-                        <a:rPr lang="en-US" sz="1400" dirty="0">
+                        <a:rPr lang="en-US" sz="1100" dirty="0">
                           <a:solidFill>
-                            <a:srgbClr val="1C2733"/>
+                            <a:srgbClr val="B23B3B"/>
                           </a:solidFill>
                           <a:latin typeface="Calibri" pitchFamily="34" charset="0"/>
                           <a:ea typeface="Calibri" pitchFamily="34" charset="-122"/>
                           <a:cs typeface="Calibri" pitchFamily="34" charset="-120"/>
                         </a:rPr>
-                        <a:t>VAR в разностях — основная модель</a:t>
+                        <a:t>0,37</a:t>
                       </a:r>
-                      <a:endParaRPr lang="en-US" sz="1400" dirty="0">
+                      <a:endParaRPr lang="en-US" sz="1100" dirty="0">
                         <a:latin typeface="Calibri" charset="0"/>
                         <a:ea typeface="Calibri" charset="0"/>
                         <a:cs typeface="Calibri" charset="0"/>
@@ -7348,20 +5209,23 @@
                       <a:headEnd type="none" w="med" len="med"/>
                       <a:tailEnd type="none" w="med" len="med"/>
                     </a:lnB>
+                    <a:solidFill>
+                      <a:srgbClr val="FFFFFF"/>
+                    </a:solidFill>
                   </a:tcPr>
                 </a:tc>
               </a:tr>
-              <a:tr h="457200">
+              <a:tr h="594360">
                 <a:tc>
                   <a:txBody>
                     <a:bodyPr/>
                     <a:lstStyle/>
                     <a:p>
-                      <a:pPr indent="0" marL="0">
+                      <a:pPr algn="ctr" indent="0" marL="0">
                         <a:buNone/>
                       </a:pPr>
                       <a:r>
-                        <a:rPr lang="en-US" sz="1400" dirty="0">
+                        <a:rPr lang="en-US" sz="1100" dirty="0">
                           <a:solidFill>
                             <a:srgbClr val="1C2733"/>
                           </a:solidFill>
@@ -7369,9 +5233,9 @@
                           <a:ea typeface="Calibri" pitchFamily="34" charset="-122"/>
                           <a:cs typeface="Calibri" pitchFamily="34" charset="-120"/>
                         </a:rPr>
-                        <a:t>3</a:t>
+                        <a:t>После острой фазы 2022-09…</a:t>
                       </a:r>
-                      <a:endParaRPr lang="en-US" sz="1400" dirty="0">
+                      <a:endParaRPr lang="en-US" sz="1100" dirty="0">
                         <a:latin typeface="Calibri" charset="0"/>
                         <a:ea typeface="Calibri" charset="0"/>
                         <a:cs typeface="Calibri" charset="0"/>
@@ -7415,6 +5279,9 @@
                       <a:headEnd type="none" w="med" len="med"/>
                       <a:tailEnd type="none" w="med" len="med"/>
                     </a:lnB>
+                    <a:solidFill>
+                      <a:srgbClr val="FFFFFF"/>
+                    </a:solidFill>
                   </a:tcPr>
                 </a:tc>
                 <a:tc>
@@ -7422,21 +5289,21 @@
                     <a:bodyPr/>
                     <a:lstStyle/>
                     <a:p>
-                      <a:pPr indent="0" marL="0">
+                      <a:pPr algn="ctr" indent="0" marL="0">
                         <a:buNone/>
                       </a:pPr>
                       <a:r>
-                        <a:rPr lang="en-US" sz="1400" dirty="0">
+                        <a:rPr lang="en-US" sz="1100" dirty="0">
                           <a:solidFill>
-                            <a:srgbClr val="1C2733"/>
+                            <a:srgbClr val="B23B3B"/>
                           </a:solidFill>
                           <a:latin typeface="Calibri" pitchFamily="34" charset="0"/>
                           <a:ea typeface="Calibri" pitchFamily="34" charset="-122"/>
                           <a:cs typeface="Calibri" pitchFamily="34" charset="-120"/>
                         </a:rPr>
-                        <a:t>0</a:t>
+                        <a:t>0,74</a:t>
                       </a:r>
-                      <a:endParaRPr lang="en-US" sz="1400" dirty="0">
+                      <a:endParaRPr lang="en-US" sz="1100" dirty="0">
                         <a:latin typeface="Calibri" charset="0"/>
                         <a:ea typeface="Calibri" charset="0"/>
                         <a:cs typeface="Calibri" charset="0"/>
@@ -7480,6 +5347,9 @@
                       <a:headEnd type="none" w="med" len="med"/>
                       <a:tailEnd type="none" w="med" len="med"/>
                     </a:lnB>
+                    <a:solidFill>
+                      <a:srgbClr val="FFFFFF"/>
+                    </a:solidFill>
                   </a:tcPr>
                 </a:tc>
                 <a:tc>
@@ -7487,21 +5357,21 @@
                     <a:bodyPr/>
                     <a:lstStyle/>
                     <a:p>
-                      <a:pPr indent="0" marL="0">
+                      <a:pPr algn="ctr" indent="0" marL="0">
                         <a:buNone/>
                       </a:pPr>
                       <a:r>
-                        <a:rPr lang="en-US" sz="1400" dirty="0">
+                        <a:rPr lang="en-US" sz="1100" dirty="0">
                           <a:solidFill>
-                            <a:srgbClr val="1C2733"/>
+                            <a:srgbClr val="B23B3B"/>
                           </a:solidFill>
                           <a:latin typeface="Calibri" pitchFamily="34" charset="0"/>
                           <a:ea typeface="Calibri" pitchFamily="34" charset="-122"/>
                           <a:cs typeface="Calibri" pitchFamily="34" charset="-120"/>
                         </a:rPr>
-                        <a:t>подтверждает k=2</a:t>
+                        <a:t>0,37</a:t>
                       </a:r>
-                      <a:endParaRPr lang="en-US" sz="1400" dirty="0">
+                      <a:endParaRPr lang="en-US" sz="1100" dirty="0">
                         <a:latin typeface="Calibri" charset="0"/>
                         <a:ea typeface="Calibri" charset="0"/>
                         <a:cs typeface="Calibri" charset="0"/>
@@ -7545,6 +5415,9 @@
                       <a:headEnd type="none" w="med" len="med"/>
                       <a:tailEnd type="none" w="med" len="med"/>
                     </a:lnB>
+                    <a:solidFill>
+                      <a:srgbClr val="FFFFFF"/>
+                    </a:solidFill>
                   </a:tcPr>
                 </a:tc>
               </a:tr>
@@ -7554,14 +5427,14 @@
       </p:graphicFrame>
       <p:sp>
         <p:nvSpPr>
-          <p:cNvPr id="5" name="Text 2"/>
+          <p:cNvPr id="7" name="Text 3"/>
           <p:cNvSpPr txBox="1"/>
           <p:nvPr/>
         </p:nvSpPr>
         <p:spPr>
           <a:xfrm>
-            <a:off x="548640" y="4160520"/>
-            <a:ext cx="10972800" cy="1097280"/>
+            <a:off x="7589520" y="4160520"/>
+            <a:ext cx="4114800" cy="1828800"/>
           </a:xfrm>
           <a:prstGeom prst="rect">
             <a:avLst/>
@@ -7577,37 +5450,76 @@
               <a:buNone/>
             </a:pPr>
             <a:r>
-              <a:rPr lang="en-US" sz="1400" b="1" dirty="0">
-                <a:solidFill>
-                  <a:srgbClr val="13294B"/>
-                </a:solidFill>
-                <a:latin typeface="Calibri" pitchFamily="34" charset="0"/>
-                <a:ea typeface="Calibri" pitchFamily="34" charset="-122"/>
-                <a:cs typeface="Calibri" pitchFamily="34" charset="-120"/>
-              </a:rPr>
-              <a:t>Ранг неустойчив к выбору лага </a:t>
-            </a:r>
+              <a:rPr lang="en-US" sz="1150" dirty="0">
+                <a:solidFill>
+                  <a:srgbClr val="CADCFC"/>
+                </a:solidFill>
+                <a:latin typeface="Calibri" pitchFamily="34" charset="0"/>
+                <a:ea typeface="Calibri" pitchFamily="34" charset="-122"/>
+                <a:cs typeface="Calibri" pitchFamily="34" charset="-120"/>
+              </a:rPr>
+              <a:t>Скользящее окно (60 мес.): p-значение падает с ~0,1 до ~10⁻³⁰ ровно в момент, когда в окно входит кризис 2022 года — и остаётся астрономически значимым все последующие годы, пока кризис в окне.</a:t>
+            </a:r>
+            <a:endParaRPr lang="en-US" sz="1150" dirty="0"/>
+          </a:p>
+        </p:txBody>
+      </p:sp>
+      <p:sp>
+        <p:nvSpPr>
+          <p:cNvPr id="8" name="Text 4"/>
+          <p:cNvSpPr txBox="1"/>
+          <p:nvPr/>
+        </p:nvSpPr>
+        <p:spPr>
+          <a:xfrm>
+            <a:off x="457200" y="5989320"/>
+            <a:ext cx="10881360" cy="457200"/>
+          </a:xfrm>
+          <a:prstGeom prst="rect">
+            <a:avLst/>
+          </a:prstGeom>
+          <a:noFill/>
+          <a:ln/>
+        </p:spPr>
+        <p:txBody>
+          <a:bodyPr wrap="square" lIns="0" tIns="0" rIns="0" bIns="0" rtlCol="0" anchor="ctr"/>
+          <a:lstStyle/>
+          <a:p>
             <a:pPr indent="0" marL="0">
               <a:buNone/>
             </a:pPr>
             <a:r>
-              <a:rPr lang="en-US" sz="1400" dirty="0">
-                <a:solidFill>
-                  <a:srgbClr val="1C2733"/>
-                </a:solidFill>
-                <a:latin typeface="Calibri" pitchFamily="34" charset="0"/>
-                <a:ea typeface="Calibri" pitchFamily="34" charset="-122"/>
-                <a:cs typeface="Calibri" pitchFamily="34" charset="-120"/>
-              </a:rPr>
-              <a:t>— это не техническая деталь, а содержательный вывод: свидетельство долгосрочной связи слабое, поэтому в основу модели его не кладём. Обе спецификации считаются и сравниваются на всех дальнейших шагах.</a:t>
-            </a:r>
-            <a:endParaRPr lang="en-US" sz="1400" dirty="0"/>
-          </a:p>
-        </p:txBody>
-      </p:sp>
-      <p:sp>
-        <p:nvSpPr>
-          <p:cNvPr id="6" name="Text 3"/>
+              <a:rPr lang="en-US" sz="1250" b="1" dirty="0">
+                <a:solidFill>
+                  <a:srgbClr val="C9A227"/>
+                </a:solidFill>
+                <a:latin typeface="Calibri" pitchFamily="34" charset="0"/>
+                <a:ea typeface="Calibri" pitchFamily="34" charset="-122"/>
+                <a:cs typeface="Calibri" pitchFamily="34" charset="-120"/>
+              </a:rPr>
+              <a:t>Вне кризисов предсказуемости нет ни в одну сторону. </a:t>
+            </a:r>
+            <a:pPr indent="0" marL="0">
+              <a:buNone/>
+            </a:pPr>
+            <a:r>
+              <a:rPr lang="en-US" sz="1250" dirty="0">
+                <a:solidFill>
+                  <a:srgbClr val="CADCFC"/>
+                </a:solidFill>
+                <a:latin typeface="Calibri" pitchFamily="34" charset="0"/>
+                <a:ea typeface="Calibri" pitchFamily="34" charset="-122"/>
+                <a:cs typeface="Calibri" pitchFamily="34" charset="-120"/>
+              </a:rPr>
+              <a:t>Полновыборочный результат — эффект нескольких кризисных месяцев, а не устойчивая закономерность.</a:t>
+            </a:r>
+            <a:endParaRPr lang="en-US" sz="1250" dirty="0"/>
+          </a:p>
+        </p:txBody>
+      </p:sp>
+      <p:sp>
+        <p:nvSpPr>
+          <p:cNvPr id="10" name="Text 5"/>
           <p:cNvSpPr txBox="1"/>
           <p:nvPr/>
         </p:nvSpPr>
@@ -7632,7 +5544,7 @@
             <a:r>
               <a:rPr lang="en-US" sz="1000" dirty="0">
                 <a:solidFill>
-                  <a:srgbClr val="6B7688"/>
+                  <a:srgbClr val="8592A8"/>
                 </a:solidFill>
                 <a:latin typeface="Calibri" pitchFamily="34" charset="0"/>
                 <a:ea typeface="Calibri" pitchFamily="34" charset="-122"/>
@@ -7701,7 +5613,7 @@
               <a:buNone/>
             </a:pPr>
             <a:r>
-              <a:rPr lang="en-US" sz="3000" b="1" dirty="0">
+              <a:rPr lang="en-US" sz="2800" b="1" dirty="0">
                 <a:solidFill>
                   <a:srgbClr val="1C2733"/>
                 </a:solidFill>
@@ -7709,15 +5621,15 @@
                 <a:ea typeface="Calibri" pitchFamily="34" charset="-122"/>
                 <a:cs typeface="Calibri" pitchFamily="34" charset="-120"/>
               </a:rPr>
-              <a:t>Три ряда во времени</a:t>
-            </a:r>
-            <a:endParaRPr lang="en-US" sz="3000" dirty="0"/>
+              <a:t>Импульсный отклик: исправленный масштаб и накопленный эффект</a:t>
+            </a:r>
+            <a:endParaRPr lang="en-US" sz="2800" dirty="0"/>
           </a:p>
         </p:txBody>
       </p:sp>
       <p:pic>
         <p:nvPicPr>
-          <p:cNvPr id="3" name="Image 0" descr="../output/figures/R1_three_series.png">    </p:cNvPr>
+          <p:cNvPr id="3" name="Image 0" descr="../output/figures/R2_irf_rate_to_fx.png">    </p:cNvPr>
           <p:cNvPicPr>
             <a:picLocks noChangeAspect="1"/>
           </p:cNvPicPr>
@@ -7731,8 +5643,8 @@
         </p:blipFill>
         <p:spPr>
           <a:xfrm>
-            <a:off x="3163824" y="1280160"/>
-            <a:ext cx="5861304" cy="5212080"/>
+            <a:off x="4297680" y="1188720"/>
+            <a:ext cx="3931920" cy="3657600"/>
           </a:xfrm>
           <a:prstGeom prst="rect">
             <a:avLst/>
@@ -7742,6 +5654,112 @@
       <p:sp>
         <p:nvSpPr>
           <p:cNvPr id="4" name="Text 1"/>
+          <p:cNvSpPr txBox="1"/>
+          <p:nvPr/>
+        </p:nvSpPr>
+        <p:spPr>
+          <a:xfrm>
+            <a:off x="457200" y="1371600"/>
+            <a:ext cx="3657600" cy="4114800"/>
+          </a:xfrm>
+          <a:prstGeom prst="rect">
+            <a:avLst/>
+          </a:prstGeom>
+          <a:noFill/>
+          <a:ln/>
+        </p:spPr>
+        <p:txBody>
+          <a:bodyPr wrap="square" lIns="0" tIns="0" rIns="0" bIns="0" rtlCol="0" anchor="ctr"/>
+          <a:lstStyle/>
+          <a:p>
+            <a:pPr marL="342900" indent="-342900">
+              <a:spcAft>
+                <a:spcPts val="1200"/>
+              </a:spcAft>
+              <a:buSzPct val="100000"/>
+              <a:buChar char="•"/>
+            </a:pPr>
+            <a:r>
+              <a:rPr lang="en-US" sz="1200" dirty="0">
+                <a:solidFill>
+                  <a:srgbClr val="1C2733"/>
+                </a:solidFill>
+                <a:latin typeface="Calibri" pitchFamily="34" charset="0"/>
+                <a:ea typeface="Calibri" pitchFamily="34" charset="-122"/>
+                <a:cs typeface="Calibri" pitchFamily="34" charset="-120"/>
+              </a:rPr>
+              <a:t>Шок — ровно 1 п.п. (в первой версии график был подписан «1 п.п.», но фактически показывал шок в 1 стандартное отклонение ≈ 1,33 п.п.)</a:t>
+            </a:r>
+            <a:endParaRPr lang="en-US" sz="1200" dirty="0"/>
+          </a:p>
+          <a:p>
+            <a:pPr marL="342900" indent="-342900">
+              <a:spcAft>
+                <a:spcPts val="1200"/>
+              </a:spcAft>
+              <a:buSzPct val="100000"/>
+              <a:buChar char="•"/>
+            </a:pPr>
+            <a:r>
+              <a:rPr lang="en-US" sz="1200" dirty="0">
+                <a:solidFill>
+                  <a:srgbClr val="1C2733"/>
+                </a:solidFill>
+                <a:latin typeface="Calibri" pitchFamily="34" charset="0"/>
+                <a:ea typeface="Calibri" pitchFamily="34" charset="-122"/>
+                <a:cs typeface="Calibri" pitchFamily="34" charset="-120"/>
+              </a:rPr>
+              <a:t>Пик +2,3% на 1-м месяце, разворот в минус на 2–4 месяце, гаснет к 6–7 месяцу</a:t>
+            </a:r>
+            <a:endParaRPr lang="en-US" sz="1200" dirty="0"/>
+          </a:p>
+          <a:p>
+            <a:pPr marL="342900" indent="-342900">
+              <a:spcAft>
+                <a:spcPts val="1200"/>
+              </a:spcAft>
+              <a:buSzPct val="100000"/>
+              <a:buChar char="•"/>
+            </a:pPr>
+            <a:r>
+              <a:rPr lang="en-US" sz="1200" dirty="0">
+                <a:solidFill>
+                  <a:srgbClr val="1C2733"/>
+                </a:solidFill>
+                <a:latin typeface="Calibri" pitchFamily="34" charset="0"/>
+                <a:ea typeface="Calibri" pitchFamily="34" charset="-122"/>
+                <a:cs typeface="Calibri" pitchFamily="34" charset="-120"/>
+              </a:rPr>
+              <a:t>Накопленный эффект перестаёт значимо отличаться от нуля уже с 3-го месяца (95% бутстрап-CI, 500 реплик, включает ноль)</a:t>
+            </a:r>
+            <a:endParaRPr lang="en-US" sz="1200" dirty="0"/>
+          </a:p>
+          <a:p>
+            <a:pPr marL="342900" indent="-342900">
+              <a:spcAft>
+                <a:spcPts val="1200"/>
+              </a:spcAft>
+              <a:buSzPct val="100000"/>
+              <a:buChar char="•"/>
+            </a:pPr>
+            <a:r>
+              <a:rPr lang="en-US" sz="1200" dirty="0">
+                <a:solidFill>
+                  <a:srgbClr val="1C2733"/>
+                </a:solidFill>
+                <a:latin typeface="Calibri" pitchFamily="34" charset="0"/>
+                <a:ea typeface="Calibri" pitchFamily="34" charset="-122"/>
+                <a:cs typeface="Calibri" pitchFamily="34" charset="-120"/>
+              </a:rPr>
+              <a:t>Ортогонализация по Холецкому: ставка первая в порядке — доп. допущение, устойчивое к перестановке (Т7b)</a:t>
+            </a:r>
+            <a:endParaRPr lang="en-US" sz="1200" dirty="0"/>
+          </a:p>
+        </p:txBody>
+      </p:sp>
+      <p:sp>
+        <p:nvSpPr>
+          <p:cNvPr id="5" name="Text 2"/>
           <p:cNvSpPr txBox="1"/>
           <p:nvPr/>
         </p:nvSpPr>
@@ -7835,7 +5853,7 @@
               <a:buNone/>
             </a:pPr>
             <a:r>
-              <a:rPr lang="en-US" sz="3000" b="1" dirty="0">
+              <a:rPr lang="en-US" sz="2800" b="1" dirty="0">
                 <a:solidFill>
                   <a:srgbClr val="1C2733"/>
                 </a:solidFill>
@@ -7843,22 +5861,1086 @@
                 <a:ea typeface="Calibri" pitchFamily="34" charset="-122"/>
                 <a:cs typeface="Calibri" pitchFamily="34" charset="-120"/>
               </a:rPr>
-              <a:t>Тест Грейнджера: асимметрия на полной выборке</a:t>
-            </a:r>
-            <a:endParaRPr lang="en-US" sz="3000" dirty="0"/>
-          </a:p>
-        </p:txBody>
-      </p:sp>
-      <p:sp>
-        <p:nvSpPr>
-          <p:cNvPr id="3" name="Text 1"/>
+              <a:t>GARCH: спецификация выбрана, не угадана</a:t>
+            </a:r>
+            <a:endParaRPr lang="en-US" sz="2800" dirty="0"/>
+          </a:p>
+        </p:txBody>
+      </p:sp>
+      <p:graphicFrame>
+        <p:nvGraphicFramePr>
+          <p:cNvPr id="9" name="Table 0"/>
+          <p:cNvGraphicFramePr>
+            <a:graphicFrameLocks noGrp="1"/>
+          </p:cNvGraphicFramePr>
+          <p:nvPr>
+            <p:extLst>
+              <p:ext uri="{D42A27DB-BD31-4B8C-83A1-F6EECF244321}">
+                <p14:modId xmlns:p14="http://schemas.microsoft.com/office/powerpoint/2010/main" val="1579011935"/>
+              </p:ext>
+            </p:extLst>
+          </p:nvPr>
+        </p:nvGraphicFramePr>
+        <p:xfrm>
+          <a:off x="548640" y="1371600"/>
+          <a:ext cx="5486400" cy="2011680"/>
+        </p:xfrm>
+        <a:graphic>
+          <a:graphicData uri="http://schemas.openxmlformats.org/drawingml/2006/table">
+            <a:tbl>
+              <a:tblPr/>
+              <a:tblGrid>
+                <a:gridCol w="3291840"/>
+                <a:gridCol w="1097280"/>
+                <a:gridCol w="1097280"/>
+              </a:tblGrid>
+              <a:tr h="402336">
+                <a:tc>
+                  <a:txBody>
+                    <a:bodyPr/>
+                    <a:lstStyle/>
+                    <a:p>
+                      <a:pPr indent="0" marL="0">
+                        <a:buNone/>
+                      </a:pPr>
+                      <a:r>
+                        <a:rPr lang="en-US" sz="1200" b="1" dirty="0">
+                          <a:solidFill>
+                            <a:srgbClr val="FFFFFF"/>
+                          </a:solidFill>
+                          <a:latin typeface="Calibri" pitchFamily="34" charset="0"/>
+                          <a:ea typeface="Calibri" pitchFamily="34" charset="-122"/>
+                          <a:cs typeface="Calibri" pitchFamily="34" charset="-120"/>
+                        </a:rPr>
+                        <a:t>Спецификация</a:t>
+                      </a:r>
+                      <a:endParaRPr lang="en-US" sz="1200" dirty="0">
+                        <a:latin typeface="Calibri" charset="0"/>
+                        <a:ea typeface="Calibri" charset="0"/>
+                        <a:cs typeface="Calibri" charset="0"/>
+                      </a:endParaRPr>
+                    </a:p>
+                  </a:txBody>
+                  <a:tcPr marL="91440" marR="91440" marT="45720" marB="45720">
+                    <a:lnL w="12700" cap="flat" cmpd="sng" algn="ctr">
+                      <a:solidFill>
+                        <a:srgbClr val="E3E7ED"/>
+                      </a:solidFill>
+                      <a:prstDash val="solid"/>
+                      <a:round/>
+                      <a:headEnd type="none" w="med" len="med"/>
+                      <a:tailEnd type="none" w="med" len="med"/>
+                    </a:lnL>
+                    <a:lnR w="12700" cap="flat" cmpd="sng" algn="ctr">
+                      <a:solidFill>
+                        <a:srgbClr val="E3E7ED"/>
+                      </a:solidFill>
+                      <a:prstDash val="solid"/>
+                      <a:round/>
+                      <a:headEnd type="none" w="med" len="med"/>
+                      <a:tailEnd type="none" w="med" len="med"/>
+                    </a:lnR>
+                    <a:lnT w="12700" cap="flat" cmpd="sng" algn="ctr">
+                      <a:solidFill>
+                        <a:srgbClr val="E3E7ED"/>
+                      </a:solidFill>
+                      <a:prstDash val="solid"/>
+                      <a:round/>
+                      <a:headEnd type="none" w="med" len="med"/>
+                      <a:tailEnd type="none" w="med" len="med"/>
+                    </a:lnT>
+                    <a:lnB w="12700" cap="flat" cmpd="sng" algn="ctr">
+                      <a:solidFill>
+                        <a:srgbClr val="E3E7ED"/>
+                      </a:solidFill>
+                      <a:prstDash val="solid"/>
+                      <a:round/>
+                      <a:headEnd type="none" w="med" len="med"/>
+                      <a:tailEnd type="none" w="med" len="med"/>
+                    </a:lnB>
+                    <a:solidFill>
+                      <a:srgbClr val="13294B"/>
+                    </a:solidFill>
+                  </a:tcPr>
+                </a:tc>
+                <a:tc>
+                  <a:txBody>
+                    <a:bodyPr/>
+                    <a:lstStyle/>
+                    <a:p>
+                      <a:pPr indent="0" marL="0">
+                        <a:buNone/>
+                      </a:pPr>
+                      <a:r>
+                        <a:rPr lang="en-US" sz="1200" b="1" dirty="0">
+                          <a:solidFill>
+                            <a:srgbClr val="FFFFFF"/>
+                          </a:solidFill>
+                          <a:latin typeface="Calibri" pitchFamily="34" charset="0"/>
+                          <a:ea typeface="Calibri" pitchFamily="34" charset="-122"/>
+                          <a:cs typeface="Calibri" pitchFamily="34" charset="-120"/>
+                        </a:rPr>
+                        <a:t>AIC</a:t>
+                      </a:r>
+                      <a:endParaRPr lang="en-US" sz="1200" dirty="0">
+                        <a:latin typeface="Calibri" charset="0"/>
+                        <a:ea typeface="Calibri" charset="0"/>
+                        <a:cs typeface="Calibri" charset="0"/>
+                      </a:endParaRPr>
+                    </a:p>
+                  </a:txBody>
+                  <a:tcPr marL="91440" marR="91440" marT="45720" marB="45720">
+                    <a:lnL w="12700" cap="flat" cmpd="sng" algn="ctr">
+                      <a:solidFill>
+                        <a:srgbClr val="E3E7ED"/>
+                      </a:solidFill>
+                      <a:prstDash val="solid"/>
+                      <a:round/>
+                      <a:headEnd type="none" w="med" len="med"/>
+                      <a:tailEnd type="none" w="med" len="med"/>
+                    </a:lnL>
+                    <a:lnR w="12700" cap="flat" cmpd="sng" algn="ctr">
+                      <a:solidFill>
+                        <a:srgbClr val="E3E7ED"/>
+                      </a:solidFill>
+                      <a:prstDash val="solid"/>
+                      <a:round/>
+                      <a:headEnd type="none" w="med" len="med"/>
+                      <a:tailEnd type="none" w="med" len="med"/>
+                    </a:lnR>
+                    <a:lnT w="12700" cap="flat" cmpd="sng" algn="ctr">
+                      <a:solidFill>
+                        <a:srgbClr val="E3E7ED"/>
+                      </a:solidFill>
+                      <a:prstDash val="solid"/>
+                      <a:round/>
+                      <a:headEnd type="none" w="med" len="med"/>
+                      <a:tailEnd type="none" w="med" len="med"/>
+                    </a:lnT>
+                    <a:lnB w="12700" cap="flat" cmpd="sng" algn="ctr">
+                      <a:solidFill>
+                        <a:srgbClr val="E3E7ED"/>
+                      </a:solidFill>
+                      <a:prstDash val="solid"/>
+                      <a:round/>
+                      <a:headEnd type="none" w="med" len="med"/>
+                      <a:tailEnd type="none" w="med" len="med"/>
+                    </a:lnB>
+                    <a:solidFill>
+                      <a:srgbClr val="13294B"/>
+                    </a:solidFill>
+                  </a:tcPr>
+                </a:tc>
+                <a:tc>
+                  <a:txBody>
+                    <a:bodyPr/>
+                    <a:lstStyle/>
+                    <a:p>
+                      <a:pPr indent="0" marL="0">
+                        <a:buNone/>
+                      </a:pPr>
+                      <a:r>
+                        <a:rPr lang="en-US" sz="1200" b="1" dirty="0">
+                          <a:solidFill>
+                            <a:srgbClr val="FFFFFF"/>
+                          </a:solidFill>
+                          <a:latin typeface="Calibri" pitchFamily="34" charset="0"/>
+                          <a:ea typeface="Calibri" pitchFamily="34" charset="-122"/>
+                          <a:cs typeface="Calibri" pitchFamily="34" charset="-120"/>
+                        </a:rPr>
+                        <a:t>BIC</a:t>
+                      </a:r>
+                      <a:endParaRPr lang="en-US" sz="1200" dirty="0">
+                        <a:latin typeface="Calibri" charset="0"/>
+                        <a:ea typeface="Calibri" charset="0"/>
+                        <a:cs typeface="Calibri" charset="0"/>
+                      </a:endParaRPr>
+                    </a:p>
+                  </a:txBody>
+                  <a:tcPr marL="91440" marR="91440" marT="45720" marB="45720">
+                    <a:lnL w="12700" cap="flat" cmpd="sng" algn="ctr">
+                      <a:solidFill>
+                        <a:srgbClr val="E3E7ED"/>
+                      </a:solidFill>
+                      <a:prstDash val="solid"/>
+                      <a:round/>
+                      <a:headEnd type="none" w="med" len="med"/>
+                      <a:tailEnd type="none" w="med" len="med"/>
+                    </a:lnL>
+                    <a:lnR w="12700" cap="flat" cmpd="sng" algn="ctr">
+                      <a:solidFill>
+                        <a:srgbClr val="E3E7ED"/>
+                      </a:solidFill>
+                      <a:prstDash val="solid"/>
+                      <a:round/>
+                      <a:headEnd type="none" w="med" len="med"/>
+                      <a:tailEnd type="none" w="med" len="med"/>
+                    </a:lnR>
+                    <a:lnT w="12700" cap="flat" cmpd="sng" algn="ctr">
+                      <a:solidFill>
+                        <a:srgbClr val="E3E7ED"/>
+                      </a:solidFill>
+                      <a:prstDash val="solid"/>
+                      <a:round/>
+                      <a:headEnd type="none" w="med" len="med"/>
+                      <a:tailEnd type="none" w="med" len="med"/>
+                    </a:lnT>
+                    <a:lnB w="12700" cap="flat" cmpd="sng" algn="ctr">
+                      <a:solidFill>
+                        <a:srgbClr val="E3E7ED"/>
+                      </a:solidFill>
+                      <a:prstDash val="solid"/>
+                      <a:round/>
+                      <a:headEnd type="none" w="med" len="med"/>
+                      <a:tailEnd type="none" w="med" len="med"/>
+                    </a:lnB>
+                    <a:solidFill>
+                      <a:srgbClr val="13294B"/>
+                    </a:solidFill>
+                  </a:tcPr>
+                </a:tc>
+              </a:tr>
+              <a:tr h="402336">
+                <a:tc>
+                  <a:txBody>
+                    <a:bodyPr/>
+                    <a:lstStyle/>
+                    <a:p>
+                      <a:pPr indent="0" marL="0">
+                        <a:buNone/>
+                      </a:pPr>
+                      <a:r>
+                        <a:rPr lang="en-US" sz="1200" dirty="0">
+                          <a:solidFill>
+                            <a:srgbClr val="1C2733"/>
+                          </a:solidFill>
+                          <a:latin typeface="Calibri" pitchFamily="34" charset="0"/>
+                          <a:ea typeface="Calibri" pitchFamily="34" charset="-122"/>
+                          <a:cs typeface="Calibri" pitchFamily="34" charset="-120"/>
+                        </a:rPr>
+                        <a:t>t, AR(1)-mean, GJR (выбрана)</a:t>
+                      </a:r>
+                      <a:endParaRPr lang="en-US" sz="1200" dirty="0">
+                        <a:latin typeface="Calibri" charset="0"/>
+                        <a:ea typeface="Calibri" charset="0"/>
+                        <a:cs typeface="Calibri" charset="0"/>
+                      </a:endParaRPr>
+                    </a:p>
+                  </a:txBody>
+                  <a:tcPr marL="91440" marR="91440" marT="45720" marB="45720">
+                    <a:lnL w="12700" cap="flat" cmpd="sng" algn="ctr">
+                      <a:solidFill>
+                        <a:srgbClr val="E3E7ED"/>
+                      </a:solidFill>
+                      <a:prstDash val="solid"/>
+                      <a:round/>
+                      <a:headEnd type="none" w="med" len="med"/>
+                      <a:tailEnd type="none" w="med" len="med"/>
+                    </a:lnL>
+                    <a:lnR w="12700" cap="flat" cmpd="sng" algn="ctr">
+                      <a:solidFill>
+                        <a:srgbClr val="E3E7ED"/>
+                      </a:solidFill>
+                      <a:prstDash val="solid"/>
+                      <a:round/>
+                      <a:headEnd type="none" w="med" len="med"/>
+                      <a:tailEnd type="none" w="med" len="med"/>
+                    </a:lnR>
+                    <a:lnT w="12700" cap="flat" cmpd="sng" algn="ctr">
+                      <a:solidFill>
+                        <a:srgbClr val="E3E7ED"/>
+                      </a:solidFill>
+                      <a:prstDash val="solid"/>
+                      <a:round/>
+                      <a:headEnd type="none" w="med" len="med"/>
+                      <a:tailEnd type="none" w="med" len="med"/>
+                    </a:lnT>
+                    <a:lnB w="12700" cap="flat" cmpd="sng" algn="ctr">
+                      <a:solidFill>
+                        <a:srgbClr val="E3E7ED"/>
+                      </a:solidFill>
+                      <a:prstDash val="solid"/>
+                      <a:round/>
+                      <a:headEnd type="none" w="med" len="med"/>
+                      <a:tailEnd type="none" w="med" len="med"/>
+                    </a:lnB>
+                  </a:tcPr>
+                </a:tc>
+                <a:tc>
+                  <a:txBody>
+                    <a:bodyPr/>
+                    <a:lstStyle/>
+                    <a:p>
+                      <a:pPr indent="0" marL="0">
+                        <a:buNone/>
+                      </a:pPr>
+                      <a:r>
+                        <a:rPr lang="en-US" sz="1200" dirty="0">
+                          <a:solidFill>
+                            <a:srgbClr val="1C2733"/>
+                          </a:solidFill>
+                          <a:latin typeface="Calibri" pitchFamily="34" charset="0"/>
+                          <a:ea typeface="Calibri" pitchFamily="34" charset="-122"/>
+                          <a:cs typeface="Calibri" pitchFamily="34" charset="-120"/>
+                        </a:rPr>
+                        <a:t>8201</a:t>
+                      </a:r>
+                      <a:endParaRPr lang="en-US" sz="1200" dirty="0">
+                        <a:latin typeface="Calibri" charset="0"/>
+                        <a:ea typeface="Calibri" charset="0"/>
+                        <a:cs typeface="Calibri" charset="0"/>
+                      </a:endParaRPr>
+                    </a:p>
+                  </a:txBody>
+                  <a:tcPr marL="91440" marR="91440" marT="45720" marB="45720">
+                    <a:lnL w="12700" cap="flat" cmpd="sng" algn="ctr">
+                      <a:solidFill>
+                        <a:srgbClr val="E3E7ED"/>
+                      </a:solidFill>
+                      <a:prstDash val="solid"/>
+                      <a:round/>
+                      <a:headEnd type="none" w="med" len="med"/>
+                      <a:tailEnd type="none" w="med" len="med"/>
+                    </a:lnL>
+                    <a:lnR w="12700" cap="flat" cmpd="sng" algn="ctr">
+                      <a:solidFill>
+                        <a:srgbClr val="E3E7ED"/>
+                      </a:solidFill>
+                      <a:prstDash val="solid"/>
+                      <a:round/>
+                      <a:headEnd type="none" w="med" len="med"/>
+                      <a:tailEnd type="none" w="med" len="med"/>
+                    </a:lnR>
+                    <a:lnT w="12700" cap="flat" cmpd="sng" algn="ctr">
+                      <a:solidFill>
+                        <a:srgbClr val="E3E7ED"/>
+                      </a:solidFill>
+                      <a:prstDash val="solid"/>
+                      <a:round/>
+                      <a:headEnd type="none" w="med" len="med"/>
+                      <a:tailEnd type="none" w="med" len="med"/>
+                    </a:lnT>
+                    <a:lnB w="12700" cap="flat" cmpd="sng" algn="ctr">
+                      <a:solidFill>
+                        <a:srgbClr val="E3E7ED"/>
+                      </a:solidFill>
+                      <a:prstDash val="solid"/>
+                      <a:round/>
+                      <a:headEnd type="none" w="med" len="med"/>
+                      <a:tailEnd type="none" w="med" len="med"/>
+                    </a:lnB>
+                  </a:tcPr>
+                </a:tc>
+                <a:tc>
+                  <a:txBody>
+                    <a:bodyPr/>
+                    <a:lstStyle/>
+                    <a:p>
+                      <a:pPr indent="0" marL="0">
+                        <a:buNone/>
+                      </a:pPr>
+                      <a:r>
+                        <a:rPr lang="en-US" sz="1200" b="1" dirty="0">
+                          <a:solidFill>
+                            <a:srgbClr val="1C7C3E"/>
+                          </a:solidFill>
+                          <a:latin typeface="Calibri" pitchFamily="34" charset="0"/>
+                          <a:ea typeface="Calibri" pitchFamily="34" charset="-122"/>
+                          <a:cs typeface="Calibri" pitchFamily="34" charset="-120"/>
+                        </a:rPr>
+                        <a:t>8244</a:t>
+                      </a:r>
+                      <a:endParaRPr lang="en-US" sz="1200" dirty="0">
+                        <a:latin typeface="Calibri" charset="0"/>
+                        <a:ea typeface="Calibri" charset="0"/>
+                        <a:cs typeface="Calibri" charset="0"/>
+                      </a:endParaRPr>
+                    </a:p>
+                  </a:txBody>
+                  <a:tcPr marL="91440" marR="91440" marT="45720" marB="45720">
+                    <a:lnL w="12700" cap="flat" cmpd="sng" algn="ctr">
+                      <a:solidFill>
+                        <a:srgbClr val="E3E7ED"/>
+                      </a:solidFill>
+                      <a:prstDash val="solid"/>
+                      <a:round/>
+                      <a:headEnd type="none" w="med" len="med"/>
+                      <a:tailEnd type="none" w="med" len="med"/>
+                    </a:lnL>
+                    <a:lnR w="12700" cap="flat" cmpd="sng" algn="ctr">
+                      <a:solidFill>
+                        <a:srgbClr val="E3E7ED"/>
+                      </a:solidFill>
+                      <a:prstDash val="solid"/>
+                      <a:round/>
+                      <a:headEnd type="none" w="med" len="med"/>
+                      <a:tailEnd type="none" w="med" len="med"/>
+                    </a:lnR>
+                    <a:lnT w="12700" cap="flat" cmpd="sng" algn="ctr">
+                      <a:solidFill>
+                        <a:srgbClr val="E3E7ED"/>
+                      </a:solidFill>
+                      <a:prstDash val="solid"/>
+                      <a:round/>
+                      <a:headEnd type="none" w="med" len="med"/>
+                      <a:tailEnd type="none" w="med" len="med"/>
+                    </a:lnT>
+                    <a:lnB w="12700" cap="flat" cmpd="sng" algn="ctr">
+                      <a:solidFill>
+                        <a:srgbClr val="E3E7ED"/>
+                      </a:solidFill>
+                      <a:prstDash val="solid"/>
+                      <a:round/>
+                      <a:headEnd type="none" w="med" len="med"/>
+                      <a:tailEnd type="none" w="med" len="med"/>
+                    </a:lnB>
+                  </a:tcPr>
+                </a:tc>
+              </a:tr>
+              <a:tr h="402336">
+                <a:tc>
+                  <a:txBody>
+                    <a:bodyPr/>
+                    <a:lstStyle/>
+                    <a:p>
+                      <a:pPr indent="0" marL="0">
+                        <a:buNone/>
+                      </a:pPr>
+                      <a:r>
+                        <a:rPr lang="en-US" sz="1200" dirty="0">
+                          <a:solidFill>
+                            <a:srgbClr val="1C2733"/>
+                          </a:solidFill>
+                          <a:latin typeface="Calibri" pitchFamily="34" charset="0"/>
+                          <a:ea typeface="Calibri" pitchFamily="34" charset="-122"/>
+                          <a:cs typeface="Calibri" pitchFamily="34" charset="-120"/>
+                        </a:rPr>
+                        <a:t>t, AR(1)-mean</a:t>
+                      </a:r>
+                      <a:endParaRPr lang="en-US" sz="1200" dirty="0">
+                        <a:latin typeface="Calibri" charset="0"/>
+                        <a:ea typeface="Calibri" charset="0"/>
+                        <a:cs typeface="Calibri" charset="0"/>
+                      </a:endParaRPr>
+                    </a:p>
+                  </a:txBody>
+                  <a:tcPr marL="91440" marR="91440" marT="45720" marB="45720">
+                    <a:lnL w="12700" cap="flat" cmpd="sng" algn="ctr">
+                      <a:solidFill>
+                        <a:srgbClr val="E3E7ED"/>
+                      </a:solidFill>
+                      <a:prstDash val="solid"/>
+                      <a:round/>
+                      <a:headEnd type="none" w="med" len="med"/>
+                      <a:tailEnd type="none" w="med" len="med"/>
+                    </a:lnL>
+                    <a:lnR w="12700" cap="flat" cmpd="sng" algn="ctr">
+                      <a:solidFill>
+                        <a:srgbClr val="E3E7ED"/>
+                      </a:solidFill>
+                      <a:prstDash val="solid"/>
+                      <a:round/>
+                      <a:headEnd type="none" w="med" len="med"/>
+                      <a:tailEnd type="none" w="med" len="med"/>
+                    </a:lnR>
+                    <a:lnT w="12700" cap="flat" cmpd="sng" algn="ctr">
+                      <a:solidFill>
+                        <a:srgbClr val="E3E7ED"/>
+                      </a:solidFill>
+                      <a:prstDash val="solid"/>
+                      <a:round/>
+                      <a:headEnd type="none" w="med" len="med"/>
+                      <a:tailEnd type="none" w="med" len="med"/>
+                    </a:lnT>
+                    <a:lnB w="12700" cap="flat" cmpd="sng" algn="ctr">
+                      <a:solidFill>
+                        <a:srgbClr val="E3E7ED"/>
+                      </a:solidFill>
+                      <a:prstDash val="solid"/>
+                      <a:round/>
+                      <a:headEnd type="none" w="med" len="med"/>
+                      <a:tailEnd type="none" w="med" len="med"/>
+                    </a:lnB>
+                  </a:tcPr>
+                </a:tc>
+                <a:tc>
+                  <a:txBody>
+                    <a:bodyPr/>
+                    <a:lstStyle/>
+                    <a:p>
+                      <a:pPr indent="0" marL="0">
+                        <a:buNone/>
+                      </a:pPr>
+                      <a:r>
+                        <a:rPr lang="en-US" sz="1200" dirty="0">
+                          <a:solidFill>
+                            <a:srgbClr val="1C2733"/>
+                          </a:solidFill>
+                          <a:latin typeface="Calibri" pitchFamily="34" charset="0"/>
+                          <a:ea typeface="Calibri" pitchFamily="34" charset="-122"/>
+                          <a:cs typeface="Calibri" pitchFamily="34" charset="-120"/>
+                        </a:rPr>
+                        <a:t>8227</a:t>
+                      </a:r>
+                      <a:endParaRPr lang="en-US" sz="1200" dirty="0">
+                        <a:latin typeface="Calibri" charset="0"/>
+                        <a:ea typeface="Calibri" charset="0"/>
+                        <a:cs typeface="Calibri" charset="0"/>
+                      </a:endParaRPr>
+                    </a:p>
+                  </a:txBody>
+                  <a:tcPr marL="91440" marR="91440" marT="45720" marB="45720">
+                    <a:lnL w="12700" cap="flat" cmpd="sng" algn="ctr">
+                      <a:solidFill>
+                        <a:srgbClr val="E3E7ED"/>
+                      </a:solidFill>
+                      <a:prstDash val="solid"/>
+                      <a:round/>
+                      <a:headEnd type="none" w="med" len="med"/>
+                      <a:tailEnd type="none" w="med" len="med"/>
+                    </a:lnL>
+                    <a:lnR w="12700" cap="flat" cmpd="sng" algn="ctr">
+                      <a:solidFill>
+                        <a:srgbClr val="E3E7ED"/>
+                      </a:solidFill>
+                      <a:prstDash val="solid"/>
+                      <a:round/>
+                      <a:headEnd type="none" w="med" len="med"/>
+                      <a:tailEnd type="none" w="med" len="med"/>
+                    </a:lnR>
+                    <a:lnT w="12700" cap="flat" cmpd="sng" algn="ctr">
+                      <a:solidFill>
+                        <a:srgbClr val="E3E7ED"/>
+                      </a:solidFill>
+                      <a:prstDash val="solid"/>
+                      <a:round/>
+                      <a:headEnd type="none" w="med" len="med"/>
+                      <a:tailEnd type="none" w="med" len="med"/>
+                    </a:lnT>
+                    <a:lnB w="12700" cap="flat" cmpd="sng" algn="ctr">
+                      <a:solidFill>
+                        <a:srgbClr val="E3E7ED"/>
+                      </a:solidFill>
+                      <a:prstDash val="solid"/>
+                      <a:round/>
+                      <a:headEnd type="none" w="med" len="med"/>
+                      <a:tailEnd type="none" w="med" len="med"/>
+                    </a:lnB>
+                  </a:tcPr>
+                </a:tc>
+                <a:tc>
+                  <a:txBody>
+                    <a:bodyPr/>
+                    <a:lstStyle/>
+                    <a:p>
+                      <a:pPr indent="0" marL="0">
+                        <a:buNone/>
+                      </a:pPr>
+                      <a:r>
+                        <a:rPr lang="en-US" sz="1200" dirty="0">
+                          <a:solidFill>
+                            <a:srgbClr val="1C2733"/>
+                          </a:solidFill>
+                          <a:latin typeface="Calibri" pitchFamily="34" charset="0"/>
+                          <a:ea typeface="Calibri" pitchFamily="34" charset="-122"/>
+                          <a:cs typeface="Calibri" pitchFamily="34" charset="-120"/>
+                        </a:rPr>
+                        <a:t>8263</a:t>
+                      </a:r>
+                      <a:endParaRPr lang="en-US" sz="1200" dirty="0">
+                        <a:latin typeface="Calibri" charset="0"/>
+                        <a:ea typeface="Calibri" charset="0"/>
+                        <a:cs typeface="Calibri" charset="0"/>
+                      </a:endParaRPr>
+                    </a:p>
+                  </a:txBody>
+                  <a:tcPr marL="91440" marR="91440" marT="45720" marB="45720">
+                    <a:lnL w="12700" cap="flat" cmpd="sng" algn="ctr">
+                      <a:solidFill>
+                        <a:srgbClr val="E3E7ED"/>
+                      </a:solidFill>
+                      <a:prstDash val="solid"/>
+                      <a:round/>
+                      <a:headEnd type="none" w="med" len="med"/>
+                      <a:tailEnd type="none" w="med" len="med"/>
+                    </a:lnL>
+                    <a:lnR w="12700" cap="flat" cmpd="sng" algn="ctr">
+                      <a:solidFill>
+                        <a:srgbClr val="E3E7ED"/>
+                      </a:solidFill>
+                      <a:prstDash val="solid"/>
+                      <a:round/>
+                      <a:headEnd type="none" w="med" len="med"/>
+                      <a:tailEnd type="none" w="med" len="med"/>
+                    </a:lnR>
+                    <a:lnT w="12700" cap="flat" cmpd="sng" algn="ctr">
+                      <a:solidFill>
+                        <a:srgbClr val="E3E7ED"/>
+                      </a:solidFill>
+                      <a:prstDash val="solid"/>
+                      <a:round/>
+                      <a:headEnd type="none" w="med" len="med"/>
+                      <a:tailEnd type="none" w="med" len="med"/>
+                    </a:lnT>
+                    <a:lnB w="12700" cap="flat" cmpd="sng" algn="ctr">
+                      <a:solidFill>
+                        <a:srgbClr val="E3E7ED"/>
+                      </a:solidFill>
+                      <a:prstDash val="solid"/>
+                      <a:round/>
+                      <a:headEnd type="none" w="med" len="med"/>
+                      <a:tailEnd type="none" w="med" len="med"/>
+                    </a:lnB>
+                  </a:tcPr>
+                </a:tc>
+              </a:tr>
+              <a:tr h="402336">
+                <a:tc>
+                  <a:txBody>
+                    <a:bodyPr/>
+                    <a:lstStyle/>
+                    <a:p>
+                      <a:pPr indent="0" marL="0">
+                        <a:buNone/>
+                      </a:pPr>
+                      <a:r>
+                        <a:rPr lang="en-US" sz="1200" dirty="0">
+                          <a:solidFill>
+                            <a:srgbClr val="1C2733"/>
+                          </a:solidFill>
+                          <a:latin typeface="Calibri" pitchFamily="34" charset="0"/>
+                          <a:ea typeface="Calibri" pitchFamily="34" charset="-122"/>
+                          <a:cs typeface="Calibri" pitchFamily="34" charset="-120"/>
+                        </a:rPr>
+                        <a:t>t, const-mean</a:t>
+                      </a:r>
+                      <a:endParaRPr lang="en-US" sz="1200" dirty="0">
+                        <a:latin typeface="Calibri" charset="0"/>
+                        <a:ea typeface="Calibri" charset="0"/>
+                        <a:cs typeface="Calibri" charset="0"/>
+                      </a:endParaRPr>
+                    </a:p>
+                  </a:txBody>
+                  <a:tcPr marL="91440" marR="91440" marT="45720" marB="45720">
+                    <a:lnL w="12700" cap="flat" cmpd="sng" algn="ctr">
+                      <a:solidFill>
+                        <a:srgbClr val="E3E7ED"/>
+                      </a:solidFill>
+                      <a:prstDash val="solid"/>
+                      <a:round/>
+                      <a:headEnd type="none" w="med" len="med"/>
+                      <a:tailEnd type="none" w="med" len="med"/>
+                    </a:lnL>
+                    <a:lnR w="12700" cap="flat" cmpd="sng" algn="ctr">
+                      <a:solidFill>
+                        <a:srgbClr val="E3E7ED"/>
+                      </a:solidFill>
+                      <a:prstDash val="solid"/>
+                      <a:round/>
+                      <a:headEnd type="none" w="med" len="med"/>
+                      <a:tailEnd type="none" w="med" len="med"/>
+                    </a:lnR>
+                    <a:lnT w="12700" cap="flat" cmpd="sng" algn="ctr">
+                      <a:solidFill>
+                        <a:srgbClr val="E3E7ED"/>
+                      </a:solidFill>
+                      <a:prstDash val="solid"/>
+                      <a:round/>
+                      <a:headEnd type="none" w="med" len="med"/>
+                      <a:tailEnd type="none" w="med" len="med"/>
+                    </a:lnT>
+                    <a:lnB w="12700" cap="flat" cmpd="sng" algn="ctr">
+                      <a:solidFill>
+                        <a:srgbClr val="E3E7ED"/>
+                      </a:solidFill>
+                      <a:prstDash val="solid"/>
+                      <a:round/>
+                      <a:headEnd type="none" w="med" len="med"/>
+                      <a:tailEnd type="none" w="med" len="med"/>
+                    </a:lnB>
+                  </a:tcPr>
+                </a:tc>
+                <a:tc>
+                  <a:txBody>
+                    <a:bodyPr/>
+                    <a:lstStyle/>
+                    <a:p>
+                      <a:pPr indent="0" marL="0">
+                        <a:buNone/>
+                      </a:pPr>
+                      <a:r>
+                        <a:rPr lang="en-US" sz="1200" dirty="0">
+                          <a:solidFill>
+                            <a:srgbClr val="1C2733"/>
+                          </a:solidFill>
+                          <a:latin typeface="Calibri" pitchFamily="34" charset="0"/>
+                          <a:ea typeface="Calibri" pitchFamily="34" charset="-122"/>
+                          <a:cs typeface="Calibri" pitchFamily="34" charset="-120"/>
+                        </a:rPr>
+                        <a:t>8257</a:t>
+                      </a:r>
+                      <a:endParaRPr lang="en-US" sz="1200" dirty="0">
+                        <a:latin typeface="Calibri" charset="0"/>
+                        <a:ea typeface="Calibri" charset="0"/>
+                        <a:cs typeface="Calibri" charset="0"/>
+                      </a:endParaRPr>
+                    </a:p>
+                  </a:txBody>
+                  <a:tcPr marL="91440" marR="91440" marT="45720" marB="45720">
+                    <a:lnL w="12700" cap="flat" cmpd="sng" algn="ctr">
+                      <a:solidFill>
+                        <a:srgbClr val="E3E7ED"/>
+                      </a:solidFill>
+                      <a:prstDash val="solid"/>
+                      <a:round/>
+                      <a:headEnd type="none" w="med" len="med"/>
+                      <a:tailEnd type="none" w="med" len="med"/>
+                    </a:lnL>
+                    <a:lnR w="12700" cap="flat" cmpd="sng" algn="ctr">
+                      <a:solidFill>
+                        <a:srgbClr val="E3E7ED"/>
+                      </a:solidFill>
+                      <a:prstDash val="solid"/>
+                      <a:round/>
+                      <a:headEnd type="none" w="med" len="med"/>
+                      <a:tailEnd type="none" w="med" len="med"/>
+                    </a:lnR>
+                    <a:lnT w="12700" cap="flat" cmpd="sng" algn="ctr">
+                      <a:solidFill>
+                        <a:srgbClr val="E3E7ED"/>
+                      </a:solidFill>
+                      <a:prstDash val="solid"/>
+                      <a:round/>
+                      <a:headEnd type="none" w="med" len="med"/>
+                      <a:tailEnd type="none" w="med" len="med"/>
+                    </a:lnT>
+                    <a:lnB w="12700" cap="flat" cmpd="sng" algn="ctr">
+                      <a:solidFill>
+                        <a:srgbClr val="E3E7ED"/>
+                      </a:solidFill>
+                      <a:prstDash val="solid"/>
+                      <a:round/>
+                      <a:headEnd type="none" w="med" len="med"/>
+                      <a:tailEnd type="none" w="med" len="med"/>
+                    </a:lnB>
+                  </a:tcPr>
+                </a:tc>
+                <a:tc>
+                  <a:txBody>
+                    <a:bodyPr/>
+                    <a:lstStyle/>
+                    <a:p>
+                      <a:pPr indent="0" marL="0">
+                        <a:buNone/>
+                      </a:pPr>
+                      <a:r>
+                        <a:rPr lang="en-US" sz="1200" dirty="0">
+                          <a:solidFill>
+                            <a:srgbClr val="1C2733"/>
+                          </a:solidFill>
+                          <a:latin typeface="Calibri" pitchFamily="34" charset="0"/>
+                          <a:ea typeface="Calibri" pitchFamily="34" charset="-122"/>
+                          <a:cs typeface="Calibri" pitchFamily="34" charset="-120"/>
+                        </a:rPr>
+                        <a:t>8287</a:t>
+                      </a:r>
+                      <a:endParaRPr lang="en-US" sz="1200" dirty="0">
+                        <a:latin typeface="Calibri" charset="0"/>
+                        <a:ea typeface="Calibri" charset="0"/>
+                        <a:cs typeface="Calibri" charset="0"/>
+                      </a:endParaRPr>
+                    </a:p>
+                  </a:txBody>
+                  <a:tcPr marL="91440" marR="91440" marT="45720" marB="45720">
+                    <a:lnL w="12700" cap="flat" cmpd="sng" algn="ctr">
+                      <a:solidFill>
+                        <a:srgbClr val="E3E7ED"/>
+                      </a:solidFill>
+                      <a:prstDash val="solid"/>
+                      <a:round/>
+                      <a:headEnd type="none" w="med" len="med"/>
+                      <a:tailEnd type="none" w="med" len="med"/>
+                    </a:lnL>
+                    <a:lnR w="12700" cap="flat" cmpd="sng" algn="ctr">
+                      <a:solidFill>
+                        <a:srgbClr val="E3E7ED"/>
+                      </a:solidFill>
+                      <a:prstDash val="solid"/>
+                      <a:round/>
+                      <a:headEnd type="none" w="med" len="med"/>
+                      <a:tailEnd type="none" w="med" len="med"/>
+                    </a:lnR>
+                    <a:lnT w="12700" cap="flat" cmpd="sng" algn="ctr">
+                      <a:solidFill>
+                        <a:srgbClr val="E3E7ED"/>
+                      </a:solidFill>
+                      <a:prstDash val="solid"/>
+                      <a:round/>
+                      <a:headEnd type="none" w="med" len="med"/>
+                      <a:tailEnd type="none" w="med" len="med"/>
+                    </a:lnT>
+                    <a:lnB w="12700" cap="flat" cmpd="sng" algn="ctr">
+                      <a:solidFill>
+                        <a:srgbClr val="E3E7ED"/>
+                      </a:solidFill>
+                      <a:prstDash val="solid"/>
+                      <a:round/>
+                      <a:headEnd type="none" w="med" len="med"/>
+                      <a:tailEnd type="none" w="med" len="med"/>
+                    </a:lnB>
+                  </a:tcPr>
+                </a:tc>
+              </a:tr>
+              <a:tr h="402336">
+                <a:tc>
+                  <a:txBody>
+                    <a:bodyPr/>
+                    <a:lstStyle/>
+                    <a:p>
+                      <a:pPr indent="0" marL="0">
+                        <a:buNone/>
+                      </a:pPr>
+                      <a:r>
+                        <a:rPr lang="en-US" sz="1200" dirty="0">
+                          <a:solidFill>
+                            <a:srgbClr val="1C2733"/>
+                          </a:solidFill>
+                          <a:latin typeface="Calibri" pitchFamily="34" charset="0"/>
+                          <a:ea typeface="Calibri" pitchFamily="34" charset="-122"/>
+                          <a:cs typeface="Calibri" pitchFamily="34" charset="-120"/>
+                        </a:rPr>
+                        <a:t>Normal, const-mean (исходная)</a:t>
+                      </a:r>
+                      <a:endParaRPr lang="en-US" sz="1200" dirty="0">
+                        <a:latin typeface="Calibri" charset="0"/>
+                        <a:ea typeface="Calibri" charset="0"/>
+                        <a:cs typeface="Calibri" charset="0"/>
+                      </a:endParaRPr>
+                    </a:p>
+                  </a:txBody>
+                  <a:tcPr marL="91440" marR="91440" marT="45720" marB="45720">
+                    <a:lnL w="12700" cap="flat" cmpd="sng" algn="ctr">
+                      <a:solidFill>
+                        <a:srgbClr val="E3E7ED"/>
+                      </a:solidFill>
+                      <a:prstDash val="solid"/>
+                      <a:round/>
+                      <a:headEnd type="none" w="med" len="med"/>
+                      <a:tailEnd type="none" w="med" len="med"/>
+                    </a:lnL>
+                    <a:lnR w="12700" cap="flat" cmpd="sng" algn="ctr">
+                      <a:solidFill>
+                        <a:srgbClr val="E3E7ED"/>
+                      </a:solidFill>
+                      <a:prstDash val="solid"/>
+                      <a:round/>
+                      <a:headEnd type="none" w="med" len="med"/>
+                      <a:tailEnd type="none" w="med" len="med"/>
+                    </a:lnR>
+                    <a:lnT w="12700" cap="flat" cmpd="sng" algn="ctr">
+                      <a:solidFill>
+                        <a:srgbClr val="E3E7ED"/>
+                      </a:solidFill>
+                      <a:prstDash val="solid"/>
+                      <a:round/>
+                      <a:headEnd type="none" w="med" len="med"/>
+                      <a:tailEnd type="none" w="med" len="med"/>
+                    </a:lnT>
+                    <a:lnB w="12700" cap="flat" cmpd="sng" algn="ctr">
+                      <a:solidFill>
+                        <a:srgbClr val="E3E7ED"/>
+                      </a:solidFill>
+                      <a:prstDash val="solid"/>
+                      <a:round/>
+                      <a:headEnd type="none" w="med" len="med"/>
+                      <a:tailEnd type="none" w="med" len="med"/>
+                    </a:lnB>
+                  </a:tcPr>
+                </a:tc>
+                <a:tc>
+                  <a:txBody>
+                    <a:bodyPr/>
+                    <a:lstStyle/>
+                    <a:p>
+                      <a:pPr indent="0" marL="0">
+                        <a:buNone/>
+                      </a:pPr>
+                      <a:r>
+                        <a:rPr lang="en-US" sz="1200" dirty="0">
+                          <a:solidFill>
+                            <a:srgbClr val="1C2733"/>
+                          </a:solidFill>
+                          <a:latin typeface="Calibri" pitchFamily="34" charset="0"/>
+                          <a:ea typeface="Calibri" pitchFamily="34" charset="-122"/>
+                          <a:cs typeface="Calibri" pitchFamily="34" charset="-120"/>
+                        </a:rPr>
+                        <a:t>8544</a:t>
+                      </a:r>
+                      <a:endParaRPr lang="en-US" sz="1200" dirty="0">
+                        <a:latin typeface="Calibri" charset="0"/>
+                        <a:ea typeface="Calibri" charset="0"/>
+                        <a:cs typeface="Calibri" charset="0"/>
+                      </a:endParaRPr>
+                    </a:p>
+                  </a:txBody>
+                  <a:tcPr marL="91440" marR="91440" marT="45720" marB="45720">
+                    <a:lnL w="12700" cap="flat" cmpd="sng" algn="ctr">
+                      <a:solidFill>
+                        <a:srgbClr val="E3E7ED"/>
+                      </a:solidFill>
+                      <a:prstDash val="solid"/>
+                      <a:round/>
+                      <a:headEnd type="none" w="med" len="med"/>
+                      <a:tailEnd type="none" w="med" len="med"/>
+                    </a:lnL>
+                    <a:lnR w="12700" cap="flat" cmpd="sng" algn="ctr">
+                      <a:solidFill>
+                        <a:srgbClr val="E3E7ED"/>
+                      </a:solidFill>
+                      <a:prstDash val="solid"/>
+                      <a:round/>
+                      <a:headEnd type="none" w="med" len="med"/>
+                      <a:tailEnd type="none" w="med" len="med"/>
+                    </a:lnR>
+                    <a:lnT w="12700" cap="flat" cmpd="sng" algn="ctr">
+                      <a:solidFill>
+                        <a:srgbClr val="E3E7ED"/>
+                      </a:solidFill>
+                      <a:prstDash val="solid"/>
+                      <a:round/>
+                      <a:headEnd type="none" w="med" len="med"/>
+                      <a:tailEnd type="none" w="med" len="med"/>
+                    </a:lnT>
+                    <a:lnB w="12700" cap="flat" cmpd="sng" algn="ctr">
+                      <a:solidFill>
+                        <a:srgbClr val="E3E7ED"/>
+                      </a:solidFill>
+                      <a:prstDash val="solid"/>
+                      <a:round/>
+                      <a:headEnd type="none" w="med" len="med"/>
+                      <a:tailEnd type="none" w="med" len="med"/>
+                    </a:lnB>
+                  </a:tcPr>
+                </a:tc>
+                <a:tc>
+                  <a:txBody>
+                    <a:bodyPr/>
+                    <a:lstStyle/>
+                    <a:p>
+                      <a:pPr indent="0" marL="0">
+                        <a:buNone/>
+                      </a:pPr>
+                      <a:r>
+                        <a:rPr lang="en-US" sz="1200" dirty="0">
+                          <a:solidFill>
+                            <a:srgbClr val="1C2733"/>
+                          </a:solidFill>
+                          <a:latin typeface="Calibri" pitchFamily="34" charset="0"/>
+                          <a:ea typeface="Calibri" pitchFamily="34" charset="-122"/>
+                          <a:cs typeface="Calibri" pitchFamily="34" charset="-120"/>
+                        </a:rPr>
+                        <a:t>8568</a:t>
+                      </a:r>
+                      <a:endParaRPr lang="en-US" sz="1200" dirty="0">
+                        <a:latin typeface="Calibri" charset="0"/>
+                        <a:ea typeface="Calibri" charset="0"/>
+                        <a:cs typeface="Calibri" charset="0"/>
+                      </a:endParaRPr>
+                    </a:p>
+                  </a:txBody>
+                  <a:tcPr marL="91440" marR="91440" marT="45720" marB="45720">
+                    <a:lnL w="12700" cap="flat" cmpd="sng" algn="ctr">
+                      <a:solidFill>
+                        <a:srgbClr val="E3E7ED"/>
+                      </a:solidFill>
+                      <a:prstDash val="solid"/>
+                      <a:round/>
+                      <a:headEnd type="none" w="med" len="med"/>
+                      <a:tailEnd type="none" w="med" len="med"/>
+                    </a:lnL>
+                    <a:lnR w="12700" cap="flat" cmpd="sng" algn="ctr">
+                      <a:solidFill>
+                        <a:srgbClr val="E3E7ED"/>
+                      </a:solidFill>
+                      <a:prstDash val="solid"/>
+                      <a:round/>
+                      <a:headEnd type="none" w="med" len="med"/>
+                      <a:tailEnd type="none" w="med" len="med"/>
+                    </a:lnR>
+                    <a:lnT w="12700" cap="flat" cmpd="sng" algn="ctr">
+                      <a:solidFill>
+                        <a:srgbClr val="E3E7ED"/>
+                      </a:solidFill>
+                      <a:prstDash val="solid"/>
+                      <a:round/>
+                      <a:headEnd type="none" w="med" len="med"/>
+                      <a:tailEnd type="none" w="med" len="med"/>
+                    </a:lnT>
+                    <a:lnB w="12700" cap="flat" cmpd="sng" algn="ctr">
+                      <a:solidFill>
+                        <a:srgbClr val="E3E7ED"/>
+                      </a:solidFill>
+                      <a:prstDash val="solid"/>
+                      <a:round/>
+                      <a:headEnd type="none" w="med" len="med"/>
+                      <a:tailEnd type="none" w="med" len="med"/>
+                    </a:lnB>
+                  </a:tcPr>
+                </a:tc>
+              </a:tr>
+            </a:tbl>
+          </a:graphicData>
+        </a:graphic>
+      </p:graphicFrame>
+      <p:sp>
+        <p:nvSpPr>
+          <p:cNvPr id="4" name="Text 1"/>
           <p:cNvSpPr txBox="1"/>
           <p:nvPr/>
         </p:nvSpPr>
         <p:spPr>
           <a:xfrm>
-            <a:off x="731520" y="1645920"/>
-            <a:ext cx="5029200" cy="1371600"/>
+            <a:off x="548640" y="3566160"/>
+            <a:ext cx="5486400" cy="1005840"/>
+          </a:xfrm>
+          <a:prstGeom prst="rect">
+            <a:avLst/>
+          </a:prstGeom>
+          <a:noFill/>
+          <a:ln/>
+        </p:spPr>
+        <p:txBody>
+          <a:bodyPr wrap="square" lIns="0" tIns="0" rIns="0" bIns="0" rtlCol="0" anchor="ctr"/>
+          <a:lstStyle/>
+          <a:p>
+            <a:pPr indent="0" marL="0">
+              <a:buNone/>
+            </a:pPr>
+            <a:r>
+              <a:rPr lang="en-US" sz="1200" i="1" dirty="0">
+                <a:solidFill>
+                  <a:srgbClr val="6B7688"/>
+                </a:solidFill>
+                <a:latin typeface="Calibri" pitchFamily="34" charset="0"/>
+                <a:ea typeface="Calibri" pitchFamily="34" charset="-122"/>
+                <a:cs typeface="Calibri" pitchFamily="34" charset="-120"/>
+              </a:rPr>
+              <a:t>Исходная спецификация не проходила диагностику остатков (Ljung-Box p&lt;0,001). Выбранная по BIC — проходит (p=0,18 на всём периоде, p=0,45 в квадратах остатков).</a:t>
+            </a:r>
+            <a:endParaRPr lang="en-US" sz="1200" dirty="0"/>
+          </a:p>
+        </p:txBody>
+      </p:sp>
+      <p:sp>
+        <p:nvSpPr>
+          <p:cNvPr id="5" name="Text 2"/>
+          <p:cNvSpPr txBox="1"/>
+          <p:nvPr/>
+        </p:nvSpPr>
+        <p:spPr>
+          <a:xfrm>
+            <a:off x="6492240" y="1371600"/>
+            <a:ext cx="4937760" cy="640080"/>
           </a:xfrm>
           <a:prstGeom prst="rect">
             <a:avLst/>
@@ -7874,7 +6956,7 @@
               <a:buNone/>
             </a:pPr>
             <a:r>
-              <a:rPr lang="en-US" sz="3400" b="1" dirty="0">
+              <a:rPr lang="en-US" sz="2800" b="1" dirty="0">
                 <a:solidFill>
                   <a:srgbClr val="13294B"/>
                 </a:solidFill>
@@ -7882,39 +6964,61 @@
                 <a:ea typeface="Calibri" pitchFamily="34" charset="-122"/>
                 <a:cs typeface="Calibri" pitchFamily="34" charset="-120"/>
               </a:rPr>
-              <a:t>F = 50,2</a:t>
-            </a:r>
-            <a:endParaRPr lang="en-US" sz="3400" dirty="0"/>
-          </a:p>
+              <a:t>α+β ≈ 0,99</a:t>
+            </a:r>
+            <a:endParaRPr lang="en-US" sz="2800" dirty="0"/>
+          </a:p>
+        </p:txBody>
+      </p:sp>
+      <p:sp>
+        <p:nvSpPr>
+          <p:cNvPr id="6" name="Text 3"/>
+          <p:cNvSpPr txBox="1"/>
+          <p:nvPr/>
+        </p:nvSpPr>
+        <p:spPr>
+          <a:xfrm>
+            <a:off x="6492240" y="2011680"/>
+            <a:ext cx="4937760" cy="548640"/>
+          </a:xfrm>
+          <a:prstGeom prst="rect">
+            <a:avLst/>
+          </a:prstGeom>
+          <a:noFill/>
+          <a:ln/>
+        </p:spPr>
+        <p:txBody>
+          <a:bodyPr wrap="square" lIns="0" tIns="0" rIns="0" bIns="0" rtlCol="0" anchor="ctr"/>
+          <a:lstStyle/>
           <a:p>
             <a:pPr algn="l" indent="0" marL="0">
               <a:buNone/>
             </a:pPr>
             <a:r>
-              <a:rPr lang="en-US" sz="3400" b="1" dirty="0">
-                <a:solidFill>
-                  <a:srgbClr val="13294B"/>
-                </a:solidFill>
-                <a:latin typeface="Calibri" pitchFamily="34" charset="0"/>
-                <a:ea typeface="Calibri" pitchFamily="34" charset="-122"/>
-                <a:cs typeface="Calibri" pitchFamily="34" charset="-120"/>
-              </a:rPr>
-              <a:t>p &lt; 0,0001</a:t>
-            </a:r>
-            <a:endParaRPr lang="en-US" sz="3400" dirty="0"/>
-          </a:p>
-        </p:txBody>
-      </p:sp>
-      <p:sp>
-        <p:nvSpPr>
-          <p:cNvPr id="4" name="Text 2"/>
+              <a:rPr lang="en-US" sz="1100" dirty="0">
+                <a:solidFill>
+                  <a:srgbClr val="6B7688"/>
+                </a:solidFill>
+                <a:latin typeface="Calibri" pitchFamily="34" charset="0"/>
+                <a:ea typeface="Calibri" pitchFamily="34" charset="-122"/>
+                <a:cs typeface="Calibri" pitchFamily="34" charset="-120"/>
+              </a:rPr>
+              <a:t>персистентность волатильности, весь период</a:t>
+            </a:r>
+            <a:endParaRPr lang="en-US" sz="1100" dirty="0"/>
+          </a:p>
+        </p:txBody>
+      </p:sp>
+      <p:sp>
+        <p:nvSpPr>
+          <p:cNvPr id="7" name="Text 4"/>
           <p:cNvSpPr txBox="1"/>
           <p:nvPr/>
         </p:nvSpPr>
         <p:spPr>
           <a:xfrm>
-            <a:off x="731520" y="3017520"/>
-            <a:ext cx="5029200" cy="914400"/>
+            <a:off x="6492240" y="2743200"/>
+            <a:ext cx="4937760" cy="640080"/>
           </a:xfrm>
           <a:prstGeom prst="rect">
             <a:avLst/>
@@ -7930,24 +7034,46 @@
               <a:buNone/>
             </a:pPr>
             <a:r>
-              <a:rPr lang="en-US" sz="1300" dirty="0">
-                <a:solidFill>
-                  <a:srgbClr val="6B7688"/>
-                </a:solidFill>
-                <a:latin typeface="Calibri" pitchFamily="34" charset="0"/>
-                <a:ea typeface="Calibri" pitchFamily="34" charset="-122"/>
-                <a:cs typeface="Calibri" pitchFamily="34" charset="-120"/>
-              </a:rPr>
-              <a:t>ставка → курс</a:t>
-            </a:r>
-            <a:endParaRPr lang="en-US" sz="1300" dirty="0"/>
-          </a:p>
+              <a:rPr lang="en-US" sz="2400" b="1" dirty="0">
+                <a:solidFill>
+                  <a:srgbClr val="5B7FA6"/>
+                </a:solidFill>
+                <a:latin typeface="Calibri" pitchFamily="34" charset="0"/>
+                <a:ea typeface="Calibri" pitchFamily="34" charset="-122"/>
+                <a:cs typeface="Calibri" pitchFamily="34" charset="-120"/>
+              </a:rPr>
+              <a:t>0,029→0,061</a:t>
+            </a:r>
+            <a:endParaRPr lang="en-US" sz="2400" dirty="0"/>
+          </a:p>
+        </p:txBody>
+      </p:sp>
+      <p:sp>
+        <p:nvSpPr>
+          <p:cNvPr id="8" name="Text 5"/>
+          <p:cNvSpPr txBox="1"/>
+          <p:nvPr/>
+        </p:nvSpPr>
+        <p:spPr>
+          <a:xfrm>
+            <a:off x="6492240" y="3383280"/>
+            <a:ext cx="4937760" cy="548640"/>
+          </a:xfrm>
+          <a:prstGeom prst="rect">
+            <a:avLst/>
+          </a:prstGeom>
+          <a:noFill/>
+          <a:ln/>
+        </p:spPr>
+        <p:txBody>
+          <a:bodyPr wrap="square" lIns="0" tIns="0" rIns="0" bIns="0" rtlCol="0" anchor="ctr"/>
+          <a:lstStyle/>
           <a:p>
             <a:pPr algn="l" indent="0" marL="0">
               <a:buNone/>
             </a:pPr>
             <a:r>
-              <a:rPr lang="en-US" sz="1300" dirty="0">
+              <a:rPr lang="en-US" sz="1100" dirty="0">
                 <a:solidFill>
                   <a:srgbClr val="6B7688"/>
                 </a:solidFill>
@@ -7955,157 +7081,22 @@
                 <a:ea typeface="Calibri" pitchFamily="34" charset="-122"/>
                 <a:cs typeface="Calibri" pitchFamily="34" charset="-120"/>
               </a:rPr>
-              <a:t>(с нефтью в системе и без — не меняется)</a:t>
-            </a:r>
-            <a:endParaRPr lang="en-US" sz="1300" dirty="0"/>
-          </a:p>
-        </p:txBody>
-      </p:sp>
-      <p:sp>
-        <p:nvSpPr>
-          <p:cNvPr id="5" name="Text 3"/>
+              <a:t>ω (не безусловная дисперсия!) до → после 28.02.2022</a:t>
+            </a:r>
+            <a:endParaRPr lang="en-US" sz="1100" dirty="0"/>
+          </a:p>
+        </p:txBody>
+      </p:sp>
+      <p:sp>
+        <p:nvSpPr>
+          <p:cNvPr id="9" name="Text 6"/>
           <p:cNvSpPr txBox="1"/>
           <p:nvPr/>
         </p:nvSpPr>
         <p:spPr>
           <a:xfrm>
-            <a:off x="6400800" y="1645920"/>
-            <a:ext cx="5029200" cy="1371600"/>
-          </a:xfrm>
-          <a:prstGeom prst="rect">
-            <a:avLst/>
-          </a:prstGeom>
-          <a:noFill/>
-          <a:ln/>
-        </p:spPr>
-        <p:txBody>
-          <a:bodyPr wrap="square" lIns="0" tIns="0" rIns="0" bIns="0" rtlCol="0" anchor="ctr"/>
-          <a:lstStyle/>
-          <a:p>
-            <a:pPr algn="l" indent="0" marL="0">
-              <a:buNone/>
-            </a:pPr>
-            <a:r>
-              <a:rPr lang="en-US" sz="3400" b="1" dirty="0">
-                <a:solidFill>
-                  <a:srgbClr val="5B7FA6"/>
-                </a:solidFill>
-                <a:latin typeface="Calibri" pitchFamily="34" charset="0"/>
-                <a:ea typeface="Calibri" pitchFamily="34" charset="-122"/>
-                <a:cs typeface="Calibri" pitchFamily="34" charset="-120"/>
-              </a:rPr>
-              <a:t>F = 5,4</a:t>
-            </a:r>
-            <a:endParaRPr lang="en-US" sz="3400" dirty="0"/>
-          </a:p>
-          <a:p>
-            <a:pPr algn="l" indent="0" marL="0">
-              <a:buNone/>
-            </a:pPr>
-            <a:r>
-              <a:rPr lang="en-US" sz="3400" b="1" dirty="0">
-                <a:solidFill>
-                  <a:srgbClr val="5B7FA6"/>
-                </a:solidFill>
-                <a:latin typeface="Calibri" pitchFamily="34" charset="0"/>
-                <a:ea typeface="Calibri" pitchFamily="34" charset="-122"/>
-                <a:cs typeface="Calibri" pitchFamily="34" charset="-120"/>
-              </a:rPr>
-              <a:t>p = 0,005</a:t>
-            </a:r>
-            <a:endParaRPr lang="en-US" sz="3400" dirty="0"/>
-          </a:p>
-        </p:txBody>
-      </p:sp>
-      <p:sp>
-        <p:nvSpPr>
-          <p:cNvPr id="6" name="Text 4"/>
-          <p:cNvSpPr txBox="1"/>
-          <p:nvPr/>
-        </p:nvSpPr>
-        <p:spPr>
-          <a:xfrm>
-            <a:off x="6400800" y="3017520"/>
-            <a:ext cx="5029200" cy="914400"/>
-          </a:xfrm>
-          <a:prstGeom prst="rect">
-            <a:avLst/>
-          </a:prstGeom>
-          <a:noFill/>
-          <a:ln/>
-        </p:spPr>
-        <p:txBody>
-          <a:bodyPr wrap="square" lIns="0" tIns="0" rIns="0" bIns="0" rtlCol="0" anchor="ctr"/>
-          <a:lstStyle/>
-          <a:p>
-            <a:pPr algn="l" indent="0" marL="0">
-              <a:buNone/>
-            </a:pPr>
-            <a:r>
-              <a:rPr lang="en-US" sz="1300" dirty="0">
-                <a:solidFill>
-                  <a:srgbClr val="6B7688"/>
-                </a:solidFill>
-                <a:latin typeface="Calibri" pitchFamily="34" charset="0"/>
-                <a:ea typeface="Calibri" pitchFamily="34" charset="-122"/>
-                <a:cs typeface="Calibri" pitchFamily="34" charset="-120"/>
-              </a:rPr>
-              <a:t>курс → ставка</a:t>
-            </a:r>
-            <a:endParaRPr lang="en-US" sz="1300" dirty="0"/>
-          </a:p>
-          <a:p>
-            <a:pPr algn="l" indent="0" marL="0">
-              <a:buNone/>
-            </a:pPr>
-            <a:r>
-              <a:rPr lang="en-US" sz="1300" dirty="0">
-                <a:solidFill>
-                  <a:srgbClr val="6B7688"/>
-                </a:solidFill>
-                <a:latin typeface="Calibri" pitchFamily="34" charset="0"/>
-                <a:ea typeface="Calibri" pitchFamily="34" charset="-122"/>
-                <a:cs typeface="Calibri" pitchFamily="34" charset="-120"/>
-              </a:rPr>
-              <a:t>(значимо, но на порядок слабее)</a:t>
-            </a:r>
-            <a:endParaRPr lang="en-US" sz="1300" dirty="0"/>
-          </a:p>
-        </p:txBody>
-      </p:sp>
-      <p:sp>
-        <p:nvSpPr>
-          <p:cNvPr id="7" name="Shape 5"/>
-          <p:cNvSpPr/>
-          <p:nvPr/>
-        </p:nvSpPr>
-        <p:spPr>
-          <a:xfrm>
-            <a:off x="5989320" y="1737360"/>
-            <a:ext cx="0" cy="2743200"/>
-          </a:xfrm>
-          <a:prstGeom prst="line">
-            <a:avLst/>
-          </a:prstGeom>
-          <a:noFill/>
-          <a:ln w="19050">
-            <a:solidFill>
-              <a:srgbClr val="E3E7ED"/>
-            </a:solidFill>
-            <a:prstDash val="solid"/>
-          </a:ln>
-        </p:spPr>
-      </p:sp>
-      <p:sp>
-        <p:nvSpPr>
-          <p:cNvPr id="8" name="Text 6"/>
-          <p:cNvSpPr txBox="1"/>
-          <p:nvPr/>
-        </p:nvSpPr>
-        <p:spPr>
-          <a:xfrm>
-            <a:off x="731520" y="5029200"/>
-            <a:ext cx="10698480" cy="914400"/>
+            <a:off x="6492240" y="4160520"/>
+            <a:ext cx="4937760" cy="1280160"/>
           </a:xfrm>
           <a:prstGeom prst="rect">
             <a:avLst/>
@@ -8121,7 +7112,7 @@
               <a:buNone/>
             </a:pPr>
             <a:r>
-              <a:rPr lang="en-US" sz="1400" i="1" dirty="0">
+              <a:rPr lang="en-US" sz="1150" i="1" dirty="0">
                 <a:solidFill>
                   <a:srgbClr val="6B7688"/>
                 </a:solidFill>
@@ -8129,15 +7120,15 @@
                 <a:ea typeface="Calibri" pitchFamily="34" charset="-122"/>
                 <a:cs typeface="Calibri" pitchFamily="34" charset="-120"/>
               </a:rPr>
-              <a:t>Результат совпадает в двух спецификациях (VAR-в-разностях и VECM) и с контролем на нефть, и без — но, как покажет следующий слайд, не совпадает по подпериодам.</a:t>
-            </a:r>
-            <a:endParaRPr lang="en-US" sz="1400" dirty="0"/>
-          </a:p>
-        </p:txBody>
-      </p:sp>
-      <p:sp>
-        <p:nvSpPr>
-          <p:cNvPr id="9" name="Text 7"/>
+              <a:t>На подвыборке «после 2022» персистентность выходит на 1,0 (интегрированный GARCH) — известный артефакт кластера экстремальной волатильности в малой подвыборке; безусловная дисперсия там не идентифицируется, репортим как NaN, а не как число.</a:t>
+            </a:r>
+            <a:endParaRPr lang="en-US" sz="1150" dirty="0"/>
+          </a:p>
+        </p:txBody>
+      </p:sp>
+      <p:sp>
+        <p:nvSpPr>
+          <p:cNvPr id="10" name="Text 7"/>
           <p:cNvSpPr txBox="1"/>
           <p:nvPr/>
         </p:nvSpPr>
@@ -8188,7 +7179,7 @@
     <p:bg>
       <p:bgPr>
         <a:solidFill>
-          <a:srgbClr val="13294B"/>
+          <a:srgbClr val="FFFFFF"/>
         </a:solidFill>
       </p:bgPr>
     </p:bg>
@@ -8208,64 +7199,64 @@
       </p:grpSpPr>
       <p:sp>
         <p:nvSpPr>
-          <p:cNvPr id="2" name="Shape 0"/>
+          <p:cNvPr id="2" name="Text 0"/>
+          <p:cNvSpPr txBox="1"/>
+          <p:nvPr/>
+        </p:nvSpPr>
+        <p:spPr>
+          <a:xfrm>
+            <a:off x="548640" y="411480"/>
+            <a:ext cx="11064240" cy="822960"/>
+          </a:xfrm>
+          <a:prstGeom prst="rect">
+            <a:avLst/>
+          </a:prstGeom>
+          <a:noFill/>
+          <a:ln/>
+        </p:spPr>
+        <p:txBody>
+          <a:bodyPr wrap="square" lIns="0" tIns="0" rIns="0" bIns="0" rtlCol="0" anchor="ctr"/>
+          <a:lstStyle/>
+          <a:p>
+            <a:pPr indent="0" marL="0">
+              <a:buNone/>
+            </a:pPr>
+            <a:r>
+              <a:rPr lang="en-US" sz="2800" b="1" dirty="0">
+                <a:solidFill>
+                  <a:srgbClr val="1C2733"/>
+                </a:solidFill>
+                <a:latin typeface="Calibri" pitchFamily="34" charset="0"/>
+                <a:ea typeface="Calibri" pitchFamily="34" charset="-122"/>
+                <a:cs typeface="Calibri" pitchFamily="34" charset="-120"/>
+              </a:rPr>
+              <a:t>Волатильность вокруг решений и прогноз вне выборки</a:t>
+            </a:r>
+            <a:endParaRPr lang="en-US" sz="2800" dirty="0"/>
+          </a:p>
+        </p:txBody>
+      </p:sp>
+      <p:sp>
+        <p:nvSpPr>
+          <p:cNvPr id="3" name="Shape 1"/>
           <p:cNvSpPr/>
           <p:nvPr/>
         </p:nvSpPr>
         <p:spPr>
           <a:xfrm>
-            <a:off x="457200" y="411480"/>
-            <a:ext cx="2743200" cy="365760"/>
+            <a:off x="457200" y="1371600"/>
+            <a:ext cx="5486400" cy="4297680"/>
           </a:xfrm>
           <a:prstGeom prst="roundRect">
             <a:avLst>
-              <a:gd name="adj" fmla="val 15000"/>
+              <a:gd name="adj" fmla="val 1702"/>
             </a:avLst>
           </a:prstGeom>
           <a:solidFill>
-            <a:srgbClr val="C9A227"/>
+            <a:srgbClr val="F3F5F8"/>
           </a:solidFill>
           <a:ln/>
         </p:spPr>
-      </p:sp>
-      <p:sp>
-        <p:nvSpPr>
-          <p:cNvPr id="3" name="Text 1"/>
-          <p:cNvSpPr txBox="1"/>
-          <p:nvPr/>
-        </p:nvSpPr>
-        <p:spPr>
-          <a:xfrm>
-            <a:off x="457200" y="411480"/>
-            <a:ext cx="2743200" cy="365760"/>
-          </a:xfrm>
-          <a:prstGeom prst="rect">
-            <a:avLst/>
-          </a:prstGeom>
-          <a:noFill/>
-          <a:ln/>
-        </p:spPr>
-        <p:txBody>
-          <a:bodyPr wrap="square" lIns="0" tIns="0" rIns="0" bIns="0" rtlCol="0" anchor="ctr"/>
-          <a:lstStyle/>
-          <a:p>
-            <a:pPr algn="ctr" indent="0" marL="0">
-              <a:buNone/>
-            </a:pPr>
-            <a:r>
-              <a:rPr lang="en-US" sz="1300" b="1" dirty="0">
-                <a:solidFill>
-                  <a:srgbClr val="13294B"/>
-                </a:solidFill>
-                <a:latin typeface="Calibri" pitchFamily="34" charset="0"/>
-                <a:ea typeface="Calibri" pitchFamily="34" charset="-122"/>
-                <a:cs typeface="Calibri" pitchFamily="34" charset="-120"/>
-              </a:rPr>
-              <a:t>ГЛАВНАЯ НАХОДКА</a:t>
-            </a:r>
-            <a:endParaRPr lang="en-US" sz="1300" dirty="0"/>
-          </a:p>
-        </p:txBody>
       </p:sp>
       <p:sp>
         <p:nvSpPr>
@@ -8275,8 +7266,8 @@
         </p:nvSpPr>
         <p:spPr>
           <a:xfrm>
-            <a:off x="548640" y="960120"/>
-            <a:ext cx="10972800" cy="822960"/>
+            <a:off x="731520" y="1554480"/>
+            <a:ext cx="4937760" cy="365760"/>
           </a:xfrm>
           <a:prstGeom prst="rect">
             <a:avLst/>
@@ -8292,874 +7283,158 @@
               <a:buNone/>
             </a:pPr>
             <a:r>
-              <a:rPr lang="en-US" sz="2700" b="1" dirty="0">
-                <a:solidFill>
-                  <a:srgbClr val="FFFFFF"/>
-                </a:solidFill>
-                <a:latin typeface="Cambria" pitchFamily="34" charset="0"/>
-                <a:ea typeface="Cambria" pitchFamily="34" charset="-122"/>
-                <a:cs typeface="Cambria" pitchFamily="34" charset="-120"/>
-              </a:rPr>
-              <a:t>Результат переворачивается внутри подпериодов</a:t>
-            </a:r>
-            <a:endParaRPr lang="en-US" sz="2700" dirty="0"/>
-          </a:p>
-        </p:txBody>
-      </p:sp>
-      <p:graphicFrame>
-        <p:nvGraphicFramePr>
-          <p:cNvPr id="10" name="Table 0"/>
-          <p:cNvGraphicFramePr>
-            <a:graphicFrameLocks noGrp="1"/>
-          </p:cNvGraphicFramePr>
-          <p:nvPr>
-            <p:extLst>
-              <p:ext uri="{D42A27DB-BD31-4B8C-83A1-F6EECF244321}">
-                <p14:modId xmlns:p14="http://schemas.microsoft.com/office/powerpoint/2010/main" val="1579011935"/>
-              </p:ext>
-            </p:extLst>
-          </p:nvPr>
-        </p:nvGraphicFramePr>
-        <p:xfrm>
-          <a:off x="548640" y="1965960"/>
-          <a:ext cx="10972800" cy="2103120"/>
-        </p:xfrm>
-        <a:graphic>
-          <a:graphicData uri="http://schemas.openxmlformats.org/drawingml/2006/table">
-            <a:tbl>
-              <a:tblPr/>
-              <a:tblGrid>
-                <a:gridCol w="3657600"/>
-                <a:gridCol w="3657600"/>
-                <a:gridCol w="3657600"/>
-              </a:tblGrid>
-              <a:tr h="525780">
-                <a:tc>
-                  <a:txBody>
-                    <a:bodyPr/>
-                    <a:lstStyle/>
-                    <a:p>
-                      <a:pPr algn="ctr" indent="0" marL="0">
-                        <a:buNone/>
-                      </a:pPr>
-                      <a:endParaRPr lang="en-US" sz="1500" dirty="0">
-                        <a:latin typeface="Calibri" charset="0"/>
-                        <a:ea typeface="Calibri" charset="0"/>
-                        <a:cs typeface="Calibri" charset="0"/>
-                      </a:endParaRPr>
-                    </a:p>
-                  </a:txBody>
-                  <a:tcPr marL="91440" marR="91440" marT="45720" marB="45720">
-                    <a:lnL w="12700" cap="flat" cmpd="sng" algn="ctr">
-                      <a:solidFill>
-                        <a:srgbClr val="E3E7ED"/>
-                      </a:solidFill>
-                      <a:prstDash val="solid"/>
-                      <a:round/>
-                      <a:headEnd type="none" w="med" len="med"/>
-                      <a:tailEnd type="none" w="med" len="med"/>
-                    </a:lnL>
-                    <a:lnR w="12700" cap="flat" cmpd="sng" algn="ctr">
-                      <a:solidFill>
-                        <a:srgbClr val="E3E7ED"/>
-                      </a:solidFill>
-                      <a:prstDash val="solid"/>
-                      <a:round/>
-                      <a:headEnd type="none" w="med" len="med"/>
-                      <a:tailEnd type="none" w="med" len="med"/>
-                    </a:lnR>
-                    <a:lnT w="12700" cap="flat" cmpd="sng" algn="ctr">
-                      <a:solidFill>
-                        <a:srgbClr val="E3E7ED"/>
-                      </a:solidFill>
-                      <a:prstDash val="solid"/>
-                      <a:round/>
-                      <a:headEnd type="none" w="med" len="med"/>
-                      <a:tailEnd type="none" w="med" len="med"/>
-                    </a:lnT>
-                    <a:lnB w="12700" cap="flat" cmpd="sng" algn="ctr">
-                      <a:solidFill>
-                        <a:srgbClr val="E3E7ED"/>
-                      </a:solidFill>
-                      <a:prstDash val="solid"/>
-                      <a:round/>
-                      <a:headEnd type="none" w="med" len="med"/>
-                      <a:tailEnd type="none" w="med" len="med"/>
-                    </a:lnB>
-                    <a:solidFill>
-                      <a:srgbClr val="13294B"/>
-                    </a:solidFill>
-                  </a:tcPr>
-                </a:tc>
-                <a:tc>
-                  <a:txBody>
-                    <a:bodyPr/>
-                    <a:lstStyle/>
-                    <a:p>
-                      <a:pPr algn="ctr" indent="0" marL="0">
-                        <a:buNone/>
-                      </a:pPr>
-                      <a:r>
-                        <a:rPr lang="en-US" sz="1500" b="1" dirty="0">
-                          <a:solidFill>
-                            <a:srgbClr val="FFFFFF"/>
-                          </a:solidFill>
-                          <a:latin typeface="Calibri" pitchFamily="34" charset="0"/>
-                          <a:ea typeface="Calibri" pitchFamily="34" charset="-122"/>
-                          <a:cs typeface="Calibri" pitchFamily="34" charset="-120"/>
-                        </a:rPr>
-                        <a:t>ставка → курс</a:t>
-                      </a:r>
-                      <a:endParaRPr lang="en-US" sz="1500" dirty="0">
-                        <a:latin typeface="Calibri" charset="0"/>
-                        <a:ea typeface="Calibri" charset="0"/>
-                        <a:cs typeface="Calibri" charset="0"/>
-                      </a:endParaRPr>
-                    </a:p>
-                  </a:txBody>
-                  <a:tcPr marL="91440" marR="91440" marT="45720" marB="45720">
-                    <a:lnL w="12700" cap="flat" cmpd="sng" algn="ctr">
-                      <a:solidFill>
-                        <a:srgbClr val="E3E7ED"/>
-                      </a:solidFill>
-                      <a:prstDash val="solid"/>
-                      <a:round/>
-                      <a:headEnd type="none" w="med" len="med"/>
-                      <a:tailEnd type="none" w="med" len="med"/>
-                    </a:lnL>
-                    <a:lnR w="12700" cap="flat" cmpd="sng" algn="ctr">
-                      <a:solidFill>
-                        <a:srgbClr val="E3E7ED"/>
-                      </a:solidFill>
-                      <a:prstDash val="solid"/>
-                      <a:round/>
-                      <a:headEnd type="none" w="med" len="med"/>
-                      <a:tailEnd type="none" w="med" len="med"/>
-                    </a:lnR>
-                    <a:lnT w="12700" cap="flat" cmpd="sng" algn="ctr">
-                      <a:solidFill>
-                        <a:srgbClr val="E3E7ED"/>
-                      </a:solidFill>
-                      <a:prstDash val="solid"/>
-                      <a:round/>
-                      <a:headEnd type="none" w="med" len="med"/>
-                      <a:tailEnd type="none" w="med" len="med"/>
-                    </a:lnT>
-                    <a:lnB w="12700" cap="flat" cmpd="sng" algn="ctr">
-                      <a:solidFill>
-                        <a:srgbClr val="E3E7ED"/>
-                      </a:solidFill>
-                      <a:prstDash val="solid"/>
-                      <a:round/>
-                      <a:headEnd type="none" w="med" len="med"/>
-                      <a:tailEnd type="none" w="med" len="med"/>
-                    </a:lnB>
-                    <a:solidFill>
-                      <a:srgbClr val="13294B"/>
-                    </a:solidFill>
-                  </a:tcPr>
-                </a:tc>
-                <a:tc>
-                  <a:txBody>
-                    <a:bodyPr/>
-                    <a:lstStyle/>
-                    <a:p>
-                      <a:pPr algn="ctr" indent="0" marL="0">
-                        <a:buNone/>
-                      </a:pPr>
-                      <a:r>
-                        <a:rPr lang="en-US" sz="1500" b="1" dirty="0">
-                          <a:solidFill>
-                            <a:srgbClr val="FFFFFF"/>
-                          </a:solidFill>
-                          <a:latin typeface="Calibri" pitchFamily="34" charset="0"/>
-                          <a:ea typeface="Calibri" pitchFamily="34" charset="-122"/>
-                          <a:cs typeface="Calibri" pitchFamily="34" charset="-120"/>
-                        </a:rPr>
-                        <a:t>курс → ставка</a:t>
-                      </a:r>
-                      <a:endParaRPr lang="en-US" sz="1500" dirty="0">
-                        <a:latin typeface="Calibri" charset="0"/>
-                        <a:ea typeface="Calibri" charset="0"/>
-                        <a:cs typeface="Calibri" charset="0"/>
-                      </a:endParaRPr>
-                    </a:p>
-                  </a:txBody>
-                  <a:tcPr marL="91440" marR="91440" marT="45720" marB="45720">
-                    <a:lnL w="12700" cap="flat" cmpd="sng" algn="ctr">
-                      <a:solidFill>
-                        <a:srgbClr val="E3E7ED"/>
-                      </a:solidFill>
-                      <a:prstDash val="solid"/>
-                      <a:round/>
-                      <a:headEnd type="none" w="med" len="med"/>
-                      <a:tailEnd type="none" w="med" len="med"/>
-                    </a:lnL>
-                    <a:lnR w="12700" cap="flat" cmpd="sng" algn="ctr">
-                      <a:solidFill>
-                        <a:srgbClr val="E3E7ED"/>
-                      </a:solidFill>
-                      <a:prstDash val="solid"/>
-                      <a:round/>
-                      <a:headEnd type="none" w="med" len="med"/>
-                      <a:tailEnd type="none" w="med" len="med"/>
-                    </a:lnR>
-                    <a:lnT w="12700" cap="flat" cmpd="sng" algn="ctr">
-                      <a:solidFill>
-                        <a:srgbClr val="E3E7ED"/>
-                      </a:solidFill>
-                      <a:prstDash val="solid"/>
-                      <a:round/>
-                      <a:headEnd type="none" w="med" len="med"/>
-                      <a:tailEnd type="none" w="med" len="med"/>
-                    </a:lnT>
-                    <a:lnB w="12700" cap="flat" cmpd="sng" algn="ctr">
-                      <a:solidFill>
-                        <a:srgbClr val="E3E7ED"/>
-                      </a:solidFill>
-                      <a:prstDash val="solid"/>
-                      <a:round/>
-                      <a:headEnd type="none" w="med" len="med"/>
-                      <a:tailEnd type="none" w="med" len="med"/>
-                    </a:lnB>
-                    <a:solidFill>
-                      <a:srgbClr val="13294B"/>
-                    </a:solidFill>
-                  </a:tcPr>
-                </a:tc>
-              </a:tr>
-              <a:tr h="525780">
-                <a:tc>
-                  <a:txBody>
-                    <a:bodyPr/>
-                    <a:lstStyle/>
-                    <a:p>
-                      <a:pPr algn="ctr" indent="0" marL="0">
-                        <a:buNone/>
-                      </a:pPr>
-                      <a:r>
-                        <a:rPr lang="en-US" sz="1500" b="1" dirty="0">
-                          <a:solidFill>
-                            <a:srgbClr val="1C2733"/>
-                          </a:solidFill>
-                          <a:latin typeface="Calibri" pitchFamily="34" charset="0"/>
-                          <a:ea typeface="Calibri" pitchFamily="34" charset="-122"/>
-                          <a:cs typeface="Calibri" pitchFamily="34" charset="-120"/>
-                        </a:rPr>
-                        <a:t>Вся выборка</a:t>
-                      </a:r>
-                      <a:endParaRPr lang="en-US" sz="1500" dirty="0">
-                        <a:latin typeface="Calibri" charset="0"/>
-                        <a:ea typeface="Calibri" charset="0"/>
-                        <a:cs typeface="Calibri" charset="0"/>
-                      </a:endParaRPr>
-                    </a:p>
-                  </a:txBody>
-                  <a:tcPr marL="91440" marR="91440" marT="45720" marB="45720">
-                    <a:lnL w="12700" cap="flat" cmpd="sng" algn="ctr">
-                      <a:solidFill>
-                        <a:srgbClr val="E3E7ED"/>
-                      </a:solidFill>
-                      <a:prstDash val="solid"/>
-                      <a:round/>
-                      <a:headEnd type="none" w="med" len="med"/>
-                      <a:tailEnd type="none" w="med" len="med"/>
-                    </a:lnL>
-                    <a:lnR w="12700" cap="flat" cmpd="sng" algn="ctr">
-                      <a:solidFill>
-                        <a:srgbClr val="E3E7ED"/>
-                      </a:solidFill>
-                      <a:prstDash val="solid"/>
-                      <a:round/>
-                      <a:headEnd type="none" w="med" len="med"/>
-                      <a:tailEnd type="none" w="med" len="med"/>
-                    </a:lnR>
-                    <a:lnT w="12700" cap="flat" cmpd="sng" algn="ctr">
-                      <a:solidFill>
-                        <a:srgbClr val="E3E7ED"/>
-                      </a:solidFill>
-                      <a:prstDash val="solid"/>
-                      <a:round/>
-                      <a:headEnd type="none" w="med" len="med"/>
-                      <a:tailEnd type="none" w="med" len="med"/>
-                    </a:lnT>
-                    <a:lnB w="12700" cap="flat" cmpd="sng" algn="ctr">
-                      <a:solidFill>
-                        <a:srgbClr val="E3E7ED"/>
-                      </a:solidFill>
-                      <a:prstDash val="solid"/>
-                      <a:round/>
-                      <a:headEnd type="none" w="med" len="med"/>
-                      <a:tailEnd type="none" w="med" len="med"/>
-                    </a:lnB>
-                    <a:solidFill>
-                      <a:srgbClr val="FFFFFF"/>
-                    </a:solidFill>
-                  </a:tcPr>
-                </a:tc>
-                <a:tc>
-                  <a:txBody>
-                    <a:bodyPr/>
-                    <a:lstStyle/>
-                    <a:p>
-                      <a:pPr algn="ctr" indent="0" marL="0">
-                        <a:buNone/>
-                      </a:pPr>
-                      <a:r>
-                        <a:rPr lang="en-US" sz="1500" b="1" dirty="0">
-                          <a:solidFill>
-                            <a:srgbClr val="1C7C3E"/>
-                          </a:solidFill>
-                          <a:latin typeface="Calibri" pitchFamily="34" charset="0"/>
-                          <a:ea typeface="Calibri" pitchFamily="34" charset="-122"/>
-                          <a:cs typeface="Calibri" pitchFamily="34" charset="-120"/>
-                        </a:rPr>
-                        <a:t>p &lt; 0,0001</a:t>
-                      </a:r>
-                      <a:endParaRPr lang="en-US" sz="1500" dirty="0">
-                        <a:latin typeface="Calibri" charset="0"/>
-                        <a:ea typeface="Calibri" charset="0"/>
-                        <a:cs typeface="Calibri" charset="0"/>
-                      </a:endParaRPr>
-                    </a:p>
-                  </a:txBody>
-                  <a:tcPr marL="91440" marR="91440" marT="45720" marB="45720">
-                    <a:lnL w="12700" cap="flat" cmpd="sng" algn="ctr">
-                      <a:solidFill>
-                        <a:srgbClr val="E3E7ED"/>
-                      </a:solidFill>
-                      <a:prstDash val="solid"/>
-                      <a:round/>
-                      <a:headEnd type="none" w="med" len="med"/>
-                      <a:tailEnd type="none" w="med" len="med"/>
-                    </a:lnL>
-                    <a:lnR w="12700" cap="flat" cmpd="sng" algn="ctr">
-                      <a:solidFill>
-                        <a:srgbClr val="E3E7ED"/>
-                      </a:solidFill>
-                      <a:prstDash val="solid"/>
-                      <a:round/>
-                      <a:headEnd type="none" w="med" len="med"/>
-                      <a:tailEnd type="none" w="med" len="med"/>
-                    </a:lnR>
-                    <a:lnT w="12700" cap="flat" cmpd="sng" algn="ctr">
-                      <a:solidFill>
-                        <a:srgbClr val="E3E7ED"/>
-                      </a:solidFill>
-                      <a:prstDash val="solid"/>
-                      <a:round/>
-                      <a:headEnd type="none" w="med" len="med"/>
-                      <a:tailEnd type="none" w="med" len="med"/>
-                    </a:lnT>
-                    <a:lnB w="12700" cap="flat" cmpd="sng" algn="ctr">
-                      <a:solidFill>
-                        <a:srgbClr val="E3E7ED"/>
-                      </a:solidFill>
-                      <a:prstDash val="solid"/>
-                      <a:round/>
-                      <a:headEnd type="none" w="med" len="med"/>
-                      <a:tailEnd type="none" w="med" len="med"/>
-                    </a:lnB>
-                    <a:solidFill>
-                      <a:srgbClr val="FFFFFF"/>
-                    </a:solidFill>
-                  </a:tcPr>
-                </a:tc>
-                <a:tc>
-                  <a:txBody>
-                    <a:bodyPr/>
-                    <a:lstStyle/>
-                    <a:p>
-                      <a:pPr algn="ctr" indent="0" marL="0">
-                        <a:buNone/>
-                      </a:pPr>
-                      <a:r>
-                        <a:rPr lang="en-US" sz="1500" dirty="0">
-                          <a:solidFill>
-                            <a:srgbClr val="1C7C3E"/>
-                          </a:solidFill>
-                          <a:latin typeface="Calibri" pitchFamily="34" charset="0"/>
-                          <a:ea typeface="Calibri" pitchFamily="34" charset="-122"/>
-                          <a:cs typeface="Calibri" pitchFamily="34" charset="-120"/>
-                        </a:rPr>
-                        <a:t>p = 0,005</a:t>
-                      </a:r>
-                      <a:endParaRPr lang="en-US" sz="1500" dirty="0">
-                        <a:latin typeface="Calibri" charset="0"/>
-                        <a:ea typeface="Calibri" charset="0"/>
-                        <a:cs typeface="Calibri" charset="0"/>
-                      </a:endParaRPr>
-                    </a:p>
-                  </a:txBody>
-                  <a:tcPr marL="91440" marR="91440" marT="45720" marB="45720">
-                    <a:lnL w="12700" cap="flat" cmpd="sng" algn="ctr">
-                      <a:solidFill>
-                        <a:srgbClr val="E3E7ED"/>
-                      </a:solidFill>
-                      <a:prstDash val="solid"/>
-                      <a:round/>
-                      <a:headEnd type="none" w="med" len="med"/>
-                      <a:tailEnd type="none" w="med" len="med"/>
-                    </a:lnL>
-                    <a:lnR w="12700" cap="flat" cmpd="sng" algn="ctr">
-                      <a:solidFill>
-                        <a:srgbClr val="E3E7ED"/>
-                      </a:solidFill>
-                      <a:prstDash val="solid"/>
-                      <a:round/>
-                      <a:headEnd type="none" w="med" len="med"/>
-                      <a:tailEnd type="none" w="med" len="med"/>
-                    </a:lnR>
-                    <a:lnT w="12700" cap="flat" cmpd="sng" algn="ctr">
-                      <a:solidFill>
-                        <a:srgbClr val="E3E7ED"/>
-                      </a:solidFill>
-                      <a:prstDash val="solid"/>
-                      <a:round/>
-                      <a:headEnd type="none" w="med" len="med"/>
-                      <a:tailEnd type="none" w="med" len="med"/>
-                    </a:lnT>
-                    <a:lnB w="12700" cap="flat" cmpd="sng" algn="ctr">
-                      <a:solidFill>
-                        <a:srgbClr val="E3E7ED"/>
-                      </a:solidFill>
-                      <a:prstDash val="solid"/>
-                      <a:round/>
-                      <a:headEnd type="none" w="med" len="med"/>
-                      <a:tailEnd type="none" w="med" len="med"/>
-                    </a:lnB>
-                    <a:solidFill>
-                      <a:srgbClr val="FFFFFF"/>
-                    </a:solidFill>
-                  </a:tcPr>
-                </a:tc>
-              </a:tr>
-              <a:tr h="525780">
-                <a:tc>
-                  <a:txBody>
-                    <a:bodyPr/>
-                    <a:lstStyle/>
-                    <a:p>
-                      <a:pPr algn="ctr" indent="0" marL="0">
-                        <a:buNone/>
-                      </a:pPr>
-                      <a:r>
-                        <a:rPr lang="en-US" sz="1500" b="1" dirty="0">
-                          <a:solidFill>
-                            <a:srgbClr val="1C2733"/>
-                          </a:solidFill>
-                          <a:latin typeface="Calibri" pitchFamily="34" charset="0"/>
-                          <a:ea typeface="Calibri" pitchFamily="34" charset="-122"/>
-                          <a:cs typeface="Calibri" pitchFamily="34" charset="-120"/>
-                        </a:rPr>
-                        <a:t>До 28.02.2022</a:t>
-                      </a:r>
-                      <a:endParaRPr lang="en-US" sz="1500" dirty="0">
-                        <a:latin typeface="Calibri" charset="0"/>
-                        <a:ea typeface="Calibri" charset="0"/>
-                        <a:cs typeface="Calibri" charset="0"/>
-                      </a:endParaRPr>
-                    </a:p>
-                  </a:txBody>
-                  <a:tcPr marL="91440" marR="91440" marT="45720" marB="45720">
-                    <a:lnL w="12700" cap="flat" cmpd="sng" algn="ctr">
-                      <a:solidFill>
-                        <a:srgbClr val="E3E7ED"/>
-                      </a:solidFill>
-                      <a:prstDash val="solid"/>
-                      <a:round/>
-                      <a:headEnd type="none" w="med" len="med"/>
-                      <a:tailEnd type="none" w="med" len="med"/>
-                    </a:lnL>
-                    <a:lnR w="12700" cap="flat" cmpd="sng" algn="ctr">
-                      <a:solidFill>
-                        <a:srgbClr val="E3E7ED"/>
-                      </a:solidFill>
-                      <a:prstDash val="solid"/>
-                      <a:round/>
-                      <a:headEnd type="none" w="med" len="med"/>
-                      <a:tailEnd type="none" w="med" len="med"/>
-                    </a:lnR>
-                    <a:lnT w="12700" cap="flat" cmpd="sng" algn="ctr">
-                      <a:solidFill>
-                        <a:srgbClr val="E3E7ED"/>
-                      </a:solidFill>
-                      <a:prstDash val="solid"/>
-                      <a:round/>
-                      <a:headEnd type="none" w="med" len="med"/>
-                      <a:tailEnd type="none" w="med" len="med"/>
-                    </a:lnT>
-                    <a:lnB w="12700" cap="flat" cmpd="sng" algn="ctr">
-                      <a:solidFill>
-                        <a:srgbClr val="E3E7ED"/>
-                      </a:solidFill>
-                      <a:prstDash val="solid"/>
-                      <a:round/>
-                      <a:headEnd type="none" w="med" len="med"/>
-                      <a:tailEnd type="none" w="med" len="med"/>
-                    </a:lnB>
-                    <a:solidFill>
-                      <a:srgbClr val="FFFFFF"/>
-                    </a:solidFill>
-                  </a:tcPr>
-                </a:tc>
-                <a:tc>
-                  <a:txBody>
-                    <a:bodyPr/>
-                    <a:lstStyle/>
-                    <a:p>
-                      <a:pPr algn="ctr" indent="0" marL="0">
-                        <a:buNone/>
-                      </a:pPr>
-                      <a:r>
-                        <a:rPr lang="en-US" sz="1500" dirty="0">
-                          <a:solidFill>
-                            <a:srgbClr val="B23B3B"/>
-                          </a:solidFill>
-                          <a:latin typeface="Calibri" pitchFamily="34" charset="0"/>
-                          <a:ea typeface="Calibri" pitchFamily="34" charset="-122"/>
-                          <a:cs typeface="Calibri" pitchFamily="34" charset="-120"/>
-                        </a:rPr>
-                        <a:t>p = 0,062</a:t>
-                      </a:r>
-                      <a:endParaRPr lang="en-US" sz="1500" dirty="0">
-                        <a:latin typeface="Calibri" charset="0"/>
-                        <a:ea typeface="Calibri" charset="0"/>
-                        <a:cs typeface="Calibri" charset="0"/>
-                      </a:endParaRPr>
-                    </a:p>
-                  </a:txBody>
-                  <a:tcPr marL="91440" marR="91440" marT="45720" marB="45720">
-                    <a:lnL w="12700" cap="flat" cmpd="sng" algn="ctr">
-                      <a:solidFill>
-                        <a:srgbClr val="E3E7ED"/>
-                      </a:solidFill>
-                      <a:prstDash val="solid"/>
-                      <a:round/>
-                      <a:headEnd type="none" w="med" len="med"/>
-                      <a:tailEnd type="none" w="med" len="med"/>
-                    </a:lnL>
-                    <a:lnR w="12700" cap="flat" cmpd="sng" algn="ctr">
-                      <a:solidFill>
-                        <a:srgbClr val="E3E7ED"/>
-                      </a:solidFill>
-                      <a:prstDash val="solid"/>
-                      <a:round/>
-                      <a:headEnd type="none" w="med" len="med"/>
-                      <a:tailEnd type="none" w="med" len="med"/>
-                    </a:lnR>
-                    <a:lnT w="12700" cap="flat" cmpd="sng" algn="ctr">
-                      <a:solidFill>
-                        <a:srgbClr val="E3E7ED"/>
-                      </a:solidFill>
-                      <a:prstDash val="solid"/>
-                      <a:round/>
-                      <a:headEnd type="none" w="med" len="med"/>
-                      <a:tailEnd type="none" w="med" len="med"/>
-                    </a:lnT>
-                    <a:lnB w="12700" cap="flat" cmpd="sng" algn="ctr">
-                      <a:solidFill>
-                        <a:srgbClr val="E3E7ED"/>
-                      </a:solidFill>
-                      <a:prstDash val="solid"/>
-                      <a:round/>
-                      <a:headEnd type="none" w="med" len="med"/>
-                      <a:tailEnd type="none" w="med" len="med"/>
-                    </a:lnB>
-                    <a:solidFill>
-                      <a:srgbClr val="FFFFFF"/>
-                    </a:solidFill>
-                  </a:tcPr>
-                </a:tc>
-                <a:tc>
-                  <a:txBody>
-                    <a:bodyPr/>
-                    <a:lstStyle/>
-                    <a:p>
-                      <a:pPr algn="ctr" indent="0" marL="0">
-                        <a:buNone/>
-                      </a:pPr>
-                      <a:r>
-                        <a:rPr lang="en-US" sz="1500" b="1" dirty="0">
-                          <a:solidFill>
-                            <a:srgbClr val="1C7C3E"/>
-                          </a:solidFill>
-                          <a:latin typeface="Calibri" pitchFamily="34" charset="0"/>
-                          <a:ea typeface="Calibri" pitchFamily="34" charset="-122"/>
-                          <a:cs typeface="Calibri" pitchFamily="34" charset="-120"/>
-                        </a:rPr>
-                        <a:t>p = 0,040</a:t>
-                      </a:r>
-                      <a:endParaRPr lang="en-US" sz="1500" dirty="0">
-                        <a:latin typeface="Calibri" charset="0"/>
-                        <a:ea typeface="Calibri" charset="0"/>
-                        <a:cs typeface="Calibri" charset="0"/>
-                      </a:endParaRPr>
-                    </a:p>
-                  </a:txBody>
-                  <a:tcPr marL="91440" marR="91440" marT="45720" marB="45720">
-                    <a:lnL w="12700" cap="flat" cmpd="sng" algn="ctr">
-                      <a:solidFill>
-                        <a:srgbClr val="E3E7ED"/>
-                      </a:solidFill>
-                      <a:prstDash val="solid"/>
-                      <a:round/>
-                      <a:headEnd type="none" w="med" len="med"/>
-                      <a:tailEnd type="none" w="med" len="med"/>
-                    </a:lnL>
-                    <a:lnR w="12700" cap="flat" cmpd="sng" algn="ctr">
-                      <a:solidFill>
-                        <a:srgbClr val="E3E7ED"/>
-                      </a:solidFill>
-                      <a:prstDash val="solid"/>
-                      <a:round/>
-                      <a:headEnd type="none" w="med" len="med"/>
-                      <a:tailEnd type="none" w="med" len="med"/>
-                    </a:lnR>
-                    <a:lnT w="12700" cap="flat" cmpd="sng" algn="ctr">
-                      <a:solidFill>
-                        <a:srgbClr val="E3E7ED"/>
-                      </a:solidFill>
-                      <a:prstDash val="solid"/>
-                      <a:round/>
-                      <a:headEnd type="none" w="med" len="med"/>
-                      <a:tailEnd type="none" w="med" len="med"/>
-                    </a:lnT>
-                    <a:lnB w="12700" cap="flat" cmpd="sng" algn="ctr">
-                      <a:solidFill>
-                        <a:srgbClr val="E3E7ED"/>
-                      </a:solidFill>
-                      <a:prstDash val="solid"/>
-                      <a:round/>
-                      <a:headEnd type="none" w="med" len="med"/>
-                      <a:tailEnd type="none" w="med" len="med"/>
-                    </a:lnB>
-                    <a:solidFill>
-                      <a:srgbClr val="FFFFFF"/>
-                    </a:solidFill>
-                  </a:tcPr>
-                </a:tc>
-              </a:tr>
-              <a:tr h="525780">
-                <a:tc>
-                  <a:txBody>
-                    <a:bodyPr/>
-                    <a:lstStyle/>
-                    <a:p>
-                      <a:pPr algn="ctr" indent="0" marL="0">
-                        <a:buNone/>
-                      </a:pPr>
-                      <a:r>
-                        <a:rPr lang="en-US" sz="1500" b="1" dirty="0">
-                          <a:solidFill>
-                            <a:srgbClr val="1C2733"/>
-                          </a:solidFill>
-                          <a:latin typeface="Calibri" pitchFamily="34" charset="0"/>
-                          <a:ea typeface="Calibri" pitchFamily="34" charset="-122"/>
-                          <a:cs typeface="Calibri" pitchFamily="34" charset="-120"/>
-                        </a:rPr>
-                        <a:t>После 28.02.2022</a:t>
-                      </a:r>
-                      <a:endParaRPr lang="en-US" sz="1500" dirty="0">
-                        <a:latin typeface="Calibri" charset="0"/>
-                        <a:ea typeface="Calibri" charset="0"/>
-                        <a:cs typeface="Calibri" charset="0"/>
-                      </a:endParaRPr>
-                    </a:p>
-                  </a:txBody>
-                  <a:tcPr marL="91440" marR="91440" marT="45720" marB="45720">
-                    <a:lnL w="12700" cap="flat" cmpd="sng" algn="ctr">
-                      <a:solidFill>
-                        <a:srgbClr val="E3E7ED"/>
-                      </a:solidFill>
-                      <a:prstDash val="solid"/>
-                      <a:round/>
-                      <a:headEnd type="none" w="med" len="med"/>
-                      <a:tailEnd type="none" w="med" len="med"/>
-                    </a:lnL>
-                    <a:lnR w="12700" cap="flat" cmpd="sng" algn="ctr">
-                      <a:solidFill>
-                        <a:srgbClr val="E3E7ED"/>
-                      </a:solidFill>
-                      <a:prstDash val="solid"/>
-                      <a:round/>
-                      <a:headEnd type="none" w="med" len="med"/>
-                      <a:tailEnd type="none" w="med" len="med"/>
-                    </a:lnR>
-                    <a:lnT w="12700" cap="flat" cmpd="sng" algn="ctr">
-                      <a:solidFill>
-                        <a:srgbClr val="E3E7ED"/>
-                      </a:solidFill>
-                      <a:prstDash val="solid"/>
-                      <a:round/>
-                      <a:headEnd type="none" w="med" len="med"/>
-                      <a:tailEnd type="none" w="med" len="med"/>
-                    </a:lnT>
-                    <a:lnB w="12700" cap="flat" cmpd="sng" algn="ctr">
-                      <a:solidFill>
-                        <a:srgbClr val="E3E7ED"/>
-                      </a:solidFill>
-                      <a:prstDash val="solid"/>
-                      <a:round/>
-                      <a:headEnd type="none" w="med" len="med"/>
-                      <a:tailEnd type="none" w="med" len="med"/>
-                    </a:lnB>
-                    <a:solidFill>
-                      <a:srgbClr val="FFFFFF"/>
-                    </a:solidFill>
-                  </a:tcPr>
-                </a:tc>
-                <a:tc>
-                  <a:txBody>
-                    <a:bodyPr/>
-                    <a:lstStyle/>
-                    <a:p>
-                      <a:pPr algn="ctr" indent="0" marL="0">
-                        <a:buNone/>
-                      </a:pPr>
-                      <a:r>
-                        <a:rPr lang="en-US" sz="1500" dirty="0">
-                          <a:solidFill>
-                            <a:srgbClr val="B23B3B"/>
-                          </a:solidFill>
-                          <a:latin typeface="Calibri" pitchFamily="34" charset="0"/>
-                          <a:ea typeface="Calibri" pitchFamily="34" charset="-122"/>
-                          <a:cs typeface="Calibri" pitchFamily="34" charset="-120"/>
-                        </a:rPr>
-                        <a:t>p = 0,779</a:t>
-                      </a:r>
-                      <a:endParaRPr lang="en-US" sz="1500" dirty="0">
-                        <a:latin typeface="Calibri" charset="0"/>
-                        <a:ea typeface="Calibri" charset="0"/>
-                        <a:cs typeface="Calibri" charset="0"/>
-                      </a:endParaRPr>
-                    </a:p>
-                  </a:txBody>
-                  <a:tcPr marL="91440" marR="91440" marT="45720" marB="45720">
-                    <a:lnL w="12700" cap="flat" cmpd="sng" algn="ctr">
-                      <a:solidFill>
-                        <a:srgbClr val="E3E7ED"/>
-                      </a:solidFill>
-                      <a:prstDash val="solid"/>
-                      <a:round/>
-                      <a:headEnd type="none" w="med" len="med"/>
-                      <a:tailEnd type="none" w="med" len="med"/>
-                    </a:lnL>
-                    <a:lnR w="12700" cap="flat" cmpd="sng" algn="ctr">
-                      <a:solidFill>
-                        <a:srgbClr val="E3E7ED"/>
-                      </a:solidFill>
-                      <a:prstDash val="solid"/>
-                      <a:round/>
-                      <a:headEnd type="none" w="med" len="med"/>
-                      <a:tailEnd type="none" w="med" len="med"/>
-                    </a:lnR>
-                    <a:lnT w="12700" cap="flat" cmpd="sng" algn="ctr">
-                      <a:solidFill>
-                        <a:srgbClr val="E3E7ED"/>
-                      </a:solidFill>
-                      <a:prstDash val="solid"/>
-                      <a:round/>
-                      <a:headEnd type="none" w="med" len="med"/>
-                      <a:tailEnd type="none" w="med" len="med"/>
-                    </a:lnT>
-                    <a:lnB w="12700" cap="flat" cmpd="sng" algn="ctr">
-                      <a:solidFill>
-                        <a:srgbClr val="E3E7ED"/>
-                      </a:solidFill>
-                      <a:prstDash val="solid"/>
-                      <a:round/>
-                      <a:headEnd type="none" w="med" len="med"/>
-                      <a:tailEnd type="none" w="med" len="med"/>
-                    </a:lnB>
-                    <a:solidFill>
-                      <a:srgbClr val="FFFFFF"/>
-                    </a:solidFill>
-                  </a:tcPr>
-                </a:tc>
-                <a:tc>
-                  <a:txBody>
-                    <a:bodyPr/>
-                    <a:lstStyle/>
-                    <a:p>
-                      <a:pPr algn="ctr" indent="0" marL="0">
-                        <a:buNone/>
-                      </a:pPr>
-                      <a:r>
-                        <a:rPr lang="en-US" sz="1500" b="1" dirty="0">
-                          <a:solidFill>
-                            <a:srgbClr val="1C7C3E"/>
-                          </a:solidFill>
-                          <a:latin typeface="Calibri" pitchFamily="34" charset="0"/>
-                          <a:ea typeface="Calibri" pitchFamily="34" charset="-122"/>
-                          <a:cs typeface="Calibri" pitchFamily="34" charset="-120"/>
-                        </a:rPr>
-                        <a:t>p &lt; 0,0001</a:t>
-                      </a:r>
-                      <a:endParaRPr lang="en-US" sz="1500" dirty="0">
-                        <a:latin typeface="Calibri" charset="0"/>
-                        <a:ea typeface="Calibri" charset="0"/>
-                        <a:cs typeface="Calibri" charset="0"/>
-                      </a:endParaRPr>
-                    </a:p>
-                  </a:txBody>
-                  <a:tcPr marL="91440" marR="91440" marT="45720" marB="45720">
-                    <a:lnL w="12700" cap="flat" cmpd="sng" algn="ctr">
-                      <a:solidFill>
-                        <a:srgbClr val="E3E7ED"/>
-                      </a:solidFill>
-                      <a:prstDash val="solid"/>
-                      <a:round/>
-                      <a:headEnd type="none" w="med" len="med"/>
-                      <a:tailEnd type="none" w="med" len="med"/>
-                    </a:lnL>
-                    <a:lnR w="12700" cap="flat" cmpd="sng" algn="ctr">
-                      <a:solidFill>
-                        <a:srgbClr val="E3E7ED"/>
-                      </a:solidFill>
-                      <a:prstDash val="solid"/>
-                      <a:round/>
-                      <a:headEnd type="none" w="med" len="med"/>
-                      <a:tailEnd type="none" w="med" len="med"/>
-                    </a:lnR>
-                    <a:lnT w="12700" cap="flat" cmpd="sng" algn="ctr">
-                      <a:solidFill>
-                        <a:srgbClr val="E3E7ED"/>
-                      </a:solidFill>
-                      <a:prstDash val="solid"/>
-                      <a:round/>
-                      <a:headEnd type="none" w="med" len="med"/>
-                      <a:tailEnd type="none" w="med" len="med"/>
-                    </a:lnT>
-                    <a:lnB w="12700" cap="flat" cmpd="sng" algn="ctr">
-                      <a:solidFill>
-                        <a:srgbClr val="E3E7ED"/>
-                      </a:solidFill>
-                      <a:prstDash val="solid"/>
-                      <a:round/>
-                      <a:headEnd type="none" w="med" len="med"/>
-                      <a:tailEnd type="none" w="med" len="med"/>
-                    </a:lnB>
-                    <a:solidFill>
-                      <a:srgbClr val="FFFFFF"/>
-                    </a:solidFill>
-                  </a:tcPr>
-                </a:tc>
-              </a:tr>
-            </a:tbl>
-          </a:graphicData>
-        </a:graphic>
-      </p:graphicFrame>
-      <p:sp>
-        <p:nvSpPr>
-          <p:cNvPr id="6" name="Text 3"/>
+              <a:rPr lang="en-US" sz="1500" b="1" dirty="0">
+                <a:solidFill>
+                  <a:srgbClr val="13294B"/>
+                </a:solidFill>
+                <a:latin typeface="Calibri" pitchFamily="34" charset="0"/>
+                <a:ea typeface="Calibri" pitchFamily="34" charset="-122"/>
+                <a:cs typeface="Calibri" pitchFamily="34" charset="-120"/>
+              </a:rPr>
+              <a:t>Событийное исследование</a:t>
+            </a:r>
+            <a:endParaRPr lang="en-US" sz="1500" dirty="0"/>
+          </a:p>
+        </p:txBody>
+      </p:sp>
+      <p:sp>
+        <p:nvSpPr>
+          <p:cNvPr id="5" name="Text 3"/>
           <p:cNvSpPr txBox="1"/>
           <p:nvPr/>
         </p:nvSpPr>
         <p:spPr>
           <a:xfrm>
-            <a:off x="548640" y="4343400"/>
-            <a:ext cx="10972800" cy="1188720"/>
+            <a:off x="731520" y="2057400"/>
+            <a:ext cx="4937760" cy="3474720"/>
+          </a:xfrm>
+          <a:prstGeom prst="rect">
+            <a:avLst/>
+          </a:prstGeom>
+          <a:noFill/>
+          <a:ln/>
+        </p:spPr>
+        <p:txBody>
+          <a:bodyPr wrap="square" lIns="0" tIns="0" rIns="0" bIns="0" rtlCol="0" anchor="ctr"/>
+          <a:lstStyle/>
+          <a:p>
+            <a:pPr marL="342900" indent="-342900">
+              <a:spcAft>
+                <a:spcPts val="1000"/>
+              </a:spcAft>
+              <a:buSzPct val="100000"/>
+              <a:buChar char="•"/>
+            </a:pPr>
+            <a:r>
+              <a:rPr lang="en-US" sz="1200" dirty="0">
+                <a:solidFill>
+                  <a:srgbClr val="1C2733"/>
+                </a:solidFill>
+                <a:latin typeface="Calibri" pitchFamily="34" charset="0"/>
+                <a:ea typeface="Calibri" pitchFamily="34" charset="-122"/>
+                <a:cs typeface="Calibri" pitchFamily="34" charset="-120"/>
+              </a:rPr>
+              <a:t>Наивный тест (плацебо по всей выборке): p=0,000 — но 19 из 65 решений физически лежат в кризисных годах.</a:t>
+            </a:r>
+            <a:endParaRPr lang="en-US" sz="1200" dirty="0"/>
+          </a:p>
+          <a:p>
+            <a:pPr marL="342900" indent="-342900">
+              <a:spcAft>
+                <a:spcPts val="1000"/>
+              </a:spcAft>
+              <a:buSzPct val="100000"/>
+              <a:buChar char="•"/>
+            </a:pPr>
+            <a:r>
+              <a:rPr lang="en-US" sz="1200" dirty="0">
+                <a:solidFill>
+                  <a:srgbClr val="1C2733"/>
+                </a:solidFill>
+                <a:latin typeface="Calibri" pitchFamily="34" charset="0"/>
+                <a:ea typeface="Calibri" pitchFamily="34" charset="-122"/>
+                <a:cs typeface="Calibri" pitchFamily="34" charset="-120"/>
+              </a:rPr>
+              <a:t>Плацебо стратифицировано по году + аномальная |доходность| (минус база за 30 дней): все события — p=0,009.</a:t>
+            </a:r>
+            <a:endParaRPr lang="en-US" sz="1200" dirty="0"/>
+          </a:p>
+          <a:p>
+            <a:pPr marL="342900" indent="-342900">
+              <a:spcAft>
+                <a:spcPts val="1000"/>
+              </a:spcAft>
+              <a:buSzPct val="100000"/>
+              <a:buChar char="•"/>
+            </a:pPr>
+            <a:r>
+              <a:rPr lang="en-US" sz="1200" b="1" dirty="0">
+                <a:solidFill>
+                  <a:srgbClr val="1C2733"/>
+                </a:solidFill>
+                <a:latin typeface="Calibri" pitchFamily="34" charset="0"/>
+                <a:ea typeface="Calibri" pitchFamily="34" charset="-122"/>
+                <a:cs typeface="Calibri" pitchFamily="34" charset="-120"/>
+              </a:rPr>
+              <a:t>Без 2014/2015/2022: p=0,457 — эффекта нет.</a:t>
+            </a:r>
+            <a:endParaRPr lang="en-US" sz="1200" dirty="0"/>
+          </a:p>
+          <a:p>
+            <a:pPr marL="342900" indent="-342900">
+              <a:spcAft>
+                <a:spcPts val="1000"/>
+              </a:spcAft>
+              <a:buSzPct val="100000"/>
+              <a:buChar char="•"/>
+            </a:pPr>
+            <a:r>
+              <a:rPr lang="en-US" sz="1200" dirty="0">
+                <a:solidFill>
+                  <a:srgbClr val="1C2733"/>
+                </a:solidFill>
+                <a:latin typeface="Calibri" pitchFamily="34" charset="0"/>
+                <a:ea typeface="Calibri" pitchFamily="34" charset="-122"/>
+                <a:cs typeface="Calibri" pitchFamily="34" charset="-120"/>
+              </a:rPr>
+              <a:t>После решения доходность выше (1,07%), чем до (0,84%, = базовый уровень 0,84%) — реакция идёт после, не до.</a:t>
+            </a:r>
+            <a:endParaRPr lang="en-US" sz="1200" dirty="0"/>
+          </a:p>
+        </p:txBody>
+      </p:sp>
+      <p:sp>
+        <p:nvSpPr>
+          <p:cNvPr id="6" name="Shape 4"/>
+          <p:cNvSpPr/>
+          <p:nvPr/>
+        </p:nvSpPr>
+        <p:spPr>
+          <a:xfrm>
+            <a:off x="6263640" y="1371600"/>
+            <a:ext cx="5394960" cy="4297680"/>
+          </a:xfrm>
+          <a:prstGeom prst="roundRect">
+            <a:avLst>
+              <a:gd name="adj" fmla="val 1702"/>
+            </a:avLst>
+          </a:prstGeom>
+          <a:solidFill>
+            <a:srgbClr val="13294B"/>
+          </a:solidFill>
+          <a:ln/>
+        </p:spPr>
+      </p:sp>
+      <p:sp>
+        <p:nvSpPr>
+          <p:cNvPr id="7" name="Text 5"/>
+          <p:cNvSpPr txBox="1"/>
+          <p:nvPr/>
+        </p:nvSpPr>
+        <p:spPr>
+          <a:xfrm>
+            <a:off x="6537960" y="1554480"/>
+            <a:ext cx="4846320" cy="365760"/>
           </a:xfrm>
           <a:prstGeom prst="rect">
             <a:avLst/>
@@ -9175,7 +7450,7 @@
               <a:buNone/>
             </a:pPr>
             <a:r>
-              <a:rPr lang="en-US" sz="1600" b="1" dirty="0">
+              <a:rPr lang="en-US" sz="1500" b="1" dirty="0">
                 <a:solidFill>
                   <a:srgbClr val="C9A227"/>
                 </a:solidFill>
@@ -9183,29 +7458,100 @@
                 <a:ea typeface="Calibri" pitchFamily="34" charset="-122"/>
                 <a:cs typeface="Calibri" pitchFamily="34" charset="-120"/>
               </a:rPr>
-              <a:t>Внутри каждого режима курс предсказывает ставку, а не наоборот. </a:t>
-            </a:r>
-            <a:pPr indent="0" marL="0">
-              <a:buNone/>
-            </a:pPr>
-            <a:r>
-              <a:rPr lang="en-US" sz="1600" dirty="0">
-                <a:solidFill>
-                  <a:srgbClr val="CADCFC"/>
-                </a:solidFill>
-                <a:latin typeface="Calibri" pitchFamily="34" charset="0"/>
-                <a:ea typeface="Calibri" pitchFamily="34" charset="-122"/>
-                <a:cs typeface="Calibri" pitchFamily="34" charset="-120"/>
-              </a:rPr>
-              <a:t>Полновыборочный результат, скорее всего, порождён самим фактом одновременного слома обоих рядов в 2022 году — не устойчивой внутрирежимной динамикой.</a:t>
-            </a:r>
-            <a:endParaRPr lang="en-US" sz="1600" dirty="0"/>
-          </a:p>
-        </p:txBody>
-      </p:sp>
-      <p:sp>
-        <p:nvSpPr>
-          <p:cNvPr id="7" name="Text 4"/>
+              <a:t>Прогноз вне выборки (rolling origin)</a:t>
+            </a:r>
+            <a:endParaRPr lang="en-US" sz="1500" dirty="0"/>
+          </a:p>
+        </p:txBody>
+      </p:sp>
+      <p:sp>
+        <p:nvSpPr>
+          <p:cNvPr id="8" name="Text 6"/>
+          <p:cNvSpPr txBox="1"/>
+          <p:nvPr/>
+        </p:nvSpPr>
+        <p:spPr>
+          <a:xfrm>
+            <a:off x="6537960" y="2057400"/>
+            <a:ext cx="4846320" cy="3474720"/>
+          </a:xfrm>
+          <a:prstGeom prst="rect">
+            <a:avLst/>
+          </a:prstGeom>
+          <a:noFill/>
+          <a:ln/>
+        </p:spPr>
+        <p:txBody>
+          <a:bodyPr wrap="square" lIns="0" tIns="0" rIns="0" bIns="0" rtlCol="0" anchor="ctr"/>
+          <a:lstStyle/>
+          <a:p>
+            <a:pPr marL="342900" indent="-342900">
+              <a:spcAft>
+                <a:spcPts val="1200"/>
+              </a:spcAft>
+              <a:buSzPct val="100000"/>
+              <a:buChar char="•"/>
+            </a:pPr>
+            <a:r>
+              <a:rPr lang="en-US" sz="1250" dirty="0">
+                <a:solidFill>
+                  <a:srgbClr val="FFFFFF"/>
+                </a:solidFill>
+                <a:latin typeface="Calibri" pitchFamily="34" charset="0"/>
+                <a:ea typeface="Calibri" pitchFamily="34" charset="-122"/>
+                <a:cs typeface="Calibri" pitchFamily="34" charset="-120"/>
+              </a:rPr>
+              <a:t>Наивный прогноз («без изменений») конкурентен с VAR-моделями на горизонтах 1–3 месяца.</a:t>
+            </a:r>
+            <a:endParaRPr lang="en-US" sz="1250" dirty="0"/>
+          </a:p>
+          <a:p>
+            <a:pPr marL="342900" indent="-342900">
+              <a:spcAft>
+                <a:spcPts val="1200"/>
+              </a:spcAft>
+              <a:buSzPct val="100000"/>
+              <a:buChar char="•"/>
+            </a:pPr>
+            <a:r>
+              <a:rPr lang="en-US" sz="1250" dirty="0">
+                <a:solidFill>
+                  <a:srgbClr val="FFFFFF"/>
+                </a:solidFill>
+                <a:latin typeface="Calibri" pitchFamily="34" charset="0"/>
+                <a:ea typeface="Calibri" pitchFamily="34" charset="-122"/>
+                <a:cs typeface="Calibri" pitchFamily="34" charset="-120"/>
+              </a:rPr>
+              <a:t>RMSE (h=1, спокойные годы): наивный 0,033, VAR без ставки 0,035, VAR со ставкой 0,037 — ставка прогноз не улучшает.</a:t>
+            </a:r>
+            <a:endParaRPr lang="en-US" sz="1250" dirty="0"/>
+          </a:p>
+          <a:p>
+            <a:pPr marL="342900" indent="-342900">
+              <a:spcAft>
+                <a:spcPts val="1200"/>
+              </a:spcAft>
+              <a:buSzPct val="100000"/>
+              <a:buChar char="•"/>
+            </a:pPr>
+            <a:r>
+              <a:rPr lang="en-US" sz="1250" b="1" dirty="0">
+                <a:solidFill>
+                  <a:srgbClr val="FFFFFF"/>
+                </a:solidFill>
+                <a:latin typeface="Calibri" pitchFamily="34" charset="0"/>
+                <a:ea typeface="Calibri" pitchFamily="34" charset="-122"/>
+                <a:cs typeface="Calibri" pitchFamily="34" charset="-120"/>
+              </a:rPr>
+              <a:t>Значимость по Грейнджеру внутри выборки ≠ польза для прогноза вне неё — разные вопросы.</a:t>
+            </a:r>
+            <a:endParaRPr lang="en-US" sz="1250" dirty="0"/>
+          </a:p>
+        </p:txBody>
+      </p:sp>
+      <p:sp>
+        <p:nvSpPr>
+          <p:cNvPr id="9" name="Text 7"/>
           <p:cNvSpPr txBox="1"/>
           <p:nvPr/>
         </p:nvSpPr>
@@ -9230,7 +7576,7 @@
             <a:r>
               <a:rPr lang="en-US" sz="1000" dirty="0">
                 <a:solidFill>
-                  <a:srgbClr val="8592A8"/>
+                  <a:srgbClr val="6B7688"/>
                 </a:solidFill>
                 <a:latin typeface="Calibri" pitchFamily="34" charset="0"/>
                 <a:ea typeface="Calibri" pitchFamily="34" charset="-122"/>

--- a/slides/presentation.pptx
+++ b/slides/presentation.pptx
@@ -512,7 +512,7 @@
           <a:p>
             <a:r>
               <a:rPr lang="en-US" dirty="0"/>
-              <a:t>Заголовок раскрывает главный вывод не сразу — сначала вопрос и дизайн, потом находка на слайде 6. Если попросят резюме в одном предложении: связь между ставкой и курсом реальна, но только в кризис.</a:t>
+              <a:t>Резюме в одном предложении: связь между ставкой и курсом статистически значима на полной выборке, но целиком объясняется семью кризисными месяцами из 156 — при их нейтрализации значимость исчезает.</a:t>
             </a:r>
             <a:endParaRPr lang="en-US" dirty="0"/>
           </a:p>
@@ -952,7 +952,7 @@
           <a:p>
             <a:r>
               <a:rPr lang="en-US" dirty="0"/>
-              <a:t>Если спросят про VECM: мы его не выбросили, а прогнали параллельно (слайд с Грейнджером) — результат тот же качественно.</a:t>
+              <a:t>Если спросят про VECM: мы его не выбросили, а прогнали параллельно (T4) — результат тот же качественно.</a:t>
             </a:r>
             <a:endParaRPr lang="en-US" dirty="0"/>
           </a:p>
@@ -1040,7 +1040,7 @@
           <a:p>
             <a:r>
               <a:rPr lang="en-US" dirty="0"/>
-              <a:t/>
+              <a:t>Обратить внимание на два эпизода, которые видны на всех трёх графиках одновременно: конец 2014 — начало 2015 (нефть падает, ставка и курс резко растут) и февраль-март 2022 (экстренное повышение ставки, пик курса). Это и есть те самые 7 месяцев, которые определяют весь результат — см. слайд 6.</a:t>
             </a:r>
             <a:endParaRPr lang="en-US" dirty="0"/>
           </a:p>
@@ -1128,7 +1128,7 @@
           <a:p>
             <a:r>
               <a:rPr lang="en-US" dirty="0"/>
-              <a:t>Это переработанная версия находки после внешнего ревью: в первой версии мы утверждали 'разворот' Грейнджера по подпериодам до/после 2022. Ревью показало, что оба подпериода всё ещё содержат кризисные месяцы. Спокойные периоды по отдельности не значимы ни в одну сторону — значит, дело не в направлении причинности, а в самом присутствии кризиса в выборке. Экзогенная дамми на кризисные месяцы эффект не убирает — связь размазана по кризисному режиму, а не сосредоточена в паре месяцев.</a:t>
+              <a:t>Ключевая методическая правка: одна общая дамми на весь кризисный период не гасит эффект выброса, потому что тот же выброс входит в VAR ещё и как лаг на t+1, t+2. Дамми нужно ставить по одному наблюдению. После этого исправления значимость на полной выборке действительно исчезает при нейтрализации обоих кризисов (p=0.74), что и есть прямое, а не косвенное доказательство главного тезиса.</a:t>
             </a:r>
             <a:endParaRPr lang="en-US" dirty="0"/>
           </a:p>
@@ -1216,7 +1216,7 @@
           <a:p>
             <a:r>
               <a:rPr lang="en-US" dirty="0"/>
-              <a:t/>
+              <a:t>Размер эффекта отдельно от значимости: сумма коэффициентов при двух лагах ставки в уравнении курса — 0.0005, 95% ДИ от -0.008 до 0.009, включает ноль.</a:t>
             </a:r>
             <a:endParaRPr lang="en-US" dirty="0"/>
           </a:p>
@@ -1392,7 +1392,7 @@
           <a:p>
             <a:r>
               <a:rPr lang="en-US" dirty="0"/>
-              <a:t/>
+              <a:t>Для вложенной пары VAR-без-ставки/VAR-со-ставкой классический тест Диболда-Мариано формально смещён (лишние параметры добавляют шум оценивания) — корректнее тест Кларка-Уэста, мы его не реализовывали, это отмечено как ограничение.</a:t>
             </a:r>
             <a:endParaRPr lang="en-US" dirty="0"/>
           </a:p>
@@ -2001,7 +2001,7 @@
               <a:buNone/>
             </a:pPr>
             <a:r>
-              <a:rPr lang="en-US" sz="2800" b="1" dirty="0">
+              <a:rPr lang="en-US" sz="2700" b="1" dirty="0">
                 <a:solidFill>
                   <a:srgbClr val="1C2733"/>
                 </a:solidFill>
@@ -2011,7 +2011,7 @@
               </a:rPr>
               <a:t>Ответ на вопрос и ограничения</a:t>
             </a:r>
-            <a:endParaRPr lang="en-US" sz="2800" dirty="0"/>
+            <a:endParaRPr lang="en-US" sz="2700" dirty="0"/>
           </a:p>
         </p:txBody>
       </p:sp>
@@ -2105,7 +2105,7 @@
               <a:buChar char="•"/>
             </a:pPr>
             <a:r>
-              <a:rPr lang="en-US" sz="1250" dirty="0">
+              <a:rPr lang="en-US" sz="1200" dirty="0">
                 <a:solidFill>
                   <a:srgbClr val="1C2733"/>
                 </a:solidFill>
@@ -2113,9 +2113,9 @@
                 <a:ea typeface="Calibri" pitchFamily="34" charset="-122"/>
                 <a:cs typeface="Calibri" pitchFamily="34" charset="-120"/>
               </a:rPr>
-              <a:t>Факт: ставка и курс совместно движутся сильнее в кризис; вне кризиса предсказуемости нет ни в одну сторону.</a:t>
-            </a:r>
-            <a:endParaRPr lang="en-US" sz="1250" dirty="0"/>
+              <a:t>Факт: значимость связи целиком объясняется двумя кризисными эпизодами (7 месяцев из 156); при их нейтрализации она исчезает.</a:t>
+            </a:r>
+            <a:endParaRPr lang="en-US" sz="1200" dirty="0"/>
           </a:p>
           <a:p>
             <a:pPr marL="342900" indent="-342900">
@@ -2126,7 +2126,7 @@
               <a:buChar char="•"/>
             </a:pPr>
             <a:r>
-              <a:rPr lang="en-US" sz="1250" dirty="0">
+              <a:rPr lang="en-US" sz="1200" dirty="0">
                 <a:solidFill>
                   <a:srgbClr val="1C2733"/>
                 </a:solidFill>
@@ -2134,9 +2134,9 @@
                 <a:ea typeface="Calibri" pitchFamily="34" charset="-122"/>
                 <a:cs typeface="Calibri" pitchFamily="34" charset="-120"/>
               </a:rPr>
-              <a:t>Чего данные не позволяют утверждать: направление причинности, роль инфляции и ожиданий (их нет в модели).</a:t>
-            </a:r>
-            <a:endParaRPr lang="en-US" sz="1250" dirty="0"/>
+              <a:t>Вне кризисных лет — ни предсказуемости, ни повышенной волатильности вокруг решений. В кризис ставка помогает прогнозу курса, но на 12 наблюдениях это не доказано формально.</a:t>
+            </a:r>
+            <a:endParaRPr lang="en-US" sz="1200" dirty="0"/>
           </a:p>
           <a:p>
             <a:pPr marL="342900" indent="-342900">
@@ -2147,7 +2147,7 @@
               <a:buChar char="•"/>
             </a:pPr>
             <a:r>
-              <a:rPr lang="en-US" sz="1250" dirty="0">
+              <a:rPr lang="en-US" sz="1200" dirty="0">
                 <a:solidFill>
                   <a:srgbClr val="1C2733"/>
                 </a:solidFill>
@@ -2155,9 +2155,9 @@
                 <a:ea typeface="Calibri" pitchFamily="34" charset="-122"/>
                 <a:cs typeface="Calibri" pitchFamily="34" charset="-120"/>
               </a:rPr>
-              <a:t>Что нужно для следующего шага: данные по инфляции, календарь заседаний без изменения ставки, дизайн с «сюрпризом» решения.</a:t>
-            </a:r>
-            <a:endParaRPr lang="en-US" sz="1250" dirty="0"/>
+              <a:t>Чего данные не позволяют утверждать: направление причинности, роль инфляции и ожиданий (их нет в модели).</a:t>
+            </a:r>
+            <a:endParaRPr lang="en-US" sz="1200" dirty="0"/>
           </a:p>
         </p:txBody>
       </p:sp>
@@ -2251,7 +2251,7 @@
               <a:buChar char="•"/>
             </a:pPr>
             <a:r>
-              <a:rPr lang="en-US" sz="1250" dirty="0">
+              <a:rPr lang="en-US" sz="1200" dirty="0">
                 <a:solidFill>
                   <a:srgbClr val="FFFFFF"/>
                 </a:solidFill>
@@ -2261,7 +2261,7 @@
               </a:rPr>
               <a:t>Контрольная группа «заседания без изменения ставки» не построена — тест остаётся ослабленным.</a:t>
             </a:r>
-            <a:endParaRPr lang="en-US" sz="1250" dirty="0"/>
+            <a:endParaRPr lang="en-US" sz="1200" dirty="0"/>
           </a:p>
           <a:p>
             <a:pPr marL="342900" indent="-342900">
@@ -2272,7 +2272,7 @@
               <a:buChar char="•"/>
             </a:pPr>
             <a:r>
-              <a:rPr lang="en-US" sz="1250" dirty="0">
+              <a:rPr lang="en-US" sz="1200" dirty="0">
                 <a:solidFill>
                   <a:srgbClr val="FFFFFF"/>
                 </a:solidFill>
@@ -2280,9 +2280,9 @@
                 <a:ea typeface="Calibri" pitchFamily="34" charset="-122"/>
                 <a:cs typeface="Calibri" pitchFamily="34" charset="-120"/>
               </a:rPr>
-              <a:t>Множественные проверки (лаги, подпериоды, спецификации) не скорректированы на множественное тестирование.</a:t>
-            </a:r>
-            <a:endParaRPr lang="en-US" sz="1250" dirty="0"/>
+              <a:t>Множественные проверки (лаги, подпериоды, дамми-варианты) не скорректированы на множественное тестирование.</a:t>
+            </a:r>
+            <a:endParaRPr lang="en-US" sz="1200" dirty="0"/>
           </a:p>
           <a:p>
             <a:pPr marL="342900" indent="-342900">
@@ -2293,7 +2293,7 @@
               <a:buChar char="•"/>
             </a:pPr>
             <a:r>
-              <a:rPr lang="en-US" sz="1250" dirty="0">
+              <a:rPr lang="en-US" sz="1200" dirty="0">
                 <a:solidFill>
                   <a:srgbClr val="FFFFFF"/>
                 </a:solidFill>
@@ -2301,9 +2301,9 @@
                 <a:ea typeface="Calibri" pitchFamily="34" charset="-122"/>
                 <a:cs typeface="Calibri" pitchFamily="34" charset="-120"/>
               </a:rPr>
-              <a:t>Короткие кризисные подвыборки (n=12–55) — низкая мощность, отсутствие значимости может быть нехваткой данных.</a:t>
-            </a:r>
-            <a:endParaRPr lang="en-US" sz="1250" dirty="0"/>
+              <a:t>Короткие кризисные подвыборки (n=12–55) — низкая мощность.</a:t>
+            </a:r>
+            <a:endParaRPr lang="en-US" sz="1200" dirty="0"/>
           </a:p>
           <a:p>
             <a:pPr marL="342900" indent="-342900">
@@ -2314,7 +2314,7 @@
               <a:buChar char="•"/>
             </a:pPr>
             <a:r>
-              <a:rPr lang="en-US" sz="1250" dirty="0">
+              <a:rPr lang="en-US" sz="1200" dirty="0">
                 <a:solidFill>
                   <a:srgbClr val="FFFFFF"/>
                 </a:solidFill>
@@ -2322,9 +2322,9 @@
                 <a:ea typeface="Calibri" pitchFamily="34" charset="-122"/>
                 <a:cs typeface="Calibri" pitchFamily="34" charset="-120"/>
               </a:rPr>
-              <a:t>Три переменные — упрощение: нет ставки ФРС, инфляции, санкционного индекса.</a:t>
-            </a:r>
-            <a:endParaRPr lang="en-US" sz="1250" dirty="0"/>
+              <a:t>DM-тест для вложенных моделей формально смещён (нужен тест Кларка-Уэста); три переменные — упрощение.</a:t>
+            </a:r>
+            <a:endParaRPr lang="en-US" sz="1200" dirty="0"/>
           </a:p>
         </p:txBody>
       </p:sp>
@@ -2486,7 +2486,7 @@
         <p:spPr>
           <a:xfrm>
             <a:off x="731520" y="3749040"/>
-            <a:ext cx="9601200" cy="1188720"/>
+            <a:ext cx="9601200" cy="914400"/>
           </a:xfrm>
           <a:prstGeom prst="rect">
             <a:avLst/>
@@ -2527,24 +2527,7 @@
                 <a:ea typeface="Calibri" pitchFamily="34" charset="-122"/>
                 <a:cs typeface="Calibri" pitchFamily="34" charset="-120"/>
               </a:rPr>
-              <a:t>Полный прогон с нуля: ~19 секунд (лимит задания — 30 минут).</a:t>
-            </a:r>
-            <a:endParaRPr lang="en-US" sz="1300" dirty="0"/>
-          </a:p>
-          <a:p>
-            <a:pPr indent="0" marL="0">
-              <a:buNone/>
-            </a:pPr>
-            <a:r>
-              <a:rPr lang="en-US" sz="1300" dirty="0">
-                <a:solidFill>
-                  <a:srgbClr val="8592A8"/>
-                </a:solidFill>
-                <a:latin typeface="Calibri" pitchFamily="34" charset="0"/>
-                <a:ea typeface="Calibri" pitchFamily="34" charset="-122"/>
-                <a:cs typeface="Calibri" pitchFamily="34" charset="-120"/>
-              </a:rPr>
-              <a:t>Проект прошёл внешнее ревью — см. feedback_1.md в репозитории.</a:t>
+              <a:t>Полный прогон с нуля: ~16 секунд (лимит задания — 30 минут).</a:t>
             </a:r>
             <a:endParaRPr lang="en-US" sz="1300" dirty="0"/>
           </a:p>
@@ -2646,7 +2629,7 @@
               <a:buNone/>
             </a:pPr>
             <a:r>
-              <a:rPr lang="en-US" sz="2800" b="1" dirty="0">
+              <a:rPr lang="en-US" sz="2700" b="1" dirty="0">
                 <a:solidFill>
                   <a:srgbClr val="1C2733"/>
                 </a:solidFill>
@@ -2656,7 +2639,7 @@
               </a:rPr>
               <a:t>Вопрос</a:t>
             </a:r>
-            <a:endParaRPr lang="en-US" sz="2800" dirty="0"/>
+            <a:endParaRPr lang="en-US" sz="2700" dirty="0"/>
           </a:p>
         </p:txBody>
       </p:sp>
@@ -2826,7 +2809,7 @@
               <a:buNone/>
             </a:pPr>
             <a:r>
-              <a:rPr lang="en-US" sz="3200" b="1" dirty="0">
+              <a:rPr lang="en-US" sz="3000" b="1" dirty="0">
                 <a:solidFill>
                   <a:srgbClr val="13294B"/>
                 </a:solidFill>
@@ -2836,7 +2819,7 @@
               </a:rPr>
               <a:t>4,25 – 21%</a:t>
             </a:r>
-            <a:endParaRPr lang="en-US" sz="3200" dirty="0"/>
+            <a:endParaRPr lang="en-US" sz="3000" dirty="0"/>
           </a:p>
         </p:txBody>
       </p:sp>
@@ -2904,7 +2887,7 @@
               <a:buNone/>
             </a:pPr>
             <a:r>
-              <a:rPr lang="en-US" sz="3200" b="1" dirty="0">
+              <a:rPr lang="en-US" sz="3000" b="1" dirty="0">
                 <a:solidFill>
                   <a:srgbClr val="13294B"/>
                 </a:solidFill>
@@ -2914,7 +2897,7 @@
               </a:rPr>
               <a:t>65</a:t>
             </a:r>
-            <a:endParaRPr lang="en-US" sz="3200" dirty="0"/>
+            <a:endParaRPr lang="en-US" sz="3000" dirty="0"/>
           </a:p>
         </p:txBody>
       </p:sp>
@@ -3053,7 +3036,7 @@
               <a:buNone/>
             </a:pPr>
             <a:r>
-              <a:rPr lang="en-US" sz="2800" b="1" dirty="0">
+              <a:rPr lang="en-US" sz="2700" b="1" dirty="0">
                 <a:solidFill>
                   <a:srgbClr val="1C2733"/>
                 </a:solidFill>
@@ -3063,7 +3046,7 @@
               </a:rPr>
               <a:t>Данные: три открытых источника</a:t>
             </a:r>
-            <a:endParaRPr lang="en-US" sz="2800" dirty="0"/>
+            <a:endParaRPr lang="en-US" sz="2700" dirty="0"/>
           </a:p>
         </p:txBody>
       </p:sp>
@@ -3856,7 +3839,7 @@
               <a:buNone/>
             </a:pPr>
             <a:r>
-              <a:rPr lang="en-US" sz="2800" b="1" dirty="0">
+              <a:rPr lang="en-US" sz="2700" b="1" dirty="0">
                 <a:solidFill>
                   <a:srgbClr val="1C2733"/>
                 </a:solidFill>
@@ -3866,7 +3849,7 @@
               </a:rPr>
               <a:t>Методы: два слоя, спецификация выбрана данными</a:t>
             </a:r>
-            <a:endParaRPr lang="en-US" sz="2800" dirty="0"/>
+            <a:endParaRPr lang="en-US" sz="2700" dirty="0"/>
           </a:p>
         </p:txBody>
       </p:sp>
@@ -4009,7 +3992,7 @@
                 <a:ea typeface="Calibri" pitchFamily="34" charset="-122"/>
                 <a:cs typeface="Calibri" pitchFamily="34" charset="-120"/>
               </a:rPr>
-              <a:t>Тест на коинтеграцию: ранг неустойчив к лагу (1 при kd=1, 0 при kd=2/3) — берём VAR-в-разностях, VECM как альтернатива</a:t>
+              <a:t>Тест на коинтеграцию: ранг неустойчив к лагу (1 при kd=1, 0 при kd=2/3) — берём VAR-в-разностях, VECM как помеченная альтернатива</a:t>
             </a:r>
             <a:endParaRPr lang="en-US" sz="1300" dirty="0"/>
           </a:p>
@@ -4337,7 +4320,7 @@
               <a:buNone/>
             </a:pPr>
             <a:r>
-              <a:rPr lang="en-US" sz="2800" b="1" dirty="0">
+              <a:rPr lang="en-US" sz="2700" b="1" dirty="0">
                 <a:solidFill>
                   <a:srgbClr val="1C2733"/>
                 </a:solidFill>
@@ -4347,7 +4330,7 @@
               </a:rPr>
               <a:t>Три ряда во времени</a:t>
             </a:r>
-            <a:endParaRPr lang="en-US" sz="2800" dirty="0"/>
+            <a:endParaRPr lang="en-US" sz="2700" dirty="0"/>
           </a:p>
         </p:txBody>
       </p:sp>
@@ -4377,7 +4360,7 @@
       </p:pic>
       <p:sp>
         <p:nvSpPr>
-          <p:cNvPr id="4" name="Text 1"/>
+          <p:cNvPr id="5" name="Text 1"/>
           <p:cNvSpPr txBox="1"/>
           <p:nvPr/>
         </p:nvSpPr>
@@ -4540,7 +4523,7 @@
                 <a:ea typeface="Cambria" pitchFamily="34" charset="-122"/>
                 <a:cs typeface="Cambria" pitchFamily="34" charset="-120"/>
               </a:rPr>
-              <a:t>Связь видна только тогда, когда в выборке есть кризис</a:t>
+              <a:t>Значимость держится на семи месяцах из 156</a:t>
             </a:r>
             <a:endParaRPr lang="en-US" sz="2400" dirty="0"/>
           </a:p>
@@ -4593,11 +4576,10 @@
             <a:tbl>
               <a:tblPr/>
               <a:tblGrid>
-                <a:gridCol w="1920240"/>
-                <a:gridCol w="1097280"/>
-                <a:gridCol w="1097280"/>
+                <a:gridCol w="2743200"/>
+                <a:gridCol w="1371600"/>
               </a:tblGrid>
-              <a:tr h="594360">
+              <a:tr h="475488">
                 <a:tc>
                   <a:txBody>
                     <a:bodyPr/>
@@ -4615,7 +4597,7 @@
                           <a:ea typeface="Calibri" pitchFamily="34" charset="-122"/>
                           <a:cs typeface="Calibri" pitchFamily="34" charset="-120"/>
                         </a:rPr>
-                        <a:t>Подвыборка</a:t>
+                        <a:t>Нейтрализация (дамми по наблюдению)</a:t>
                       </a:r>
                       <a:endParaRPr lang="en-US" sz="1100" dirty="0">
                         <a:latin typeface="Calibri" charset="0"/>
@@ -4734,76 +4716,8 @@
                     </a:solidFill>
                   </a:tcPr>
                 </a:tc>
-                <a:tc>
-                  <a:txBody>
-                    <a:bodyPr/>
-                    <a:lstStyle/>
-                    <a:p>
-                      <a:pPr algn="ctr" indent="0" marL="0">
-                        <a:buNone/>
-                      </a:pPr>
-                      <a:r>
-                        <a:rPr lang="en-US" sz="1100" b="1" dirty="0">
-                          <a:solidFill>
-                            <a:srgbClr val="FFFFFF"/>
-                          </a:solidFill>
-                          <a:latin typeface="Calibri" pitchFamily="34" charset="0"/>
-                          <a:ea typeface="Calibri" pitchFamily="34" charset="-122"/>
-                          <a:cs typeface="Calibri" pitchFamily="34" charset="-120"/>
-                        </a:rPr>
-                        <a:t>курс→ставка, p</a:t>
-                      </a:r>
-                      <a:endParaRPr lang="en-US" sz="1100" dirty="0">
-                        <a:latin typeface="Calibri" charset="0"/>
-                        <a:ea typeface="Calibri" charset="0"/>
-                        <a:cs typeface="Calibri" charset="0"/>
-                      </a:endParaRPr>
-                    </a:p>
-                  </a:txBody>
-                  <a:tcPr marL="91440" marR="91440" marT="45720" marB="45720">
-                    <a:lnL w="12700" cap="flat" cmpd="sng" algn="ctr">
-                      <a:solidFill>
-                        <a:srgbClr val="E3E7ED"/>
-                      </a:solidFill>
-                      <a:prstDash val="solid"/>
-                      <a:round/>
-                      <a:headEnd type="none" w="med" len="med"/>
-                      <a:tailEnd type="none" w="med" len="med"/>
-                    </a:lnL>
-                    <a:lnR w="12700" cap="flat" cmpd="sng" algn="ctr">
-                      <a:solidFill>
-                        <a:srgbClr val="E3E7ED"/>
-                      </a:solidFill>
-                      <a:prstDash val="solid"/>
-                      <a:round/>
-                      <a:headEnd type="none" w="med" len="med"/>
-                      <a:tailEnd type="none" w="med" len="med"/>
-                    </a:lnR>
-                    <a:lnT w="12700" cap="flat" cmpd="sng" algn="ctr">
-                      <a:solidFill>
-                        <a:srgbClr val="E3E7ED"/>
-                      </a:solidFill>
-                      <a:prstDash val="solid"/>
-                      <a:round/>
-                      <a:headEnd type="none" w="med" len="med"/>
-                      <a:tailEnd type="none" w="med" len="med"/>
-                    </a:lnT>
-                    <a:lnB w="12700" cap="flat" cmpd="sng" algn="ctr">
-                      <a:solidFill>
-                        <a:srgbClr val="E3E7ED"/>
-                      </a:solidFill>
-                      <a:prstDash val="solid"/>
-                      <a:round/>
-                      <a:headEnd type="none" w="med" len="med"/>
-                      <a:tailEnd type="none" w="med" len="med"/>
-                    </a:lnB>
-                    <a:solidFill>
-                      <a:srgbClr val="13294B"/>
-                    </a:solidFill>
-                  </a:tcPr>
-                </a:tc>
               </a:tr>
-              <a:tr h="594360">
+              <a:tr h="475488">
                 <a:tc>
                   <a:txBody>
                     <a:bodyPr/>
@@ -4821,7 +4735,7 @@
                           <a:ea typeface="Calibri" pitchFamily="34" charset="-122"/>
                           <a:cs typeface="Calibri" pitchFamily="34" charset="-120"/>
                         </a:rPr>
-                        <a:t>Вся выборка</a:t>
+                        <a:t>Ничего (основной результат)</a:t>
                       </a:r>
                       <a:endParaRPr lang="en-US" sz="1100" dirty="0">
                         <a:latin typeface="Calibri" charset="0"/>
@@ -4889,7 +4803,215 @@
                           <a:ea typeface="Calibri" pitchFamily="34" charset="-122"/>
                           <a:cs typeface="Calibri" pitchFamily="34" charset="-120"/>
                         </a:rPr>
-                        <a:t>&lt;0,0001</a:t>
+                        <a:t>&lt;10⁻¹⁹</a:t>
+                      </a:r>
+                      <a:endParaRPr lang="en-US" sz="1100" dirty="0">
+                        <a:latin typeface="Calibri" charset="0"/>
+                        <a:ea typeface="Calibri" charset="0"/>
+                        <a:cs typeface="Calibri" charset="0"/>
+                      </a:endParaRPr>
+                    </a:p>
+                  </a:txBody>
+                  <a:tcPr marL="91440" marR="91440" marT="45720" marB="45720">
+                    <a:lnL w="12700" cap="flat" cmpd="sng" algn="ctr">
+                      <a:solidFill>
+                        <a:srgbClr val="E3E7ED"/>
+                      </a:solidFill>
+                      <a:prstDash val="solid"/>
+                      <a:round/>
+                      <a:headEnd type="none" w="med" len="med"/>
+                      <a:tailEnd type="none" w="med" len="med"/>
+                    </a:lnL>
+                    <a:lnR w="12700" cap="flat" cmpd="sng" algn="ctr">
+                      <a:solidFill>
+                        <a:srgbClr val="E3E7ED"/>
+                      </a:solidFill>
+                      <a:prstDash val="solid"/>
+                      <a:round/>
+                      <a:headEnd type="none" w="med" len="med"/>
+                      <a:tailEnd type="none" w="med" len="med"/>
+                    </a:lnR>
+                    <a:lnT w="12700" cap="flat" cmpd="sng" algn="ctr">
+                      <a:solidFill>
+                        <a:srgbClr val="E3E7ED"/>
+                      </a:solidFill>
+                      <a:prstDash val="solid"/>
+                      <a:round/>
+                      <a:headEnd type="none" w="med" len="med"/>
+                      <a:tailEnd type="none" w="med" len="med"/>
+                    </a:lnT>
+                    <a:lnB w="12700" cap="flat" cmpd="sng" algn="ctr">
+                      <a:solidFill>
+                        <a:srgbClr val="E3E7ED"/>
+                      </a:solidFill>
+                      <a:prstDash val="solid"/>
+                      <a:round/>
+                      <a:headEnd type="none" w="med" len="med"/>
+                      <a:tailEnd type="none" w="med" len="med"/>
+                    </a:lnB>
+                    <a:solidFill>
+                      <a:srgbClr val="FFFFFF"/>
+                    </a:solidFill>
+                  </a:tcPr>
+                </a:tc>
+              </a:tr>
+              <a:tr h="475488">
+                <a:tc>
+                  <a:txBody>
+                    <a:bodyPr/>
+                    <a:lstStyle/>
+                    <a:p>
+                      <a:pPr algn="ctr" indent="0" marL="0">
+                        <a:buNone/>
+                      </a:pPr>
+                      <a:r>
+                        <a:rPr lang="en-US" sz="1100" dirty="0">
+                          <a:solidFill>
+                            <a:srgbClr val="1C2733"/>
+                          </a:solidFill>
+                          <a:latin typeface="Calibri" pitchFamily="34" charset="0"/>
+                          <a:ea typeface="Calibri" pitchFamily="34" charset="-122"/>
+                          <a:cs typeface="Calibri" pitchFamily="34" charset="-120"/>
+                        </a:rPr>
+                        <a:t>Только 2022 (фев–апр)</a:t>
+                      </a:r>
+                      <a:endParaRPr lang="en-US" sz="1100" dirty="0">
+                        <a:latin typeface="Calibri" charset="0"/>
+                        <a:ea typeface="Calibri" charset="0"/>
+                        <a:cs typeface="Calibri" charset="0"/>
+                      </a:endParaRPr>
+                    </a:p>
+                  </a:txBody>
+                  <a:tcPr marL="91440" marR="91440" marT="45720" marB="45720">
+                    <a:lnL w="12700" cap="flat" cmpd="sng" algn="ctr">
+                      <a:solidFill>
+                        <a:srgbClr val="E3E7ED"/>
+                      </a:solidFill>
+                      <a:prstDash val="solid"/>
+                      <a:round/>
+                      <a:headEnd type="none" w="med" len="med"/>
+                      <a:tailEnd type="none" w="med" len="med"/>
+                    </a:lnL>
+                    <a:lnR w="12700" cap="flat" cmpd="sng" algn="ctr">
+                      <a:solidFill>
+                        <a:srgbClr val="E3E7ED"/>
+                      </a:solidFill>
+                      <a:prstDash val="solid"/>
+                      <a:round/>
+                      <a:headEnd type="none" w="med" len="med"/>
+                      <a:tailEnd type="none" w="med" len="med"/>
+                    </a:lnR>
+                    <a:lnT w="12700" cap="flat" cmpd="sng" algn="ctr">
+                      <a:solidFill>
+                        <a:srgbClr val="E3E7ED"/>
+                      </a:solidFill>
+                      <a:prstDash val="solid"/>
+                      <a:round/>
+                      <a:headEnd type="none" w="med" len="med"/>
+                      <a:tailEnd type="none" w="med" len="med"/>
+                    </a:lnT>
+                    <a:lnB w="12700" cap="flat" cmpd="sng" algn="ctr">
+                      <a:solidFill>
+                        <a:srgbClr val="E3E7ED"/>
+                      </a:solidFill>
+                      <a:prstDash val="solid"/>
+                      <a:round/>
+                      <a:headEnd type="none" w="med" len="med"/>
+                      <a:tailEnd type="none" w="med" len="med"/>
+                    </a:lnB>
+                    <a:solidFill>
+                      <a:srgbClr val="FFFFFF"/>
+                    </a:solidFill>
+                  </a:tcPr>
+                </a:tc>
+                <a:tc>
+                  <a:txBody>
+                    <a:bodyPr/>
+                    <a:lstStyle/>
+                    <a:p>
+                      <a:pPr algn="ctr" indent="0" marL="0">
+                        <a:buNone/>
+                      </a:pPr>
+                      <a:r>
+                        <a:rPr lang="en-US" sz="1100" dirty="0">
+                          <a:solidFill>
+                            <a:srgbClr val="B23B3B"/>
+                          </a:solidFill>
+                          <a:latin typeface="Calibri" pitchFamily="34" charset="0"/>
+                          <a:ea typeface="Calibri" pitchFamily="34" charset="-122"/>
+                          <a:cs typeface="Calibri" pitchFamily="34" charset="-120"/>
+                        </a:rPr>
+                        <a:t>0,10</a:t>
+                      </a:r>
+                      <a:endParaRPr lang="en-US" sz="1100" dirty="0">
+                        <a:latin typeface="Calibri" charset="0"/>
+                        <a:ea typeface="Calibri" charset="0"/>
+                        <a:cs typeface="Calibri" charset="0"/>
+                      </a:endParaRPr>
+                    </a:p>
+                  </a:txBody>
+                  <a:tcPr marL="91440" marR="91440" marT="45720" marB="45720">
+                    <a:lnL w="12700" cap="flat" cmpd="sng" algn="ctr">
+                      <a:solidFill>
+                        <a:srgbClr val="E3E7ED"/>
+                      </a:solidFill>
+                      <a:prstDash val="solid"/>
+                      <a:round/>
+                      <a:headEnd type="none" w="med" len="med"/>
+                      <a:tailEnd type="none" w="med" len="med"/>
+                    </a:lnL>
+                    <a:lnR w="12700" cap="flat" cmpd="sng" algn="ctr">
+                      <a:solidFill>
+                        <a:srgbClr val="E3E7ED"/>
+                      </a:solidFill>
+                      <a:prstDash val="solid"/>
+                      <a:round/>
+                      <a:headEnd type="none" w="med" len="med"/>
+                      <a:tailEnd type="none" w="med" len="med"/>
+                    </a:lnR>
+                    <a:lnT w="12700" cap="flat" cmpd="sng" algn="ctr">
+                      <a:solidFill>
+                        <a:srgbClr val="E3E7ED"/>
+                      </a:solidFill>
+                      <a:prstDash val="solid"/>
+                      <a:round/>
+                      <a:headEnd type="none" w="med" len="med"/>
+                      <a:tailEnd type="none" w="med" len="med"/>
+                    </a:lnT>
+                    <a:lnB w="12700" cap="flat" cmpd="sng" algn="ctr">
+                      <a:solidFill>
+                        <a:srgbClr val="E3E7ED"/>
+                      </a:solidFill>
+                      <a:prstDash val="solid"/>
+                      <a:round/>
+                      <a:headEnd type="none" w="med" len="med"/>
+                      <a:tailEnd type="none" w="med" len="med"/>
+                    </a:lnB>
+                    <a:solidFill>
+                      <a:srgbClr val="FFFFFF"/>
+                    </a:solidFill>
+                  </a:tcPr>
+                </a:tc>
+              </a:tr>
+              <a:tr h="475488">
+                <a:tc>
+                  <a:txBody>
+                    <a:bodyPr/>
+                    <a:lstStyle/>
+                    <a:p>
+                      <a:pPr algn="ctr" indent="0" marL="0">
+                        <a:buNone/>
+                      </a:pPr>
+                      <a:r>
+                        <a:rPr lang="en-US" sz="1100" dirty="0">
+                          <a:solidFill>
+                            <a:srgbClr val="1C2733"/>
+                          </a:solidFill>
+                          <a:latin typeface="Calibri" pitchFamily="34" charset="0"/>
+                          <a:ea typeface="Calibri" pitchFamily="34" charset="-122"/>
+                          <a:cs typeface="Calibri" pitchFamily="34" charset="-120"/>
+                        </a:rPr>
+                        <a:t>Только 2014-15 (ноя–фев)</a:t>
                       </a:r>
                       <a:endParaRPr lang="en-US" sz="1100" dirty="0">
                         <a:latin typeface="Calibri" charset="0"/>
@@ -4957,7 +5079,7 @@
                           <a:ea typeface="Calibri" pitchFamily="34" charset="-122"/>
                           <a:cs typeface="Calibri" pitchFamily="34" charset="-120"/>
                         </a:rPr>
-                        <a:t>0,005</a:t>
+                        <a:t>&lt;10⁻¹⁹</a:t>
                       </a:r>
                       <a:endParaRPr lang="en-US" sz="1100" dirty="0">
                         <a:latin typeface="Calibri" charset="0"/>
@@ -5009,7 +5131,7 @@
                   </a:tcPr>
                 </a:tc>
               </a:tr>
-              <a:tr h="594360">
+              <a:tr h="475488">
                 <a:tc>
                   <a:txBody>
                     <a:bodyPr/>
@@ -5027,7 +5149,7 @@
                           <a:ea typeface="Calibri" pitchFamily="34" charset="-122"/>
                           <a:cs typeface="Calibri" pitchFamily="34" charset="-120"/>
                         </a:rPr>
-                        <a:t>Спокойный период 2015-06–2021-12</a:t>
+                        <a:t>Оба кризиса</a:t>
                       </a:r>
                       <a:endParaRPr lang="en-US" sz="1100" dirty="0">
                         <a:latin typeface="Calibri" charset="0"/>
@@ -5087,213 +5209,7 @@
                         <a:buNone/>
                       </a:pPr>
                       <a:r>
-                        <a:rPr lang="en-US" sz="1100" dirty="0">
-                          <a:solidFill>
-                            <a:srgbClr val="B23B3B"/>
-                          </a:solidFill>
-                          <a:latin typeface="Calibri" pitchFamily="34" charset="0"/>
-                          <a:ea typeface="Calibri" pitchFamily="34" charset="-122"/>
-                          <a:cs typeface="Calibri" pitchFamily="34" charset="-120"/>
-                        </a:rPr>
-                        <a:t>0,54</a:t>
-                      </a:r>
-                      <a:endParaRPr lang="en-US" sz="1100" dirty="0">
-                        <a:latin typeface="Calibri" charset="0"/>
-                        <a:ea typeface="Calibri" charset="0"/>
-                        <a:cs typeface="Calibri" charset="0"/>
-                      </a:endParaRPr>
-                    </a:p>
-                  </a:txBody>
-                  <a:tcPr marL="91440" marR="91440" marT="45720" marB="45720">
-                    <a:lnL w="12700" cap="flat" cmpd="sng" algn="ctr">
-                      <a:solidFill>
-                        <a:srgbClr val="E3E7ED"/>
-                      </a:solidFill>
-                      <a:prstDash val="solid"/>
-                      <a:round/>
-                      <a:headEnd type="none" w="med" len="med"/>
-                      <a:tailEnd type="none" w="med" len="med"/>
-                    </a:lnL>
-                    <a:lnR w="12700" cap="flat" cmpd="sng" algn="ctr">
-                      <a:solidFill>
-                        <a:srgbClr val="E3E7ED"/>
-                      </a:solidFill>
-                      <a:prstDash val="solid"/>
-                      <a:round/>
-                      <a:headEnd type="none" w="med" len="med"/>
-                      <a:tailEnd type="none" w="med" len="med"/>
-                    </a:lnR>
-                    <a:lnT w="12700" cap="flat" cmpd="sng" algn="ctr">
-                      <a:solidFill>
-                        <a:srgbClr val="E3E7ED"/>
-                      </a:solidFill>
-                      <a:prstDash val="solid"/>
-                      <a:round/>
-                      <a:headEnd type="none" w="med" len="med"/>
-                      <a:tailEnd type="none" w="med" len="med"/>
-                    </a:lnT>
-                    <a:lnB w="12700" cap="flat" cmpd="sng" algn="ctr">
-                      <a:solidFill>
-                        <a:srgbClr val="E3E7ED"/>
-                      </a:solidFill>
-                      <a:prstDash val="solid"/>
-                      <a:round/>
-                      <a:headEnd type="none" w="med" len="med"/>
-                      <a:tailEnd type="none" w="med" len="med"/>
-                    </a:lnB>
-                    <a:solidFill>
-                      <a:srgbClr val="FFFFFF"/>
-                    </a:solidFill>
-                  </a:tcPr>
-                </a:tc>
-                <a:tc>
-                  <a:txBody>
-                    <a:bodyPr/>
-                    <a:lstStyle/>
-                    <a:p>
-                      <a:pPr algn="ctr" indent="0" marL="0">
-                        <a:buNone/>
-                      </a:pPr>
-                      <a:r>
-                        <a:rPr lang="en-US" sz="1100" dirty="0">
-                          <a:solidFill>
-                            <a:srgbClr val="B23B3B"/>
-                          </a:solidFill>
-                          <a:latin typeface="Calibri" pitchFamily="34" charset="0"/>
-                          <a:ea typeface="Calibri" pitchFamily="34" charset="-122"/>
-                          <a:cs typeface="Calibri" pitchFamily="34" charset="-120"/>
-                        </a:rPr>
-                        <a:t>0,37</a:t>
-                      </a:r>
-                      <a:endParaRPr lang="en-US" sz="1100" dirty="0">
-                        <a:latin typeface="Calibri" charset="0"/>
-                        <a:ea typeface="Calibri" charset="0"/>
-                        <a:cs typeface="Calibri" charset="0"/>
-                      </a:endParaRPr>
-                    </a:p>
-                  </a:txBody>
-                  <a:tcPr marL="91440" marR="91440" marT="45720" marB="45720">
-                    <a:lnL w="12700" cap="flat" cmpd="sng" algn="ctr">
-                      <a:solidFill>
-                        <a:srgbClr val="E3E7ED"/>
-                      </a:solidFill>
-                      <a:prstDash val="solid"/>
-                      <a:round/>
-                      <a:headEnd type="none" w="med" len="med"/>
-                      <a:tailEnd type="none" w="med" len="med"/>
-                    </a:lnL>
-                    <a:lnR w="12700" cap="flat" cmpd="sng" algn="ctr">
-                      <a:solidFill>
-                        <a:srgbClr val="E3E7ED"/>
-                      </a:solidFill>
-                      <a:prstDash val="solid"/>
-                      <a:round/>
-                      <a:headEnd type="none" w="med" len="med"/>
-                      <a:tailEnd type="none" w="med" len="med"/>
-                    </a:lnR>
-                    <a:lnT w="12700" cap="flat" cmpd="sng" algn="ctr">
-                      <a:solidFill>
-                        <a:srgbClr val="E3E7ED"/>
-                      </a:solidFill>
-                      <a:prstDash val="solid"/>
-                      <a:round/>
-                      <a:headEnd type="none" w="med" len="med"/>
-                      <a:tailEnd type="none" w="med" len="med"/>
-                    </a:lnT>
-                    <a:lnB w="12700" cap="flat" cmpd="sng" algn="ctr">
-                      <a:solidFill>
-                        <a:srgbClr val="E3E7ED"/>
-                      </a:solidFill>
-                      <a:prstDash val="solid"/>
-                      <a:round/>
-                      <a:headEnd type="none" w="med" len="med"/>
-                      <a:tailEnd type="none" w="med" len="med"/>
-                    </a:lnB>
-                    <a:solidFill>
-                      <a:srgbClr val="FFFFFF"/>
-                    </a:solidFill>
-                  </a:tcPr>
-                </a:tc>
-              </a:tr>
-              <a:tr h="594360">
-                <a:tc>
-                  <a:txBody>
-                    <a:bodyPr/>
-                    <a:lstStyle/>
-                    <a:p>
-                      <a:pPr algn="ctr" indent="0" marL="0">
-                        <a:buNone/>
-                      </a:pPr>
-                      <a:r>
-                        <a:rPr lang="en-US" sz="1100" dirty="0">
-                          <a:solidFill>
-                            <a:srgbClr val="1C2733"/>
-                          </a:solidFill>
-                          <a:latin typeface="Calibri" pitchFamily="34" charset="0"/>
-                          <a:ea typeface="Calibri" pitchFamily="34" charset="-122"/>
-                          <a:cs typeface="Calibri" pitchFamily="34" charset="-120"/>
-                        </a:rPr>
-                        <a:t>После острой фазы 2022-09…</a:t>
-                      </a:r>
-                      <a:endParaRPr lang="en-US" sz="1100" dirty="0">
-                        <a:latin typeface="Calibri" charset="0"/>
-                        <a:ea typeface="Calibri" charset="0"/>
-                        <a:cs typeface="Calibri" charset="0"/>
-                      </a:endParaRPr>
-                    </a:p>
-                  </a:txBody>
-                  <a:tcPr marL="91440" marR="91440" marT="45720" marB="45720">
-                    <a:lnL w="12700" cap="flat" cmpd="sng" algn="ctr">
-                      <a:solidFill>
-                        <a:srgbClr val="E3E7ED"/>
-                      </a:solidFill>
-                      <a:prstDash val="solid"/>
-                      <a:round/>
-                      <a:headEnd type="none" w="med" len="med"/>
-                      <a:tailEnd type="none" w="med" len="med"/>
-                    </a:lnL>
-                    <a:lnR w="12700" cap="flat" cmpd="sng" algn="ctr">
-                      <a:solidFill>
-                        <a:srgbClr val="E3E7ED"/>
-                      </a:solidFill>
-                      <a:prstDash val="solid"/>
-                      <a:round/>
-                      <a:headEnd type="none" w="med" len="med"/>
-                      <a:tailEnd type="none" w="med" len="med"/>
-                    </a:lnR>
-                    <a:lnT w="12700" cap="flat" cmpd="sng" algn="ctr">
-                      <a:solidFill>
-                        <a:srgbClr val="E3E7ED"/>
-                      </a:solidFill>
-                      <a:prstDash val="solid"/>
-                      <a:round/>
-                      <a:headEnd type="none" w="med" len="med"/>
-                      <a:tailEnd type="none" w="med" len="med"/>
-                    </a:lnT>
-                    <a:lnB w="12700" cap="flat" cmpd="sng" algn="ctr">
-                      <a:solidFill>
-                        <a:srgbClr val="E3E7ED"/>
-                      </a:solidFill>
-                      <a:prstDash val="solid"/>
-                      <a:round/>
-                      <a:headEnd type="none" w="med" len="med"/>
-                      <a:tailEnd type="none" w="med" len="med"/>
-                    </a:lnB>
-                    <a:solidFill>
-                      <a:srgbClr val="FFFFFF"/>
-                    </a:solidFill>
-                  </a:tcPr>
-                </a:tc>
-                <a:tc>
-                  <a:txBody>
-                    <a:bodyPr/>
-                    <a:lstStyle/>
-                    <a:p>
-                      <a:pPr algn="ctr" indent="0" marL="0">
-                        <a:buNone/>
-                      </a:pPr>
-                      <a:r>
-                        <a:rPr lang="en-US" sz="1100" dirty="0">
+                        <a:rPr lang="en-US" sz="1100" b="1" dirty="0">
                           <a:solidFill>
                             <a:srgbClr val="B23B3B"/>
                           </a:solidFill>
@@ -5352,74 +5268,6 @@
                     </a:solidFill>
                   </a:tcPr>
                 </a:tc>
-                <a:tc>
-                  <a:txBody>
-                    <a:bodyPr/>
-                    <a:lstStyle/>
-                    <a:p>
-                      <a:pPr algn="ctr" indent="0" marL="0">
-                        <a:buNone/>
-                      </a:pPr>
-                      <a:r>
-                        <a:rPr lang="en-US" sz="1100" dirty="0">
-                          <a:solidFill>
-                            <a:srgbClr val="B23B3B"/>
-                          </a:solidFill>
-                          <a:latin typeface="Calibri" pitchFamily="34" charset="0"/>
-                          <a:ea typeface="Calibri" pitchFamily="34" charset="-122"/>
-                          <a:cs typeface="Calibri" pitchFamily="34" charset="-120"/>
-                        </a:rPr>
-                        <a:t>0,37</a:t>
-                      </a:r>
-                      <a:endParaRPr lang="en-US" sz="1100" dirty="0">
-                        <a:latin typeface="Calibri" charset="0"/>
-                        <a:ea typeface="Calibri" charset="0"/>
-                        <a:cs typeface="Calibri" charset="0"/>
-                      </a:endParaRPr>
-                    </a:p>
-                  </a:txBody>
-                  <a:tcPr marL="91440" marR="91440" marT="45720" marB="45720">
-                    <a:lnL w="12700" cap="flat" cmpd="sng" algn="ctr">
-                      <a:solidFill>
-                        <a:srgbClr val="E3E7ED"/>
-                      </a:solidFill>
-                      <a:prstDash val="solid"/>
-                      <a:round/>
-                      <a:headEnd type="none" w="med" len="med"/>
-                      <a:tailEnd type="none" w="med" len="med"/>
-                    </a:lnL>
-                    <a:lnR w="12700" cap="flat" cmpd="sng" algn="ctr">
-                      <a:solidFill>
-                        <a:srgbClr val="E3E7ED"/>
-                      </a:solidFill>
-                      <a:prstDash val="solid"/>
-                      <a:round/>
-                      <a:headEnd type="none" w="med" len="med"/>
-                      <a:tailEnd type="none" w="med" len="med"/>
-                    </a:lnR>
-                    <a:lnT w="12700" cap="flat" cmpd="sng" algn="ctr">
-                      <a:solidFill>
-                        <a:srgbClr val="E3E7ED"/>
-                      </a:solidFill>
-                      <a:prstDash val="solid"/>
-                      <a:round/>
-                      <a:headEnd type="none" w="med" len="med"/>
-                      <a:tailEnd type="none" w="med" len="med"/>
-                    </a:lnT>
-                    <a:lnB w="12700" cap="flat" cmpd="sng" algn="ctr">
-                      <a:solidFill>
-                        <a:srgbClr val="E3E7ED"/>
-                      </a:solidFill>
-                      <a:prstDash val="solid"/>
-                      <a:round/>
-                      <a:headEnd type="none" w="med" len="med"/>
-                      <a:tailEnd type="none" w="med" len="med"/>
-                    </a:lnB>
-                    <a:solidFill>
-                      <a:srgbClr val="FFFFFF"/>
-                    </a:solidFill>
-                  </a:tcPr>
-                </a:tc>
               </a:tr>
             </a:tbl>
           </a:graphicData>
@@ -5458,7 +5306,7 @@
                 <a:ea typeface="Calibri" pitchFamily="34" charset="-122"/>
                 <a:cs typeface="Calibri" pitchFamily="34" charset="-120"/>
               </a:rPr>
-              <a:t>Скользящее окно (60 мес.): p-значение падает с ~0,1 до ~10⁻³⁰ ровно в момент, когда в окно входит кризис 2022 года — и остаётся астрономически значимым все последующие годы, пока кризис в окне.</a:t>
+              <a:t>Дамми ставится по одному наблюдению на каждый кризисный месяц (общая дамми на весь период эффект выброса не гасит — он ещё входит в VAR как лаг). Нужны оба кризиса: один эпизод в одиночку значимость не убирает.</a:t>
             </a:r>
             <a:endParaRPr lang="en-US" sz="1150" dirty="0"/>
           </a:p>
@@ -5472,8 +5320,8 @@
         </p:nvSpPr>
         <p:spPr>
           <a:xfrm>
-            <a:off x="457200" y="5989320"/>
-            <a:ext cx="10881360" cy="457200"/>
+            <a:off x="457200" y="5943600"/>
+            <a:ext cx="10881360" cy="731520"/>
           </a:xfrm>
           <a:prstGeom prst="rect">
             <a:avLst/>
@@ -5489,7 +5337,7 @@
               <a:buNone/>
             </a:pPr>
             <a:r>
-              <a:rPr lang="en-US" sz="1250" b="1" dirty="0">
+              <a:rPr lang="en-US" sz="1150" b="1" dirty="0">
                 <a:solidFill>
                   <a:srgbClr val="C9A227"/>
                 </a:solidFill>
@@ -5497,13 +5345,13 @@
                 <a:ea typeface="Calibri" pitchFamily="34" charset="-122"/>
                 <a:cs typeface="Calibri" pitchFamily="34" charset="-120"/>
               </a:rPr>
-              <a:t>Вне кризисов предсказуемости нет ни в одну сторону. </a:t>
+              <a:t>Скользящее окно: доля значимых окон падает с 60% до 2% </a:t>
             </a:r>
             <a:pPr indent="0" marL="0">
               <a:buNone/>
             </a:pPr>
             <a:r>
-              <a:rPr lang="en-US" sz="1250" dirty="0">
+              <a:rPr lang="en-US" sz="1150" dirty="0">
                 <a:solidFill>
                   <a:srgbClr val="CADCFC"/>
                 </a:solidFill>
@@ -5511,9 +5359,9 @@
                 <a:ea typeface="Calibri" pitchFamily="34" charset="-122"/>
                 <a:cs typeface="Calibri" pitchFamily="34" charset="-120"/>
               </a:rPr>
-              <a:t>Полновыборочный результат — эффект нескольких кризисных месяцев, а не устойчивая закономерность.</a:t>
-            </a:r>
-            <a:endParaRPr lang="en-US" sz="1250" dirty="0"/>
+              <a:t>при нейтрализации кризисных месяцев в каждом окне. Провал до p≈10⁻³⁰ — эффект одного экстремального наблюдения (ставка +10,5 п.п., курс +29% в тот же месяц), не сила связи; F-тест при таком выбросе не проходит проверку на нормальность остатков.</a:t>
+            </a:r>
+            <a:endParaRPr lang="en-US" sz="1150" dirty="0"/>
           </a:p>
         </p:txBody>
       </p:sp>
@@ -5613,7 +5461,7 @@
               <a:buNone/>
             </a:pPr>
             <a:r>
-              <a:rPr lang="en-US" sz="2800" b="1" dirty="0">
+              <a:rPr lang="en-US" sz="2700" b="1" dirty="0">
                 <a:solidFill>
                   <a:srgbClr val="1C2733"/>
                 </a:solidFill>
@@ -5621,9 +5469,9 @@
                 <a:ea typeface="Calibri" pitchFamily="34" charset="-122"/>
                 <a:cs typeface="Calibri" pitchFamily="34" charset="-120"/>
               </a:rPr>
-              <a:t>Импульсный отклик: исправленный масштаб и накопленный эффект</a:t>
-            </a:r>
-            <a:endParaRPr lang="en-US" sz="2800" dirty="0"/>
+              <a:t>Импульсный отклик: 1 п.п., накопленный эффект, бутстрап-CI</a:t>
+            </a:r>
+            <a:endParaRPr lang="en-US" sz="2700" dirty="0"/>
           </a:p>
         </p:txBody>
       </p:sp>
@@ -5688,7 +5536,7 @@
                 <a:ea typeface="Calibri" pitchFamily="34" charset="-122"/>
                 <a:cs typeface="Calibri" pitchFamily="34" charset="-120"/>
               </a:rPr>
-              <a:t>Шок — ровно 1 п.п. (в первой версии график был подписан «1 п.п.», но фактически показывал шок в 1 стандартное отклонение ≈ 1,33 п.п.)</a:t>
+              <a:t>Шок — ровно 1 п.п. ставки (не 1 стандартное отклонение ≈ 1,33 п.п.)</a:t>
             </a:r>
             <a:endParaRPr lang="en-US" sz="1200" dirty="0"/>
           </a:p>
@@ -5751,7 +5599,7 @@
                 <a:ea typeface="Calibri" pitchFamily="34" charset="-122"/>
                 <a:cs typeface="Calibri" pitchFamily="34" charset="-120"/>
               </a:rPr>
-              <a:t>Ортогонализация по Холецкому: ставка первая в порядке — доп. допущение, устойчивое к перестановке (Т7b)</a:t>
+              <a:t>Устойчиво к порядку ортогонализации: при пересчёте в тех же единицах (1 п.п.) для всех трёх порядков пик 0,019–0,023, накопленный эффект на 3-м месяце близок к нулю (0,001–0,014)</a:t>
             </a:r>
             <a:endParaRPr lang="en-US" sz="1200" dirty="0"/>
           </a:p>
@@ -5759,7 +5607,7 @@
       </p:sp>
       <p:sp>
         <p:nvSpPr>
-          <p:cNvPr id="5" name="Text 2"/>
+          <p:cNvPr id="6" name="Text 2"/>
           <p:cNvSpPr txBox="1"/>
           <p:nvPr/>
         </p:nvSpPr>
@@ -5853,7 +5701,7 @@
               <a:buNone/>
             </a:pPr>
             <a:r>
-              <a:rPr lang="en-US" sz="2800" b="1" dirty="0">
+              <a:rPr lang="en-US" sz="2700" b="1" dirty="0">
                 <a:solidFill>
                   <a:srgbClr val="1C2733"/>
                 </a:solidFill>
@@ -5863,7 +5711,7 @@
               </a:rPr>
               <a:t>GARCH: спецификация выбрана, не угадана</a:t>
             </a:r>
-            <a:endParaRPr lang="en-US" sz="2800" dirty="0"/>
+            <a:endParaRPr lang="en-US" sz="2700" dirty="0"/>
           </a:p>
         </p:txBody>
       </p:sp>
@@ -5883,7 +5731,7 @@
         </p:nvGraphicFramePr>
         <p:xfrm>
           <a:off x="548640" y="1371600"/>
-          <a:ext cx="5486400" cy="2011680"/>
+          <a:ext cx="5486400" cy="1828800"/>
         </p:xfrm>
         <a:graphic>
           <a:graphicData uri="http://schemas.openxmlformats.org/drawingml/2006/table">
@@ -5894,7 +5742,7 @@
                 <a:gridCol w="1097280"/>
                 <a:gridCol w="1097280"/>
               </a:tblGrid>
-              <a:tr h="402336">
+              <a:tr h="365760">
                 <a:tc>
                   <a:txBody>
                     <a:bodyPr/>
@@ -6100,7 +5948,7 @@
                   </a:tcPr>
                 </a:tc>
               </a:tr>
-              <a:tr h="402336">
+              <a:tr h="365760">
                 <a:tc>
                   <a:txBody>
                     <a:bodyPr/>
@@ -6297,7 +6145,7 @@
                   </a:tcPr>
                 </a:tc>
               </a:tr>
-              <a:tr h="402336">
+              <a:tr h="365760">
                 <a:tc>
                   <a:txBody>
                     <a:bodyPr/>
@@ -6494,7 +6342,7 @@
                   </a:tcPr>
                 </a:tc>
               </a:tr>
-              <a:tr h="402336">
+              <a:tr h="365760">
                 <a:tc>
                   <a:txBody>
                     <a:bodyPr/>
@@ -6691,7 +6539,7 @@
                   </a:tcPr>
                 </a:tc>
               </a:tr>
-              <a:tr h="402336">
+              <a:tr h="365760">
                 <a:tc>
                   <a:txBody>
                     <a:bodyPr/>
@@ -6709,7 +6557,7 @@
                           <a:ea typeface="Calibri" pitchFamily="34" charset="-122"/>
                           <a:cs typeface="Calibri" pitchFamily="34" charset="-120"/>
                         </a:rPr>
-                        <a:t>Normal, const-mean (исходная)</a:t>
+                        <a:t>Normal, const-mean</a:t>
                       </a:r>
                       <a:endParaRPr lang="en-US" sz="1200" dirty="0">
                         <a:latin typeface="Calibri" charset="0"/>
@@ -6900,8 +6748,8 @@
         </p:nvSpPr>
         <p:spPr>
           <a:xfrm>
-            <a:off x="548640" y="3566160"/>
-            <a:ext cx="5486400" cy="1005840"/>
+            <a:off x="548640" y="3429000"/>
+            <a:ext cx="5486400" cy="1554480"/>
           </a:xfrm>
           <a:prstGeom prst="rect">
             <a:avLst/>
@@ -6917,7 +6765,7 @@
               <a:buNone/>
             </a:pPr>
             <a:r>
-              <a:rPr lang="en-US" sz="1200" i="1" dirty="0">
+              <a:rPr lang="en-US" sz="1150" i="1" dirty="0">
                 <a:solidFill>
                   <a:srgbClr val="6B7688"/>
                 </a:solidFill>
@@ -6925,9 +6773,9 @@
                 <a:ea typeface="Calibri" pitchFamily="34" charset="-122"/>
                 <a:cs typeface="Calibri" pitchFamily="34" charset="-120"/>
               </a:rPr>
-              <a:t>Исходная спецификация не проходила диагностику остатков (Ljung-Box p&lt;0,001). Выбранная по BIC — проходит (p=0,18 на всём периоде, p=0,45 в квадратах остатков).</a:t>
-            </a:r>
-            <a:endParaRPr lang="en-US" sz="1200" dirty="0"/>
+              <a:t>Диагностика остатков (Ljung-Box), весь период: p=0,18 (уровень), p=0,45 (квадраты) — проходит. Подвыборка «после 2022»: персистентность выходит на 1,0 (интегрированный GARCH), квадраты остатков p=6·10⁻⁸ — НЕ проходит; артефакт кластера экстремальной волатильности в малой подвыборке.</a:t>
+            </a:r>
+            <a:endParaRPr lang="en-US" sz="1150" dirty="0"/>
           </a:p>
         </p:txBody>
       </p:sp>
@@ -6956,7 +6804,7 @@
               <a:buNone/>
             </a:pPr>
             <a:r>
-              <a:rPr lang="en-US" sz="2800" b="1" dirty="0">
+              <a:rPr lang="en-US" sz="2600" b="1" dirty="0">
                 <a:solidFill>
                   <a:srgbClr val="13294B"/>
                 </a:solidFill>
@@ -6964,9 +6812,9 @@
                 <a:ea typeface="Calibri" pitchFamily="34" charset="-122"/>
                 <a:cs typeface="Calibri" pitchFamily="34" charset="-120"/>
               </a:rPr>
-              <a:t>α+β ≈ 0,99</a:t>
-            </a:r>
-            <a:endParaRPr lang="en-US" sz="2800" dirty="0"/>
+              <a:t>0,98 → 1,00</a:t>
+            </a:r>
+            <a:endParaRPr lang="en-US" sz="2600" dirty="0"/>
           </a:p>
         </p:txBody>
       </p:sp>
@@ -7003,7 +6851,7 @@
                 <a:ea typeface="Calibri" pitchFamily="34" charset="-122"/>
                 <a:cs typeface="Calibri" pitchFamily="34" charset="-120"/>
               </a:rPr>
-              <a:t>персистентность волатильности, весь период</a:t>
+              <a:t>персистентность (α+β+γ/2): до → после 28.02.2022</a:t>
             </a:r>
             <a:endParaRPr lang="en-US" sz="1100" dirty="0"/>
           </a:p>
@@ -7042,7 +6890,7 @@
                 <a:ea typeface="Calibri" pitchFamily="34" charset="-122"/>
                 <a:cs typeface="Calibri" pitchFamily="34" charset="-120"/>
               </a:rPr>
-              <a:t>0,029→0,061</a:t>
+              <a:t>1,06 → н/д</a:t>
             </a:r>
             <a:endParaRPr lang="en-US" sz="2400" dirty="0"/>
           </a:p>
@@ -7081,7 +6929,7 @@
                 <a:ea typeface="Calibri" pitchFamily="34" charset="-122"/>
                 <a:cs typeface="Calibri" pitchFamily="34" charset="-120"/>
               </a:rPr>
-              <a:t>ω (не безусловная дисперсия!) до → после 28.02.2022</a:t>
+              <a:t>безусловная дисперсия, %²: до 2022 — идентифицируется; после — нет</a:t>
             </a:r>
             <a:endParaRPr lang="en-US" sz="1100" dirty="0"/>
           </a:p>
@@ -7120,7 +6968,7 @@
                 <a:ea typeface="Calibri" pitchFamily="34" charset="-122"/>
                 <a:cs typeface="Calibri" pitchFamily="34" charset="-120"/>
               </a:rPr>
-              <a:t>На подвыборке «после 2022» персистентность выходит на 1,0 (интегрированный GARCH) — известный артефакт кластера экстремальной волатильности в малой подвыборке; безусловная дисперсия там не идентифицируется, репортим как NaN, а не как число.</a:t>
+              <a:t>Персистентность ~1 в малой подвыборке с выбросами — не находка про «долгую память», а известный артефакт оценивания GARCH; безусловная дисперсия там математически не определена и не репортится как число.</a:t>
             </a:r>
             <a:endParaRPr lang="en-US" sz="1150" dirty="0"/>
           </a:p>
@@ -7222,7 +7070,7 @@
               <a:buNone/>
             </a:pPr>
             <a:r>
-              <a:rPr lang="en-US" sz="2800" b="1" dirty="0">
+              <a:rPr lang="en-US" sz="2700" b="1" dirty="0">
                 <a:solidFill>
                   <a:srgbClr val="1C2733"/>
                 </a:solidFill>
@@ -7232,7 +7080,7 @@
               </a:rPr>
               <a:t>Волатильность вокруг решений и прогноз вне выборки</a:t>
             </a:r>
-            <a:endParaRPr lang="en-US" sz="2800" dirty="0"/>
+            <a:endParaRPr lang="en-US" sz="2700" dirty="0"/>
           </a:p>
         </p:txBody>
       </p:sp>
@@ -7355,7 +7203,7 @@
                 <a:ea typeface="Calibri" pitchFamily="34" charset="-122"/>
                 <a:cs typeface="Calibri" pitchFamily="34" charset="-120"/>
               </a:rPr>
-              <a:t>Плацебо стратифицировано по году + аномальная |доходность| (минус база за 30 дней): все события — p=0,009.</a:t>
+              <a:t>Плацебо стратифицировано по году + аномальная |доходность|: все события — p=0,009; без 2014/2015/2022 — p=0,457.</a:t>
             </a:r>
             <a:endParaRPr lang="en-US" sz="1200" dirty="0"/>
           </a:p>
@@ -7376,10 +7224,93 @@
                 <a:ea typeface="Calibri" pitchFamily="34" charset="-122"/>
                 <a:cs typeface="Calibri" pitchFamily="34" charset="-120"/>
               </a:rPr>
-              <a:t>Без 2014/2015/2022: p=0,457 — эффекта нет.</a:t>
+              <a:t>Вне кризисных лет: доходность до решения 0,568%, после — 0,570%, база — 0,569% — никакой реакции нет.</a:t>
             </a:r>
             <a:endParaRPr lang="en-US" sz="1200" dirty="0"/>
           </a:p>
+        </p:txBody>
+      </p:sp>
+      <p:sp>
+        <p:nvSpPr>
+          <p:cNvPr id="6" name="Shape 4"/>
+          <p:cNvSpPr/>
+          <p:nvPr/>
+        </p:nvSpPr>
+        <p:spPr>
+          <a:xfrm>
+            <a:off x="6263640" y="1371600"/>
+            <a:ext cx="5394960" cy="4297680"/>
+          </a:xfrm>
+          <a:prstGeom prst="roundRect">
+            <a:avLst>
+              <a:gd name="adj" fmla="val 1702"/>
+            </a:avLst>
+          </a:prstGeom>
+          <a:solidFill>
+            <a:srgbClr val="13294B"/>
+          </a:solidFill>
+          <a:ln/>
+        </p:spPr>
+      </p:sp>
+      <p:sp>
+        <p:nvSpPr>
+          <p:cNvPr id="7" name="Text 5"/>
+          <p:cNvSpPr txBox="1"/>
+          <p:nvPr/>
+        </p:nvSpPr>
+        <p:spPr>
+          <a:xfrm>
+            <a:off x="6537960" y="1554480"/>
+            <a:ext cx="4846320" cy="365760"/>
+          </a:xfrm>
+          <a:prstGeom prst="rect">
+            <a:avLst/>
+          </a:prstGeom>
+          <a:noFill/>
+          <a:ln/>
+        </p:spPr>
+        <p:txBody>
+          <a:bodyPr wrap="square" lIns="0" tIns="0" rIns="0" bIns="0" rtlCol="0" anchor="ctr"/>
+          <a:lstStyle/>
+          <a:p>
+            <a:pPr indent="0" marL="0">
+              <a:buNone/>
+            </a:pPr>
+            <a:r>
+              <a:rPr lang="en-US" sz="1500" b="1" dirty="0">
+                <a:solidFill>
+                  <a:srgbClr val="C9A227"/>
+                </a:solidFill>
+                <a:latin typeface="Calibri" pitchFamily="34" charset="0"/>
+                <a:ea typeface="Calibri" pitchFamily="34" charset="-122"/>
+                <a:cs typeface="Calibri" pitchFamily="34" charset="-120"/>
+              </a:rPr>
+              <a:t>Прогноз вне выборки (rolling origin)</a:t>
+            </a:r>
+            <a:endParaRPr lang="en-US" sz="1500" dirty="0"/>
+          </a:p>
+        </p:txBody>
+      </p:sp>
+      <p:sp>
+        <p:nvSpPr>
+          <p:cNvPr id="8" name="Text 6"/>
+          <p:cNvSpPr txBox="1"/>
+          <p:nvPr/>
+        </p:nvSpPr>
+        <p:spPr>
+          <a:xfrm>
+            <a:off x="6537960" y="2057400"/>
+            <a:ext cx="4846320" cy="3474720"/>
+          </a:xfrm>
+          <a:prstGeom prst="rect">
+            <a:avLst/>
+          </a:prstGeom>
+          <a:noFill/>
+          <a:ln/>
+        </p:spPr>
+        <p:txBody>
+          <a:bodyPr wrap="square" lIns="0" tIns="0" rIns="0" bIns="0" rtlCol="0" anchor="ctr"/>
+          <a:lstStyle/>
           <a:p>
             <a:pPr marL="342900" indent="-342900">
               <a:spcAft>
@@ -7391,109 +7322,26 @@
             <a:r>
               <a:rPr lang="en-US" sz="1200" dirty="0">
                 <a:solidFill>
-                  <a:srgbClr val="1C2733"/>
-                </a:solidFill>
-                <a:latin typeface="Calibri" pitchFamily="34" charset="0"/>
-                <a:ea typeface="Calibri" pitchFamily="34" charset="-122"/>
-                <a:cs typeface="Calibri" pitchFamily="34" charset="-120"/>
-              </a:rPr>
-              <a:t>После решения доходность выше (1,07%), чем до (0,84%, = базовый уровень 0,84%) — реакция идёт после, не до.</a:t>
+                  <a:srgbClr val="FFFFFF"/>
+                </a:solidFill>
+                <a:latin typeface="Calibri" pitchFamily="34" charset="0"/>
+                <a:ea typeface="Calibri" pitchFamily="34" charset="-122"/>
+                <a:cs typeface="Calibri" pitchFamily="34" charset="-120"/>
+              </a:rPr>
+              <a:t>Спокойные годы: наивный прогноз не хуже VAR-моделей (VAR без ставки значимо точнее VAR со ставкой, DM p=0,025).</a:t>
             </a:r>
             <a:endParaRPr lang="en-US" sz="1200" dirty="0"/>
           </a:p>
-        </p:txBody>
-      </p:sp>
-      <p:sp>
-        <p:nvSpPr>
-          <p:cNvPr id="6" name="Shape 4"/>
-          <p:cNvSpPr/>
-          <p:nvPr/>
-        </p:nvSpPr>
-        <p:spPr>
-          <a:xfrm>
-            <a:off x="6263640" y="1371600"/>
-            <a:ext cx="5394960" cy="4297680"/>
-          </a:xfrm>
-          <a:prstGeom prst="roundRect">
-            <a:avLst>
-              <a:gd name="adj" fmla="val 1702"/>
-            </a:avLst>
-          </a:prstGeom>
-          <a:solidFill>
-            <a:srgbClr val="13294B"/>
-          </a:solidFill>
-          <a:ln/>
-        </p:spPr>
-      </p:sp>
-      <p:sp>
-        <p:nvSpPr>
-          <p:cNvPr id="7" name="Text 5"/>
-          <p:cNvSpPr txBox="1"/>
-          <p:nvPr/>
-        </p:nvSpPr>
-        <p:spPr>
-          <a:xfrm>
-            <a:off x="6537960" y="1554480"/>
-            <a:ext cx="4846320" cy="365760"/>
-          </a:xfrm>
-          <a:prstGeom prst="rect">
-            <a:avLst/>
-          </a:prstGeom>
-          <a:noFill/>
-          <a:ln/>
-        </p:spPr>
-        <p:txBody>
-          <a:bodyPr wrap="square" lIns="0" tIns="0" rIns="0" bIns="0" rtlCol="0" anchor="ctr"/>
-          <a:lstStyle/>
-          <a:p>
-            <a:pPr indent="0" marL="0">
-              <a:buNone/>
-            </a:pPr>
-            <a:r>
-              <a:rPr lang="en-US" sz="1500" b="1" dirty="0">
-                <a:solidFill>
-                  <a:srgbClr val="C9A227"/>
-                </a:solidFill>
-                <a:latin typeface="Calibri" pitchFamily="34" charset="0"/>
-                <a:ea typeface="Calibri" pitchFamily="34" charset="-122"/>
-                <a:cs typeface="Calibri" pitchFamily="34" charset="-120"/>
-              </a:rPr>
-              <a:t>Прогноз вне выборки (rolling origin)</a:t>
-            </a:r>
-            <a:endParaRPr lang="en-US" sz="1500" dirty="0"/>
-          </a:p>
-        </p:txBody>
-      </p:sp>
-      <p:sp>
-        <p:nvSpPr>
-          <p:cNvPr id="8" name="Text 6"/>
-          <p:cNvSpPr txBox="1"/>
-          <p:nvPr/>
-        </p:nvSpPr>
-        <p:spPr>
-          <a:xfrm>
-            <a:off x="6537960" y="2057400"/>
-            <a:ext cx="4846320" cy="3474720"/>
-          </a:xfrm>
-          <a:prstGeom prst="rect">
-            <a:avLst/>
-          </a:prstGeom>
-          <a:noFill/>
-          <a:ln/>
-        </p:spPr>
-        <p:txBody>
-          <a:bodyPr wrap="square" lIns="0" tIns="0" rIns="0" bIns="0" rtlCol="0" anchor="ctr"/>
-          <a:lstStyle/>
           <a:p>
             <a:pPr marL="342900" indent="-342900">
               <a:spcAft>
-                <a:spcPts val="1200"/>
+                <a:spcPts val="1000"/>
               </a:spcAft>
               <a:buSzPct val="100000"/>
               <a:buChar char="•"/>
             </a:pPr>
             <a:r>
-              <a:rPr lang="en-US" sz="1250" dirty="0">
+              <a:rPr lang="en-US" sz="1200" dirty="0">
                 <a:solidFill>
                   <a:srgbClr val="FFFFFF"/>
                 </a:solidFill>
@@ -7501,20 +7349,20 @@
                 <a:ea typeface="Calibri" pitchFamily="34" charset="-122"/>
                 <a:cs typeface="Calibri" pitchFamily="34" charset="-120"/>
               </a:rPr>
-              <a:t>Наивный прогноз («без изменений») конкурентен с VAR-моделями на горизонтах 1–3 месяца.</a:t>
-            </a:r>
-            <a:endParaRPr lang="en-US" sz="1250" dirty="0"/>
+              <a:t>Кризисные годы (n=12): VAR со ставкой точнее наивного (RMSE 0,127 vs 0,138) и VAR без ставки (0,191) — но по упрощённому тесту Диболда-Мариано разница не значима (p=0,09–0,73).</a:t>
+            </a:r>
+            <a:endParaRPr lang="en-US" sz="1200" dirty="0"/>
           </a:p>
           <a:p>
             <a:pPr marL="342900" indent="-342900">
               <a:spcAft>
-                <a:spcPts val="1200"/>
+                <a:spcPts val="1000"/>
               </a:spcAft>
               <a:buSzPct val="100000"/>
               <a:buChar char="•"/>
             </a:pPr>
             <a:r>
-              <a:rPr lang="en-US" sz="1250" dirty="0">
+              <a:rPr lang="en-US" sz="1200" b="1" dirty="0">
                 <a:solidFill>
                   <a:srgbClr val="FFFFFF"/>
                 </a:solidFill>
@@ -7522,36 +7370,15 @@
                 <a:ea typeface="Calibri" pitchFamily="34" charset="-122"/>
                 <a:cs typeface="Calibri" pitchFamily="34" charset="-120"/>
               </a:rPr>
-              <a:t>RMSE (h=1, спокойные годы): наивный 0,033, VAR без ставки 0,035, VAR со ставкой 0,037 — ставка прогноз не улучшает.</a:t>
-            </a:r>
-            <a:endParaRPr lang="en-US" sz="1250" dirty="0"/>
-          </a:p>
-          <a:p>
-            <a:pPr marL="342900" indent="-342900">
-              <a:spcAft>
-                <a:spcPts val="1200"/>
-              </a:spcAft>
-              <a:buSzPct val="100000"/>
-              <a:buChar char="•"/>
-            </a:pPr>
-            <a:r>
-              <a:rPr lang="en-US" sz="1250" b="1" dirty="0">
-                <a:solidFill>
-                  <a:srgbClr val="FFFFFF"/>
-                </a:solidFill>
-                <a:latin typeface="Calibri" pitchFamily="34" charset="0"/>
-                <a:ea typeface="Calibri" pitchFamily="34" charset="-122"/>
-                <a:cs typeface="Calibri" pitchFamily="34" charset="-120"/>
-              </a:rPr>
-              <a:t>Значимость по Грейнджеру внутри выборки ≠ польза для прогноза вне неё — разные вопросы.</a:t>
-            </a:r>
-            <a:endParaRPr lang="en-US" sz="1250" dirty="0"/>
-          </a:p>
-        </p:txBody>
-      </p:sp>
-      <p:sp>
-        <p:nvSpPr>
-          <p:cNvPr id="9" name="Text 7"/>
+              <a:t>Честно по обоим режимам, не выбираем удобную половину результата.</a:t>
+            </a:r>
+            <a:endParaRPr lang="en-US" sz="1200" dirty="0"/>
+          </a:p>
+        </p:txBody>
+      </p:sp>
+      <p:sp>
+        <p:nvSpPr>
+          <p:cNvPr id="10" name="Text 7"/>
           <p:cNvSpPr txBox="1"/>
           <p:nvPr/>
         </p:nvSpPr>
